--- a/Genetica Grupal/Poster_bioinfo_grupo12_v4.pptx
+++ b/Genetica Grupal/Poster_bioinfo_grupo12_v4.pptx
@@ -1,119 +1,19 @@
 
 <file path=ppt/presentation.xml><?xml version="1.0" encoding="utf-8"?>
-<p:presentation xmlns:a="http://schemas.openxmlformats.org/drawingml/2006/main" xmlns:r="http://schemas.openxmlformats.org/officeDocument/2006/relationships" xmlns:p="http://schemas.openxmlformats.org/presentationml/2006/main">
+<p:presentation xmlns:a="http://schemas.openxmlformats.org/drawingml/2006/main" xmlns:p="http://schemas.openxmlformats.org/presentationml/2006/main" xmlns:r="http://schemas.openxmlformats.org/officeDocument/2006/relationships" xmlns:p14="http://schemas.microsoft.com/office/powerpoint/2010/main" xmlns:p15="http://schemas.microsoft.com/office/powerpoint/2012/main" xmlns:mc="http://schemas.openxmlformats.org/markup-compatibility/2006">
   <p:sldMasterIdLst>
-    <p:sldMasterId id="2147483648" r:id="rId1"/>
+    <p:sldMasterId id="2147483648" r:id="rId2"/>
   </p:sldMasterIdLst>
   <p:sldIdLst>
-    <p:sldId id="256" r:id="rId2"/>
+    <p:sldId id="256" r:id="rId3"/>
   </p:sldIdLst>
   <p:sldSz cx="15119350" cy="21383625"/>
-  <p:notesSz cx="7559675" cy="10691813"/>
-  <p:defaultTextStyle>
-    <a:defPPr>
-      <a:defRPr lang="es-ES"/>
-    </a:defPPr>
-    <a:lvl1pPr marL="0" algn="l" defTabSz="914400" rtl="0" eaLnBrk="1" latinLnBrk="0" hangingPunct="1">
-      <a:defRPr sz="1800" kern="1200">
-        <a:solidFill>
-          <a:schemeClr val="tx1"/>
-        </a:solidFill>
-        <a:latin typeface="+mn-lt"/>
-        <a:ea typeface="+mn-ea"/>
-        <a:cs typeface="+mn-cs"/>
-      </a:defRPr>
-    </a:lvl1pPr>
-    <a:lvl2pPr marL="457200" algn="l" defTabSz="914400" rtl="0" eaLnBrk="1" latinLnBrk="0" hangingPunct="1">
-      <a:defRPr sz="1800" kern="1200">
-        <a:solidFill>
-          <a:schemeClr val="tx1"/>
-        </a:solidFill>
-        <a:latin typeface="+mn-lt"/>
-        <a:ea typeface="+mn-ea"/>
-        <a:cs typeface="+mn-cs"/>
-      </a:defRPr>
-    </a:lvl2pPr>
-    <a:lvl3pPr marL="914400" algn="l" defTabSz="914400" rtl="0" eaLnBrk="1" latinLnBrk="0" hangingPunct="1">
-      <a:defRPr sz="1800" kern="1200">
-        <a:solidFill>
-          <a:schemeClr val="tx1"/>
-        </a:solidFill>
-        <a:latin typeface="+mn-lt"/>
-        <a:ea typeface="+mn-ea"/>
-        <a:cs typeface="+mn-cs"/>
-      </a:defRPr>
-    </a:lvl3pPr>
-    <a:lvl4pPr marL="1371600" algn="l" defTabSz="914400" rtl="0" eaLnBrk="1" latinLnBrk="0" hangingPunct="1">
-      <a:defRPr sz="1800" kern="1200">
-        <a:solidFill>
-          <a:schemeClr val="tx1"/>
-        </a:solidFill>
-        <a:latin typeface="+mn-lt"/>
-        <a:ea typeface="+mn-ea"/>
-        <a:cs typeface="+mn-cs"/>
-      </a:defRPr>
-    </a:lvl4pPr>
-    <a:lvl5pPr marL="1828800" algn="l" defTabSz="914400" rtl="0" eaLnBrk="1" latinLnBrk="0" hangingPunct="1">
-      <a:defRPr sz="1800" kern="1200">
-        <a:solidFill>
-          <a:schemeClr val="tx1"/>
-        </a:solidFill>
-        <a:latin typeface="+mn-lt"/>
-        <a:ea typeface="+mn-ea"/>
-        <a:cs typeface="+mn-cs"/>
-      </a:defRPr>
-    </a:lvl5pPr>
-    <a:lvl6pPr marL="2286000" algn="l" defTabSz="914400" rtl="0" eaLnBrk="1" latinLnBrk="0" hangingPunct="1">
-      <a:defRPr sz="1800" kern="1200">
-        <a:solidFill>
-          <a:schemeClr val="tx1"/>
-        </a:solidFill>
-        <a:latin typeface="+mn-lt"/>
-        <a:ea typeface="+mn-ea"/>
-        <a:cs typeface="+mn-cs"/>
-      </a:defRPr>
-    </a:lvl6pPr>
-    <a:lvl7pPr marL="2743200" algn="l" defTabSz="914400" rtl="0" eaLnBrk="1" latinLnBrk="0" hangingPunct="1">
-      <a:defRPr sz="1800" kern="1200">
-        <a:solidFill>
-          <a:schemeClr val="tx1"/>
-        </a:solidFill>
-        <a:latin typeface="+mn-lt"/>
-        <a:ea typeface="+mn-ea"/>
-        <a:cs typeface="+mn-cs"/>
-      </a:defRPr>
-    </a:lvl7pPr>
-    <a:lvl8pPr marL="3200400" algn="l" defTabSz="914400" rtl="0" eaLnBrk="1" latinLnBrk="0" hangingPunct="1">
-      <a:defRPr sz="1800" kern="1200">
-        <a:solidFill>
-          <a:schemeClr val="tx1"/>
-        </a:solidFill>
-        <a:latin typeface="+mn-lt"/>
-        <a:ea typeface="+mn-ea"/>
-        <a:cs typeface="+mn-cs"/>
-      </a:defRPr>
-    </a:lvl8pPr>
-    <a:lvl9pPr marL="3657600" algn="l" defTabSz="914400" rtl="0" eaLnBrk="1" latinLnBrk="0" hangingPunct="1">
-      <a:defRPr sz="1800" kern="1200">
-        <a:solidFill>
-          <a:schemeClr val="tx1"/>
-        </a:solidFill>
-        <a:latin typeface="+mn-lt"/>
-        <a:ea typeface="+mn-ea"/>
-        <a:cs typeface="+mn-cs"/>
-      </a:defRPr>
-    </a:lvl9pPr>
-  </p:defaultTextStyle>
-  <p:extLst>
-    <p:ext uri="{EFAFB233-063F-42B5-8137-9DF3F51BA10A}">
-      <p15:sldGuideLst xmlns:p15="http://schemas.microsoft.com/office/powerpoint/2012/main"/>
-    </p:ext>
-  </p:extLst>
+  <p:notesSz cx="7559675" cy="10691812"/>
 </p:presentation>
 </file>
 
 <file path=ppt/slideLayouts/slideLayout1.xml><?xml version="1.0" encoding="utf-8"?>
-<p:sldLayout xmlns:a="http://schemas.openxmlformats.org/drawingml/2006/main" xmlns:r="http://schemas.openxmlformats.org/officeDocument/2006/relationships" xmlns:p="http://schemas.openxmlformats.org/presentationml/2006/main" type="blank" preserve="1">
+<p:sldLayout xmlns:a="http://schemas.openxmlformats.org/drawingml/2006/main" xmlns:p="http://schemas.openxmlformats.org/presentationml/2006/main" xmlns:r="http://schemas.openxmlformats.org/officeDocument/2006/relationships" xmlns:p14="http://schemas.microsoft.com/office/powerpoint/2010/main" xmlns:p15="http://schemas.microsoft.com/office/powerpoint/2012/main" xmlns:mc="http://schemas.openxmlformats.org/markup-compatibility/2006" type="blank" preserve="1">
   <p:cSld name="Blank Slide">
     <p:spTree>
       <p:nvGrpSpPr>
@@ -131,15 +31,133 @@
       </p:grpSpPr>
     </p:spTree>
   </p:cSld>
-  <p:clrMapOvr>
-    <a:masterClrMapping/>
-  </p:clrMapOvr>
 </p:sldLayout>
 </file>
 
 <file path=ppt/slideLayouts/slideLayout10.xml><?xml version="1.0" encoding="utf-8"?>
-<p:sldLayout xmlns:a="http://schemas.openxmlformats.org/drawingml/2006/main" xmlns:r="http://schemas.openxmlformats.org/officeDocument/2006/relationships" xmlns:p="http://schemas.openxmlformats.org/presentationml/2006/main" type="objOverTx" preserve="1">
+<p:sldLayout xmlns:a="http://schemas.openxmlformats.org/drawingml/2006/main" xmlns:p="http://schemas.openxmlformats.org/presentationml/2006/main" xmlns:r="http://schemas.openxmlformats.org/officeDocument/2006/relationships" xmlns:p14="http://schemas.microsoft.com/office/powerpoint/2010/main" xmlns:p15="http://schemas.microsoft.com/office/powerpoint/2012/main" xmlns:mc="http://schemas.openxmlformats.org/markup-compatibility/2006" type="objOverTx" preserve="1">
   <p:cSld name="Title, Content over Content">
+    <p:spTree>
+      <p:nvGrpSpPr>
+        <p:cNvPr id="1" name=""/>
+        <p:cNvGrpSpPr/>
+        <p:nvPr/>
+      </p:nvGrpSpPr>
+      <p:grpSpPr>
+        <a:xfrm>
+          <a:off x="0" y="0"/>
+          <a:ext cx="0" cy="0"/>
+          <a:chOff x="0" y="0"/>
+          <a:chExt cx="0" cy="0"/>
+        </a:xfrm>
+      </p:grpSpPr>
+      <p:sp>
+        <p:nvSpPr>
+          <p:cNvPr id="23" name="PlaceHolder 1"/>
+          <p:cNvSpPr>
+            <a:spLocks noGrp="1"/>
+          </p:cNvSpPr>
+          <p:nvPr>
+            <p:ph type="title"/>
+          </p:nvPr>
+        </p:nvSpPr>
+        <p:spPr>
+          <a:xfrm>
+            <a:off x="1134000" y="3499560"/>
+            <a:ext cx="12850560" cy="7444080"/>
+          </a:xfrm>
+          <a:prstGeom prst="rect">
+            <a:avLst/>
+          </a:prstGeom>
+        </p:spPr>
+        <p:txBody>
+          <a:bodyPr lIns="0" rIns="0" tIns="0" bIns="0" anchor="ctr">
+            <a:noAutofit/>
+          </a:bodyPr>
+          <a:p>
+            <a:endParaRPr b="0" lang="es-ES" sz="1800" spc="-1" strike="noStrike">
+              <a:solidFill>
+                <a:srgbClr val="000000"/>
+              </a:solidFill>
+              <a:latin typeface="Arial"/>
+            </a:endParaRPr>
+          </a:p>
+        </p:txBody>
+      </p:sp>
+      <p:sp>
+        <p:nvSpPr>
+          <p:cNvPr id="24" name="PlaceHolder 2"/>
+          <p:cNvSpPr>
+            <a:spLocks noGrp="1"/>
+          </p:cNvSpPr>
+          <p:nvPr>
+            <p:ph type="body"/>
+          </p:nvPr>
+        </p:nvSpPr>
+        <p:spPr>
+          <a:xfrm>
+            <a:off x="755640" y="5003640"/>
+            <a:ext cx="13606920" cy="5915520"/>
+          </a:xfrm>
+          <a:prstGeom prst="rect">
+            <a:avLst/>
+          </a:prstGeom>
+        </p:spPr>
+        <p:txBody>
+          <a:bodyPr lIns="0" rIns="0" tIns="0" bIns="0">
+            <a:normAutofit/>
+          </a:bodyPr>
+          <a:p>
+            <a:endParaRPr b="0" lang="es-ES" sz="2800" spc="-1" strike="noStrike">
+              <a:solidFill>
+                <a:srgbClr val="000000"/>
+              </a:solidFill>
+              <a:latin typeface="Arial"/>
+            </a:endParaRPr>
+          </a:p>
+        </p:txBody>
+      </p:sp>
+      <p:sp>
+        <p:nvSpPr>
+          <p:cNvPr id="25" name="PlaceHolder 3"/>
+          <p:cNvSpPr>
+            <a:spLocks noGrp="1"/>
+          </p:cNvSpPr>
+          <p:nvPr>
+            <p:ph type="body"/>
+          </p:nvPr>
+        </p:nvSpPr>
+        <p:spPr>
+          <a:xfrm>
+            <a:off x="755640" y="11481480"/>
+            <a:ext cx="13606920" cy="5915520"/>
+          </a:xfrm>
+          <a:prstGeom prst="rect">
+            <a:avLst/>
+          </a:prstGeom>
+        </p:spPr>
+        <p:txBody>
+          <a:bodyPr lIns="0" rIns="0" tIns="0" bIns="0">
+            <a:normAutofit/>
+          </a:bodyPr>
+          <a:p>
+            <a:endParaRPr b="0" lang="es-ES" sz="2800" spc="-1" strike="noStrike">
+              <a:solidFill>
+                <a:srgbClr val="000000"/>
+              </a:solidFill>
+              <a:latin typeface="Arial"/>
+            </a:endParaRPr>
+          </a:p>
+        </p:txBody>
+      </p:sp>
+    </p:spTree>
+  </p:cSld>
+</p:sldLayout>
+</file>
+
+<file path=ppt/slideLayouts/slideLayout11.xml><?xml version="1.0" encoding="utf-8"?>
+<p:sldLayout xmlns:a="http://schemas.openxmlformats.org/drawingml/2006/main" xmlns:p="http://schemas.openxmlformats.org/presentationml/2006/main" xmlns:r="http://schemas.openxmlformats.org/officeDocument/2006/relationships" xmlns:p14="http://schemas.microsoft.com/office/powerpoint/2010/main" xmlns:p15="http://schemas.microsoft.com/office/powerpoint/2012/main" xmlns:mc="http://schemas.openxmlformats.org/markup-compatibility/2006" type="fourObj" preserve="1">
+  <p:cSld name="Title, 4 Content">
     <p:spTree>
       <p:nvGrpSpPr>
         <p:cNvPr id="1" name=""/>
@@ -167,23 +185,22 @@
         <p:spPr>
           <a:xfrm>
             <a:off x="1134000" y="3499560"/>
-            <a:ext cx="12850920" cy="7444440"/>
+            <a:ext cx="12850560" cy="7444080"/>
           </a:xfrm>
           <a:prstGeom prst="rect">
             <a:avLst/>
           </a:prstGeom>
         </p:spPr>
         <p:txBody>
-          <a:bodyPr lIns="0" tIns="0" rIns="0" bIns="0" anchor="ctr">
+          <a:bodyPr lIns="0" rIns="0" tIns="0" bIns="0" anchor="ctr">
             <a:noAutofit/>
           </a:bodyPr>
-          <a:lstStyle/>
           <a:p>
-            <a:endParaRPr lang="en-US" sz="1800" b="0" strike="noStrike" spc="-1">
+            <a:endParaRPr b="0" lang="es-ES" sz="1800" spc="-1" strike="noStrike">
               <a:solidFill>
                 <a:srgbClr val="000000"/>
               </a:solidFill>
-              <a:latin typeface="Aptos"/>
+              <a:latin typeface="Arial"/>
             </a:endParaRPr>
           </a:p>
         </p:txBody>
@@ -201,23 +218,22 @@
         <p:spPr>
           <a:xfrm>
             <a:off x="755640" y="5003640"/>
-            <a:ext cx="13606920" cy="5915520"/>
+            <a:ext cx="6639840" cy="5915520"/>
           </a:xfrm>
           <a:prstGeom prst="rect">
             <a:avLst/>
           </a:prstGeom>
         </p:spPr>
         <p:txBody>
-          <a:bodyPr lIns="0" tIns="0" rIns="0" bIns="0">
+          <a:bodyPr lIns="0" rIns="0" tIns="0" bIns="0">
             <a:normAutofit/>
           </a:bodyPr>
-          <a:lstStyle/>
           <a:p>
-            <a:endParaRPr lang="en-US" sz="4630" b="0" strike="noStrike" spc="-1">
+            <a:endParaRPr b="0" lang="es-ES" sz="2800" spc="-1" strike="noStrike">
               <a:solidFill>
                 <a:srgbClr val="000000"/>
               </a:solidFill>
-              <a:latin typeface="Aptos"/>
+              <a:latin typeface="Arial"/>
             </a:endParaRPr>
           </a:p>
         </p:txBody>
@@ -225,133 +241,6 @@
       <p:sp>
         <p:nvSpPr>
           <p:cNvPr id="28" name="PlaceHolder 3"/>
-          <p:cNvSpPr>
-            <a:spLocks noGrp="1"/>
-          </p:cNvSpPr>
-          <p:nvPr>
-            <p:ph type="body"/>
-          </p:nvPr>
-        </p:nvSpPr>
-        <p:spPr>
-          <a:xfrm>
-            <a:off x="755640" y="11481480"/>
-            <a:ext cx="13606920" cy="5915520"/>
-          </a:xfrm>
-          <a:prstGeom prst="rect">
-            <a:avLst/>
-          </a:prstGeom>
-        </p:spPr>
-        <p:txBody>
-          <a:bodyPr lIns="0" tIns="0" rIns="0" bIns="0">
-            <a:normAutofit/>
-          </a:bodyPr>
-          <a:lstStyle/>
-          <a:p>
-            <a:endParaRPr lang="en-US" sz="4630" b="0" strike="noStrike" spc="-1">
-              <a:solidFill>
-                <a:srgbClr val="000000"/>
-              </a:solidFill>
-              <a:latin typeface="Aptos"/>
-            </a:endParaRPr>
-          </a:p>
-        </p:txBody>
-      </p:sp>
-    </p:spTree>
-  </p:cSld>
-  <p:clrMapOvr>
-    <a:masterClrMapping/>
-  </p:clrMapOvr>
-</p:sldLayout>
-</file>
-
-<file path=ppt/slideLayouts/slideLayout11.xml><?xml version="1.0" encoding="utf-8"?>
-<p:sldLayout xmlns:a="http://schemas.openxmlformats.org/drawingml/2006/main" xmlns:r="http://schemas.openxmlformats.org/officeDocument/2006/relationships" xmlns:p="http://schemas.openxmlformats.org/presentationml/2006/main" type="fourObj" preserve="1">
-  <p:cSld name="Title, 4 Content">
-    <p:spTree>
-      <p:nvGrpSpPr>
-        <p:cNvPr id="1" name=""/>
-        <p:cNvGrpSpPr/>
-        <p:nvPr/>
-      </p:nvGrpSpPr>
-      <p:grpSpPr>
-        <a:xfrm>
-          <a:off x="0" y="0"/>
-          <a:ext cx="0" cy="0"/>
-          <a:chOff x="0" y="0"/>
-          <a:chExt cx="0" cy="0"/>
-        </a:xfrm>
-      </p:grpSpPr>
-      <p:sp>
-        <p:nvSpPr>
-          <p:cNvPr id="29" name="PlaceHolder 1"/>
-          <p:cNvSpPr>
-            <a:spLocks noGrp="1"/>
-          </p:cNvSpPr>
-          <p:nvPr>
-            <p:ph type="title"/>
-          </p:nvPr>
-        </p:nvSpPr>
-        <p:spPr>
-          <a:xfrm>
-            <a:off x="1134000" y="3499560"/>
-            <a:ext cx="12850920" cy="7444440"/>
-          </a:xfrm>
-          <a:prstGeom prst="rect">
-            <a:avLst/>
-          </a:prstGeom>
-        </p:spPr>
-        <p:txBody>
-          <a:bodyPr lIns="0" tIns="0" rIns="0" bIns="0" anchor="ctr">
-            <a:noAutofit/>
-          </a:bodyPr>
-          <a:lstStyle/>
-          <a:p>
-            <a:endParaRPr lang="en-US" sz="1800" b="0" strike="noStrike" spc="-1">
-              <a:solidFill>
-                <a:srgbClr val="000000"/>
-              </a:solidFill>
-              <a:latin typeface="Aptos"/>
-            </a:endParaRPr>
-          </a:p>
-        </p:txBody>
-      </p:sp>
-      <p:sp>
-        <p:nvSpPr>
-          <p:cNvPr id="30" name="PlaceHolder 2"/>
-          <p:cNvSpPr>
-            <a:spLocks noGrp="1"/>
-          </p:cNvSpPr>
-          <p:nvPr>
-            <p:ph type="body"/>
-          </p:nvPr>
-        </p:nvSpPr>
-        <p:spPr>
-          <a:xfrm>
-            <a:off x="755640" y="5003640"/>
-            <a:ext cx="6639840" cy="5915520"/>
-          </a:xfrm>
-          <a:prstGeom prst="rect">
-            <a:avLst/>
-          </a:prstGeom>
-        </p:spPr>
-        <p:txBody>
-          <a:bodyPr lIns="0" tIns="0" rIns="0" bIns="0">
-            <a:normAutofit/>
-          </a:bodyPr>
-          <a:lstStyle/>
-          <a:p>
-            <a:endParaRPr lang="en-US" sz="4630" b="0" strike="noStrike" spc="-1">
-              <a:solidFill>
-                <a:srgbClr val="000000"/>
-              </a:solidFill>
-              <a:latin typeface="Aptos"/>
-            </a:endParaRPr>
-          </a:p>
-        </p:txBody>
-      </p:sp>
-      <p:sp>
-        <p:nvSpPr>
-          <p:cNvPr id="31" name="PlaceHolder 3"/>
           <p:cNvSpPr>
             <a:spLocks noGrp="1"/>
           </p:cNvSpPr>
@@ -369,23 +258,22 @@
           </a:prstGeom>
         </p:spPr>
         <p:txBody>
-          <a:bodyPr lIns="0" tIns="0" rIns="0" bIns="0">
+          <a:bodyPr lIns="0" rIns="0" tIns="0" bIns="0">
             <a:normAutofit/>
           </a:bodyPr>
-          <a:lstStyle/>
           <a:p>
-            <a:endParaRPr lang="en-US" sz="4630" b="0" strike="noStrike" spc="-1">
+            <a:endParaRPr b="0" lang="es-ES" sz="2800" spc="-1" strike="noStrike">
               <a:solidFill>
                 <a:srgbClr val="000000"/>
               </a:solidFill>
-              <a:latin typeface="Aptos"/>
+              <a:latin typeface="Arial"/>
             </a:endParaRPr>
           </a:p>
         </p:txBody>
       </p:sp>
       <p:sp>
         <p:nvSpPr>
-          <p:cNvPr id="32" name="PlaceHolder 4"/>
+          <p:cNvPr id="29" name="PlaceHolder 4"/>
           <p:cNvSpPr>
             <a:spLocks noGrp="1"/>
           </p:cNvSpPr>
@@ -403,23 +291,22 @@
           </a:prstGeom>
         </p:spPr>
         <p:txBody>
-          <a:bodyPr lIns="0" tIns="0" rIns="0" bIns="0">
+          <a:bodyPr lIns="0" rIns="0" tIns="0" bIns="0">
             <a:normAutofit/>
           </a:bodyPr>
-          <a:lstStyle/>
           <a:p>
-            <a:endParaRPr lang="en-US" sz="4630" b="0" strike="noStrike" spc="-1">
+            <a:endParaRPr b="0" lang="es-ES" sz="2800" spc="-1" strike="noStrike">
               <a:solidFill>
                 <a:srgbClr val="000000"/>
               </a:solidFill>
-              <a:latin typeface="Aptos"/>
+              <a:latin typeface="Arial"/>
             </a:endParaRPr>
           </a:p>
         </p:txBody>
       </p:sp>
       <p:sp>
         <p:nvSpPr>
-          <p:cNvPr id="33" name="PlaceHolder 5"/>
+          <p:cNvPr id="30" name="PlaceHolder 5"/>
           <p:cNvSpPr>
             <a:spLocks noGrp="1"/>
           </p:cNvSpPr>
@@ -437,30 +324,26 @@
           </a:prstGeom>
         </p:spPr>
         <p:txBody>
-          <a:bodyPr lIns="0" tIns="0" rIns="0" bIns="0">
+          <a:bodyPr lIns="0" rIns="0" tIns="0" bIns="0">
             <a:normAutofit/>
           </a:bodyPr>
-          <a:lstStyle/>
           <a:p>
-            <a:endParaRPr lang="en-US" sz="4630" b="0" strike="noStrike" spc="-1">
+            <a:endParaRPr b="0" lang="es-ES" sz="2800" spc="-1" strike="noStrike">
               <a:solidFill>
                 <a:srgbClr val="000000"/>
               </a:solidFill>
-              <a:latin typeface="Aptos"/>
+              <a:latin typeface="Arial"/>
             </a:endParaRPr>
           </a:p>
         </p:txBody>
       </p:sp>
     </p:spTree>
   </p:cSld>
-  <p:clrMapOvr>
-    <a:masterClrMapping/>
-  </p:clrMapOvr>
 </p:sldLayout>
 </file>
 
 <file path=ppt/slideLayouts/slideLayout12.xml><?xml version="1.0" encoding="utf-8"?>
-<p:sldLayout xmlns:a="http://schemas.openxmlformats.org/drawingml/2006/main" xmlns:r="http://schemas.openxmlformats.org/officeDocument/2006/relationships" xmlns:p="http://schemas.openxmlformats.org/presentationml/2006/main" type="blank" preserve="1">
+<p:sldLayout xmlns:a="http://schemas.openxmlformats.org/drawingml/2006/main" xmlns:p="http://schemas.openxmlformats.org/presentationml/2006/main" xmlns:r="http://schemas.openxmlformats.org/officeDocument/2006/relationships" xmlns:p14="http://schemas.microsoft.com/office/powerpoint/2010/main" xmlns:p15="http://schemas.microsoft.com/office/powerpoint/2012/main" xmlns:mc="http://schemas.openxmlformats.org/markup-compatibility/2006" type="blank" preserve="1">
   <p:cSld name="Title, 6 Content">
     <p:spTree>
       <p:nvGrpSpPr>
@@ -478,7 +361,7 @@
       </p:grpSpPr>
       <p:sp>
         <p:nvSpPr>
-          <p:cNvPr id="34" name="PlaceHolder 1"/>
+          <p:cNvPr id="31" name="PlaceHolder 1"/>
           <p:cNvSpPr>
             <a:spLocks noGrp="1"/>
           </p:cNvSpPr>
@@ -489,30 +372,29 @@
         <p:spPr>
           <a:xfrm>
             <a:off x="1134000" y="3499560"/>
-            <a:ext cx="12850920" cy="7444440"/>
+            <a:ext cx="12850560" cy="7444080"/>
           </a:xfrm>
           <a:prstGeom prst="rect">
             <a:avLst/>
           </a:prstGeom>
         </p:spPr>
         <p:txBody>
-          <a:bodyPr lIns="0" tIns="0" rIns="0" bIns="0" anchor="ctr">
+          <a:bodyPr lIns="0" rIns="0" tIns="0" bIns="0" anchor="ctr">
             <a:noAutofit/>
           </a:bodyPr>
-          <a:lstStyle/>
           <a:p>
-            <a:endParaRPr lang="en-US" sz="1800" b="0" strike="noStrike" spc="-1">
+            <a:endParaRPr b="0" lang="es-ES" sz="1800" spc="-1" strike="noStrike">
               <a:solidFill>
                 <a:srgbClr val="000000"/>
               </a:solidFill>
-              <a:latin typeface="Aptos"/>
+              <a:latin typeface="Arial"/>
             </a:endParaRPr>
           </a:p>
         </p:txBody>
       </p:sp>
       <p:sp>
         <p:nvSpPr>
-          <p:cNvPr id="35" name="PlaceHolder 2"/>
+          <p:cNvPr id="32" name="PlaceHolder 2"/>
           <p:cNvSpPr>
             <a:spLocks noGrp="1"/>
           </p:cNvSpPr>
@@ -530,23 +412,22 @@
           </a:prstGeom>
         </p:spPr>
         <p:txBody>
-          <a:bodyPr lIns="0" tIns="0" rIns="0" bIns="0">
+          <a:bodyPr lIns="0" rIns="0" tIns="0" bIns="0">
             <a:normAutofit/>
           </a:bodyPr>
-          <a:lstStyle/>
           <a:p>
-            <a:endParaRPr lang="en-US" sz="4630" b="0" strike="noStrike" spc="-1">
+            <a:endParaRPr b="0" lang="es-ES" sz="2800" spc="-1" strike="noStrike">
               <a:solidFill>
                 <a:srgbClr val="000000"/>
               </a:solidFill>
-              <a:latin typeface="Aptos"/>
+              <a:latin typeface="Arial"/>
             </a:endParaRPr>
           </a:p>
         </p:txBody>
       </p:sp>
       <p:sp>
         <p:nvSpPr>
-          <p:cNvPr id="36" name="PlaceHolder 3"/>
+          <p:cNvPr id="33" name="PlaceHolder 3"/>
           <p:cNvSpPr>
             <a:spLocks noGrp="1"/>
           </p:cNvSpPr>
@@ -564,23 +445,22 @@
           </a:prstGeom>
         </p:spPr>
         <p:txBody>
-          <a:bodyPr lIns="0" tIns="0" rIns="0" bIns="0">
+          <a:bodyPr lIns="0" rIns="0" tIns="0" bIns="0">
             <a:normAutofit/>
           </a:bodyPr>
-          <a:lstStyle/>
           <a:p>
-            <a:endParaRPr lang="en-US" sz="4630" b="0" strike="noStrike" spc="-1">
+            <a:endParaRPr b="0" lang="es-ES" sz="2800" spc="-1" strike="noStrike">
               <a:solidFill>
                 <a:srgbClr val="000000"/>
               </a:solidFill>
-              <a:latin typeface="Aptos"/>
+              <a:latin typeface="Arial"/>
             </a:endParaRPr>
           </a:p>
         </p:txBody>
       </p:sp>
       <p:sp>
         <p:nvSpPr>
-          <p:cNvPr id="37" name="PlaceHolder 4"/>
+          <p:cNvPr id="34" name="PlaceHolder 4"/>
           <p:cNvSpPr>
             <a:spLocks noGrp="1"/>
           </p:cNvSpPr>
@@ -598,23 +478,22 @@
           </a:prstGeom>
         </p:spPr>
         <p:txBody>
-          <a:bodyPr lIns="0" tIns="0" rIns="0" bIns="0">
+          <a:bodyPr lIns="0" rIns="0" tIns="0" bIns="0">
             <a:normAutofit/>
           </a:bodyPr>
-          <a:lstStyle/>
           <a:p>
-            <a:endParaRPr lang="en-US" sz="4630" b="0" strike="noStrike" spc="-1">
+            <a:endParaRPr b="0" lang="es-ES" sz="2800" spc="-1" strike="noStrike">
               <a:solidFill>
                 <a:srgbClr val="000000"/>
               </a:solidFill>
-              <a:latin typeface="Aptos"/>
+              <a:latin typeface="Arial"/>
             </a:endParaRPr>
           </a:p>
         </p:txBody>
       </p:sp>
       <p:sp>
         <p:nvSpPr>
-          <p:cNvPr id="38" name="PlaceHolder 5"/>
+          <p:cNvPr id="35" name="PlaceHolder 5"/>
           <p:cNvSpPr>
             <a:spLocks noGrp="1"/>
           </p:cNvSpPr>
@@ -632,23 +511,22 @@
           </a:prstGeom>
         </p:spPr>
         <p:txBody>
-          <a:bodyPr lIns="0" tIns="0" rIns="0" bIns="0">
+          <a:bodyPr lIns="0" rIns="0" tIns="0" bIns="0">
             <a:normAutofit/>
           </a:bodyPr>
-          <a:lstStyle/>
           <a:p>
-            <a:endParaRPr lang="en-US" sz="4630" b="0" strike="noStrike" spc="-1">
+            <a:endParaRPr b="0" lang="es-ES" sz="2800" spc="-1" strike="noStrike">
               <a:solidFill>
                 <a:srgbClr val="000000"/>
               </a:solidFill>
-              <a:latin typeface="Aptos"/>
+              <a:latin typeface="Arial"/>
             </a:endParaRPr>
           </a:p>
         </p:txBody>
       </p:sp>
       <p:sp>
         <p:nvSpPr>
-          <p:cNvPr id="39" name="PlaceHolder 6"/>
+          <p:cNvPr id="36" name="PlaceHolder 6"/>
           <p:cNvSpPr>
             <a:spLocks noGrp="1"/>
           </p:cNvSpPr>
@@ -666,23 +544,22 @@
           </a:prstGeom>
         </p:spPr>
         <p:txBody>
-          <a:bodyPr lIns="0" tIns="0" rIns="0" bIns="0">
+          <a:bodyPr lIns="0" rIns="0" tIns="0" bIns="0">
             <a:normAutofit/>
           </a:bodyPr>
-          <a:lstStyle/>
           <a:p>
-            <a:endParaRPr lang="en-US" sz="4630" b="0" strike="noStrike" spc="-1">
+            <a:endParaRPr b="0" lang="es-ES" sz="2800" spc="-1" strike="noStrike">
               <a:solidFill>
                 <a:srgbClr val="000000"/>
               </a:solidFill>
-              <a:latin typeface="Aptos"/>
+              <a:latin typeface="Arial"/>
             </a:endParaRPr>
           </a:p>
         </p:txBody>
       </p:sp>
       <p:sp>
         <p:nvSpPr>
-          <p:cNvPr id="40" name="PlaceHolder 7"/>
+          <p:cNvPr id="37" name="PlaceHolder 7"/>
           <p:cNvSpPr>
             <a:spLocks noGrp="1"/>
           </p:cNvSpPr>
@@ -700,30 +577,26 @@
           </a:prstGeom>
         </p:spPr>
         <p:txBody>
-          <a:bodyPr lIns="0" tIns="0" rIns="0" bIns="0">
+          <a:bodyPr lIns="0" rIns="0" tIns="0" bIns="0">
             <a:normAutofit/>
           </a:bodyPr>
-          <a:lstStyle/>
           <a:p>
-            <a:endParaRPr lang="en-US" sz="4630" b="0" strike="noStrike" spc="-1">
+            <a:endParaRPr b="0" lang="es-ES" sz="2800" spc="-1" strike="noStrike">
               <a:solidFill>
                 <a:srgbClr val="000000"/>
               </a:solidFill>
-              <a:latin typeface="Aptos"/>
+              <a:latin typeface="Arial"/>
             </a:endParaRPr>
           </a:p>
         </p:txBody>
       </p:sp>
     </p:spTree>
   </p:cSld>
-  <p:clrMapOvr>
-    <a:masterClrMapping/>
-  </p:clrMapOvr>
 </p:sldLayout>
 </file>
 
 <file path=ppt/slideLayouts/slideLayout2.xml><?xml version="1.0" encoding="utf-8"?>
-<p:sldLayout xmlns:a="http://schemas.openxmlformats.org/drawingml/2006/main" xmlns:r="http://schemas.openxmlformats.org/officeDocument/2006/relationships" xmlns:p="http://schemas.openxmlformats.org/presentationml/2006/main" type="tx" preserve="1">
+<p:sldLayout xmlns:a="http://schemas.openxmlformats.org/drawingml/2006/main" xmlns:p="http://schemas.openxmlformats.org/presentationml/2006/main" xmlns:r="http://schemas.openxmlformats.org/officeDocument/2006/relationships" xmlns:p14="http://schemas.microsoft.com/office/powerpoint/2010/main" xmlns:p15="http://schemas.microsoft.com/office/powerpoint/2012/main" xmlns:mc="http://schemas.openxmlformats.org/markup-compatibility/2006" type="tx" preserve="1">
   <p:cSld name="Title Slide">
     <p:spTree>
       <p:nvGrpSpPr>
@@ -741,7 +614,7 @@
       </p:grpSpPr>
       <p:sp>
         <p:nvSpPr>
-          <p:cNvPr id="5" name="PlaceHolder 1"/>
+          <p:cNvPr id="2" name="PlaceHolder 1"/>
           <p:cNvSpPr>
             <a:spLocks noGrp="1"/>
           </p:cNvSpPr>
@@ -752,30 +625,29 @@
         <p:spPr>
           <a:xfrm>
             <a:off x="1134000" y="3499560"/>
-            <a:ext cx="12850920" cy="7444440"/>
+            <a:ext cx="12850560" cy="7444080"/>
           </a:xfrm>
           <a:prstGeom prst="rect">
             <a:avLst/>
           </a:prstGeom>
         </p:spPr>
         <p:txBody>
-          <a:bodyPr lIns="0" tIns="0" rIns="0" bIns="0" anchor="ctr">
+          <a:bodyPr lIns="0" rIns="0" tIns="0" bIns="0" anchor="ctr">
             <a:noAutofit/>
           </a:bodyPr>
-          <a:lstStyle/>
           <a:p>
-            <a:endParaRPr lang="en-US" sz="1800" b="0" strike="noStrike" spc="-1">
+            <a:endParaRPr b="0" lang="es-ES" sz="1800" spc="-1" strike="noStrike">
               <a:solidFill>
                 <a:srgbClr val="000000"/>
               </a:solidFill>
-              <a:latin typeface="Aptos"/>
+              <a:latin typeface="Arial"/>
             </a:endParaRPr>
           </a:p>
         </p:txBody>
       </p:sp>
       <p:sp>
         <p:nvSpPr>
-          <p:cNvPr id="6" name="PlaceHolder 2"/>
+          <p:cNvPr id="3" name="PlaceHolder 2"/>
           <p:cNvSpPr>
             <a:spLocks noGrp="1"/>
           </p:cNvSpPr>
@@ -793,13 +665,12 @@
           </a:prstGeom>
         </p:spPr>
         <p:txBody>
-          <a:bodyPr lIns="0" tIns="0" rIns="0" bIns="0" anchor="ctr">
+          <a:bodyPr lIns="0" rIns="0" tIns="0" bIns="0" anchor="ctr">
             <a:noAutofit/>
           </a:bodyPr>
-          <a:lstStyle/>
           <a:p>
             <a:pPr algn="ctr"/>
-            <a:endParaRPr lang="es-ES" sz="3200" b="0" strike="noStrike" spc="-1">
+            <a:endParaRPr b="0" lang="es-ES" sz="3200" spc="-1" strike="noStrike">
               <a:latin typeface="Arial"/>
             </a:endParaRPr>
           </a:p>
@@ -807,14 +678,11 @@
       </p:sp>
     </p:spTree>
   </p:cSld>
-  <p:clrMapOvr>
-    <a:masterClrMapping/>
-  </p:clrMapOvr>
 </p:sldLayout>
 </file>
 
 <file path=ppt/slideLayouts/slideLayout3.xml><?xml version="1.0" encoding="utf-8"?>
-<p:sldLayout xmlns:a="http://schemas.openxmlformats.org/drawingml/2006/main" xmlns:r="http://schemas.openxmlformats.org/officeDocument/2006/relationships" xmlns:p="http://schemas.openxmlformats.org/presentationml/2006/main" type="obj" preserve="1">
+<p:sldLayout xmlns:a="http://schemas.openxmlformats.org/drawingml/2006/main" xmlns:p="http://schemas.openxmlformats.org/presentationml/2006/main" xmlns:r="http://schemas.openxmlformats.org/officeDocument/2006/relationships" xmlns:p14="http://schemas.microsoft.com/office/powerpoint/2010/main" xmlns:p15="http://schemas.microsoft.com/office/powerpoint/2012/main" xmlns:mc="http://schemas.openxmlformats.org/markup-compatibility/2006" type="obj" preserve="1">
   <p:cSld name="Title, Content">
     <p:spTree>
       <p:nvGrpSpPr>
@@ -832,7 +700,7 @@
       </p:grpSpPr>
       <p:sp>
         <p:nvSpPr>
-          <p:cNvPr id="7" name="PlaceHolder 1"/>
+          <p:cNvPr id="4" name="PlaceHolder 1"/>
           <p:cNvSpPr>
             <a:spLocks noGrp="1"/>
           </p:cNvSpPr>
@@ -843,30 +711,29 @@
         <p:spPr>
           <a:xfrm>
             <a:off x="1134000" y="3499560"/>
-            <a:ext cx="12850920" cy="7444440"/>
+            <a:ext cx="12850560" cy="7444080"/>
           </a:xfrm>
           <a:prstGeom prst="rect">
             <a:avLst/>
           </a:prstGeom>
         </p:spPr>
         <p:txBody>
-          <a:bodyPr lIns="0" tIns="0" rIns="0" bIns="0" anchor="ctr">
+          <a:bodyPr lIns="0" rIns="0" tIns="0" bIns="0" anchor="ctr">
             <a:noAutofit/>
           </a:bodyPr>
-          <a:lstStyle/>
           <a:p>
-            <a:endParaRPr lang="en-US" sz="1800" b="0" strike="noStrike" spc="-1">
+            <a:endParaRPr b="0" lang="es-ES" sz="1800" spc="-1" strike="noStrike">
               <a:solidFill>
                 <a:srgbClr val="000000"/>
               </a:solidFill>
-              <a:latin typeface="Aptos"/>
+              <a:latin typeface="Arial"/>
             </a:endParaRPr>
           </a:p>
         </p:txBody>
       </p:sp>
       <p:sp>
         <p:nvSpPr>
-          <p:cNvPr id="8" name="PlaceHolder 2"/>
+          <p:cNvPr id="5" name="PlaceHolder 2"/>
           <p:cNvSpPr>
             <a:spLocks noGrp="1"/>
           </p:cNvSpPr>
@@ -884,31 +751,148 @@
           </a:prstGeom>
         </p:spPr>
         <p:txBody>
-          <a:bodyPr lIns="0" tIns="0" rIns="0" bIns="0">
+          <a:bodyPr lIns="0" rIns="0" tIns="0" bIns="0">
             <a:normAutofit/>
           </a:bodyPr>
-          <a:lstStyle/>
           <a:p>
-            <a:endParaRPr lang="en-US" sz="4630" b="0" strike="noStrike" spc="-1">
+            <a:endParaRPr b="0" lang="es-ES" sz="2800" spc="-1" strike="noStrike">
               <a:solidFill>
                 <a:srgbClr val="000000"/>
               </a:solidFill>
-              <a:latin typeface="Aptos"/>
+              <a:latin typeface="Arial"/>
             </a:endParaRPr>
           </a:p>
         </p:txBody>
       </p:sp>
     </p:spTree>
   </p:cSld>
-  <p:clrMapOvr>
-    <a:masterClrMapping/>
-  </p:clrMapOvr>
 </p:sldLayout>
 </file>
 
 <file path=ppt/slideLayouts/slideLayout4.xml><?xml version="1.0" encoding="utf-8"?>
-<p:sldLayout xmlns:a="http://schemas.openxmlformats.org/drawingml/2006/main" xmlns:r="http://schemas.openxmlformats.org/officeDocument/2006/relationships" xmlns:p="http://schemas.openxmlformats.org/presentationml/2006/main" type="twoObj" preserve="1">
+<p:sldLayout xmlns:a="http://schemas.openxmlformats.org/drawingml/2006/main" xmlns:p="http://schemas.openxmlformats.org/presentationml/2006/main" xmlns:r="http://schemas.openxmlformats.org/officeDocument/2006/relationships" xmlns:p14="http://schemas.microsoft.com/office/powerpoint/2010/main" xmlns:p15="http://schemas.microsoft.com/office/powerpoint/2012/main" xmlns:mc="http://schemas.openxmlformats.org/markup-compatibility/2006" type="twoObj" preserve="1">
   <p:cSld name="Title, 2 Content">
+    <p:spTree>
+      <p:nvGrpSpPr>
+        <p:cNvPr id="1" name=""/>
+        <p:cNvGrpSpPr/>
+        <p:nvPr/>
+      </p:nvGrpSpPr>
+      <p:grpSpPr>
+        <a:xfrm>
+          <a:off x="0" y="0"/>
+          <a:ext cx="0" cy="0"/>
+          <a:chOff x="0" y="0"/>
+          <a:chExt cx="0" cy="0"/>
+        </a:xfrm>
+      </p:grpSpPr>
+      <p:sp>
+        <p:nvSpPr>
+          <p:cNvPr id="6" name="PlaceHolder 1"/>
+          <p:cNvSpPr>
+            <a:spLocks noGrp="1"/>
+          </p:cNvSpPr>
+          <p:nvPr>
+            <p:ph type="title"/>
+          </p:nvPr>
+        </p:nvSpPr>
+        <p:spPr>
+          <a:xfrm>
+            <a:off x="1134000" y="3499560"/>
+            <a:ext cx="12850560" cy="7444080"/>
+          </a:xfrm>
+          <a:prstGeom prst="rect">
+            <a:avLst/>
+          </a:prstGeom>
+        </p:spPr>
+        <p:txBody>
+          <a:bodyPr lIns="0" rIns="0" tIns="0" bIns="0" anchor="ctr">
+            <a:noAutofit/>
+          </a:bodyPr>
+          <a:p>
+            <a:endParaRPr b="0" lang="es-ES" sz="1800" spc="-1" strike="noStrike">
+              <a:solidFill>
+                <a:srgbClr val="000000"/>
+              </a:solidFill>
+              <a:latin typeface="Arial"/>
+            </a:endParaRPr>
+          </a:p>
+        </p:txBody>
+      </p:sp>
+      <p:sp>
+        <p:nvSpPr>
+          <p:cNvPr id="7" name="PlaceHolder 2"/>
+          <p:cNvSpPr>
+            <a:spLocks noGrp="1"/>
+          </p:cNvSpPr>
+          <p:nvPr>
+            <p:ph type="body"/>
+          </p:nvPr>
+        </p:nvSpPr>
+        <p:spPr>
+          <a:xfrm>
+            <a:off x="755640" y="5003640"/>
+            <a:ext cx="6639840" cy="12402000"/>
+          </a:xfrm>
+          <a:prstGeom prst="rect">
+            <a:avLst/>
+          </a:prstGeom>
+        </p:spPr>
+        <p:txBody>
+          <a:bodyPr lIns="0" rIns="0" tIns="0" bIns="0">
+            <a:normAutofit/>
+          </a:bodyPr>
+          <a:p>
+            <a:endParaRPr b="0" lang="es-ES" sz="2800" spc="-1" strike="noStrike">
+              <a:solidFill>
+                <a:srgbClr val="000000"/>
+              </a:solidFill>
+              <a:latin typeface="Arial"/>
+            </a:endParaRPr>
+          </a:p>
+        </p:txBody>
+      </p:sp>
+      <p:sp>
+        <p:nvSpPr>
+          <p:cNvPr id="8" name="PlaceHolder 3"/>
+          <p:cNvSpPr>
+            <a:spLocks noGrp="1"/>
+          </p:cNvSpPr>
+          <p:nvPr>
+            <p:ph type="body"/>
+          </p:nvPr>
+        </p:nvSpPr>
+        <p:spPr>
+          <a:xfrm>
+            <a:off x="7727760" y="5003640"/>
+            <a:ext cx="6639840" cy="12402000"/>
+          </a:xfrm>
+          <a:prstGeom prst="rect">
+            <a:avLst/>
+          </a:prstGeom>
+        </p:spPr>
+        <p:txBody>
+          <a:bodyPr lIns="0" rIns="0" tIns="0" bIns="0">
+            <a:normAutofit/>
+          </a:bodyPr>
+          <a:p>
+            <a:endParaRPr b="0" lang="es-ES" sz="2800" spc="-1" strike="noStrike">
+              <a:solidFill>
+                <a:srgbClr val="000000"/>
+              </a:solidFill>
+              <a:latin typeface="Arial"/>
+            </a:endParaRPr>
+          </a:p>
+        </p:txBody>
+      </p:sp>
+    </p:spTree>
+  </p:cSld>
+</p:sldLayout>
+</file>
+
+<file path=ppt/slideLayouts/slideLayout5.xml><?xml version="1.0" encoding="utf-8"?>
+<p:sldLayout xmlns:a="http://schemas.openxmlformats.org/drawingml/2006/main" xmlns:p="http://schemas.openxmlformats.org/presentationml/2006/main" xmlns:r="http://schemas.openxmlformats.org/officeDocument/2006/relationships" xmlns:p14="http://schemas.microsoft.com/office/powerpoint/2010/main" xmlns:p15="http://schemas.microsoft.com/office/powerpoint/2012/main" xmlns:mc="http://schemas.openxmlformats.org/markup-compatibility/2006" type="titleOnly" preserve="1">
+  <p:cSld name="Title Only">
     <p:spTree>
       <p:nvGrpSpPr>
         <p:cNvPr id="1" name=""/>
@@ -936,30 +920,291 @@
         <p:spPr>
           <a:xfrm>
             <a:off x="1134000" y="3499560"/>
-            <a:ext cx="12850920" cy="7444440"/>
+            <a:ext cx="12850560" cy="7444080"/>
           </a:xfrm>
           <a:prstGeom prst="rect">
             <a:avLst/>
           </a:prstGeom>
         </p:spPr>
         <p:txBody>
-          <a:bodyPr lIns="0" tIns="0" rIns="0" bIns="0" anchor="ctr">
+          <a:bodyPr lIns="0" rIns="0" tIns="0" bIns="0" anchor="ctr">
             <a:noAutofit/>
           </a:bodyPr>
-          <a:lstStyle/>
           <a:p>
-            <a:endParaRPr lang="en-US" sz="1800" b="0" strike="noStrike" spc="-1">
+            <a:endParaRPr b="0" lang="es-ES" sz="1800" spc="-1" strike="noStrike">
               <a:solidFill>
                 <a:srgbClr val="000000"/>
               </a:solidFill>
-              <a:latin typeface="Aptos"/>
+              <a:latin typeface="Arial"/>
+            </a:endParaRPr>
+          </a:p>
+        </p:txBody>
+      </p:sp>
+    </p:spTree>
+  </p:cSld>
+</p:sldLayout>
+</file>
+
+<file path=ppt/slideLayouts/slideLayout6.xml><?xml version="1.0" encoding="utf-8"?>
+<p:sldLayout xmlns:a="http://schemas.openxmlformats.org/drawingml/2006/main" xmlns:p="http://schemas.openxmlformats.org/presentationml/2006/main" xmlns:r="http://schemas.openxmlformats.org/officeDocument/2006/relationships" xmlns:p14="http://schemas.microsoft.com/office/powerpoint/2010/main" xmlns:p15="http://schemas.microsoft.com/office/powerpoint/2012/main" xmlns:mc="http://schemas.openxmlformats.org/markup-compatibility/2006" type="objOnly" preserve="1">
+  <p:cSld name="Centered Text">
+    <p:spTree>
+      <p:nvGrpSpPr>
+        <p:cNvPr id="1" name=""/>
+        <p:cNvGrpSpPr/>
+        <p:nvPr/>
+      </p:nvGrpSpPr>
+      <p:grpSpPr>
+        <a:xfrm>
+          <a:off x="0" y="0"/>
+          <a:ext cx="0" cy="0"/>
+          <a:chOff x="0" y="0"/>
+          <a:chExt cx="0" cy="0"/>
+        </a:xfrm>
+      </p:grpSpPr>
+      <p:sp>
+        <p:nvSpPr>
+          <p:cNvPr id="10" name="PlaceHolder 1"/>
+          <p:cNvSpPr>
+            <a:spLocks noGrp="1"/>
+          </p:cNvSpPr>
+          <p:nvPr>
+            <p:ph type="subTitle"/>
+          </p:nvPr>
+        </p:nvSpPr>
+        <p:spPr>
+          <a:xfrm>
+            <a:off x="1134000" y="3499560"/>
+            <a:ext cx="12850560" cy="34507440"/>
+          </a:xfrm>
+          <a:prstGeom prst="rect">
+            <a:avLst/>
+          </a:prstGeom>
+        </p:spPr>
+        <p:txBody>
+          <a:bodyPr lIns="0" rIns="0" tIns="0" bIns="0" anchor="ctr">
+            <a:noAutofit/>
+          </a:bodyPr>
+          <a:p>
+            <a:pPr algn="ctr"/>
+            <a:endParaRPr b="0" lang="es-ES" sz="3200" spc="-1" strike="noStrike">
+              <a:latin typeface="Arial"/>
+            </a:endParaRPr>
+          </a:p>
+        </p:txBody>
+      </p:sp>
+    </p:spTree>
+  </p:cSld>
+</p:sldLayout>
+</file>
+
+<file path=ppt/slideLayouts/slideLayout7.xml><?xml version="1.0" encoding="utf-8"?>
+<p:sldLayout xmlns:a="http://schemas.openxmlformats.org/drawingml/2006/main" xmlns:p="http://schemas.openxmlformats.org/presentationml/2006/main" xmlns:r="http://schemas.openxmlformats.org/officeDocument/2006/relationships" xmlns:p14="http://schemas.microsoft.com/office/powerpoint/2010/main" xmlns:p15="http://schemas.microsoft.com/office/powerpoint/2012/main" xmlns:mc="http://schemas.openxmlformats.org/markup-compatibility/2006" type="twoObjAndObj" preserve="1">
+  <p:cSld name="Title, 2 Content and Content">
+    <p:spTree>
+      <p:nvGrpSpPr>
+        <p:cNvPr id="1" name=""/>
+        <p:cNvGrpSpPr/>
+        <p:nvPr/>
+      </p:nvGrpSpPr>
+      <p:grpSpPr>
+        <a:xfrm>
+          <a:off x="0" y="0"/>
+          <a:ext cx="0" cy="0"/>
+          <a:chOff x="0" y="0"/>
+          <a:chExt cx="0" cy="0"/>
+        </a:xfrm>
+      </p:grpSpPr>
+      <p:sp>
+        <p:nvSpPr>
+          <p:cNvPr id="11" name="PlaceHolder 1"/>
+          <p:cNvSpPr>
+            <a:spLocks noGrp="1"/>
+          </p:cNvSpPr>
+          <p:nvPr>
+            <p:ph type="title"/>
+          </p:nvPr>
+        </p:nvSpPr>
+        <p:spPr>
+          <a:xfrm>
+            <a:off x="1134000" y="3499560"/>
+            <a:ext cx="12850560" cy="7444080"/>
+          </a:xfrm>
+          <a:prstGeom prst="rect">
+            <a:avLst/>
+          </a:prstGeom>
+        </p:spPr>
+        <p:txBody>
+          <a:bodyPr lIns="0" rIns="0" tIns="0" bIns="0" anchor="ctr">
+            <a:noAutofit/>
+          </a:bodyPr>
+          <a:p>
+            <a:endParaRPr b="0" lang="es-ES" sz="1800" spc="-1" strike="noStrike">
+              <a:solidFill>
+                <a:srgbClr val="000000"/>
+              </a:solidFill>
+              <a:latin typeface="Arial"/>
             </a:endParaRPr>
           </a:p>
         </p:txBody>
       </p:sp>
       <p:sp>
         <p:nvSpPr>
-          <p:cNvPr id="10" name="PlaceHolder 2"/>
+          <p:cNvPr id="12" name="PlaceHolder 2"/>
+          <p:cNvSpPr>
+            <a:spLocks noGrp="1"/>
+          </p:cNvSpPr>
+          <p:nvPr>
+            <p:ph type="body"/>
+          </p:nvPr>
+        </p:nvSpPr>
+        <p:spPr>
+          <a:xfrm>
+            <a:off x="755640" y="5003640"/>
+            <a:ext cx="6639840" cy="5915520"/>
+          </a:xfrm>
+          <a:prstGeom prst="rect">
+            <a:avLst/>
+          </a:prstGeom>
+        </p:spPr>
+        <p:txBody>
+          <a:bodyPr lIns="0" rIns="0" tIns="0" bIns="0">
+            <a:normAutofit/>
+          </a:bodyPr>
+          <a:p>
+            <a:endParaRPr b="0" lang="es-ES" sz="2800" spc="-1" strike="noStrike">
+              <a:solidFill>
+                <a:srgbClr val="000000"/>
+              </a:solidFill>
+              <a:latin typeface="Arial"/>
+            </a:endParaRPr>
+          </a:p>
+        </p:txBody>
+      </p:sp>
+      <p:sp>
+        <p:nvSpPr>
+          <p:cNvPr id="13" name="PlaceHolder 3"/>
+          <p:cNvSpPr>
+            <a:spLocks noGrp="1"/>
+          </p:cNvSpPr>
+          <p:nvPr>
+            <p:ph type="body"/>
+          </p:nvPr>
+        </p:nvSpPr>
+        <p:spPr>
+          <a:xfrm>
+            <a:off x="7727760" y="5003640"/>
+            <a:ext cx="6639840" cy="12402000"/>
+          </a:xfrm>
+          <a:prstGeom prst="rect">
+            <a:avLst/>
+          </a:prstGeom>
+        </p:spPr>
+        <p:txBody>
+          <a:bodyPr lIns="0" rIns="0" tIns="0" bIns="0">
+            <a:normAutofit/>
+          </a:bodyPr>
+          <a:p>
+            <a:endParaRPr b="0" lang="es-ES" sz="2800" spc="-1" strike="noStrike">
+              <a:solidFill>
+                <a:srgbClr val="000000"/>
+              </a:solidFill>
+              <a:latin typeface="Arial"/>
+            </a:endParaRPr>
+          </a:p>
+        </p:txBody>
+      </p:sp>
+      <p:sp>
+        <p:nvSpPr>
+          <p:cNvPr id="14" name="PlaceHolder 4"/>
+          <p:cNvSpPr>
+            <a:spLocks noGrp="1"/>
+          </p:cNvSpPr>
+          <p:nvPr>
+            <p:ph type="body"/>
+          </p:nvPr>
+        </p:nvSpPr>
+        <p:spPr>
+          <a:xfrm>
+            <a:off x="755640" y="11481480"/>
+            <a:ext cx="6639840" cy="5915520"/>
+          </a:xfrm>
+          <a:prstGeom prst="rect">
+            <a:avLst/>
+          </a:prstGeom>
+        </p:spPr>
+        <p:txBody>
+          <a:bodyPr lIns="0" rIns="0" tIns="0" bIns="0">
+            <a:normAutofit/>
+          </a:bodyPr>
+          <a:p>
+            <a:endParaRPr b="0" lang="es-ES" sz="2800" spc="-1" strike="noStrike">
+              <a:solidFill>
+                <a:srgbClr val="000000"/>
+              </a:solidFill>
+              <a:latin typeface="Arial"/>
+            </a:endParaRPr>
+          </a:p>
+        </p:txBody>
+      </p:sp>
+    </p:spTree>
+  </p:cSld>
+</p:sldLayout>
+</file>
+
+<file path=ppt/slideLayouts/slideLayout8.xml><?xml version="1.0" encoding="utf-8"?>
+<p:sldLayout xmlns:a="http://schemas.openxmlformats.org/drawingml/2006/main" xmlns:p="http://schemas.openxmlformats.org/presentationml/2006/main" xmlns:r="http://schemas.openxmlformats.org/officeDocument/2006/relationships" xmlns:p14="http://schemas.microsoft.com/office/powerpoint/2010/main" xmlns:p15="http://schemas.microsoft.com/office/powerpoint/2012/main" xmlns:mc="http://schemas.openxmlformats.org/markup-compatibility/2006" type="objAndTwoObj" preserve="1">
+  <p:cSld name="Title Content and 2 Content">
+    <p:spTree>
+      <p:nvGrpSpPr>
+        <p:cNvPr id="1" name=""/>
+        <p:cNvGrpSpPr/>
+        <p:nvPr/>
+      </p:nvGrpSpPr>
+      <p:grpSpPr>
+        <a:xfrm>
+          <a:off x="0" y="0"/>
+          <a:ext cx="0" cy="0"/>
+          <a:chOff x="0" y="0"/>
+          <a:chExt cx="0" cy="0"/>
+        </a:xfrm>
+      </p:grpSpPr>
+      <p:sp>
+        <p:nvSpPr>
+          <p:cNvPr id="15" name="PlaceHolder 1"/>
+          <p:cNvSpPr>
+            <a:spLocks noGrp="1"/>
+          </p:cNvSpPr>
+          <p:nvPr>
+            <p:ph type="title"/>
+          </p:nvPr>
+        </p:nvSpPr>
+        <p:spPr>
+          <a:xfrm>
+            <a:off x="1134000" y="3499560"/>
+            <a:ext cx="12850560" cy="7444080"/>
+          </a:xfrm>
+          <a:prstGeom prst="rect">
+            <a:avLst/>
+          </a:prstGeom>
+        </p:spPr>
+        <p:txBody>
+          <a:bodyPr lIns="0" rIns="0" tIns="0" bIns="0" anchor="ctr">
+            <a:noAutofit/>
+          </a:bodyPr>
+          <a:p>
+            <a:endParaRPr b="0" lang="es-ES" sz="1800" spc="-1" strike="noStrike">
+              <a:solidFill>
+                <a:srgbClr val="000000"/>
+              </a:solidFill>
+              <a:latin typeface="Arial"/>
+            </a:endParaRPr>
+          </a:p>
+        </p:txBody>
+      </p:sp>
+      <p:sp>
+        <p:nvSpPr>
+          <p:cNvPr id="16" name="PlaceHolder 2"/>
           <p:cNvSpPr>
             <a:spLocks noGrp="1"/>
           </p:cNvSpPr>
@@ -977,23 +1222,22 @@
           </a:prstGeom>
         </p:spPr>
         <p:txBody>
-          <a:bodyPr lIns="0" tIns="0" rIns="0" bIns="0">
+          <a:bodyPr lIns="0" rIns="0" tIns="0" bIns="0">
             <a:normAutofit/>
           </a:bodyPr>
-          <a:lstStyle/>
           <a:p>
-            <a:endParaRPr lang="en-US" sz="4630" b="0" strike="noStrike" spc="-1">
+            <a:endParaRPr b="0" lang="es-ES" sz="2800" spc="-1" strike="noStrike">
               <a:solidFill>
                 <a:srgbClr val="000000"/>
               </a:solidFill>
-              <a:latin typeface="Aptos"/>
+              <a:latin typeface="Arial"/>
             </a:endParaRPr>
           </a:p>
         </p:txBody>
       </p:sp>
       <p:sp>
         <p:nvSpPr>
-          <p:cNvPr id="11" name="PlaceHolder 3"/>
+          <p:cNvPr id="17" name="PlaceHolder 3"/>
           <p:cNvSpPr>
             <a:spLocks noGrp="1"/>
           </p:cNvSpPr>
@@ -1004,38 +1248,67 @@
         <p:spPr>
           <a:xfrm>
             <a:off x="7727760" y="5003640"/>
-            <a:ext cx="6639840" cy="12402000"/>
+            <a:ext cx="6639840" cy="5915520"/>
           </a:xfrm>
           <a:prstGeom prst="rect">
             <a:avLst/>
           </a:prstGeom>
         </p:spPr>
         <p:txBody>
-          <a:bodyPr lIns="0" tIns="0" rIns="0" bIns="0">
+          <a:bodyPr lIns="0" rIns="0" tIns="0" bIns="0">
             <a:normAutofit/>
           </a:bodyPr>
-          <a:lstStyle/>
           <a:p>
-            <a:endParaRPr lang="en-US" sz="4630" b="0" strike="noStrike" spc="-1">
+            <a:endParaRPr b="0" lang="es-ES" sz="2800" spc="-1" strike="noStrike">
               <a:solidFill>
                 <a:srgbClr val="000000"/>
               </a:solidFill>
-              <a:latin typeface="Aptos"/>
+              <a:latin typeface="Arial"/>
+            </a:endParaRPr>
+          </a:p>
+        </p:txBody>
+      </p:sp>
+      <p:sp>
+        <p:nvSpPr>
+          <p:cNvPr id="18" name="PlaceHolder 4"/>
+          <p:cNvSpPr>
+            <a:spLocks noGrp="1"/>
+          </p:cNvSpPr>
+          <p:nvPr>
+            <p:ph type="body"/>
+          </p:nvPr>
+        </p:nvSpPr>
+        <p:spPr>
+          <a:xfrm>
+            <a:off x="7727760" y="11481480"/>
+            <a:ext cx="6639840" cy="5915520"/>
+          </a:xfrm>
+          <a:prstGeom prst="rect">
+            <a:avLst/>
+          </a:prstGeom>
+        </p:spPr>
+        <p:txBody>
+          <a:bodyPr lIns="0" rIns="0" tIns="0" bIns="0">
+            <a:normAutofit/>
+          </a:bodyPr>
+          <a:p>
+            <a:endParaRPr b="0" lang="es-ES" sz="2800" spc="-1" strike="noStrike">
+              <a:solidFill>
+                <a:srgbClr val="000000"/>
+              </a:solidFill>
+              <a:latin typeface="Arial"/>
             </a:endParaRPr>
           </a:p>
         </p:txBody>
       </p:sp>
     </p:spTree>
   </p:cSld>
-  <p:clrMapOvr>
-    <a:masterClrMapping/>
-  </p:clrMapOvr>
 </p:sldLayout>
 </file>
 
-<file path=ppt/slideLayouts/slideLayout5.xml><?xml version="1.0" encoding="utf-8"?>
-<p:sldLayout xmlns:a="http://schemas.openxmlformats.org/drawingml/2006/main" xmlns:r="http://schemas.openxmlformats.org/officeDocument/2006/relationships" xmlns:p="http://schemas.openxmlformats.org/presentationml/2006/main" type="titleOnly" preserve="1">
-  <p:cSld name="Title Only">
+<file path=ppt/slideLayouts/slideLayout9.xml><?xml version="1.0" encoding="utf-8"?>
+<p:sldLayout xmlns:a="http://schemas.openxmlformats.org/drawingml/2006/main" xmlns:p="http://schemas.openxmlformats.org/presentationml/2006/main" xmlns:r="http://schemas.openxmlformats.org/officeDocument/2006/relationships" xmlns:p14="http://schemas.microsoft.com/office/powerpoint/2010/main" xmlns:p15="http://schemas.microsoft.com/office/powerpoint/2012/main" xmlns:mc="http://schemas.openxmlformats.org/markup-compatibility/2006" type="twoObjOverTx" preserve="1">
+  <p:cSld name="Title, 2 Content over Content">
     <p:spTree>
       <p:nvGrpSpPr>
         <p:cNvPr id="1" name=""/>
@@ -1052,7 +1325,7 @@
       </p:grpSpPr>
       <p:sp>
         <p:nvSpPr>
-          <p:cNvPr id="12" name="PlaceHolder 1"/>
+          <p:cNvPr id="19" name="PlaceHolder 1"/>
           <p:cNvSpPr>
             <a:spLocks noGrp="1"/>
           </p:cNvSpPr>
@@ -1063,146 +1336,29 @@
         <p:spPr>
           <a:xfrm>
             <a:off x="1134000" y="3499560"/>
-            <a:ext cx="12850920" cy="7444440"/>
+            <a:ext cx="12850560" cy="7444080"/>
           </a:xfrm>
           <a:prstGeom prst="rect">
             <a:avLst/>
           </a:prstGeom>
         </p:spPr>
         <p:txBody>
-          <a:bodyPr lIns="0" tIns="0" rIns="0" bIns="0" anchor="ctr">
+          <a:bodyPr lIns="0" rIns="0" tIns="0" bIns="0" anchor="ctr">
             <a:noAutofit/>
           </a:bodyPr>
-          <a:lstStyle/>
           <a:p>
-            <a:endParaRPr lang="en-US" sz="1800" b="0" strike="noStrike" spc="-1">
+            <a:endParaRPr b="0" lang="es-ES" sz="1800" spc="-1" strike="noStrike">
               <a:solidFill>
                 <a:srgbClr val="000000"/>
               </a:solidFill>
-              <a:latin typeface="Aptos"/>
-            </a:endParaRPr>
-          </a:p>
-        </p:txBody>
-      </p:sp>
-    </p:spTree>
-  </p:cSld>
-  <p:clrMapOvr>
-    <a:masterClrMapping/>
-  </p:clrMapOvr>
-</p:sldLayout>
-</file>
-
-<file path=ppt/slideLayouts/slideLayout6.xml><?xml version="1.0" encoding="utf-8"?>
-<p:sldLayout xmlns:a="http://schemas.openxmlformats.org/drawingml/2006/main" xmlns:r="http://schemas.openxmlformats.org/officeDocument/2006/relationships" xmlns:p="http://schemas.openxmlformats.org/presentationml/2006/main" type="objOnly" preserve="1">
-  <p:cSld name="Centered Text">
-    <p:spTree>
-      <p:nvGrpSpPr>
-        <p:cNvPr id="1" name=""/>
-        <p:cNvGrpSpPr/>
-        <p:nvPr/>
-      </p:nvGrpSpPr>
-      <p:grpSpPr>
-        <a:xfrm>
-          <a:off x="0" y="0"/>
-          <a:ext cx="0" cy="0"/>
-          <a:chOff x="0" y="0"/>
-          <a:chExt cx="0" cy="0"/>
-        </a:xfrm>
-      </p:grpSpPr>
-      <p:sp>
-        <p:nvSpPr>
-          <p:cNvPr id="13" name="PlaceHolder 1"/>
-          <p:cNvSpPr>
-            <a:spLocks noGrp="1"/>
-          </p:cNvSpPr>
-          <p:nvPr>
-            <p:ph type="subTitle"/>
-          </p:nvPr>
-        </p:nvSpPr>
-        <p:spPr>
-          <a:xfrm>
-            <a:off x="1134000" y="3499560"/>
-            <a:ext cx="12850920" cy="34509240"/>
-          </a:xfrm>
-          <a:prstGeom prst="rect">
-            <a:avLst/>
-          </a:prstGeom>
-        </p:spPr>
-        <p:txBody>
-          <a:bodyPr lIns="0" tIns="0" rIns="0" bIns="0" anchor="ctr">
-            <a:noAutofit/>
-          </a:bodyPr>
-          <a:lstStyle/>
-          <a:p>
-            <a:pPr algn="ctr"/>
-            <a:endParaRPr lang="es-ES" sz="3200" b="0" strike="noStrike" spc="-1">
               <a:latin typeface="Arial"/>
-            </a:endParaRPr>
-          </a:p>
-        </p:txBody>
-      </p:sp>
-    </p:spTree>
-  </p:cSld>
-  <p:clrMapOvr>
-    <a:masterClrMapping/>
-  </p:clrMapOvr>
-</p:sldLayout>
-</file>
-
-<file path=ppt/slideLayouts/slideLayout7.xml><?xml version="1.0" encoding="utf-8"?>
-<p:sldLayout xmlns:a="http://schemas.openxmlformats.org/drawingml/2006/main" xmlns:r="http://schemas.openxmlformats.org/officeDocument/2006/relationships" xmlns:p="http://schemas.openxmlformats.org/presentationml/2006/main" type="twoObjAndObj" preserve="1">
-  <p:cSld name="Title, 2 Content and Content">
-    <p:spTree>
-      <p:nvGrpSpPr>
-        <p:cNvPr id="1" name=""/>
-        <p:cNvGrpSpPr/>
-        <p:nvPr/>
-      </p:nvGrpSpPr>
-      <p:grpSpPr>
-        <a:xfrm>
-          <a:off x="0" y="0"/>
-          <a:ext cx="0" cy="0"/>
-          <a:chOff x="0" y="0"/>
-          <a:chExt cx="0" cy="0"/>
-        </a:xfrm>
-      </p:grpSpPr>
-      <p:sp>
-        <p:nvSpPr>
-          <p:cNvPr id="14" name="PlaceHolder 1"/>
-          <p:cNvSpPr>
-            <a:spLocks noGrp="1"/>
-          </p:cNvSpPr>
-          <p:nvPr>
-            <p:ph type="title"/>
-          </p:nvPr>
-        </p:nvSpPr>
-        <p:spPr>
-          <a:xfrm>
-            <a:off x="1134000" y="3499560"/>
-            <a:ext cx="12850920" cy="7444440"/>
-          </a:xfrm>
-          <a:prstGeom prst="rect">
-            <a:avLst/>
-          </a:prstGeom>
-        </p:spPr>
-        <p:txBody>
-          <a:bodyPr lIns="0" tIns="0" rIns="0" bIns="0" anchor="ctr">
-            <a:noAutofit/>
-          </a:bodyPr>
-          <a:lstStyle/>
-          <a:p>
-            <a:endParaRPr lang="en-US" sz="1800" b="0" strike="noStrike" spc="-1">
-              <a:solidFill>
-                <a:srgbClr val="000000"/>
-              </a:solidFill>
-              <a:latin typeface="Aptos"/>
             </a:endParaRPr>
           </a:p>
         </p:txBody>
       </p:sp>
       <p:sp>
         <p:nvSpPr>
-          <p:cNvPr id="15" name="PlaceHolder 2"/>
+          <p:cNvPr id="20" name="PlaceHolder 2"/>
           <p:cNvSpPr>
             <a:spLocks noGrp="1"/>
           </p:cNvSpPr>
@@ -1220,184 +1376,22 @@
           </a:prstGeom>
         </p:spPr>
         <p:txBody>
-          <a:bodyPr lIns="0" tIns="0" rIns="0" bIns="0">
+          <a:bodyPr lIns="0" rIns="0" tIns="0" bIns="0">
             <a:normAutofit/>
           </a:bodyPr>
-          <a:lstStyle/>
           <a:p>
-            <a:endParaRPr lang="en-US" sz="4630" b="0" strike="noStrike" spc="-1">
+            <a:endParaRPr b="0" lang="es-ES" sz="2800" spc="-1" strike="noStrike">
               <a:solidFill>
                 <a:srgbClr val="000000"/>
               </a:solidFill>
-              <a:latin typeface="Aptos"/>
+              <a:latin typeface="Arial"/>
             </a:endParaRPr>
           </a:p>
         </p:txBody>
       </p:sp>
       <p:sp>
         <p:nvSpPr>
-          <p:cNvPr id="16" name="PlaceHolder 3"/>
-          <p:cNvSpPr>
-            <a:spLocks noGrp="1"/>
-          </p:cNvSpPr>
-          <p:nvPr>
-            <p:ph type="body"/>
-          </p:nvPr>
-        </p:nvSpPr>
-        <p:spPr>
-          <a:xfrm>
-            <a:off x="7727760" y="5003640"/>
-            <a:ext cx="6639840" cy="12402000"/>
-          </a:xfrm>
-          <a:prstGeom prst="rect">
-            <a:avLst/>
-          </a:prstGeom>
-        </p:spPr>
-        <p:txBody>
-          <a:bodyPr lIns="0" tIns="0" rIns="0" bIns="0">
-            <a:normAutofit/>
-          </a:bodyPr>
-          <a:lstStyle/>
-          <a:p>
-            <a:endParaRPr lang="en-US" sz="4630" b="0" strike="noStrike" spc="-1">
-              <a:solidFill>
-                <a:srgbClr val="000000"/>
-              </a:solidFill>
-              <a:latin typeface="Aptos"/>
-            </a:endParaRPr>
-          </a:p>
-        </p:txBody>
-      </p:sp>
-      <p:sp>
-        <p:nvSpPr>
-          <p:cNvPr id="17" name="PlaceHolder 4"/>
-          <p:cNvSpPr>
-            <a:spLocks noGrp="1"/>
-          </p:cNvSpPr>
-          <p:nvPr>
-            <p:ph type="body"/>
-          </p:nvPr>
-        </p:nvSpPr>
-        <p:spPr>
-          <a:xfrm>
-            <a:off x="755640" y="11481480"/>
-            <a:ext cx="6639840" cy="5915520"/>
-          </a:xfrm>
-          <a:prstGeom prst="rect">
-            <a:avLst/>
-          </a:prstGeom>
-        </p:spPr>
-        <p:txBody>
-          <a:bodyPr lIns="0" tIns="0" rIns="0" bIns="0">
-            <a:normAutofit/>
-          </a:bodyPr>
-          <a:lstStyle/>
-          <a:p>
-            <a:endParaRPr lang="en-US" sz="4630" b="0" strike="noStrike" spc="-1">
-              <a:solidFill>
-                <a:srgbClr val="000000"/>
-              </a:solidFill>
-              <a:latin typeface="Aptos"/>
-            </a:endParaRPr>
-          </a:p>
-        </p:txBody>
-      </p:sp>
-    </p:spTree>
-  </p:cSld>
-  <p:clrMapOvr>
-    <a:masterClrMapping/>
-  </p:clrMapOvr>
-</p:sldLayout>
-</file>
-
-<file path=ppt/slideLayouts/slideLayout8.xml><?xml version="1.0" encoding="utf-8"?>
-<p:sldLayout xmlns:a="http://schemas.openxmlformats.org/drawingml/2006/main" xmlns:r="http://schemas.openxmlformats.org/officeDocument/2006/relationships" xmlns:p="http://schemas.openxmlformats.org/presentationml/2006/main" type="objAndTwoObj" preserve="1">
-  <p:cSld name="Title Content and 2 Content">
-    <p:spTree>
-      <p:nvGrpSpPr>
-        <p:cNvPr id="1" name=""/>
-        <p:cNvGrpSpPr/>
-        <p:nvPr/>
-      </p:nvGrpSpPr>
-      <p:grpSpPr>
-        <a:xfrm>
-          <a:off x="0" y="0"/>
-          <a:ext cx="0" cy="0"/>
-          <a:chOff x="0" y="0"/>
-          <a:chExt cx="0" cy="0"/>
-        </a:xfrm>
-      </p:grpSpPr>
-      <p:sp>
-        <p:nvSpPr>
-          <p:cNvPr id="18" name="PlaceHolder 1"/>
-          <p:cNvSpPr>
-            <a:spLocks noGrp="1"/>
-          </p:cNvSpPr>
-          <p:nvPr>
-            <p:ph type="title"/>
-          </p:nvPr>
-        </p:nvSpPr>
-        <p:spPr>
-          <a:xfrm>
-            <a:off x="1134000" y="3499560"/>
-            <a:ext cx="12850920" cy="7444440"/>
-          </a:xfrm>
-          <a:prstGeom prst="rect">
-            <a:avLst/>
-          </a:prstGeom>
-        </p:spPr>
-        <p:txBody>
-          <a:bodyPr lIns="0" tIns="0" rIns="0" bIns="0" anchor="ctr">
-            <a:noAutofit/>
-          </a:bodyPr>
-          <a:lstStyle/>
-          <a:p>
-            <a:endParaRPr lang="en-US" sz="1800" b="0" strike="noStrike" spc="-1">
-              <a:solidFill>
-                <a:srgbClr val="000000"/>
-              </a:solidFill>
-              <a:latin typeface="Aptos"/>
-            </a:endParaRPr>
-          </a:p>
-        </p:txBody>
-      </p:sp>
-      <p:sp>
-        <p:nvSpPr>
-          <p:cNvPr id="19" name="PlaceHolder 2"/>
-          <p:cNvSpPr>
-            <a:spLocks noGrp="1"/>
-          </p:cNvSpPr>
-          <p:nvPr>
-            <p:ph type="body"/>
-          </p:nvPr>
-        </p:nvSpPr>
-        <p:spPr>
-          <a:xfrm>
-            <a:off x="755640" y="5003640"/>
-            <a:ext cx="6639840" cy="12402000"/>
-          </a:xfrm>
-          <a:prstGeom prst="rect">
-            <a:avLst/>
-          </a:prstGeom>
-        </p:spPr>
-        <p:txBody>
-          <a:bodyPr lIns="0" tIns="0" rIns="0" bIns="0">
-            <a:normAutofit/>
-          </a:bodyPr>
-          <a:lstStyle/>
-          <a:p>
-            <a:endParaRPr lang="en-US" sz="4630" b="0" strike="noStrike" spc="-1">
-              <a:solidFill>
-                <a:srgbClr val="000000"/>
-              </a:solidFill>
-              <a:latin typeface="Aptos"/>
-            </a:endParaRPr>
-          </a:p>
-        </p:txBody>
-      </p:sp>
-      <p:sp>
-        <p:nvSpPr>
-          <p:cNvPr id="20" name="PlaceHolder 3"/>
+          <p:cNvPr id="21" name="PlaceHolder 3"/>
           <p:cNvSpPr>
             <a:spLocks noGrp="1"/>
           </p:cNvSpPr>
@@ -1415,184 +1409,22 @@
           </a:prstGeom>
         </p:spPr>
         <p:txBody>
-          <a:bodyPr lIns="0" tIns="0" rIns="0" bIns="0">
+          <a:bodyPr lIns="0" rIns="0" tIns="0" bIns="0">
             <a:normAutofit/>
           </a:bodyPr>
-          <a:lstStyle/>
           <a:p>
-            <a:endParaRPr lang="en-US" sz="4630" b="0" strike="noStrike" spc="-1">
+            <a:endParaRPr b="0" lang="es-ES" sz="2800" spc="-1" strike="noStrike">
               <a:solidFill>
                 <a:srgbClr val="000000"/>
               </a:solidFill>
-              <a:latin typeface="Aptos"/>
+              <a:latin typeface="Arial"/>
             </a:endParaRPr>
           </a:p>
         </p:txBody>
       </p:sp>
       <p:sp>
         <p:nvSpPr>
-          <p:cNvPr id="21" name="PlaceHolder 4"/>
-          <p:cNvSpPr>
-            <a:spLocks noGrp="1"/>
-          </p:cNvSpPr>
-          <p:nvPr>
-            <p:ph type="body"/>
-          </p:nvPr>
-        </p:nvSpPr>
-        <p:spPr>
-          <a:xfrm>
-            <a:off x="7727760" y="11481480"/>
-            <a:ext cx="6639840" cy="5915520"/>
-          </a:xfrm>
-          <a:prstGeom prst="rect">
-            <a:avLst/>
-          </a:prstGeom>
-        </p:spPr>
-        <p:txBody>
-          <a:bodyPr lIns="0" tIns="0" rIns="0" bIns="0">
-            <a:normAutofit/>
-          </a:bodyPr>
-          <a:lstStyle/>
-          <a:p>
-            <a:endParaRPr lang="en-US" sz="4630" b="0" strike="noStrike" spc="-1">
-              <a:solidFill>
-                <a:srgbClr val="000000"/>
-              </a:solidFill>
-              <a:latin typeface="Aptos"/>
-            </a:endParaRPr>
-          </a:p>
-        </p:txBody>
-      </p:sp>
-    </p:spTree>
-  </p:cSld>
-  <p:clrMapOvr>
-    <a:masterClrMapping/>
-  </p:clrMapOvr>
-</p:sldLayout>
-</file>
-
-<file path=ppt/slideLayouts/slideLayout9.xml><?xml version="1.0" encoding="utf-8"?>
-<p:sldLayout xmlns:a="http://schemas.openxmlformats.org/drawingml/2006/main" xmlns:r="http://schemas.openxmlformats.org/officeDocument/2006/relationships" xmlns:p="http://schemas.openxmlformats.org/presentationml/2006/main" type="twoObjOverTx" preserve="1">
-  <p:cSld name="Title, 2 Content over Content">
-    <p:spTree>
-      <p:nvGrpSpPr>
-        <p:cNvPr id="1" name=""/>
-        <p:cNvGrpSpPr/>
-        <p:nvPr/>
-      </p:nvGrpSpPr>
-      <p:grpSpPr>
-        <a:xfrm>
-          <a:off x="0" y="0"/>
-          <a:ext cx="0" cy="0"/>
-          <a:chOff x="0" y="0"/>
-          <a:chExt cx="0" cy="0"/>
-        </a:xfrm>
-      </p:grpSpPr>
-      <p:sp>
-        <p:nvSpPr>
-          <p:cNvPr id="22" name="PlaceHolder 1"/>
-          <p:cNvSpPr>
-            <a:spLocks noGrp="1"/>
-          </p:cNvSpPr>
-          <p:nvPr>
-            <p:ph type="title"/>
-          </p:nvPr>
-        </p:nvSpPr>
-        <p:spPr>
-          <a:xfrm>
-            <a:off x="1134000" y="3499560"/>
-            <a:ext cx="12850920" cy="7444440"/>
-          </a:xfrm>
-          <a:prstGeom prst="rect">
-            <a:avLst/>
-          </a:prstGeom>
-        </p:spPr>
-        <p:txBody>
-          <a:bodyPr lIns="0" tIns="0" rIns="0" bIns="0" anchor="ctr">
-            <a:noAutofit/>
-          </a:bodyPr>
-          <a:lstStyle/>
-          <a:p>
-            <a:endParaRPr lang="en-US" sz="1800" b="0" strike="noStrike" spc="-1">
-              <a:solidFill>
-                <a:srgbClr val="000000"/>
-              </a:solidFill>
-              <a:latin typeface="Aptos"/>
-            </a:endParaRPr>
-          </a:p>
-        </p:txBody>
-      </p:sp>
-      <p:sp>
-        <p:nvSpPr>
-          <p:cNvPr id="23" name="PlaceHolder 2"/>
-          <p:cNvSpPr>
-            <a:spLocks noGrp="1"/>
-          </p:cNvSpPr>
-          <p:nvPr>
-            <p:ph type="body"/>
-          </p:nvPr>
-        </p:nvSpPr>
-        <p:spPr>
-          <a:xfrm>
-            <a:off x="755640" y="5003640"/>
-            <a:ext cx="6639840" cy="5915520"/>
-          </a:xfrm>
-          <a:prstGeom prst="rect">
-            <a:avLst/>
-          </a:prstGeom>
-        </p:spPr>
-        <p:txBody>
-          <a:bodyPr lIns="0" tIns="0" rIns="0" bIns="0">
-            <a:normAutofit/>
-          </a:bodyPr>
-          <a:lstStyle/>
-          <a:p>
-            <a:endParaRPr lang="en-US" sz="4630" b="0" strike="noStrike" spc="-1">
-              <a:solidFill>
-                <a:srgbClr val="000000"/>
-              </a:solidFill>
-              <a:latin typeface="Aptos"/>
-            </a:endParaRPr>
-          </a:p>
-        </p:txBody>
-      </p:sp>
-      <p:sp>
-        <p:nvSpPr>
-          <p:cNvPr id="24" name="PlaceHolder 3"/>
-          <p:cNvSpPr>
-            <a:spLocks noGrp="1"/>
-          </p:cNvSpPr>
-          <p:nvPr>
-            <p:ph type="body"/>
-          </p:nvPr>
-        </p:nvSpPr>
-        <p:spPr>
-          <a:xfrm>
-            <a:off x="7727760" y="5003640"/>
-            <a:ext cx="6639840" cy="5915520"/>
-          </a:xfrm>
-          <a:prstGeom prst="rect">
-            <a:avLst/>
-          </a:prstGeom>
-        </p:spPr>
-        <p:txBody>
-          <a:bodyPr lIns="0" tIns="0" rIns="0" bIns="0">
-            <a:normAutofit/>
-          </a:bodyPr>
-          <a:lstStyle/>
-          <a:p>
-            <a:endParaRPr lang="en-US" sz="4630" b="0" strike="noStrike" spc="-1">
-              <a:solidFill>
-                <a:srgbClr val="000000"/>
-              </a:solidFill>
-              <a:latin typeface="Aptos"/>
-            </a:endParaRPr>
-          </a:p>
-        </p:txBody>
-      </p:sp>
-      <p:sp>
-        <p:nvSpPr>
-          <p:cNvPr id="25" name="PlaceHolder 4"/>
+          <p:cNvPr id="22" name="PlaceHolder 4"/>
           <p:cNvSpPr>
             <a:spLocks noGrp="1"/>
           </p:cNvSpPr>
@@ -1610,37 +1442,32 @@
           </a:prstGeom>
         </p:spPr>
         <p:txBody>
-          <a:bodyPr lIns="0" tIns="0" rIns="0" bIns="0">
+          <a:bodyPr lIns="0" rIns="0" tIns="0" bIns="0">
             <a:normAutofit/>
           </a:bodyPr>
-          <a:lstStyle/>
           <a:p>
-            <a:endParaRPr lang="en-US" sz="4630" b="0" strike="noStrike" spc="-1">
+            <a:endParaRPr b="0" lang="es-ES" sz="2800" spc="-1" strike="noStrike">
               <a:solidFill>
                 <a:srgbClr val="000000"/>
               </a:solidFill>
-              <a:latin typeface="Aptos"/>
+              <a:latin typeface="Arial"/>
             </a:endParaRPr>
           </a:p>
         </p:txBody>
       </p:sp>
     </p:spTree>
   </p:cSld>
-  <p:clrMapOvr>
-    <a:masterClrMapping/>
-  </p:clrMapOvr>
 </p:sldLayout>
 </file>
 
 <file path=ppt/slideMasters/slideMaster1.xml><?xml version="1.0" encoding="utf-8"?>
-<p:sldMaster xmlns:a="http://schemas.openxmlformats.org/drawingml/2006/main" xmlns:r="http://schemas.openxmlformats.org/officeDocument/2006/relationships" xmlns:p="http://schemas.openxmlformats.org/presentationml/2006/main">
+<p:sldMaster xmlns:a="http://schemas.openxmlformats.org/drawingml/2006/main" xmlns:p="http://schemas.openxmlformats.org/presentationml/2006/main" xmlns:r="http://schemas.openxmlformats.org/officeDocument/2006/relationships" xmlns:p14="http://schemas.microsoft.com/office/powerpoint/2010/main" xmlns:p15="http://schemas.microsoft.com/office/powerpoint/2012/main" xmlns:mc="http://schemas.openxmlformats.org/markup-compatibility/2006">
   <p:cSld>
     <p:bg>
       <p:bgPr>
         <a:solidFill>
-          <a:srgbClr val="FFFFFF"/>
+          <a:srgbClr val="ffffff"/>
         </a:solidFill>
-        <a:effectLst/>
       </p:bgPr>
     </p:bg>
     <p:spTree>
@@ -1659,7 +1486,7 @@
       </p:grpSpPr>
       <p:sp>
         <p:nvSpPr>
-          <p:cNvPr id="5" name="PlaceHolder 1"/>
+          <p:cNvPr id="0" name="PlaceHolder 1"/>
           <p:cNvSpPr>
             <a:spLocks noGrp="1"/>
           </p:cNvSpPr>
@@ -1670,165 +1497,39 @@
         <p:spPr>
           <a:xfrm>
             <a:off x="1134000" y="3499560"/>
-            <a:ext cx="12850920" cy="7444440"/>
+            <a:ext cx="12850560" cy="7444080"/>
           </a:xfrm>
           <a:prstGeom prst="rect">
             <a:avLst/>
           </a:prstGeom>
         </p:spPr>
         <p:txBody>
-          <a:bodyPr anchor="b">
+          <a:bodyPr lIns="0" rIns="0" tIns="0" bIns="0" anchor="ctr">
             <a:noAutofit/>
           </a:bodyPr>
-          <a:lstStyle/>
           <a:p>
-            <a:pPr algn="ctr">
-              <a:lnSpc>
-                <a:spcPct val="90000"/>
-              </a:lnSpc>
-            </a:pPr>
+            <a:pPr algn="ctr"/>
             <a:r>
-              <a:rPr lang="es-ES" sz="9920" b="0" strike="noStrike" spc="-1">
+              <a:rPr b="0" lang="es-ES" sz="4400" spc="-1" strike="noStrike">
                 <a:solidFill>
                   <a:srgbClr val="000000"/>
                 </a:solidFill>
-                <a:latin typeface="Aptos Display"/>
+                <a:latin typeface="Arial"/>
               </a:rPr>
-              <a:t>Haga clic para modificar el estilo de título del patrón</a:t>
+              <a:t>Pulse para editar el formato del texto de título</a:t>
             </a:r>
-            <a:endParaRPr lang="en-US" sz="9920" b="0" strike="noStrike" spc="-1">
+            <a:endParaRPr b="0" lang="es-ES" sz="4400" spc="-1" strike="noStrike">
               <a:solidFill>
                 <a:srgbClr val="000000"/>
               </a:solidFill>
-              <a:latin typeface="Aptos"/>
+              <a:latin typeface="Arial"/>
             </a:endParaRPr>
           </a:p>
         </p:txBody>
       </p:sp>
       <p:sp>
         <p:nvSpPr>
-          <p:cNvPr id="6" name="PlaceHolder 2"/>
-          <p:cNvSpPr>
-            <a:spLocks noGrp="1"/>
-          </p:cNvSpPr>
-          <p:nvPr>
-            <p:ph type="dt"/>
-          </p:nvPr>
-        </p:nvSpPr>
-        <p:spPr>
-          <a:xfrm>
-            <a:off x="1039320" y="19819440"/>
-            <a:ext cx="3401640" cy="1137960"/>
-          </a:xfrm>
-          <a:prstGeom prst="rect">
-            <a:avLst/>
-          </a:prstGeom>
-        </p:spPr>
-        <p:txBody>
-          <a:bodyPr anchor="ctr">
-            <a:noAutofit/>
-          </a:bodyPr>
-          <a:lstStyle/>
-          <a:p>
-            <a:pPr>
-              <a:lnSpc>
-                <a:spcPct val="100000"/>
-              </a:lnSpc>
-            </a:pPr>
-            <a:fld id="{9F1400D3-169B-4160-ACBD-F5964F8D1484}" type="datetime">
-              <a:rPr lang="es-ES_tradnl" sz="1990" b="0" strike="noStrike" spc="-1">
-                <a:solidFill>
-                  <a:srgbClr val="787878"/>
-                </a:solidFill>
-                <a:latin typeface="Aptos"/>
-              </a:rPr>
-              <a:t>01/02/2026</a:t>
-            </a:fld>
-            <a:endParaRPr lang="es-ES" sz="1990" b="0" strike="noStrike" spc="-1">
-              <a:latin typeface="Times New Roman"/>
-            </a:endParaRPr>
-          </a:p>
-        </p:txBody>
-      </p:sp>
-      <p:sp>
-        <p:nvSpPr>
-          <p:cNvPr id="2" name="PlaceHolder 3"/>
-          <p:cNvSpPr>
-            <a:spLocks noGrp="1"/>
-          </p:cNvSpPr>
-          <p:nvPr>
-            <p:ph type="ftr"/>
-          </p:nvPr>
-        </p:nvSpPr>
-        <p:spPr>
-          <a:xfrm>
-            <a:off x="5008320" y="19819440"/>
-            <a:ext cx="5102280" cy="1137960"/>
-          </a:xfrm>
-          <a:prstGeom prst="rect">
-            <a:avLst/>
-          </a:prstGeom>
-        </p:spPr>
-        <p:txBody>
-          <a:bodyPr anchor="ctr">
-            <a:noAutofit/>
-          </a:bodyPr>
-          <a:lstStyle/>
-          <a:p>
-            <a:endParaRPr lang="es-ES" sz="2400" b="0" strike="noStrike" spc="-1">
-              <a:latin typeface="Times New Roman"/>
-            </a:endParaRPr>
-          </a:p>
-        </p:txBody>
-      </p:sp>
-      <p:sp>
-        <p:nvSpPr>
-          <p:cNvPr id="3" name="PlaceHolder 4"/>
-          <p:cNvSpPr>
-            <a:spLocks noGrp="1"/>
-          </p:cNvSpPr>
-          <p:nvPr>
-            <p:ph type="sldNum"/>
-          </p:nvPr>
-        </p:nvSpPr>
-        <p:spPr>
-          <a:xfrm>
-            <a:off x="10677960" y="19819440"/>
-            <a:ext cx="3401640" cy="1137960"/>
-          </a:xfrm>
-          <a:prstGeom prst="rect">
-            <a:avLst/>
-          </a:prstGeom>
-        </p:spPr>
-        <p:txBody>
-          <a:bodyPr anchor="ctr">
-            <a:noAutofit/>
-          </a:bodyPr>
-          <a:lstStyle/>
-          <a:p>
-            <a:pPr algn="r">
-              <a:lnSpc>
-                <a:spcPct val="100000"/>
-              </a:lnSpc>
-            </a:pPr>
-            <a:fld id="{C6142E2D-8A08-4215-B761-B0383F04405C}" type="slidenum">
-              <a:rPr lang="es-ES_tradnl" sz="1990" b="0" strike="noStrike" spc="-1">
-                <a:solidFill>
-                  <a:srgbClr val="787878"/>
-                </a:solidFill>
-                <a:latin typeface="Aptos"/>
-              </a:rPr>
-              <a:t>‹Nº›</a:t>
-            </a:fld>
-            <a:endParaRPr lang="es-ES" sz="1990" b="0" strike="noStrike" spc="-1">
-              <a:latin typeface="Times New Roman"/>
-            </a:endParaRPr>
-          </a:p>
-        </p:txBody>
-      </p:sp>
-      <p:sp>
-        <p:nvSpPr>
-          <p:cNvPr id="4" name="PlaceHolder 5"/>
+          <p:cNvPr id="1" name="PlaceHolder 2"/>
           <p:cNvSpPr>
             <a:spLocks noGrp="1"/>
           </p:cNvSpPr>
@@ -1846,10 +1547,9 @@
           </a:prstGeom>
         </p:spPr>
         <p:txBody>
-          <a:bodyPr lIns="0" tIns="0" rIns="0" bIns="0">
+          <a:bodyPr lIns="0" rIns="0" tIns="0" bIns="0">
             <a:normAutofit/>
           </a:bodyPr>
-          <a:lstStyle/>
           <a:p>
             <a:pPr marL="432000" indent="-324000">
               <a:spcBef>
@@ -1863,17 +1563,23 @@
               <a:buChar char=""/>
             </a:pPr>
             <a:r>
-              <a:rPr lang="en-US" sz="4630" b="0" strike="noStrike" spc="-1">
+              <a:rPr b="0" lang="es-ES" sz="2800" spc="-1" strike="noStrike">
                 <a:solidFill>
                   <a:srgbClr val="000000"/>
                 </a:solidFill>
-                <a:latin typeface="Aptos"/>
+                <a:latin typeface="Arial"/>
               </a:rPr>
               <a:t>Pulse para editar el formato de texto del esquema</a:t>
             </a:r>
+            <a:endParaRPr b="0" lang="es-ES" sz="2800" spc="-1" strike="noStrike">
+              <a:solidFill>
+                <a:srgbClr val="000000"/>
+              </a:solidFill>
+              <a:latin typeface="Arial"/>
+            </a:endParaRPr>
           </a:p>
           <a:p>
-            <a:pPr marL="864000" lvl="1" indent="-324000">
+            <a:pPr lvl="1" marL="864000" indent="-324000">
               <a:spcBef>
                 <a:spcPts val="1134"/>
               </a:spcBef>
@@ -1885,17 +1591,23 @@
               <a:buChar char=""/>
             </a:pPr>
             <a:r>
-              <a:rPr lang="en-US" sz="3309" b="0" strike="noStrike" spc="-1">
+              <a:rPr b="0" lang="es-ES" sz="2000" spc="-1" strike="noStrike">
                 <a:solidFill>
                   <a:srgbClr val="000000"/>
                 </a:solidFill>
-                <a:latin typeface="Aptos"/>
+                <a:latin typeface="Arial"/>
               </a:rPr>
               <a:t>Segundo nivel del esquema</a:t>
             </a:r>
+            <a:endParaRPr b="0" lang="es-ES" sz="2000" spc="-1" strike="noStrike">
+              <a:solidFill>
+                <a:srgbClr val="000000"/>
+              </a:solidFill>
+              <a:latin typeface="Arial"/>
+            </a:endParaRPr>
           </a:p>
           <a:p>
-            <a:pPr marL="1296000" lvl="2" indent="-288000">
+            <a:pPr lvl="2" marL="1296000" indent="-288000">
               <a:spcBef>
                 <a:spcPts val="850"/>
               </a:spcBef>
@@ -1907,17 +1619,23 @@
               <a:buChar char=""/>
             </a:pPr>
             <a:r>
-              <a:rPr lang="en-US" sz="2980" b="0" strike="noStrike" spc="-1">
+              <a:rPr b="0" lang="es-ES" sz="1800" spc="-1" strike="noStrike">
                 <a:solidFill>
                   <a:srgbClr val="000000"/>
                 </a:solidFill>
-                <a:latin typeface="Aptos"/>
+                <a:latin typeface="Arial"/>
               </a:rPr>
               <a:t>Tercer nivel del esquema</a:t>
             </a:r>
+            <a:endParaRPr b="0" lang="es-ES" sz="1800" spc="-1" strike="noStrike">
+              <a:solidFill>
+                <a:srgbClr val="000000"/>
+              </a:solidFill>
+              <a:latin typeface="Arial"/>
+            </a:endParaRPr>
           </a:p>
           <a:p>
-            <a:pPr marL="1728000" lvl="3" indent="-216000">
+            <a:pPr lvl="3" marL="1728000" indent="-216000">
               <a:spcBef>
                 <a:spcPts val="567"/>
               </a:spcBef>
@@ -1929,17 +1647,23 @@
               <a:buChar char=""/>
             </a:pPr>
             <a:r>
-              <a:rPr lang="en-US" sz="2980" b="0" strike="noStrike" spc="-1">
+              <a:rPr b="0" lang="es-ES" sz="1800" spc="-1" strike="noStrike">
                 <a:solidFill>
                   <a:srgbClr val="000000"/>
                 </a:solidFill>
-                <a:latin typeface="Aptos"/>
+                <a:latin typeface="Arial"/>
               </a:rPr>
               <a:t>Cuarto nivel del esquema</a:t>
             </a:r>
+            <a:endParaRPr b="0" lang="es-ES" sz="1800" spc="-1" strike="noStrike">
+              <a:solidFill>
+                <a:srgbClr val="000000"/>
+              </a:solidFill>
+              <a:latin typeface="Arial"/>
+            </a:endParaRPr>
           </a:p>
           <a:p>
-            <a:pPr marL="2160000" lvl="4" indent="-216000">
+            <a:pPr lvl="4" marL="2160000" indent="-216000">
               <a:spcBef>
                 <a:spcPts val="283"/>
               </a:spcBef>
@@ -1951,17 +1675,23 @@
               <a:buChar char=""/>
             </a:pPr>
             <a:r>
-              <a:rPr lang="en-US" sz="2000" b="0" strike="noStrike" spc="-1">
+              <a:rPr b="0" lang="es-ES" sz="2000" spc="-1" strike="noStrike">
                 <a:solidFill>
                   <a:srgbClr val="000000"/>
                 </a:solidFill>
-                <a:latin typeface="Aptos"/>
+                <a:latin typeface="Arial"/>
               </a:rPr>
               <a:t>Quinto nivel del esquema</a:t>
             </a:r>
+            <a:endParaRPr b="0" lang="es-ES" sz="2000" spc="-1" strike="noStrike">
+              <a:solidFill>
+                <a:srgbClr val="000000"/>
+              </a:solidFill>
+              <a:latin typeface="Arial"/>
+            </a:endParaRPr>
           </a:p>
           <a:p>
-            <a:pPr marL="2592000" lvl="5" indent="-216000">
+            <a:pPr lvl="5" marL="2592000" indent="-216000">
               <a:spcBef>
                 <a:spcPts val="283"/>
               </a:spcBef>
@@ -1973,17 +1703,23 @@
               <a:buChar char=""/>
             </a:pPr>
             <a:r>
-              <a:rPr lang="en-US" sz="2000" b="0" strike="noStrike" spc="-1">
+              <a:rPr b="0" lang="es-ES" sz="2000" spc="-1" strike="noStrike">
                 <a:solidFill>
                   <a:srgbClr val="000000"/>
                 </a:solidFill>
-                <a:latin typeface="Aptos"/>
+                <a:latin typeface="Arial"/>
               </a:rPr>
               <a:t>Sexto nivel del esquema</a:t>
             </a:r>
+            <a:endParaRPr b="0" lang="es-ES" sz="2000" spc="-1" strike="noStrike">
+              <a:solidFill>
+                <a:srgbClr val="000000"/>
+              </a:solidFill>
+              <a:latin typeface="Arial"/>
+            </a:endParaRPr>
           </a:p>
           <a:p>
-            <a:pPr marL="3024000" lvl="6" indent="-216000">
+            <a:pPr lvl="6" marL="3024000" indent="-216000">
               <a:spcBef>
                 <a:spcPts val="283"/>
               </a:spcBef>
@@ -1995,336 +1731,61 @@
               <a:buChar char=""/>
             </a:pPr>
             <a:r>
-              <a:rPr lang="en-US" sz="2000" b="0" strike="noStrike" spc="-1">
+              <a:rPr b="0" lang="es-ES" sz="2000" spc="-1" strike="noStrike">
                 <a:solidFill>
                   <a:srgbClr val="000000"/>
                 </a:solidFill>
-                <a:latin typeface="Aptos"/>
+                <a:latin typeface="Arial"/>
               </a:rPr>
               <a:t>Séptimo nivel del esquema</a:t>
             </a:r>
+            <a:endParaRPr b="0" lang="es-ES" sz="2000" spc="-1" strike="noStrike">
+              <a:solidFill>
+                <a:srgbClr val="000000"/>
+              </a:solidFill>
+              <a:latin typeface="Arial"/>
+            </a:endParaRPr>
           </a:p>
         </p:txBody>
       </p:sp>
     </p:spTree>
   </p:cSld>
-  <p:clrMap bg1="lt1" tx1="dk1" bg2="lt2" tx2="dk2" accent1="accent1" accent2="accent2" accent3="accent3" accent4="accent4" accent5="accent5" accent6="accent6" hlink="hlink" folHlink="folHlink"/>
+  <p:clrMap bg1="lt1" bg2="lt2" tx1="dk1" tx2="dk2" accent1="accent1" accent2="accent2" accent3="accent3" accent4="accent4" accent5="accent5" accent6="accent6" hlink="hlink" folHlink="folHlink"/>
   <p:sldLayoutIdLst>
-    <p:sldLayoutId id="2147483649" r:id="rId1"/>
-    <p:sldLayoutId id="2147483650" r:id="rId2"/>
-    <p:sldLayoutId id="2147483651" r:id="rId3"/>
-    <p:sldLayoutId id="2147483652" r:id="rId4"/>
-    <p:sldLayoutId id="2147483653" r:id="rId5"/>
-    <p:sldLayoutId id="2147483654" r:id="rId6"/>
-    <p:sldLayoutId id="2147483655" r:id="rId7"/>
-    <p:sldLayoutId id="2147483656" r:id="rId8"/>
-    <p:sldLayoutId id="2147483657" r:id="rId9"/>
-    <p:sldLayoutId id="2147483658" r:id="rId10"/>
-    <p:sldLayoutId id="2147483659" r:id="rId11"/>
-    <p:sldLayoutId id="2147483660" r:id="rId12"/>
+    <p:sldLayoutId id="2147483649" r:id="rId2"/>
+    <p:sldLayoutId id="2147483650" r:id="rId3"/>
+    <p:sldLayoutId id="2147483651" r:id="rId4"/>
+    <p:sldLayoutId id="2147483652" r:id="rId5"/>
+    <p:sldLayoutId id="2147483653" r:id="rId6"/>
+    <p:sldLayoutId id="2147483654" r:id="rId7"/>
+    <p:sldLayoutId id="2147483655" r:id="rId8"/>
+    <p:sldLayoutId id="2147483656" r:id="rId9"/>
+    <p:sldLayoutId id="2147483657" r:id="rId10"/>
+    <p:sldLayoutId id="2147483658" r:id="rId11"/>
+    <p:sldLayoutId id="2147483659" r:id="rId12"/>
+    <p:sldLayoutId id="2147483660" r:id="rId13"/>
   </p:sldLayoutIdLst>
-  <p:txStyles>
-    <p:titleStyle>
-      <a:lvl1pPr algn="l" defTabSz="914400" rtl="0" eaLnBrk="1" latinLnBrk="0" hangingPunct="1">
-        <a:lnSpc>
-          <a:spcPct val="90000"/>
-        </a:lnSpc>
-        <a:spcBef>
-          <a:spcPct val="0"/>
-        </a:spcBef>
-        <a:buNone/>
-        <a:defRPr sz="4400" kern="1200">
-          <a:solidFill>
-            <a:schemeClr val="tx1"/>
-          </a:solidFill>
-          <a:latin typeface="+mj-lt"/>
-          <a:ea typeface="+mj-ea"/>
-          <a:cs typeface="+mj-cs"/>
-        </a:defRPr>
-      </a:lvl1pPr>
-    </p:titleStyle>
-    <p:bodyStyle>
-      <a:lvl1pPr marL="228600" indent="-228600" algn="l" defTabSz="914400" rtl="0" eaLnBrk="1" latinLnBrk="0" hangingPunct="1">
-        <a:lnSpc>
-          <a:spcPct val="90000"/>
-        </a:lnSpc>
-        <a:spcBef>
-          <a:spcPts val="1000"/>
-        </a:spcBef>
-        <a:buFont typeface="Arial" panose="020B0604020202020204" pitchFamily="34" charset="0"/>
-        <a:buChar char="•"/>
-        <a:defRPr sz="2800" kern="1200">
-          <a:solidFill>
-            <a:schemeClr val="tx1"/>
-          </a:solidFill>
-          <a:latin typeface="+mn-lt"/>
-          <a:ea typeface="+mn-ea"/>
-          <a:cs typeface="+mn-cs"/>
-        </a:defRPr>
-      </a:lvl1pPr>
-      <a:lvl2pPr marL="685800" indent="-228600" algn="l" defTabSz="914400" rtl="0" eaLnBrk="1" latinLnBrk="0" hangingPunct="1">
-        <a:lnSpc>
-          <a:spcPct val="90000"/>
-        </a:lnSpc>
-        <a:spcBef>
-          <a:spcPts val="500"/>
-        </a:spcBef>
-        <a:buFont typeface="Arial" panose="020B0604020202020204" pitchFamily="34" charset="0"/>
-        <a:buChar char="•"/>
-        <a:defRPr sz="2400" kern="1200">
-          <a:solidFill>
-            <a:schemeClr val="tx1"/>
-          </a:solidFill>
-          <a:latin typeface="+mn-lt"/>
-          <a:ea typeface="+mn-ea"/>
-          <a:cs typeface="+mn-cs"/>
-        </a:defRPr>
-      </a:lvl2pPr>
-      <a:lvl3pPr marL="1143000" indent="-228600" algn="l" defTabSz="914400" rtl="0" eaLnBrk="1" latinLnBrk="0" hangingPunct="1">
-        <a:lnSpc>
-          <a:spcPct val="90000"/>
-        </a:lnSpc>
-        <a:spcBef>
-          <a:spcPts val="500"/>
-        </a:spcBef>
-        <a:buFont typeface="Arial" panose="020B0604020202020204" pitchFamily="34" charset="0"/>
-        <a:buChar char="•"/>
-        <a:defRPr sz="2000" kern="1200">
-          <a:solidFill>
-            <a:schemeClr val="tx1"/>
-          </a:solidFill>
-          <a:latin typeface="+mn-lt"/>
-          <a:ea typeface="+mn-ea"/>
-          <a:cs typeface="+mn-cs"/>
-        </a:defRPr>
-      </a:lvl3pPr>
-      <a:lvl4pPr marL="1600200" indent="-228600" algn="l" defTabSz="914400" rtl="0" eaLnBrk="1" latinLnBrk="0" hangingPunct="1">
-        <a:lnSpc>
-          <a:spcPct val="90000"/>
-        </a:lnSpc>
-        <a:spcBef>
-          <a:spcPts val="500"/>
-        </a:spcBef>
-        <a:buFont typeface="Arial" panose="020B0604020202020204" pitchFamily="34" charset="0"/>
-        <a:buChar char="•"/>
-        <a:defRPr sz="1800" kern="1200">
-          <a:solidFill>
-            <a:schemeClr val="tx1"/>
-          </a:solidFill>
-          <a:latin typeface="+mn-lt"/>
-          <a:ea typeface="+mn-ea"/>
-          <a:cs typeface="+mn-cs"/>
-        </a:defRPr>
-      </a:lvl4pPr>
-      <a:lvl5pPr marL="2057400" indent="-228600" algn="l" defTabSz="914400" rtl="0" eaLnBrk="1" latinLnBrk="0" hangingPunct="1">
-        <a:lnSpc>
-          <a:spcPct val="90000"/>
-        </a:lnSpc>
-        <a:spcBef>
-          <a:spcPts val="500"/>
-        </a:spcBef>
-        <a:buFont typeface="Arial" panose="020B0604020202020204" pitchFamily="34" charset="0"/>
-        <a:buChar char="•"/>
-        <a:defRPr sz="1800" kern="1200">
-          <a:solidFill>
-            <a:schemeClr val="tx1"/>
-          </a:solidFill>
-          <a:latin typeface="+mn-lt"/>
-          <a:ea typeface="+mn-ea"/>
-          <a:cs typeface="+mn-cs"/>
-        </a:defRPr>
-      </a:lvl5pPr>
-      <a:lvl6pPr marL="2514600" indent="-228600" algn="l" defTabSz="914400" rtl="0" eaLnBrk="1" latinLnBrk="0" hangingPunct="1">
-        <a:lnSpc>
-          <a:spcPct val="90000"/>
-        </a:lnSpc>
-        <a:spcBef>
-          <a:spcPts val="500"/>
-        </a:spcBef>
-        <a:buFont typeface="Arial" panose="020B0604020202020204" pitchFamily="34" charset="0"/>
-        <a:buChar char="•"/>
-        <a:defRPr sz="1800" kern="1200">
-          <a:solidFill>
-            <a:schemeClr val="tx1"/>
-          </a:solidFill>
-          <a:latin typeface="+mn-lt"/>
-          <a:ea typeface="+mn-ea"/>
-          <a:cs typeface="+mn-cs"/>
-        </a:defRPr>
-      </a:lvl6pPr>
-      <a:lvl7pPr marL="2971800" indent="-228600" algn="l" defTabSz="914400" rtl="0" eaLnBrk="1" latinLnBrk="0" hangingPunct="1">
-        <a:lnSpc>
-          <a:spcPct val="90000"/>
-        </a:lnSpc>
-        <a:spcBef>
-          <a:spcPts val="500"/>
-        </a:spcBef>
-        <a:buFont typeface="Arial" panose="020B0604020202020204" pitchFamily="34" charset="0"/>
-        <a:buChar char="•"/>
-        <a:defRPr sz="1800" kern="1200">
-          <a:solidFill>
-            <a:schemeClr val="tx1"/>
-          </a:solidFill>
-          <a:latin typeface="+mn-lt"/>
-          <a:ea typeface="+mn-ea"/>
-          <a:cs typeface="+mn-cs"/>
-        </a:defRPr>
-      </a:lvl7pPr>
-      <a:lvl8pPr marL="3429000" indent="-228600" algn="l" defTabSz="914400" rtl="0" eaLnBrk="1" latinLnBrk="0" hangingPunct="1">
-        <a:lnSpc>
-          <a:spcPct val="90000"/>
-        </a:lnSpc>
-        <a:spcBef>
-          <a:spcPts val="500"/>
-        </a:spcBef>
-        <a:buFont typeface="Arial" panose="020B0604020202020204" pitchFamily="34" charset="0"/>
-        <a:buChar char="•"/>
-        <a:defRPr sz="1800" kern="1200">
-          <a:solidFill>
-            <a:schemeClr val="tx1"/>
-          </a:solidFill>
-          <a:latin typeface="+mn-lt"/>
-          <a:ea typeface="+mn-ea"/>
-          <a:cs typeface="+mn-cs"/>
-        </a:defRPr>
-      </a:lvl8pPr>
-      <a:lvl9pPr marL="3886200" indent="-228600" algn="l" defTabSz="914400" rtl="0" eaLnBrk="1" latinLnBrk="0" hangingPunct="1">
-        <a:lnSpc>
-          <a:spcPct val="90000"/>
-        </a:lnSpc>
-        <a:spcBef>
-          <a:spcPts val="500"/>
-        </a:spcBef>
-        <a:buFont typeface="Arial" panose="020B0604020202020204" pitchFamily="34" charset="0"/>
-        <a:buChar char="•"/>
-        <a:defRPr sz="1800" kern="1200">
-          <a:solidFill>
-            <a:schemeClr val="tx1"/>
-          </a:solidFill>
-          <a:latin typeface="+mn-lt"/>
-          <a:ea typeface="+mn-ea"/>
-          <a:cs typeface="+mn-cs"/>
-        </a:defRPr>
-      </a:lvl9pPr>
-    </p:bodyStyle>
-    <p:otherStyle>
-      <a:defPPr>
-        <a:defRPr lang="es-ES"/>
-      </a:defPPr>
-      <a:lvl1pPr marL="0" algn="l" defTabSz="914400" rtl="0" eaLnBrk="1" latinLnBrk="0" hangingPunct="1">
-        <a:defRPr sz="1800" kern="1200">
-          <a:solidFill>
-            <a:schemeClr val="tx1"/>
-          </a:solidFill>
-          <a:latin typeface="+mn-lt"/>
-          <a:ea typeface="+mn-ea"/>
-          <a:cs typeface="+mn-cs"/>
-        </a:defRPr>
-      </a:lvl1pPr>
-      <a:lvl2pPr marL="457200" algn="l" defTabSz="914400" rtl="0" eaLnBrk="1" latinLnBrk="0" hangingPunct="1">
-        <a:defRPr sz="1800" kern="1200">
-          <a:solidFill>
-            <a:schemeClr val="tx1"/>
-          </a:solidFill>
-          <a:latin typeface="+mn-lt"/>
-          <a:ea typeface="+mn-ea"/>
-          <a:cs typeface="+mn-cs"/>
-        </a:defRPr>
-      </a:lvl2pPr>
-      <a:lvl3pPr marL="914400" algn="l" defTabSz="914400" rtl="0" eaLnBrk="1" latinLnBrk="0" hangingPunct="1">
-        <a:defRPr sz="1800" kern="1200">
-          <a:solidFill>
-            <a:schemeClr val="tx1"/>
-          </a:solidFill>
-          <a:latin typeface="+mn-lt"/>
-          <a:ea typeface="+mn-ea"/>
-          <a:cs typeface="+mn-cs"/>
-        </a:defRPr>
-      </a:lvl3pPr>
-      <a:lvl4pPr marL="1371600" algn="l" defTabSz="914400" rtl="0" eaLnBrk="1" latinLnBrk="0" hangingPunct="1">
-        <a:defRPr sz="1800" kern="1200">
-          <a:solidFill>
-            <a:schemeClr val="tx1"/>
-          </a:solidFill>
-          <a:latin typeface="+mn-lt"/>
-          <a:ea typeface="+mn-ea"/>
-          <a:cs typeface="+mn-cs"/>
-        </a:defRPr>
-      </a:lvl4pPr>
-      <a:lvl5pPr marL="1828800" algn="l" defTabSz="914400" rtl="0" eaLnBrk="1" latinLnBrk="0" hangingPunct="1">
-        <a:defRPr sz="1800" kern="1200">
-          <a:solidFill>
-            <a:schemeClr val="tx1"/>
-          </a:solidFill>
-          <a:latin typeface="+mn-lt"/>
-          <a:ea typeface="+mn-ea"/>
-          <a:cs typeface="+mn-cs"/>
-        </a:defRPr>
-      </a:lvl5pPr>
-      <a:lvl6pPr marL="2286000" algn="l" defTabSz="914400" rtl="0" eaLnBrk="1" latinLnBrk="0" hangingPunct="1">
-        <a:defRPr sz="1800" kern="1200">
-          <a:solidFill>
-            <a:schemeClr val="tx1"/>
-          </a:solidFill>
-          <a:latin typeface="+mn-lt"/>
-          <a:ea typeface="+mn-ea"/>
-          <a:cs typeface="+mn-cs"/>
-        </a:defRPr>
-      </a:lvl6pPr>
-      <a:lvl7pPr marL="2743200" algn="l" defTabSz="914400" rtl="0" eaLnBrk="1" latinLnBrk="0" hangingPunct="1">
-        <a:defRPr sz="1800" kern="1200">
-          <a:solidFill>
-            <a:schemeClr val="tx1"/>
-          </a:solidFill>
-          <a:latin typeface="+mn-lt"/>
-          <a:ea typeface="+mn-ea"/>
-          <a:cs typeface="+mn-cs"/>
-        </a:defRPr>
-      </a:lvl7pPr>
-      <a:lvl8pPr marL="3200400" algn="l" defTabSz="914400" rtl="0" eaLnBrk="1" latinLnBrk="0" hangingPunct="1">
-        <a:defRPr sz="1800" kern="1200">
-          <a:solidFill>
-            <a:schemeClr val="tx1"/>
-          </a:solidFill>
-          <a:latin typeface="+mn-lt"/>
-          <a:ea typeface="+mn-ea"/>
-          <a:cs typeface="+mn-cs"/>
-        </a:defRPr>
-      </a:lvl8pPr>
-      <a:lvl9pPr marL="3657600" algn="l" defTabSz="914400" rtl="0" eaLnBrk="1" latinLnBrk="0" hangingPunct="1">
-        <a:defRPr sz="1800" kern="1200">
-          <a:solidFill>
-            <a:schemeClr val="tx1"/>
-          </a:solidFill>
-          <a:latin typeface="+mn-lt"/>
-          <a:ea typeface="+mn-ea"/>
-          <a:cs typeface="+mn-cs"/>
-        </a:defRPr>
-      </a:lvl9pPr>
-    </p:otherStyle>
-  </p:txStyles>
 </p:sldMaster>
 </file>
 
 <file path=ppt/slides/slide1.xml><?xml version="1.0" encoding="utf-8"?>
-<p:sld xmlns:a="http://schemas.openxmlformats.org/drawingml/2006/main" xmlns:r="http://schemas.openxmlformats.org/officeDocument/2006/relationships" xmlns:p="http://schemas.openxmlformats.org/presentationml/2006/main">
+<p:sld xmlns:a="http://schemas.openxmlformats.org/drawingml/2006/main" xmlns:p="http://schemas.openxmlformats.org/presentationml/2006/main" xmlns:r="http://schemas.openxmlformats.org/officeDocument/2006/relationships" xmlns:p14="http://schemas.microsoft.com/office/powerpoint/2010/main" xmlns:p15="http://schemas.microsoft.com/office/powerpoint/2012/main" xmlns:mc="http://schemas.openxmlformats.org/markup-compatibility/2006">
   <p:cSld>
     <p:bg>
       <p:bgPr>
         <a:gradFill rotWithShape="0">
           <a:gsLst>
             <a:gs pos="0">
-              <a:srgbClr val="FFFFFF"/>
+              <a:srgbClr val="ffffff"/>
             </a:gs>
             <a:gs pos="100000">
-              <a:srgbClr val="59C2E3">
+              <a:srgbClr val="59c2e3">
                 <a:alpha val="25098"/>
               </a:srgbClr>
             </a:gs>
           </a:gsLst>
           <a:lin ang="2700000"/>
         </a:gradFill>
-        <a:effectLst/>
       </p:bgPr>
     </p:bg>
     <p:spTree>
@@ -2343,28 +1804,28 @@
       </p:grpSpPr>
       <p:grpSp>
         <p:nvGrpSpPr>
-          <p:cNvPr id="41" name="Group 1"/>
+          <p:cNvPr id="38" name="Group 1"/>
           <p:cNvGrpSpPr/>
           <p:nvPr/>
         </p:nvGrpSpPr>
         <p:grpSpPr>
           <a:xfrm>
             <a:off x="288000" y="3024000"/>
-            <a:ext cx="14668560" cy="1504800"/>
+            <a:ext cx="14668200" cy="1504440"/>
             <a:chOff x="288000" y="3024000"/>
-            <a:chExt cx="14668560" cy="1504800"/>
+            <a:chExt cx="14668200" cy="1504440"/>
           </a:xfrm>
         </p:grpSpPr>
         <p:sp>
           <p:nvSpPr>
-            <p:cNvPr id="42" name="CustomShape 2"/>
+            <p:cNvPr id="39" name="CustomShape 2"/>
             <p:cNvSpPr/>
             <p:nvPr/>
           </p:nvSpPr>
           <p:spPr>
             <a:xfrm>
               <a:off x="288000" y="3340800"/>
-              <a:ext cx="14668560" cy="1188000"/>
+              <a:ext cx="14668200" cy="1187640"/>
             </a:xfrm>
             <a:prstGeom prst="roundRect">
               <a:avLst>
@@ -2397,10 +1858,9 @@
             <a:fontRef idx="minor"/>
           </p:style>
           <p:txBody>
-            <a:bodyPr lIns="90000" tIns="360000" rIns="90000" bIns="45000">
+            <a:bodyPr lIns="90000" rIns="90000" tIns="360000" bIns="45000">
               <a:noAutofit/>
             </a:bodyPr>
-            <a:lstStyle/>
             <a:p>
               <a:pPr algn="just">
                 <a:lnSpc>
@@ -2408,15 +1868,16 @@
                 </a:lnSpc>
               </a:pPr>
               <a:r>
-                <a:rPr lang="es-ES_tradnl" sz="1800" b="0" i="1" strike="noStrike" spc="-1">
+                <a:rPr b="0" i="1" lang="es-ES_tradnl" sz="1800" spc="-1" strike="noStrike">
                   <a:solidFill>
                     <a:srgbClr val="000000"/>
                   </a:solidFill>
                   <a:latin typeface="Aptos"/>
+                  <a:ea typeface="DejaVu Sans"/>
                 </a:rPr>
                 <a:t>La obesidad, o acumulación excesiva de grasa corporal, causa graves problemas de salud y enfermedades crónicas. Como caso de estudio, se han estudiado las variantes genéticas en diferentes miembros de la familia Simpson para establecer la posible relación de esta patología con alteraciones a nivel genético.</a:t>
               </a:r>
-              <a:endParaRPr lang="es-ES" sz="1800" b="0" strike="noStrike" spc="-1">
+              <a:endParaRPr b="0" lang="es-ES" sz="1800" spc="-1" strike="noStrike">
                 <a:latin typeface="Arial"/>
               </a:endParaRPr>
             </a:p>
@@ -2424,14 +1885,14 @@
         </p:sp>
         <p:sp>
           <p:nvSpPr>
-            <p:cNvPr id="43" name="CustomShape 3"/>
+            <p:cNvPr id="40" name="CustomShape 3"/>
             <p:cNvSpPr/>
             <p:nvPr/>
           </p:nvSpPr>
           <p:spPr>
             <a:xfrm>
               <a:off x="581040" y="3024000"/>
-              <a:ext cx="5837760" cy="632520"/>
+              <a:ext cx="5837400" cy="632160"/>
             </a:xfrm>
             <a:prstGeom prst="roundRect">
               <a:avLst>
@@ -2441,10 +1902,10 @@
             <a:gradFill rotWithShape="0">
               <a:gsLst>
                 <a:gs pos="0">
-                  <a:srgbClr val="59C2E3"/>
+                  <a:srgbClr val="59c2e3"/>
                 </a:gs>
                 <a:gs pos="100000">
-                  <a:srgbClr val="4196C9"/>
+                  <a:srgbClr val="4196c9"/>
                 </a:gs>
               </a:gsLst>
               <a:lin ang="2700000"/>
@@ -2466,10 +1927,9 @@
             <a:fontRef idx="minor"/>
           </p:style>
           <p:txBody>
-            <a:bodyPr lIns="90000" tIns="45000" rIns="90000" bIns="45000" anchor="ctr">
+            <a:bodyPr lIns="90000" rIns="90000" tIns="45000" bIns="45000" anchor="ctr">
               <a:noAutofit/>
             </a:bodyPr>
-            <a:lstStyle/>
             <a:p>
               <a:pPr algn="ctr">
                 <a:lnSpc>
@@ -2477,15 +1937,16 @@
                 </a:lnSpc>
               </a:pPr>
               <a:r>
-                <a:rPr lang="es-ES_tradnl" sz="2800" b="1" strike="noStrike" spc="-1">
+                <a:rPr b="1" lang="es-ES_tradnl" sz="2800" spc="-1" strike="noStrike">
                   <a:solidFill>
-                    <a:srgbClr val="FFFFFF"/>
+                    <a:srgbClr val="ffffff"/>
                   </a:solidFill>
                   <a:latin typeface="Aptos"/>
+                  <a:ea typeface="DejaVu Sans"/>
                 </a:rPr>
                 <a:t>INTRODUCCIÓN</a:t>
               </a:r>
-              <a:endParaRPr lang="es-ES" sz="2800" b="0" strike="noStrike" spc="-1">
+              <a:endParaRPr b="0" lang="es-ES" sz="2800" spc="-1" strike="noStrike">
                 <a:latin typeface="Arial"/>
               </a:endParaRPr>
             </a:p>
@@ -2494,28 +1955,28 @@
       </p:grpSp>
       <p:grpSp>
         <p:nvGrpSpPr>
-          <p:cNvPr id="44" name="Group 4"/>
+          <p:cNvPr id="41" name="Group 4"/>
           <p:cNvGrpSpPr/>
           <p:nvPr/>
         </p:nvGrpSpPr>
         <p:grpSpPr>
           <a:xfrm>
             <a:off x="207720" y="4630680"/>
-            <a:ext cx="14668560" cy="1921320"/>
+            <a:ext cx="14668200" cy="1920960"/>
             <a:chOff x="207720" y="4630680"/>
-            <a:chExt cx="14668560" cy="1921320"/>
+            <a:chExt cx="14668200" cy="1920960"/>
           </a:xfrm>
         </p:grpSpPr>
         <p:sp>
           <p:nvSpPr>
-            <p:cNvPr id="45" name="CustomShape 5"/>
+            <p:cNvPr id="42" name="CustomShape 5"/>
             <p:cNvSpPr/>
             <p:nvPr/>
           </p:nvSpPr>
           <p:spPr>
             <a:xfrm>
               <a:off x="207720" y="4875840"/>
-              <a:ext cx="14668560" cy="1676160"/>
+              <a:ext cx="14668200" cy="1675800"/>
             </a:xfrm>
             <a:prstGeom prst="roundRect">
               <a:avLst>
@@ -2548,10 +2009,9 @@
             <a:fontRef idx="minor"/>
           </p:style>
           <p:txBody>
-            <a:bodyPr lIns="90000" tIns="360000" rIns="90000" bIns="45000">
+            <a:bodyPr lIns="90000" rIns="90000" tIns="360000" bIns="45000">
               <a:noAutofit/>
             </a:bodyPr>
-            <a:lstStyle/>
             <a:p>
               <a:pPr algn="just">
                 <a:lnSpc>
@@ -2559,215 +2019,236 @@
                 </a:lnSpc>
               </a:pPr>
               <a:r>
-                <a:rPr lang="es-ES_tradnl" sz="1700" b="0" i="1" strike="noStrike" spc="-1">
+                <a:rPr b="0" i="1" lang="es-ES_tradnl" sz="1700" spc="-1" strike="noStrike">
                   <a:solidFill>
                     <a:srgbClr val="000000"/>
                   </a:solidFill>
                   <a:latin typeface="Aptos"/>
+                  <a:ea typeface="DejaVu Sans"/>
                 </a:rPr>
                 <a:t>Se analizaron tres variantes de Abraham y Maggie Simpson con </a:t>
               </a:r>
               <a:r>
-                <a:rPr lang="es-ES_tradnl" sz="1700" b="0" i="1" u="sng" strike="noStrike" spc="-1">
+                <a:rPr b="0" i="1" lang="es-ES_tradnl" sz="1700" spc="-1" strike="noStrike" u="sng">
                   <a:solidFill>
                     <a:srgbClr val="467886"/>
                   </a:solidFill>
                   <a:uFillTx/>
                   <a:latin typeface="Aptos"/>
-                  <a:hlinkClick r:id="rId2"/>
+                  <a:ea typeface="DejaVu Sans"/>
+                  <a:hlinkClick r:id="rId1"/>
                 </a:rPr>
                 <a:t>VEP</a:t>
               </a:r>
               <a:r>
-                <a:rPr lang="es-ES_tradnl" sz="1700" b="0" i="1" strike="noStrike" spc="-1">
+                <a:rPr b="0" i="1" lang="es-ES_tradnl" sz="1700" spc="-1" strike="noStrike">
                   <a:solidFill>
                     <a:srgbClr val="000000"/>
                   </a:solidFill>
                   <a:latin typeface="Aptos"/>
+                  <a:ea typeface="DejaVu Sans"/>
                 </a:rPr>
                 <a:t>. Se exploraron la prevalencia en la población con </a:t>
               </a:r>
               <a:r>
-                <a:rPr lang="es-ES_tradnl" sz="1700" b="0" i="1" u="sng" strike="noStrike" spc="-1">
+                <a:rPr b="0" i="1" lang="es-ES_tradnl" sz="1700" spc="-1" strike="noStrike" u="sng">
                   <a:solidFill>
                     <a:srgbClr val="467886"/>
                   </a:solidFill>
                   <a:uFillTx/>
                   <a:latin typeface="Aptos"/>
-                  <a:hlinkClick r:id="rId3"/>
+                  <a:ea typeface="DejaVu Sans"/>
+                  <a:hlinkClick r:id="rId2"/>
                 </a:rPr>
                 <a:t>gnomAD</a:t>
               </a:r>
               <a:r>
-                <a:rPr lang="es-ES_tradnl" sz="1700" b="0" i="1" strike="noStrike" spc="-1">
+                <a:rPr b="0" i="1" lang="es-ES_tradnl" sz="1700" spc="-1" strike="noStrike">
                   <a:solidFill>
                     <a:srgbClr val="000000"/>
                   </a:solidFill>
                   <a:latin typeface="Aptos"/>
+                  <a:ea typeface="DejaVu Sans"/>
                 </a:rPr>
                 <a:t>; y su patogenicidad con </a:t>
               </a:r>
               <a:r>
-                <a:rPr lang="es-ES_tradnl" sz="1700" b="0" i="1" u="sng" strike="noStrike" spc="-1">
+                <a:rPr b="0" i="1" lang="es-ES_tradnl" sz="1700" spc="-1" strike="noStrike" u="sng">
                   <a:solidFill>
                     <a:srgbClr val="467886"/>
                   </a:solidFill>
                   <a:uFillTx/>
                   <a:latin typeface="Aptos"/>
-                  <a:hlinkClick r:id="rId4"/>
+                  <a:ea typeface="DejaVu Sans"/>
+                  <a:hlinkClick r:id="rId3"/>
                 </a:rPr>
                 <a:t>SIFT</a:t>
               </a:r>
               <a:r>
-                <a:rPr lang="es-ES_tradnl" sz="1700" b="0" i="1" strike="noStrike" spc="-1">
+                <a:rPr b="0" i="1" lang="es-ES_tradnl" sz="1700" spc="-1" strike="noStrike">
                   <a:solidFill>
                     <a:srgbClr val="000000"/>
                   </a:solidFill>
                   <a:latin typeface="Aptos"/>
+                  <a:ea typeface="DejaVu Sans"/>
                 </a:rPr>
                 <a:t>, </a:t>
               </a:r>
               <a:r>
-                <a:rPr lang="es-ES_tradnl" sz="1700" b="0" i="1" u="sng" strike="noStrike" spc="-1">
+                <a:rPr b="0" i="1" lang="es-ES_tradnl" sz="1700" spc="-1" strike="noStrike" u="sng">
                   <a:solidFill>
                     <a:srgbClr val="467886"/>
                   </a:solidFill>
                   <a:uFillTx/>
                   <a:latin typeface="Aptos"/>
-                  <a:hlinkClick r:id="rId5"/>
+                  <a:ea typeface="DejaVu Sans"/>
+                  <a:hlinkClick r:id="rId4"/>
                 </a:rPr>
                 <a:t>PolyPhen</a:t>
               </a:r>
               <a:r>
-                <a:rPr lang="es-ES_tradnl" sz="1700" b="0" i="1" strike="noStrike" spc="-1">
+                <a:rPr b="0" i="1" lang="es-ES_tradnl" sz="1700" spc="-1" strike="noStrike">
                   <a:solidFill>
                     <a:srgbClr val="000000"/>
                   </a:solidFill>
                   <a:latin typeface="Aptos"/>
+                  <a:ea typeface="DejaVu Sans"/>
                 </a:rPr>
                 <a:t>, y </a:t>
               </a:r>
               <a:r>
-                <a:rPr lang="es-ES_tradnl" sz="1700" b="0" i="1" u="sng" strike="noStrike" spc="-1">
+                <a:rPr b="0" i="1" lang="es-ES_tradnl" sz="1700" spc="-1" strike="noStrike" u="sng">
                   <a:solidFill>
                     <a:srgbClr val="467886"/>
                   </a:solidFill>
                   <a:uFillTx/>
                   <a:latin typeface="Aptos"/>
-                  <a:hlinkClick r:id="rId6"/>
+                  <a:ea typeface="DejaVu Sans"/>
+                  <a:hlinkClick r:id="rId5"/>
                 </a:rPr>
                 <a:t>OMIM</a:t>
               </a:r>
               <a:r>
-                <a:rPr lang="es-ES_tradnl" sz="1700" b="0" i="1" strike="noStrike" spc="-1">
+                <a:rPr b="0" i="1" lang="es-ES_tradnl" sz="1700" spc="-1" strike="noStrike">
                   <a:solidFill>
                     <a:srgbClr val="000000"/>
                   </a:solidFill>
                   <a:latin typeface="Aptos"/>
+                  <a:ea typeface="DejaVu Sans"/>
                 </a:rPr>
                 <a:t>. Las variantes “missense” se analizaron con </a:t>
               </a:r>
               <a:r>
-                <a:rPr lang="es-ES_tradnl" sz="1700" b="0" i="1" u="sng" strike="noStrike" spc="-1">
+                <a:rPr b="0" i="1" lang="es-ES_tradnl" sz="1700" spc="-1" strike="noStrike" u="sng">
                   <a:solidFill>
                     <a:srgbClr val="467886"/>
                   </a:solidFill>
                   <a:uFillTx/>
                   <a:latin typeface="Aptos"/>
-                  <a:hlinkClick r:id="rId7"/>
+                  <a:ea typeface="DejaVu Sans"/>
+                  <a:hlinkClick r:id="rId6"/>
                 </a:rPr>
                 <a:t>CLUSTAL omega</a:t>
               </a:r>
               <a:r>
-                <a:rPr lang="es-ES_tradnl" sz="1700" b="0" i="1" strike="noStrike" spc="-1">
+                <a:rPr b="0" i="1" lang="es-ES_tradnl" sz="1700" spc="-1" strike="noStrike">
                   <a:solidFill>
                     <a:srgbClr val="000000"/>
                   </a:solidFill>
                   <a:latin typeface="Aptos"/>
+                  <a:ea typeface="DejaVu Sans"/>
                 </a:rPr>
                 <a:t> para detectar si la región afectada estaba conservada. Las variantes “frameshift” se analizaron con </a:t>
               </a:r>
               <a:r>
-                <a:rPr lang="es-ES_tradnl" sz="1700" b="0" i="1" u="sng" strike="noStrike" spc="-1">
+                <a:rPr b="0" i="1" lang="es-ES_tradnl" sz="1700" spc="-1" strike="noStrike" u="sng">
                   <a:solidFill>
                     <a:srgbClr val="467886"/>
                   </a:solidFill>
                   <a:uFillTx/>
                   <a:latin typeface="Aptos"/>
-                  <a:hlinkClick r:id="rId8"/>
+                  <a:ea typeface="DejaVu Sans"/>
+                  <a:hlinkClick r:id="rId7"/>
                 </a:rPr>
                 <a:t>Mutalyzer</a:t>
               </a:r>
               <a:r>
-                <a:rPr lang="es-ES_tradnl" sz="1700" b="0" i="1" strike="noStrike" spc="-1">
+                <a:rPr b="0" i="1" lang="es-ES_tradnl" sz="1700" spc="-1" strike="noStrike">
                   <a:solidFill>
                     <a:srgbClr val="000000"/>
                   </a:solidFill>
                   <a:latin typeface="Aptos"/>
+                  <a:ea typeface="DejaVu Sans"/>
                 </a:rPr>
                 <a:t> para comprobar la estructura del la proteína mutada. Consultamos </a:t>
               </a:r>
               <a:r>
-                <a:rPr lang="es-ES_tradnl" sz="1700" b="0" i="1" u="sng" strike="noStrike" spc="-1">
+                <a:rPr b="0" i="1" lang="es-ES_tradnl" sz="1700" spc="-1" strike="noStrike" u="sng">
                   <a:solidFill>
                     <a:srgbClr val="467886"/>
                   </a:solidFill>
                   <a:uFillTx/>
                   <a:latin typeface="Aptos"/>
-                  <a:hlinkClick r:id="rId9"/>
+                  <a:ea typeface="DejaVu Sans"/>
+                  <a:hlinkClick r:id="rId8"/>
                 </a:rPr>
                 <a:t>UniProt</a:t>
               </a:r>
               <a:r>
-                <a:rPr lang="es-ES_tradnl" sz="1700" b="0" i="1" strike="noStrike" spc="-1">
+                <a:rPr b="0" i="1" lang="es-ES_tradnl" sz="1700" spc="-1" strike="noStrike">
                   <a:solidFill>
                     <a:srgbClr val="000000"/>
                   </a:solidFill>
                   <a:latin typeface="Aptos"/>
+                  <a:ea typeface="DejaVu Sans"/>
                 </a:rPr>
                 <a:t> e </a:t>
               </a:r>
               <a:r>
-                <a:rPr lang="es-ES_tradnl" sz="1700" b="0" i="1" u="sng" strike="noStrike" spc="-1">
+                <a:rPr b="0" i="1" lang="es-ES_tradnl" sz="1700" spc="-1" strike="noStrike" u="sng">
                   <a:solidFill>
                     <a:srgbClr val="467886"/>
                   </a:solidFill>
                   <a:uFillTx/>
                   <a:latin typeface="Aptos"/>
-                  <a:hlinkClick r:id="rId10"/>
+                  <a:ea typeface="DejaVu Sans"/>
+                  <a:hlinkClick r:id="rId9"/>
                 </a:rPr>
                 <a:t>InterPro</a:t>
               </a:r>
               <a:r>
-                <a:rPr lang="es-ES_tradnl" sz="1700" b="0" i="1" strike="noStrike" spc="-1">
+                <a:rPr b="0" i="1" lang="es-ES_tradnl" sz="1700" spc="-1" strike="noStrike">
                   <a:solidFill>
                     <a:srgbClr val="000000"/>
                   </a:solidFill>
                   <a:latin typeface="Aptos"/>
+                  <a:ea typeface="DejaVu Sans"/>
                 </a:rPr>
                 <a:t> para comprobar los dominios proteicos afectados en las variantes, y las entradas en </a:t>
               </a:r>
               <a:r>
-                <a:rPr lang="es-ES_tradnl" sz="1700" b="0" i="1" u="sng" strike="noStrike" spc="-1">
+                <a:rPr b="0" i="1" lang="es-ES_tradnl" sz="1700" spc="-1" strike="noStrike" u="sng">
                   <a:solidFill>
                     <a:srgbClr val="467886"/>
                   </a:solidFill>
                   <a:uFillTx/>
                   <a:latin typeface="Aptos"/>
-                  <a:hlinkClick r:id="rId11"/>
+                  <a:ea typeface="DejaVu Sans"/>
+                  <a:hlinkClick r:id="rId10"/>
                 </a:rPr>
                 <a:t>KEGG</a:t>
               </a:r>
               <a:r>
-                <a:rPr lang="es-ES_tradnl" sz="1700" b="0" i="1" strike="noStrike" spc="-1">
+                <a:rPr b="0" i="1" lang="es-ES_tradnl" sz="1700" spc="-1" strike="noStrike">
                   <a:solidFill>
                     <a:srgbClr val="000000"/>
                   </a:solidFill>
                   <a:latin typeface="Aptos"/>
+                  <a:ea typeface="DejaVu Sans"/>
                 </a:rPr>
                 <a:t> de los genes afectados para comprobar en qué rutas metabólicas está implicados.</a:t>
               </a:r>
-              <a:endParaRPr lang="es-ES" sz="1700" b="0" strike="noStrike" spc="-1">
+              <a:endParaRPr b="0" lang="es-ES" sz="1700" spc="-1" strike="noStrike">
                 <a:latin typeface="Arial"/>
               </a:endParaRPr>
             </a:p>
@@ -2775,14 +2256,14 @@
         </p:sp>
         <p:sp>
           <p:nvSpPr>
-            <p:cNvPr id="46" name="CustomShape 6"/>
+            <p:cNvPr id="43" name="CustomShape 6"/>
             <p:cNvSpPr/>
             <p:nvPr/>
           </p:nvSpPr>
           <p:spPr>
             <a:xfrm>
               <a:off x="500760" y="4630680"/>
-              <a:ext cx="5837760" cy="632520"/>
+              <a:ext cx="5837400" cy="632160"/>
             </a:xfrm>
             <a:prstGeom prst="roundRect">
               <a:avLst>
@@ -2792,10 +2273,10 @@
             <a:gradFill rotWithShape="0">
               <a:gsLst>
                 <a:gs pos="0">
-                  <a:srgbClr val="59C2E3"/>
+                  <a:srgbClr val="59c2e3"/>
                 </a:gs>
                 <a:gs pos="100000">
-                  <a:srgbClr val="4196C9"/>
+                  <a:srgbClr val="4196c9"/>
                 </a:gs>
               </a:gsLst>
               <a:lin ang="2700000"/>
@@ -2817,10 +2298,9 @@
             <a:fontRef idx="minor"/>
           </p:style>
           <p:txBody>
-            <a:bodyPr lIns="90000" tIns="45000" rIns="90000" bIns="45000" anchor="ctr">
+            <a:bodyPr lIns="90000" rIns="90000" tIns="45000" bIns="45000" anchor="ctr">
               <a:noAutofit/>
             </a:bodyPr>
-            <a:lstStyle/>
             <a:p>
               <a:pPr algn="ctr">
                 <a:lnSpc>
@@ -2828,15 +2308,16 @@
                 </a:lnSpc>
               </a:pPr>
               <a:r>
-                <a:rPr lang="es-ES_tradnl" sz="2800" b="1" strike="noStrike" spc="-1">
+                <a:rPr b="1" lang="es-ES_tradnl" sz="2800" spc="-1" strike="noStrike">
                   <a:solidFill>
-                    <a:srgbClr val="FFFFFF"/>
+                    <a:srgbClr val="ffffff"/>
                   </a:solidFill>
                   <a:latin typeface="Aptos"/>
+                  <a:ea typeface="DejaVu Sans"/>
                 </a:rPr>
                 <a:t>METODOLOGÍA</a:t>
               </a:r>
-              <a:endParaRPr lang="es-ES" sz="2800" b="0" strike="noStrike" spc="-1">
+              <a:endParaRPr b="0" lang="es-ES" sz="2800" spc="-1" strike="noStrike">
                 <a:latin typeface="Arial"/>
               </a:endParaRPr>
             </a:p>
@@ -2845,28 +2326,28 @@
       </p:grpSp>
       <p:grpSp>
         <p:nvGrpSpPr>
-          <p:cNvPr id="47" name="Group 7"/>
+          <p:cNvPr id="44" name="Group 7"/>
           <p:cNvGrpSpPr/>
           <p:nvPr/>
         </p:nvGrpSpPr>
         <p:grpSpPr>
           <a:xfrm>
             <a:off x="144000" y="6552000"/>
-            <a:ext cx="14668560" cy="11018520"/>
+            <a:ext cx="14668200" cy="11018160"/>
             <a:chOff x="144000" y="6552000"/>
-            <a:chExt cx="14668560" cy="11018520"/>
+            <a:chExt cx="14668200" cy="11018160"/>
           </a:xfrm>
         </p:grpSpPr>
         <p:sp>
           <p:nvSpPr>
-            <p:cNvPr id="48" name="CustomShape 8"/>
+            <p:cNvPr id="45" name="CustomShape 8"/>
             <p:cNvSpPr/>
             <p:nvPr/>
           </p:nvSpPr>
           <p:spPr>
             <a:xfrm>
               <a:off x="144000" y="6908400"/>
-              <a:ext cx="14668560" cy="10662120"/>
+              <a:ext cx="14668200" cy="10661760"/>
             </a:xfrm>
             <a:prstGeom prst="roundRect">
               <a:avLst>
@@ -2901,14 +2382,14 @@
         </p:sp>
         <p:sp>
           <p:nvSpPr>
-            <p:cNvPr id="49" name="CustomShape 9"/>
+            <p:cNvPr id="46" name="CustomShape 9"/>
             <p:cNvSpPr/>
             <p:nvPr/>
           </p:nvSpPr>
           <p:spPr>
             <a:xfrm>
               <a:off x="437040" y="6552000"/>
-              <a:ext cx="5837760" cy="712440"/>
+              <a:ext cx="5837400" cy="712080"/>
             </a:xfrm>
             <a:prstGeom prst="roundRect">
               <a:avLst>
@@ -2918,10 +2399,10 @@
             <a:gradFill rotWithShape="0">
               <a:gsLst>
                 <a:gs pos="0">
-                  <a:srgbClr val="59C2E3"/>
+                  <a:srgbClr val="59c2e3"/>
                 </a:gs>
                 <a:gs pos="100000">
-                  <a:srgbClr val="4196C9"/>
+                  <a:srgbClr val="4196c9"/>
                 </a:gs>
               </a:gsLst>
               <a:lin ang="2700000"/>
@@ -2943,10 +2424,9 @@
             <a:fontRef idx="minor"/>
           </p:style>
           <p:txBody>
-            <a:bodyPr lIns="90000" tIns="45000" rIns="90000" bIns="45000" anchor="ctr">
+            <a:bodyPr lIns="90000" rIns="90000" tIns="45000" bIns="45000" anchor="ctr">
               <a:noAutofit/>
             </a:bodyPr>
-            <a:lstStyle/>
             <a:p>
               <a:pPr algn="ctr">
                 <a:lnSpc>
@@ -2954,15 +2434,16 @@
                 </a:lnSpc>
               </a:pPr>
               <a:r>
-                <a:rPr lang="es-ES_tradnl" sz="2800" b="1" strike="noStrike" spc="-1">
+                <a:rPr b="1" lang="es-ES_tradnl" sz="2800" spc="-1" strike="noStrike">
                   <a:solidFill>
-                    <a:srgbClr val="FFFFFF"/>
+                    <a:srgbClr val="ffffff"/>
                   </a:solidFill>
                   <a:latin typeface="Aptos"/>
+                  <a:ea typeface="DejaVu Sans"/>
                 </a:rPr>
                 <a:t>RESULTADOS</a:t>
               </a:r>
-              <a:endParaRPr lang="es-ES" sz="2800" b="0" strike="noStrike" spc="-1">
+              <a:endParaRPr b="0" lang="es-ES" sz="2800" spc="-1" strike="noStrike">
                 <a:latin typeface="Arial"/>
               </a:endParaRPr>
             </a:p>
@@ -2971,18 +2452,18 @@
       </p:grpSp>
       <p:pic>
         <p:nvPicPr>
-          <p:cNvPr id="50" name="Picture 4"/>
+          <p:cNvPr id="47" name="Picture 4" descr=""/>
           <p:cNvPicPr/>
           <p:nvPr/>
         </p:nvPicPr>
         <p:blipFill>
-          <a:blip r:embed="rId12"/>
+          <a:blip r:embed="rId11"/>
           <a:stretch/>
         </p:blipFill>
         <p:spPr>
           <a:xfrm>
             <a:off x="12550680" y="-95400"/>
-            <a:ext cx="2325600" cy="1400400"/>
+            <a:ext cx="2325240" cy="1400040"/>
           </a:xfrm>
           <a:prstGeom prst="rect">
             <a:avLst/>
@@ -2994,32 +2475,32 @@
       </p:pic>
       <p:grpSp>
         <p:nvGrpSpPr>
-          <p:cNvPr id="51" name="Group 10"/>
+          <p:cNvPr id="48" name="Group 10"/>
           <p:cNvGrpSpPr/>
           <p:nvPr/>
         </p:nvGrpSpPr>
         <p:grpSpPr>
           <a:xfrm>
             <a:off x="0" y="-5760"/>
-            <a:ext cx="3396960" cy="2302560"/>
+            <a:ext cx="3396600" cy="2302200"/>
             <a:chOff x="0" y="-5760"/>
-            <a:chExt cx="3396960" cy="2302560"/>
+            <a:chExt cx="3396600" cy="2302200"/>
           </a:xfrm>
         </p:grpSpPr>
         <p:pic>
           <p:nvPicPr>
-            <p:cNvPr id="52" name="Imagen 4"/>
+            <p:cNvPr id="49" name="Imagen 4" descr=""/>
             <p:cNvPicPr/>
             <p:nvPr/>
           </p:nvPicPr>
           <p:blipFill>
-            <a:blip r:embed="rId13"/>
+            <a:blip r:embed="rId12"/>
             <a:stretch/>
           </p:blipFill>
           <p:spPr>
             <a:xfrm>
               <a:off x="0" y="-5760"/>
-              <a:ext cx="3396960" cy="2302560"/>
+              <a:ext cx="3396600" cy="2302200"/>
             </a:xfrm>
             <a:prstGeom prst="rect">
               <a:avLst/>
@@ -3031,14 +2512,14 @@
         </p:pic>
         <p:sp>
           <p:nvSpPr>
-            <p:cNvPr id="53" name="CustomShape 11"/>
+            <p:cNvPr id="50" name="CustomShape 11"/>
             <p:cNvSpPr/>
             <p:nvPr/>
           </p:nvSpPr>
           <p:spPr>
             <a:xfrm>
               <a:off x="677880" y="1086840"/>
-              <a:ext cx="1586160" cy="471600"/>
+              <a:ext cx="1585800" cy="471240"/>
             </a:xfrm>
             <a:prstGeom prst="rect">
               <a:avLst/>
@@ -3068,14 +2549,14 @@
       </p:grpSp>
       <p:sp>
         <p:nvSpPr>
-          <p:cNvPr id="54" name="CustomShape 12"/>
+          <p:cNvPr id="51" name="CustomShape 12"/>
           <p:cNvSpPr/>
           <p:nvPr/>
         </p:nvSpPr>
         <p:spPr>
           <a:xfrm>
             <a:off x="780840" y="1086840"/>
-            <a:ext cx="13763160" cy="1793160"/>
+            <a:ext cx="13762800" cy="1792800"/>
           </a:xfrm>
           <a:prstGeom prst="roundRect">
             <a:avLst>
@@ -3083,7 +2564,7 @@
             </a:avLst>
           </a:prstGeom>
           <a:solidFill>
-            <a:srgbClr val="4196C9"/>
+            <a:srgbClr val="4196c9"/>
           </a:solidFill>
           <a:ln>
             <a:noFill/>
@@ -3104,10 +2585,9 @@
           <a:fontRef idx="minor"/>
         </p:style>
         <p:txBody>
-          <a:bodyPr lIns="90000" tIns="46800" rIns="90000" bIns="45000" anchor="ctr">
+          <a:bodyPr lIns="90000" rIns="90000" tIns="46800" bIns="45000" anchor="ctr">
             <a:noAutofit/>
           </a:bodyPr>
-          <a:lstStyle/>
           <a:p>
             <a:pPr algn="ctr">
               <a:lnSpc>
@@ -3115,15 +2595,16 @@
               </a:lnSpc>
             </a:pPr>
             <a:r>
-              <a:rPr lang="es-ES_tradnl" sz="4000" b="1" strike="noStrike" spc="-1">
+              <a:rPr b="1" lang="es-ES_tradnl" sz="4000" spc="-1" strike="noStrike">
                 <a:solidFill>
-                  <a:srgbClr val="FFFFFF"/>
+                  <a:srgbClr val="ffffff"/>
                 </a:solidFill>
                 <a:latin typeface="Aptos"/>
+                <a:ea typeface="DejaVu Sans"/>
               </a:rPr>
               <a:t>Anotación e interpretación de variantes</a:t>
             </a:r>
-            <a:endParaRPr lang="es-ES" sz="4000" b="0" strike="noStrike" spc="-1">
+            <a:endParaRPr b="0" lang="es-ES" sz="4000" spc="-1" strike="noStrike">
               <a:latin typeface="Arial"/>
             </a:endParaRPr>
           </a:p>
@@ -3134,15 +2615,16 @@
               </a:lnSpc>
             </a:pPr>
             <a:r>
-              <a:rPr lang="es-ES_tradnl" sz="2800" b="1" i="1" strike="noStrike" spc="-1">
+              <a:rPr b="1" i="1" lang="es-ES_tradnl" sz="2800" spc="-1" strike="noStrike">
                 <a:solidFill>
-                  <a:srgbClr val="FFFFFF"/>
+                  <a:srgbClr val="ffffff"/>
                 </a:solidFill>
                 <a:latin typeface="Aptos"/>
+                <a:ea typeface="DejaVu Sans"/>
               </a:rPr>
               <a:t>Genética clínica y de poblaciones</a:t>
             </a:r>
-            <a:endParaRPr lang="es-ES" sz="2800" b="0" strike="noStrike" spc="-1">
+            <a:endParaRPr b="0" lang="es-ES" sz="2800" spc="-1" strike="noStrike">
               <a:latin typeface="Arial"/>
             </a:endParaRPr>
           </a:p>
@@ -3153,16 +2635,16 @@
               </a:lnSpc>
             </a:pPr>
             <a:r>
-              <a:rPr lang="es-ES_tradnl" sz="2000" b="1" i="1" strike="noStrike" spc="-1">
+              <a:rPr b="1" i="1" lang="es-ES_tradnl" sz="2000" spc="-1" strike="noStrike">
                 <a:solidFill>
-                  <a:srgbClr val="FFFFFF"/>
+                  <a:srgbClr val="ffffff"/>
                 </a:solidFill>
                 <a:latin typeface="Aptos"/>
                 <a:ea typeface="DejaVu Sans"/>
               </a:rPr>
               <a:t>Paula Damián Moral - Paula Sofía Norniella Jamart - Pedro García Sáez - Pedro Manuel Rodríguez Santos - Pilar Navarro Sánchez - Rubén Martín Blázquez </a:t>
             </a:r>
-            <a:endParaRPr lang="es-ES" sz="2000" b="0" strike="noStrike" spc="-1">
+            <a:endParaRPr b="0" lang="es-ES" sz="2000" spc="-1" strike="noStrike">
               <a:latin typeface="Arial"/>
             </a:endParaRPr>
           </a:p>
@@ -3170,28 +2652,28 @@
       </p:sp>
       <p:grpSp>
         <p:nvGrpSpPr>
-          <p:cNvPr id="55" name="Group 13"/>
+          <p:cNvPr id="52" name="Group 13"/>
           <p:cNvGrpSpPr/>
           <p:nvPr/>
         </p:nvGrpSpPr>
         <p:grpSpPr>
           <a:xfrm>
             <a:off x="144000" y="17570520"/>
-            <a:ext cx="9095400" cy="3597480"/>
+            <a:ext cx="9095040" cy="3597120"/>
             <a:chOff x="144000" y="17570520"/>
-            <a:chExt cx="9095400" cy="3597480"/>
+            <a:chExt cx="9095040" cy="3597120"/>
           </a:xfrm>
         </p:grpSpPr>
         <p:sp>
           <p:nvSpPr>
-            <p:cNvPr id="56" name="CustomShape 14"/>
+            <p:cNvPr id="53" name="CustomShape 14"/>
             <p:cNvSpPr/>
             <p:nvPr/>
           </p:nvSpPr>
           <p:spPr>
             <a:xfrm>
               <a:off x="144000" y="17866440"/>
-              <a:ext cx="9095400" cy="3301560"/>
+              <a:ext cx="9095040" cy="3301200"/>
             </a:xfrm>
             <a:prstGeom prst="roundRect">
               <a:avLst>
@@ -3224,10 +2706,9 @@
             <a:fontRef idx="minor"/>
           </p:style>
           <p:txBody>
-            <a:bodyPr lIns="90000" tIns="360000" rIns="90000" bIns="45000">
+            <a:bodyPr lIns="90000" rIns="90000" tIns="360000" bIns="45000">
               <a:noAutofit/>
             </a:bodyPr>
-            <a:lstStyle/>
             <a:p>
               <a:pPr algn="just">
                 <a:lnSpc>
@@ -3235,15 +2716,16 @@
                 </a:lnSpc>
               </a:pPr>
               <a:r>
-                <a:rPr lang="es-ES_tradnl" sz="1800" b="0" i="1" strike="noStrike" spc="-1">
+                <a:rPr b="0" i="1" lang="es-ES_tradnl" sz="1800" spc="-1" strike="noStrike">
                   <a:solidFill>
                     <a:srgbClr val="000000"/>
                   </a:solidFill>
                   <a:latin typeface="Aptos"/>
+                  <a:ea typeface="DejaVu Sans"/>
                 </a:rPr>
                 <a:t>Maggie: presenta una deleción en el gen receptor de leptina (LEPR), produciendo una mutación “frameshift”. Esta deleción provoca la pérdida de dominios necesarios para activar vías de señalización de la hormona leptina (encargada de disminuir la ingesta y aumentar el consumo de energía).</a:t>
               </a:r>
-              <a:endParaRPr lang="es-ES" sz="1800" b="0" strike="noStrike" spc="-1">
+              <a:endParaRPr b="0" lang="es-ES" sz="1800" spc="-1" strike="noStrike">
                 <a:latin typeface="Arial"/>
               </a:endParaRPr>
             </a:p>
@@ -3254,15 +2736,16 @@
                 </a:lnSpc>
               </a:pPr>
               <a:r>
-                <a:rPr lang="es-ES_tradnl" sz="1800" b="0" i="1" strike="noStrike" spc="-1">
+                <a:rPr b="0" i="1" lang="es-ES_tradnl" sz="1800" spc="-1" strike="noStrike">
                   <a:solidFill>
                     <a:srgbClr val="000000"/>
                   </a:solidFill>
                   <a:latin typeface="Aptos"/>
+                  <a:ea typeface="DejaVu Sans"/>
                 </a:rPr>
-                <a:t>Abraham y Maggie: presentan una sustitución en el gen receptor de la melanocortin 4 (MC4R) que provoca una mutación “missense”. Esta alteración es altamente patogénica, afectando a una región altamente conservada evolutivamente. Se ve alterada la ruta de señalizacion hormonal del cAMP inplicado en el control de la saciedad. Como consecuencia, se altera el control del apetito a nivel hipotalámico, derivando en la característica hiperfagia típica de pacientes con obesidad monogénica.</a:t>
+                <a:t>Abraham y Maggie: presentan una sustitución en el gen receptor de la melanocortin 4 (MC4R) que provoca una mutación “missense” que altera un dominio extracelular y crucial para la señalizacon. Esta alteración es altamente patogénica, afectando a una región altamente conservada evolutivamente. Se ve alterada la ruta de señalizacion hormonal del cAMP implicado en el control de la saciedad. Como consecuencia, se altera el control del apetito a nivel hipotalámico, derivando en la característica hiperfagia típica de pacientes con obesidad monogénica.</a:t>
               </a:r>
-              <a:endParaRPr lang="es-ES" sz="1800" b="0" strike="noStrike" spc="-1">
+              <a:endParaRPr b="0" lang="es-ES" sz="1800" spc="-1" strike="noStrike">
                 <a:latin typeface="Arial"/>
               </a:endParaRPr>
             </a:p>
@@ -3273,15 +2756,16 @@
                 </a:lnSpc>
               </a:pPr>
               <a:r>
-                <a:rPr lang="es-ES_tradnl" sz="1800" b="0" i="1" strike="noStrike" spc="-1">
+                <a:rPr b="0" i="1" lang="es-ES_tradnl" sz="1800" spc="-1" strike="noStrike">
                   <a:solidFill>
                     <a:srgbClr val="000000"/>
                   </a:solidFill>
                   <a:latin typeface="Aptos"/>
+                  <a:ea typeface="DejaVu Sans"/>
                 </a:rPr>
                 <a:t>Ambos presentan mutaciones en TP53, y Abraham es hemicigoto para la variante detectada en MED12, pero ambas tienen un nivel de patogenicidad bajo o ambiguo.</a:t>
               </a:r>
-              <a:endParaRPr lang="es-ES" sz="1800" b="0" strike="noStrike" spc="-1">
+              <a:endParaRPr b="0" lang="es-ES" sz="1800" spc="-1" strike="noStrike">
                 <a:latin typeface="Arial"/>
               </a:endParaRPr>
             </a:p>
@@ -3289,14 +2773,14 @@
         </p:sp>
         <p:sp>
           <p:nvSpPr>
-            <p:cNvPr id="57" name="CustomShape 15"/>
+            <p:cNvPr id="54" name="CustomShape 15"/>
             <p:cNvSpPr/>
             <p:nvPr/>
           </p:nvSpPr>
           <p:spPr>
             <a:xfrm>
               <a:off x="437040" y="17570520"/>
-              <a:ext cx="5837760" cy="591840"/>
+              <a:ext cx="5837400" cy="591480"/>
             </a:xfrm>
             <a:prstGeom prst="roundRect">
               <a:avLst>
@@ -3306,10 +2790,10 @@
             <a:gradFill rotWithShape="0">
               <a:gsLst>
                 <a:gs pos="0">
-                  <a:srgbClr val="59C2E3"/>
+                  <a:srgbClr val="59c2e3"/>
                 </a:gs>
                 <a:gs pos="100000">
-                  <a:srgbClr val="4196C9"/>
+                  <a:srgbClr val="4196c9"/>
                 </a:gs>
               </a:gsLst>
               <a:lin ang="2700000"/>
@@ -3331,10 +2815,9 @@
             <a:fontRef idx="minor"/>
           </p:style>
           <p:txBody>
-            <a:bodyPr lIns="90000" tIns="45000" rIns="90000" bIns="45000" anchor="ctr">
+            <a:bodyPr lIns="90000" rIns="90000" tIns="45000" bIns="45000" anchor="ctr">
               <a:noAutofit/>
             </a:bodyPr>
-            <a:lstStyle/>
             <a:p>
               <a:pPr algn="ctr">
                 <a:lnSpc>
@@ -3342,15 +2825,16 @@
                 </a:lnSpc>
               </a:pPr>
               <a:r>
-                <a:rPr lang="es-ES_tradnl" sz="2800" b="1" strike="noStrike" spc="-1">
+                <a:rPr b="1" lang="es-ES_tradnl" sz="2800" spc="-1" strike="noStrike">
                   <a:solidFill>
-                    <a:srgbClr val="FFFFFF"/>
+                    <a:srgbClr val="ffffff"/>
                   </a:solidFill>
                   <a:latin typeface="Aptos"/>
+                  <a:ea typeface="DejaVu Sans"/>
                 </a:rPr>
                 <a:t>DISCUSIÓN</a:t>
               </a:r>
-              <a:endParaRPr lang="es-ES" sz="2800" b="0" strike="noStrike" spc="-1">
+              <a:endParaRPr b="0" lang="es-ES" sz="2800" spc="-1" strike="noStrike">
                 <a:latin typeface="Arial"/>
               </a:endParaRPr>
             </a:p>
@@ -3359,28 +2843,28 @@
       </p:grpSp>
       <p:grpSp>
         <p:nvGrpSpPr>
-          <p:cNvPr id="58" name="Group 16"/>
+          <p:cNvPr id="55" name="Group 16"/>
           <p:cNvGrpSpPr/>
           <p:nvPr/>
         </p:nvGrpSpPr>
         <p:grpSpPr>
           <a:xfrm>
-            <a:off x="9509760" y="17936280"/>
-            <a:ext cx="5366520" cy="3211920"/>
-            <a:chOff x="9509760" y="17936280"/>
-            <a:chExt cx="5366520" cy="3211920"/>
+            <a:off x="9576000" y="17657640"/>
+            <a:ext cx="5366160" cy="2934360"/>
+            <a:chOff x="9576000" y="17657640"/>
+            <a:chExt cx="5366160" cy="2934360"/>
           </a:xfrm>
         </p:grpSpPr>
         <p:sp>
           <p:nvSpPr>
-            <p:cNvPr id="59" name="CustomShape 17"/>
+            <p:cNvPr id="56" name="CustomShape 17"/>
             <p:cNvSpPr/>
             <p:nvPr/>
           </p:nvSpPr>
           <p:spPr>
             <a:xfrm>
-              <a:off x="9509760" y="18200520"/>
-              <a:ext cx="5366520" cy="2947680"/>
+              <a:off x="9576000" y="17899200"/>
+              <a:ext cx="5366160" cy="2692800"/>
             </a:xfrm>
             <a:prstGeom prst="roundRect">
               <a:avLst>
@@ -3413,10 +2897,9 @@
             <a:fontRef idx="minor"/>
           </p:style>
           <p:txBody>
-            <a:bodyPr lIns="90000" tIns="360000" rIns="90000" bIns="45000">
+            <a:bodyPr lIns="90000" rIns="90000" tIns="360000" bIns="45000">
               <a:noAutofit/>
             </a:bodyPr>
-            <a:lstStyle/>
             <a:p>
               <a:pPr algn="just">
                 <a:lnSpc>
@@ -3424,15 +2907,16 @@
                 </a:lnSpc>
               </a:pPr>
               <a:r>
-                <a:rPr lang="es-ES_tradnl" sz="1800" b="0" i="1" strike="noStrike" spc="-1">
+                <a:rPr b="0" i="1" lang="es-ES_tradnl" sz="1800" spc="-1" strike="noStrike">
                   <a:solidFill>
                     <a:srgbClr val="000000"/>
                   </a:solidFill>
                   <a:latin typeface="Aptos"/>
+                  <a:ea typeface="DejaVu Sans"/>
                 </a:rPr>
                 <a:t>Las variantes de los genes LEPR (portada por Maggie) y MC4R (portada por Abraham y Maggie) pueden indicar que los Simpson sean propensos a desarrollar obesidad. Por otro lado, mutaciones que comparten ambos en los genes MED12 y TP53, no se consideran patogénicas ni se observa relación con el fenotipo observado. Por lo tanto, la familia Simpson debe tener una dieta controlada y hábitos de vida saludable si no desean desarrollar obesidad.</a:t>
               </a:r>
-              <a:endParaRPr lang="es-ES" sz="1800" b="0" strike="noStrike" spc="-1">
+              <a:endParaRPr b="0" lang="es-ES" sz="1800" spc="-1" strike="noStrike">
                 <a:latin typeface="Arial"/>
               </a:endParaRPr>
             </a:p>
@@ -3440,14 +2924,14 @@
         </p:sp>
         <p:sp>
           <p:nvSpPr>
-            <p:cNvPr id="60" name="CustomShape 18"/>
+            <p:cNvPr id="57" name="CustomShape 18"/>
             <p:cNvSpPr/>
             <p:nvPr/>
           </p:nvSpPr>
           <p:spPr>
             <a:xfrm>
-              <a:off x="9731160" y="17936280"/>
-              <a:ext cx="4406760" cy="528480"/>
+              <a:off x="9797400" y="17657640"/>
+              <a:ext cx="4406400" cy="482400"/>
             </a:xfrm>
             <a:prstGeom prst="roundRect">
               <a:avLst>
@@ -3457,10 +2941,10 @@
             <a:gradFill rotWithShape="0">
               <a:gsLst>
                 <a:gs pos="0">
-                  <a:srgbClr val="59C2E3"/>
+                  <a:srgbClr val="59c2e3"/>
                 </a:gs>
                 <a:gs pos="100000">
-                  <a:srgbClr val="4196C9"/>
+                  <a:srgbClr val="4196c9"/>
                 </a:gs>
               </a:gsLst>
               <a:lin ang="2700000"/>
@@ -3482,10 +2966,9 @@
             <a:fontRef idx="minor"/>
           </p:style>
           <p:txBody>
-            <a:bodyPr lIns="90000" tIns="45000" rIns="90000" bIns="45000" anchor="ctr">
+            <a:bodyPr lIns="90000" rIns="90000" tIns="45000" bIns="45000" anchor="ctr">
               <a:noAutofit/>
             </a:bodyPr>
-            <a:lstStyle/>
             <a:p>
               <a:pPr algn="ctr">
                 <a:lnSpc>
@@ -3493,15 +2976,16 @@
                 </a:lnSpc>
               </a:pPr>
               <a:r>
-                <a:rPr lang="es-ES_tradnl" sz="2800" b="1" strike="noStrike" spc="-1">
+                <a:rPr b="1" lang="es-ES_tradnl" sz="2800" spc="-1" strike="noStrike">
                   <a:solidFill>
-                    <a:srgbClr val="FFFFFF"/>
+                    <a:srgbClr val="ffffff"/>
                   </a:solidFill>
                   <a:latin typeface="Aptos"/>
+                  <a:ea typeface="DejaVu Sans"/>
                 </a:rPr>
                 <a:t>CONCLUSIONES</a:t>
               </a:r>
-              <a:endParaRPr lang="es-ES" sz="2800" b="0" strike="noStrike" spc="-1">
+              <a:endParaRPr b="0" lang="es-ES" sz="2800" spc="-1" strike="noStrike">
                 <a:latin typeface="Arial"/>
               </a:endParaRPr>
             </a:p>
@@ -3510,14 +2994,14 @@
       </p:grpSp>
       <p:sp>
         <p:nvSpPr>
-          <p:cNvPr id="61" name="CustomShape 19"/>
+          <p:cNvPr id="58" name="CustomShape 19"/>
           <p:cNvSpPr/>
           <p:nvPr/>
         </p:nvSpPr>
         <p:spPr>
           <a:xfrm>
             <a:off x="440640" y="7503480"/>
-            <a:ext cx="13959360" cy="632520"/>
+            <a:ext cx="13959000" cy="632160"/>
           </a:xfrm>
           <a:prstGeom prst="roundRect">
             <a:avLst>
@@ -3546,38 +3030,39 @@
           <a:fontRef idx="minor"/>
         </p:style>
         <p:txBody>
-          <a:bodyPr lIns="90000" tIns="45000" rIns="90000" bIns="45000" anchor="ctr">
+          <a:bodyPr lIns="90000" rIns="90000" tIns="45000" bIns="45000" anchor="ctr">
             <a:noAutofit/>
           </a:bodyPr>
-          <a:lstStyle/>
           <a:p>
             <a:pPr>
               <a:lnSpc>
                 <a:spcPct val="80000"/>
               </a:lnSpc>
               <a:tabLst>
-                <a:tab pos="0" algn="l"/>
+                <a:tab algn="l" pos="0"/>
               </a:tabLst>
             </a:pPr>
             <a:r>
-              <a:rPr lang="es-ES_tradnl" sz="1800" b="1" strike="noStrike" spc="-1">
+              <a:rPr b="1" lang="es-ES_tradnl" sz="1800" spc="-1" strike="noStrike">
                 <a:solidFill>
-                  <a:srgbClr val="4196C9"/>
+                  <a:srgbClr val="4196c9"/>
                 </a:solidFill>
                 <a:latin typeface="Aptos"/>
+                <a:ea typeface="DejaVu Sans"/>
               </a:rPr>
               <a:t>Tabla 1. </a:t>
             </a:r>
             <a:r>
-              <a:rPr lang="es-ES_tradnl" sz="1800" b="0" strike="noStrike" spc="-1">
+              <a:rPr b="0" lang="es-ES_tradnl" sz="1800" spc="-1" strike="noStrike">
                 <a:solidFill>
                   <a:srgbClr val="000000"/>
                 </a:solidFill>
                 <a:latin typeface="Aptos"/>
+                <a:ea typeface="DejaVu Sans"/>
               </a:rPr>
               <a:t>Información de las variantes analizadas con VEP.</a:t>
             </a:r>
-            <a:endParaRPr lang="es-ES" sz="1800" b="0" strike="noStrike" spc="-1">
+            <a:endParaRPr b="0" lang="es-ES" sz="1800" spc="-1" strike="noStrike">
               <a:latin typeface="Arial"/>
             </a:endParaRPr>
           </a:p>
@@ -3585,14 +3070,14 @@
       </p:sp>
       <p:sp>
         <p:nvSpPr>
-          <p:cNvPr id="62" name="CustomShape 20"/>
+          <p:cNvPr id="59" name="CustomShape 20"/>
           <p:cNvSpPr/>
           <p:nvPr/>
         </p:nvSpPr>
         <p:spPr>
           <a:xfrm>
             <a:off x="288000" y="11592000"/>
-            <a:ext cx="6176880" cy="632520"/>
+            <a:ext cx="6176520" cy="632160"/>
           </a:xfrm>
           <a:prstGeom prst="roundRect">
             <a:avLst>
@@ -3621,38 +3106,39 @@
           <a:fontRef idx="minor"/>
         </p:style>
         <p:txBody>
-          <a:bodyPr lIns="90000" tIns="45000" rIns="90000" bIns="45000" anchor="ctr">
+          <a:bodyPr lIns="90000" rIns="90000" tIns="45000" bIns="45000" anchor="ctr">
             <a:noAutofit/>
           </a:bodyPr>
-          <a:lstStyle/>
           <a:p>
             <a:pPr>
               <a:lnSpc>
                 <a:spcPct val="80000"/>
               </a:lnSpc>
               <a:tabLst>
-                <a:tab pos="0" algn="l"/>
+                <a:tab algn="l" pos="0"/>
               </a:tabLst>
             </a:pPr>
             <a:r>
-              <a:rPr lang="es-ES_tradnl" sz="1800" b="1" strike="noStrike" spc="-1">
+              <a:rPr b="1" lang="es-ES_tradnl" sz="1800" spc="-1" strike="noStrike">
                 <a:solidFill>
-                  <a:srgbClr val="4196C9"/>
+                  <a:srgbClr val="4196c9"/>
                 </a:solidFill>
                 <a:latin typeface="Aptos"/>
+                <a:ea typeface="DejaVu Sans"/>
               </a:rPr>
               <a:t>Figura 1. </a:t>
             </a:r>
             <a:r>
-              <a:rPr lang="es-ES_tradnl" sz="1800" b="0" strike="noStrike" spc="-1">
+              <a:rPr b="0" lang="es-ES_tradnl" sz="1800" spc="-1" strike="noStrike">
                 <a:solidFill>
                   <a:srgbClr val="000000"/>
                 </a:solidFill>
                 <a:latin typeface="Aptos"/>
+                <a:ea typeface="DejaVu Sans"/>
               </a:rPr>
               <a:t>Estructura de LEPR wt y variante.</a:t>
             </a:r>
-            <a:endParaRPr lang="es-ES" sz="1800" b="0" strike="noStrike" spc="-1">
+            <a:endParaRPr b="0" lang="es-ES" sz="1800" spc="-1" strike="noStrike">
               <a:latin typeface="Arial"/>
             </a:endParaRPr>
           </a:p>
@@ -3660,14 +3146,14 @@
       </p:sp>
       <p:sp>
         <p:nvSpPr>
-          <p:cNvPr id="63" name="CustomShape 21"/>
+          <p:cNvPr id="60" name="CustomShape 21"/>
           <p:cNvSpPr/>
           <p:nvPr/>
         </p:nvSpPr>
         <p:spPr>
           <a:xfrm>
             <a:off x="7065000" y="11592000"/>
-            <a:ext cx="7407000" cy="632520"/>
+            <a:ext cx="7406640" cy="632160"/>
           </a:xfrm>
           <a:prstGeom prst="roundRect">
             <a:avLst>
@@ -3696,38 +3182,39 @@
           <a:fontRef idx="minor"/>
         </p:style>
         <p:txBody>
-          <a:bodyPr lIns="90000" tIns="45000" rIns="90000" bIns="45000" anchor="ctr">
+          <a:bodyPr lIns="90000" rIns="90000" tIns="45000" bIns="45000" anchor="ctr">
             <a:noAutofit/>
           </a:bodyPr>
-          <a:lstStyle/>
           <a:p>
             <a:pPr>
               <a:lnSpc>
                 <a:spcPct val="80000"/>
               </a:lnSpc>
               <a:tabLst>
-                <a:tab pos="0" algn="l"/>
+                <a:tab algn="l" pos="0"/>
               </a:tabLst>
             </a:pPr>
             <a:r>
-              <a:rPr lang="es-ES_tradnl" sz="1800" b="1" strike="noStrike" spc="-1">
+              <a:rPr b="1" lang="es-ES_tradnl" sz="1800" spc="-1" strike="noStrike">
                 <a:solidFill>
-                  <a:srgbClr val="4196C9"/>
+                  <a:srgbClr val="4196c9"/>
                 </a:solidFill>
                 <a:latin typeface="Aptos"/>
+                <a:ea typeface="DejaVu Sans"/>
               </a:rPr>
               <a:t>Figura 2. </a:t>
             </a:r>
             <a:r>
-              <a:rPr lang="es-ES_tradnl" sz="1800" b="0" strike="noStrike" spc="-1">
+              <a:rPr b="0" lang="es-ES_tradnl" sz="1800" spc="-1" strike="noStrike">
                 <a:solidFill>
                   <a:srgbClr val="000000"/>
                 </a:solidFill>
                 <a:latin typeface="Aptos"/>
+                <a:ea typeface="DejaVu Sans"/>
               </a:rPr>
               <a:t>Alineamiento múltiple de MCR4 por Custal Omega.</a:t>
             </a:r>
-            <a:endParaRPr lang="es-ES" sz="1800" b="0" strike="noStrike" spc="-1">
+            <a:endParaRPr b="0" lang="es-ES" sz="1800" spc="-1" strike="noStrike">
               <a:latin typeface="Arial"/>
             </a:endParaRPr>
           </a:p>
@@ -3735,129 +3222,40 @@
       </p:sp>
       <p:graphicFrame>
         <p:nvGraphicFramePr>
-          <p:cNvPr id="64" name="Table 22"/>
+          <p:cNvPr id="61" name="Table 22"/>
           <p:cNvGraphicFramePr/>
-          <p:nvPr>
-            <p:extLst>
-              <p:ext uri="{D42A27DB-BD31-4B8C-83A1-F6EECF244321}">
-                <p14:modId xmlns:p14="http://schemas.microsoft.com/office/powerpoint/2010/main" val="2867859995"/>
-              </p:ext>
-            </p:extLst>
-          </p:nvPr>
+          <p:nvPr/>
         </p:nvGraphicFramePr>
         <p:xfrm>
           <a:off x="207720" y="8313480"/>
-          <a:ext cx="14437080" cy="2926800"/>
+          <a:ext cx="14436720" cy="2681280"/>
         </p:xfrm>
         <a:graphic>
           <a:graphicData uri="http://schemas.openxmlformats.org/drawingml/2006/table">
             <a:tbl>
               <a:tblPr/>
               <a:tblGrid>
-                <a:gridCol w="528260">
-                  <a:extLst>
-                    <a:ext uri="{9D8B030D-6E8A-4147-A177-3AD203B41FA5}">
-                      <a16:colId xmlns:a16="http://schemas.microsoft.com/office/drawing/2014/main" val="20000"/>
-                    </a:ext>
-                  </a:extLst>
-                </a:gridCol>
-                <a:gridCol w="992459">
-                  <a:extLst>
-                    <a:ext uri="{9D8B030D-6E8A-4147-A177-3AD203B41FA5}">
-                      <a16:colId xmlns:a16="http://schemas.microsoft.com/office/drawing/2014/main" val="20001"/>
-                    </a:ext>
-                  </a:extLst>
-                </a:gridCol>
-                <a:gridCol w="1226634">
-                  <a:extLst>
-                    <a:ext uri="{9D8B030D-6E8A-4147-A177-3AD203B41FA5}">
-                      <a16:colId xmlns:a16="http://schemas.microsoft.com/office/drawing/2014/main" val="20002"/>
-                    </a:ext>
-                  </a:extLst>
-                </a:gridCol>
-                <a:gridCol w="434898">
-                  <a:extLst>
-                    <a:ext uri="{9D8B030D-6E8A-4147-A177-3AD203B41FA5}">
-                      <a16:colId xmlns:a16="http://schemas.microsoft.com/office/drawing/2014/main" val="20003"/>
-                    </a:ext>
-                  </a:extLst>
-                </a:gridCol>
-                <a:gridCol w="880946">
-                  <a:extLst>
-                    <a:ext uri="{9D8B030D-6E8A-4147-A177-3AD203B41FA5}">
-                      <a16:colId xmlns:a16="http://schemas.microsoft.com/office/drawing/2014/main" val="20004"/>
-                    </a:ext>
-                  </a:extLst>
-                </a:gridCol>
-                <a:gridCol w="1025912">
-                  <a:extLst>
-                    <a:ext uri="{9D8B030D-6E8A-4147-A177-3AD203B41FA5}">
-                      <a16:colId xmlns:a16="http://schemas.microsoft.com/office/drawing/2014/main" val="20005"/>
-                    </a:ext>
-                  </a:extLst>
-                </a:gridCol>
-                <a:gridCol w="1460810">
-                  <a:extLst>
-                    <a:ext uri="{9D8B030D-6E8A-4147-A177-3AD203B41FA5}">
-                      <a16:colId xmlns:a16="http://schemas.microsoft.com/office/drawing/2014/main" val="20006"/>
-                    </a:ext>
-                  </a:extLst>
-                </a:gridCol>
-                <a:gridCol w="1483112">
-                  <a:extLst>
-                    <a:ext uri="{9D8B030D-6E8A-4147-A177-3AD203B41FA5}">
-                      <a16:colId xmlns:a16="http://schemas.microsoft.com/office/drawing/2014/main" val="20007"/>
-                    </a:ext>
-                  </a:extLst>
-                </a:gridCol>
-                <a:gridCol w="959005">
-                  <a:extLst>
-                    <a:ext uri="{9D8B030D-6E8A-4147-A177-3AD203B41FA5}">
-                      <a16:colId xmlns:a16="http://schemas.microsoft.com/office/drawing/2014/main" val="20008"/>
-                    </a:ext>
-                  </a:extLst>
-                </a:gridCol>
-                <a:gridCol w="825190">
-                  <a:extLst>
-                    <a:ext uri="{9D8B030D-6E8A-4147-A177-3AD203B41FA5}">
-                      <a16:colId xmlns:a16="http://schemas.microsoft.com/office/drawing/2014/main" val="20009"/>
-                    </a:ext>
-                  </a:extLst>
-                </a:gridCol>
-                <a:gridCol w="947854">
-                  <a:extLst>
-                    <a:ext uri="{9D8B030D-6E8A-4147-A177-3AD203B41FA5}">
-                      <a16:colId xmlns:a16="http://schemas.microsoft.com/office/drawing/2014/main" val="20010"/>
-                    </a:ext>
-                  </a:extLst>
-                </a:gridCol>
-                <a:gridCol w="780585">
-                  <a:extLst>
-                    <a:ext uri="{9D8B030D-6E8A-4147-A177-3AD203B41FA5}">
-                      <a16:colId xmlns:a16="http://schemas.microsoft.com/office/drawing/2014/main" val="3952611696"/>
-                    </a:ext>
-                  </a:extLst>
-                </a:gridCol>
-                <a:gridCol w="955114">
-                  <a:extLst>
-                    <a:ext uri="{9D8B030D-6E8A-4147-A177-3AD203B41FA5}">
-                      <a16:colId xmlns:a16="http://schemas.microsoft.com/office/drawing/2014/main" val="4271565671"/>
-                    </a:ext>
-                  </a:extLst>
-                </a:gridCol>
-                <a:gridCol w="1936301">
-                  <a:extLst>
-                    <a:ext uri="{9D8B030D-6E8A-4147-A177-3AD203B41FA5}">
-                      <a16:colId xmlns:a16="http://schemas.microsoft.com/office/drawing/2014/main" val="593573608"/>
-                    </a:ext>
-                  </a:extLst>
-                </a:gridCol>
+                <a:gridCol w="528120"/>
+                <a:gridCol w="992160"/>
+                <a:gridCol w="1226520"/>
+                <a:gridCol w="434880"/>
+                <a:gridCol w="880920"/>
+                <a:gridCol w="1025640"/>
+                <a:gridCol w="1460520"/>
+                <a:gridCol w="1482840"/>
+                <a:gridCol w="958680"/>
+                <a:gridCol w="825120"/>
+                <a:gridCol w="947520"/>
+                <a:gridCol w="780480"/>
+                <a:gridCol w="955080"/>
+                <a:gridCol w="1938240"/>
               </a:tblGrid>
-              <a:tr h="242640">
+              <a:tr h="521640">
                 <a:tc>
                   <a:txBody>
-                    <a:bodyPr/>
-                    <a:lstStyle/>
+                    <a:bodyPr lIns="7560" rIns="7560">
+                      <a:noAutofit/>
+                    </a:bodyPr>
                     <a:p>
                       <a:pPr>
                         <a:lnSpc>
@@ -3865,49 +3263,52 @@
                         </a:lnSpc>
                       </a:pPr>
                       <a:r>
-                        <a:rPr lang="es-ES" sz="1200" b="1" u="sng" strike="noStrike" spc="-1" dirty="0">
+                        <a:rPr b="1" lang="es-ES" sz="1200" spc="-1" strike="noStrike" u="sng">
                           <a:solidFill>
                             <a:srgbClr val="000000"/>
                           </a:solidFill>
-                          <a:latin typeface="Aptos" panose="020B0004020202020204" pitchFamily="34" charset="0"/>
+                          <a:uFillTx/>
+                          <a:latin typeface="Aptos"/>
+                          <a:ea typeface="DejaVu Sans"/>
                         </a:rPr>
                         <a:t>Gen</a:t>
                       </a:r>
-                      <a:endParaRPr lang="es-ES" sz="1200" b="1" u="sng" strike="noStrike" spc="-1" dirty="0">
-                        <a:latin typeface="Aptos" panose="020B0004020202020204" pitchFamily="34" charset="0"/>
+                      <a:endParaRPr b="0" lang="es-ES" sz="1200" spc="-1" strike="noStrike">
+                        <a:latin typeface="Arial"/>
                       </a:endParaRPr>
                     </a:p>
                   </a:txBody>
                   <a:tcPr marL="7560" marR="7560">
                     <a:lnL w="12240">
                       <a:solidFill>
-                        <a:srgbClr val="FFFFFF"/>
+                        <a:srgbClr val="ffffff"/>
                       </a:solidFill>
                     </a:lnL>
                     <a:lnR w="12240">
                       <a:solidFill>
-                        <a:srgbClr val="FFFFFF"/>
+                        <a:srgbClr val="ffffff"/>
                       </a:solidFill>
                     </a:lnR>
                     <a:lnT w="12240">
                       <a:solidFill>
-                        <a:srgbClr val="FFFFFF"/>
+                        <a:srgbClr val="ffffff"/>
                       </a:solidFill>
                     </a:lnT>
                     <a:lnB w="12240">
                       <a:solidFill>
-                        <a:srgbClr val="FFFFFF"/>
+                        <a:srgbClr val="ffffff"/>
                       </a:solidFill>
                     </a:lnB>
                     <a:solidFill>
-                      <a:srgbClr val="E7EAEC"/>
+                      <a:srgbClr val="e7eaec"/>
                     </a:solidFill>
                   </a:tcPr>
                 </a:tc>
                 <a:tc>
                   <a:txBody>
-                    <a:bodyPr/>
-                    <a:lstStyle/>
+                    <a:bodyPr lIns="7560" rIns="7560">
+                      <a:noAutofit/>
+                    </a:bodyPr>
                     <a:p>
                       <a:pPr algn="ctr">
                         <a:lnSpc>
@@ -3915,49 +3316,52 @@
                         </a:lnSpc>
                       </a:pPr>
                       <a:r>
-                        <a:rPr lang="es-ES" sz="1200" b="1" u="sng" strike="noStrike" spc="-1" dirty="0">
+                        <a:rPr b="1" lang="es-ES" sz="1200" spc="-1" strike="noStrike" u="sng">
                           <a:solidFill>
                             <a:srgbClr val="000000"/>
                           </a:solidFill>
-                          <a:latin typeface="Aptos" panose="020B0004020202020204" pitchFamily="34" charset="0"/>
+                          <a:uFillTx/>
+                          <a:latin typeface="Aptos"/>
+                          <a:ea typeface="DejaVu Sans"/>
                         </a:rPr>
                         <a:t>Coordenada</a:t>
                       </a:r>
-                      <a:endParaRPr lang="es-ES" sz="1200" b="1" u="sng" strike="noStrike" spc="-1" dirty="0">
-                        <a:latin typeface="Aptos" panose="020B0004020202020204" pitchFamily="34" charset="0"/>
+                      <a:endParaRPr b="0" lang="es-ES" sz="1200" spc="-1" strike="noStrike">
+                        <a:latin typeface="Arial"/>
                       </a:endParaRPr>
                     </a:p>
                   </a:txBody>
                   <a:tcPr marL="7560" marR="7560">
                     <a:lnL w="12240">
                       <a:solidFill>
-                        <a:srgbClr val="FFFFFF"/>
+                        <a:srgbClr val="ffffff"/>
                       </a:solidFill>
                     </a:lnL>
                     <a:lnR w="12240">
                       <a:solidFill>
-                        <a:srgbClr val="FFFFFF"/>
+                        <a:srgbClr val="ffffff"/>
                       </a:solidFill>
                     </a:lnR>
                     <a:lnT w="12240">
                       <a:solidFill>
-                        <a:srgbClr val="FFFFFF"/>
+                        <a:srgbClr val="ffffff"/>
                       </a:solidFill>
                     </a:lnT>
                     <a:lnB w="12240">
                       <a:solidFill>
-                        <a:srgbClr val="FFFFFF"/>
+                        <a:srgbClr val="ffffff"/>
                       </a:solidFill>
                     </a:lnB>
                     <a:solidFill>
-                      <a:srgbClr val="E7EAEC"/>
+                      <a:srgbClr val="e7eaec"/>
                     </a:solidFill>
                   </a:tcPr>
                 </a:tc>
                 <a:tc>
                   <a:txBody>
-                    <a:bodyPr/>
-                    <a:lstStyle/>
+                    <a:bodyPr lIns="7560" rIns="7560">
+                      <a:noAutofit/>
+                    </a:bodyPr>
                     <a:p>
                       <a:pPr algn="ctr">
                         <a:lnSpc>
@@ -3965,49 +3369,52 @@
                         </a:lnSpc>
                       </a:pPr>
                       <a:r>
-                        <a:rPr lang="es-ES" sz="1200" b="1" u="sng" strike="noStrike" spc="-1" dirty="0" err="1">
+                        <a:rPr b="1" lang="es-ES" sz="1200" spc="-1" strike="noStrike" u="sng">
                           <a:solidFill>
                             <a:srgbClr val="000000"/>
                           </a:solidFill>
-                          <a:latin typeface="Aptos" panose="020B0004020202020204" pitchFamily="34" charset="0"/>
+                          <a:uFillTx/>
+                          <a:latin typeface="Aptos"/>
+                          <a:ea typeface="DejaVu Sans"/>
                         </a:rPr>
                         <a:t>Nomenclatura.c</a:t>
                       </a:r>
-                      <a:endParaRPr lang="es-ES" sz="1200" b="1" u="sng" strike="noStrike" spc="-1" dirty="0">
-                        <a:latin typeface="Aptos" panose="020B0004020202020204" pitchFamily="34" charset="0"/>
+                      <a:endParaRPr b="0" lang="es-ES" sz="1200" spc="-1" strike="noStrike">
+                        <a:latin typeface="Arial"/>
                       </a:endParaRPr>
                     </a:p>
                   </a:txBody>
                   <a:tcPr marL="7560" marR="7560">
                     <a:lnL w="12240">
                       <a:solidFill>
-                        <a:srgbClr val="FFFFFF"/>
+                        <a:srgbClr val="ffffff"/>
                       </a:solidFill>
                     </a:lnL>
                     <a:lnR w="12240">
                       <a:solidFill>
-                        <a:srgbClr val="FFFFFF"/>
+                        <a:srgbClr val="ffffff"/>
                       </a:solidFill>
                     </a:lnR>
                     <a:lnT w="12240">
                       <a:solidFill>
-                        <a:srgbClr val="FFFFFF"/>
+                        <a:srgbClr val="ffffff"/>
                       </a:solidFill>
                     </a:lnT>
                     <a:lnB w="12240">
                       <a:solidFill>
-                        <a:srgbClr val="FFFFFF"/>
+                        <a:srgbClr val="ffffff"/>
                       </a:solidFill>
                     </a:lnB>
                     <a:solidFill>
-                      <a:srgbClr val="E7EAEC"/>
+                      <a:srgbClr val="e7eaec"/>
                     </a:solidFill>
                   </a:tcPr>
                 </a:tc>
                 <a:tc>
                   <a:txBody>
-                    <a:bodyPr/>
-                    <a:lstStyle/>
+                    <a:bodyPr lIns="7560" rIns="7560">
+                      <a:noAutofit/>
+                    </a:bodyPr>
                     <a:p>
                       <a:pPr algn="ctr">
                         <a:lnSpc>
@@ -4015,49 +3422,52 @@
                         </a:lnSpc>
                       </a:pPr>
                       <a:r>
-                        <a:rPr lang="es-ES" sz="1200" b="1" u="sng" strike="noStrike" spc="-1" dirty="0">
+                        <a:rPr b="1" lang="es-ES" sz="1200" spc="-1" strike="noStrike" u="sng">
                           <a:solidFill>
                             <a:srgbClr val="000000"/>
                           </a:solidFill>
-                          <a:latin typeface="Aptos" panose="020B0004020202020204" pitchFamily="34" charset="0"/>
+                          <a:uFillTx/>
+                          <a:latin typeface="Aptos"/>
+                          <a:ea typeface="DejaVu Sans"/>
                         </a:rPr>
                         <a:t>Tipo</a:t>
                       </a:r>
-                      <a:endParaRPr lang="es-ES" sz="1200" b="1" u="sng" strike="noStrike" spc="-1" dirty="0">
-                        <a:latin typeface="Aptos" panose="020B0004020202020204" pitchFamily="34" charset="0"/>
+                      <a:endParaRPr b="0" lang="es-ES" sz="1200" spc="-1" strike="noStrike">
+                        <a:latin typeface="Arial"/>
                       </a:endParaRPr>
                     </a:p>
                   </a:txBody>
                   <a:tcPr marL="7560" marR="7560">
                     <a:lnL w="12240">
                       <a:solidFill>
-                        <a:srgbClr val="FFFFFF"/>
+                        <a:srgbClr val="ffffff"/>
                       </a:solidFill>
                     </a:lnL>
                     <a:lnR w="12240">
                       <a:solidFill>
-                        <a:srgbClr val="FFFFFF"/>
+                        <a:srgbClr val="ffffff"/>
                       </a:solidFill>
                     </a:lnR>
                     <a:lnT w="12240">
                       <a:solidFill>
-                        <a:srgbClr val="FFFFFF"/>
+                        <a:srgbClr val="ffffff"/>
                       </a:solidFill>
                     </a:lnT>
                     <a:lnB w="12240">
                       <a:solidFill>
-                        <a:srgbClr val="FFFFFF"/>
+                        <a:srgbClr val="ffffff"/>
                       </a:solidFill>
                     </a:lnB>
                     <a:solidFill>
-                      <a:srgbClr val="E7EAEC"/>
+                      <a:srgbClr val="e7eaec"/>
                     </a:solidFill>
                   </a:tcPr>
                 </a:tc>
                 <a:tc>
                   <a:txBody>
-                    <a:bodyPr/>
-                    <a:lstStyle/>
+                    <a:bodyPr lIns="7560" rIns="7560">
+                      <a:noAutofit/>
+                    </a:bodyPr>
                     <a:p>
                       <a:pPr algn="ctr">
                         <a:lnSpc>
@@ -4065,49 +3475,52 @@
                         </a:lnSpc>
                       </a:pPr>
                       <a:r>
-                        <a:rPr lang="es-ES" sz="1200" b="1" u="sng" strike="noStrike" spc="-1" dirty="0">
+                        <a:rPr b="1" lang="es-ES" sz="1200" spc="-1" strike="noStrike" u="sng">
                           <a:solidFill>
                             <a:srgbClr val="000000"/>
                           </a:solidFill>
-                          <a:latin typeface="Aptos" panose="020B0004020202020204" pitchFamily="34" charset="0"/>
+                          <a:uFillTx/>
+                          <a:latin typeface="Aptos"/>
+                          <a:ea typeface="DejaVu Sans"/>
                         </a:rPr>
                         <a:t>Genotipo</a:t>
                       </a:r>
-                      <a:endParaRPr lang="es-ES" sz="1200" b="1" u="sng" strike="noStrike" spc="-1" dirty="0">
-                        <a:latin typeface="Aptos" panose="020B0004020202020204" pitchFamily="34" charset="0"/>
+                      <a:endParaRPr b="0" lang="es-ES" sz="1200" spc="-1" strike="noStrike">
+                        <a:latin typeface="Arial"/>
                       </a:endParaRPr>
                     </a:p>
                   </a:txBody>
                   <a:tcPr marL="7560" marR="7560">
                     <a:lnL w="12240">
                       <a:solidFill>
-                        <a:srgbClr val="FFFFFF"/>
+                        <a:srgbClr val="ffffff"/>
                       </a:solidFill>
                     </a:lnL>
                     <a:lnR w="12240">
                       <a:solidFill>
-                        <a:srgbClr val="FFFFFF"/>
+                        <a:srgbClr val="ffffff"/>
                       </a:solidFill>
                     </a:lnR>
                     <a:lnT w="12240">
                       <a:solidFill>
-                        <a:srgbClr val="FFFFFF"/>
+                        <a:srgbClr val="ffffff"/>
                       </a:solidFill>
                     </a:lnT>
                     <a:lnB w="12240">
                       <a:solidFill>
-                        <a:srgbClr val="FFFFFF"/>
+                        <a:srgbClr val="ffffff"/>
                       </a:solidFill>
                     </a:lnB>
                     <a:solidFill>
-                      <a:srgbClr val="E7EAEC"/>
+                      <a:srgbClr val="e7eaec"/>
                     </a:solidFill>
                   </a:tcPr>
                 </a:tc>
                 <a:tc>
                   <a:txBody>
-                    <a:bodyPr/>
-                    <a:lstStyle/>
+                    <a:bodyPr lIns="7560" rIns="7560">
+                      <a:noAutofit/>
+                    </a:bodyPr>
                     <a:p>
                       <a:pPr algn="ctr">
                         <a:lnSpc>
@@ -4115,49 +3528,52 @@
                         </a:lnSpc>
                       </a:pPr>
                       <a:r>
-                        <a:rPr lang="es-ES" sz="1200" b="1" u="sng" strike="noStrike" spc="-1" dirty="0">
+                        <a:rPr b="1" lang="es-ES" sz="1200" spc="-1" strike="noStrike" u="sng">
                           <a:solidFill>
                             <a:srgbClr val="000000"/>
                           </a:solidFill>
-                          <a:latin typeface="Aptos" panose="020B0004020202020204" pitchFamily="34" charset="0"/>
+                          <a:uFillTx/>
+                          <a:latin typeface="Aptos"/>
+                          <a:ea typeface="DejaVu Sans"/>
                         </a:rPr>
                         <a:t>Frecuencia</a:t>
                       </a:r>
-                      <a:endParaRPr lang="es-ES" sz="1200" b="1" u="sng" strike="noStrike" spc="-1" dirty="0">
-                        <a:latin typeface="Aptos" panose="020B0004020202020204" pitchFamily="34" charset="0"/>
+                      <a:endParaRPr b="0" lang="es-ES" sz="1200" spc="-1" strike="noStrike">
+                        <a:latin typeface="Arial"/>
                       </a:endParaRPr>
                     </a:p>
                   </a:txBody>
                   <a:tcPr marL="7560" marR="7560">
                     <a:lnL w="12240">
                       <a:solidFill>
-                        <a:srgbClr val="FFFFFF"/>
+                        <a:srgbClr val="ffffff"/>
                       </a:solidFill>
                     </a:lnL>
                     <a:lnR w="12240">
                       <a:solidFill>
-                        <a:srgbClr val="FFFFFF"/>
+                        <a:srgbClr val="ffffff"/>
                       </a:solidFill>
                     </a:lnR>
                     <a:lnT w="12240">
                       <a:solidFill>
-                        <a:srgbClr val="FFFFFF"/>
+                        <a:srgbClr val="ffffff"/>
                       </a:solidFill>
                     </a:lnT>
                     <a:lnB w="12240">
                       <a:solidFill>
-                        <a:srgbClr val="FFFFFF"/>
+                        <a:srgbClr val="ffffff"/>
                       </a:solidFill>
                     </a:lnB>
                     <a:solidFill>
-                      <a:srgbClr val="E7EAEC"/>
+                      <a:srgbClr val="e7eaec"/>
                     </a:solidFill>
                   </a:tcPr>
                 </a:tc>
                 <a:tc>
                   <a:txBody>
-                    <a:bodyPr/>
-                    <a:lstStyle/>
+                    <a:bodyPr lIns="7560" rIns="7560">
+                      <a:noAutofit/>
+                    </a:bodyPr>
                     <a:p>
                       <a:pPr algn="ctr">
                         <a:lnSpc>
@@ -4165,49 +3581,52 @@
                         </a:lnSpc>
                       </a:pPr>
                       <a:r>
-                        <a:rPr lang="es-ES" sz="1200" b="1" u="sng" strike="noStrike" spc="-1" dirty="0">
+                        <a:rPr b="1" lang="es-ES" sz="1200" spc="-1" strike="noStrike" u="sng">
                           <a:solidFill>
                             <a:srgbClr val="000000"/>
                           </a:solidFill>
-                          <a:latin typeface="Aptos" panose="020B0004020202020204" pitchFamily="34" charset="0"/>
+                          <a:uFillTx/>
+                          <a:latin typeface="Aptos"/>
+                          <a:ea typeface="DejaVu Sans"/>
                         </a:rPr>
                         <a:t>Proteína</a:t>
                       </a:r>
-                      <a:endParaRPr lang="es-ES" sz="1200" b="1" u="sng" strike="noStrike" spc="-1" dirty="0">
-                        <a:latin typeface="Aptos" panose="020B0004020202020204" pitchFamily="34" charset="0"/>
+                      <a:endParaRPr b="0" lang="es-ES" sz="1200" spc="-1" strike="noStrike">
+                        <a:latin typeface="Arial"/>
                       </a:endParaRPr>
                     </a:p>
                   </a:txBody>
                   <a:tcPr marL="7560" marR="7560">
                     <a:lnL w="12240">
                       <a:solidFill>
-                        <a:srgbClr val="FFFFFF"/>
+                        <a:srgbClr val="ffffff"/>
                       </a:solidFill>
                     </a:lnL>
                     <a:lnR w="12240">
                       <a:solidFill>
-                        <a:srgbClr val="FFFFFF"/>
+                        <a:srgbClr val="ffffff"/>
                       </a:solidFill>
                     </a:lnR>
                     <a:lnT w="12240">
                       <a:solidFill>
-                        <a:srgbClr val="FFFFFF"/>
+                        <a:srgbClr val="ffffff"/>
                       </a:solidFill>
                     </a:lnT>
                     <a:lnB w="12240">
                       <a:solidFill>
-                        <a:srgbClr val="FFFFFF"/>
+                        <a:srgbClr val="ffffff"/>
                       </a:solidFill>
                     </a:lnB>
                     <a:solidFill>
-                      <a:srgbClr val="E7EAEC"/>
+                      <a:srgbClr val="e7eaec"/>
                     </a:solidFill>
                   </a:tcPr>
                 </a:tc>
                 <a:tc>
                   <a:txBody>
-                    <a:bodyPr/>
-                    <a:lstStyle/>
+                    <a:bodyPr lIns="7560" rIns="7560">
+                      <a:noAutofit/>
+                    </a:bodyPr>
                     <a:p>
                       <a:pPr algn="ctr">
                         <a:lnSpc>
@@ -4215,49 +3634,52 @@
                         </a:lnSpc>
                       </a:pPr>
                       <a:r>
-                        <a:rPr lang="es-ES" sz="1200" b="1" u="sng" strike="noStrike" spc="-1" dirty="0" err="1">
+                        <a:rPr b="1" lang="es-ES" sz="1200" spc="-1" strike="noStrike" u="sng">
                           <a:solidFill>
                             <a:srgbClr val="000000"/>
                           </a:solidFill>
-                          <a:latin typeface="Aptos" panose="020B0004020202020204" pitchFamily="34" charset="0"/>
+                          <a:uFillTx/>
+                          <a:latin typeface="Aptos"/>
+                          <a:ea typeface="DejaVu Sans"/>
                         </a:rPr>
                         <a:t>Nomenclatura.p</a:t>
                       </a:r>
-                      <a:endParaRPr lang="es-ES" sz="1200" b="1" u="sng" strike="noStrike" spc="-1" dirty="0">
-                        <a:latin typeface="Aptos" panose="020B0004020202020204" pitchFamily="34" charset="0"/>
+                      <a:endParaRPr b="0" lang="es-ES" sz="1200" spc="-1" strike="noStrike">
+                        <a:latin typeface="Arial"/>
                       </a:endParaRPr>
                     </a:p>
                   </a:txBody>
                   <a:tcPr marL="7560" marR="7560">
                     <a:lnL w="12240">
                       <a:solidFill>
-                        <a:srgbClr val="FFFFFF"/>
+                        <a:srgbClr val="ffffff"/>
                       </a:solidFill>
                     </a:lnL>
                     <a:lnR w="12240">
                       <a:solidFill>
-                        <a:srgbClr val="FFFFFF"/>
+                        <a:srgbClr val="ffffff"/>
                       </a:solidFill>
                     </a:lnR>
                     <a:lnT w="12240">
                       <a:solidFill>
-                        <a:srgbClr val="FFFFFF"/>
+                        <a:srgbClr val="ffffff"/>
                       </a:solidFill>
                     </a:lnT>
                     <a:lnB w="12240">
                       <a:solidFill>
-                        <a:srgbClr val="FFFFFF"/>
+                        <a:srgbClr val="ffffff"/>
                       </a:solidFill>
                     </a:lnB>
                     <a:solidFill>
-                      <a:srgbClr val="E7EAEC"/>
+                      <a:srgbClr val="e7eaec"/>
                     </a:solidFill>
                   </a:tcPr>
                 </a:tc>
                 <a:tc>
                   <a:txBody>
-                    <a:bodyPr/>
-                    <a:lstStyle/>
+                    <a:bodyPr lIns="7560" rIns="7560">
+                      <a:noAutofit/>
+                    </a:bodyPr>
                     <a:p>
                       <a:pPr algn="ctr">
                         <a:lnSpc>
@@ -4265,49 +3687,52 @@
                         </a:lnSpc>
                       </a:pPr>
                       <a:r>
-                        <a:rPr lang="es-ES" sz="1200" b="1" u="sng" strike="noStrike" spc="-1" dirty="0">
+                        <a:rPr b="1" lang="es-ES" sz="1200" spc="-1" strike="noStrike" u="sng">
                           <a:solidFill>
                             <a:srgbClr val="000000"/>
                           </a:solidFill>
-                          <a:latin typeface="Aptos" panose="020B0004020202020204" pitchFamily="34" charset="0"/>
+                          <a:uFillTx/>
+                          <a:latin typeface="Aptos"/>
+                          <a:ea typeface="DejaVu Sans"/>
                         </a:rPr>
                         <a:t>Efecto</a:t>
                       </a:r>
-                      <a:endParaRPr lang="es-ES" sz="1200" b="1" u="sng" strike="noStrike" spc="-1" dirty="0">
-                        <a:latin typeface="Aptos" panose="020B0004020202020204" pitchFamily="34" charset="0"/>
+                      <a:endParaRPr b="0" lang="es-ES" sz="1200" spc="-1" strike="noStrike">
+                        <a:latin typeface="Arial"/>
                       </a:endParaRPr>
                     </a:p>
                   </a:txBody>
                   <a:tcPr marL="7560" marR="7560">
                     <a:lnL w="12240">
                       <a:solidFill>
-                        <a:srgbClr val="FFFFFF"/>
+                        <a:srgbClr val="ffffff"/>
                       </a:solidFill>
                     </a:lnL>
                     <a:lnR w="12240">
                       <a:solidFill>
-                        <a:srgbClr val="FFFFFF"/>
+                        <a:srgbClr val="ffffff"/>
                       </a:solidFill>
                     </a:lnR>
                     <a:lnT w="12240">
                       <a:solidFill>
-                        <a:srgbClr val="FFFFFF"/>
+                        <a:srgbClr val="ffffff"/>
                       </a:solidFill>
                     </a:lnT>
                     <a:lnB w="12240">
                       <a:solidFill>
-                        <a:srgbClr val="FFFFFF"/>
+                        <a:srgbClr val="ffffff"/>
                       </a:solidFill>
                     </a:lnB>
                     <a:solidFill>
-                      <a:srgbClr val="E7EAEC"/>
+                      <a:srgbClr val="e7eaec"/>
                     </a:solidFill>
                   </a:tcPr>
                 </a:tc>
                 <a:tc>
                   <a:txBody>
-                    <a:bodyPr/>
-                    <a:lstStyle/>
+                    <a:bodyPr lIns="7560" rIns="7560">
+                      <a:noAutofit/>
+                    </a:bodyPr>
                     <a:p>
                       <a:pPr algn="ctr">
                         <a:lnSpc>
@@ -4315,49 +3740,52 @@
                         </a:lnSpc>
                       </a:pPr>
                       <a:r>
-                        <a:rPr lang="es-ES" sz="1200" b="1" u="sng" strike="noStrike" spc="-1" dirty="0">
+                        <a:rPr b="1" lang="es-ES" sz="1200" spc="-1" strike="noStrike" u="sng">
                           <a:solidFill>
                             <a:srgbClr val="000000"/>
                           </a:solidFill>
-                          <a:latin typeface="Aptos" panose="020B0004020202020204" pitchFamily="34" charset="0"/>
+                          <a:uFillTx/>
+                          <a:latin typeface="Aptos"/>
+                          <a:ea typeface="DejaVu Sans"/>
                         </a:rPr>
                         <a:t>SIFT</a:t>
                       </a:r>
-                      <a:endParaRPr lang="es-ES" sz="1200" b="1" u="sng" strike="noStrike" spc="-1" dirty="0">
-                        <a:latin typeface="Aptos" panose="020B0004020202020204" pitchFamily="34" charset="0"/>
+                      <a:endParaRPr b="0" lang="es-ES" sz="1200" spc="-1" strike="noStrike">
+                        <a:latin typeface="Arial"/>
                       </a:endParaRPr>
                     </a:p>
                   </a:txBody>
                   <a:tcPr marL="7560" marR="7560">
                     <a:lnL w="12240">
                       <a:solidFill>
-                        <a:srgbClr val="FFFFFF"/>
+                        <a:srgbClr val="ffffff"/>
                       </a:solidFill>
                     </a:lnL>
                     <a:lnR w="12240">
                       <a:solidFill>
-                        <a:srgbClr val="FFFFFF"/>
+                        <a:srgbClr val="ffffff"/>
                       </a:solidFill>
                     </a:lnR>
                     <a:lnT w="12240">
                       <a:solidFill>
-                        <a:srgbClr val="FFFFFF"/>
+                        <a:srgbClr val="ffffff"/>
                       </a:solidFill>
                     </a:lnT>
                     <a:lnB w="12240">
                       <a:solidFill>
-                        <a:srgbClr val="FFFFFF"/>
+                        <a:srgbClr val="ffffff"/>
                       </a:solidFill>
                     </a:lnB>
                     <a:solidFill>
-                      <a:srgbClr val="E7EAEC"/>
+                      <a:srgbClr val="e7eaec"/>
                     </a:solidFill>
                   </a:tcPr>
                 </a:tc>
                 <a:tc>
                   <a:txBody>
-                    <a:bodyPr/>
-                    <a:lstStyle/>
+                    <a:bodyPr lIns="7560" rIns="7560">
+                      <a:noAutofit/>
+                    </a:bodyPr>
                     <a:p>
                       <a:pPr algn="ctr">
                         <a:lnSpc>
@@ -4365,53 +3793,52 @@
                         </a:lnSpc>
                       </a:pPr>
                       <a:r>
-                        <a:rPr lang="es-ES" sz="1200" b="1" u="sng" strike="noStrike" spc="-1" dirty="0" err="1">
+                        <a:rPr b="1" lang="es-ES" sz="1200" spc="-1" strike="noStrike" u="sng">
                           <a:solidFill>
                             <a:srgbClr val="000000"/>
                           </a:solidFill>
-                          <a:latin typeface="Aptos" panose="020B0004020202020204" pitchFamily="34" charset="0"/>
+                          <a:uFillTx/>
+                          <a:latin typeface="Aptos"/>
+                          <a:ea typeface="DejaVu Sans"/>
                         </a:rPr>
                         <a:t>PolyPhen</a:t>
                       </a:r>
-                      <a:endParaRPr lang="es-ES" sz="1200" b="1" u="sng" strike="noStrike" spc="-1" dirty="0">
-                        <a:latin typeface="Aptos" panose="020B0004020202020204" pitchFamily="34" charset="0"/>
+                      <a:endParaRPr b="0" lang="es-ES" sz="1200" spc="-1" strike="noStrike">
+                        <a:latin typeface="Arial"/>
                       </a:endParaRPr>
                     </a:p>
                   </a:txBody>
                   <a:tcPr marL="7560" marR="7560">
                     <a:lnL w="12240">
                       <a:solidFill>
-                        <a:srgbClr val="FFFFFF"/>
+                        <a:srgbClr val="ffffff"/>
                       </a:solidFill>
                     </a:lnL>
-                    <a:lnR w="12240" cap="flat" cmpd="sng" algn="ctr">
-                      <a:solidFill>
-                        <a:srgbClr val="FFFFFF"/>
-                      </a:solidFill>
-                      <a:prstDash val="solid"/>
-                      <a:round/>
-                      <a:headEnd type="none" w="med" len="med"/>
-                      <a:tailEnd type="none" w="med" len="med"/>
+                    <a:lnR w="12240">
+                      <a:solidFill>
+                        <a:srgbClr val="ffffff"/>
+                      </a:solidFill>
                     </a:lnR>
                     <a:lnT w="12240">
                       <a:solidFill>
-                        <a:srgbClr val="FFFFFF"/>
+                        <a:srgbClr val="ffffff"/>
                       </a:solidFill>
                     </a:lnT>
                     <a:lnB w="12240">
                       <a:solidFill>
-                        <a:srgbClr val="FFFFFF"/>
+                        <a:srgbClr val="ffffff"/>
                       </a:solidFill>
                     </a:lnB>
                     <a:solidFill>
-                      <a:srgbClr val="E7EAEC"/>
+                      <a:srgbClr val="e7eaec"/>
                     </a:solidFill>
                   </a:tcPr>
                 </a:tc>
                 <a:tc>
                   <a:txBody>
-                    <a:bodyPr/>
-                    <a:lstStyle/>
+                    <a:bodyPr lIns="7560" rIns="7560">
+                      <a:noAutofit/>
+                    </a:bodyPr>
                     <a:p>
                       <a:pPr algn="ctr">
                         <a:lnSpc>
@@ -4419,51 +3846,52 @@
                         </a:lnSpc>
                       </a:pPr>
                       <a:r>
-                        <a:rPr lang="es-ES" sz="1200" b="1" u="sng" strike="noStrike" spc="-1" dirty="0">
-                          <a:latin typeface="Aptos" panose="020B0004020202020204" pitchFamily="34" charset="0"/>
+                        <a:rPr b="1" lang="es-ES" sz="1200" spc="-1" strike="noStrike" u="sng">
+                          <a:solidFill>
+                            <a:srgbClr val="000000"/>
+                          </a:solidFill>
+                          <a:uFillTx/>
+                          <a:latin typeface="Aptos"/>
+                          <a:ea typeface="DejaVu Sans"/>
                         </a:rPr>
                         <a:t>MIM</a:t>
                       </a:r>
+                      <a:endParaRPr b="0" lang="es-ES" sz="1200" spc="-1" strike="noStrike">
+                        <a:latin typeface="Arial"/>
+                      </a:endParaRPr>
                     </a:p>
                   </a:txBody>
                   <a:tcPr marL="7560" marR="7560">
                     <a:lnL w="12240">
                       <a:solidFill>
-                        <a:srgbClr val="FFFFFF"/>
+                        <a:srgbClr val="ffffff"/>
                       </a:solidFill>
                     </a:lnL>
-                    <a:lnR w="12240" cap="flat" cmpd="sng" algn="ctr">
-                      <a:solidFill>
-                        <a:srgbClr val="FFFFFF"/>
-                      </a:solidFill>
-                      <a:prstDash val="solid"/>
-                      <a:round/>
-                      <a:headEnd type="none" w="med" len="med"/>
-                      <a:tailEnd type="none" w="med" len="med"/>
+                    <a:lnR w="12240">
+                      <a:solidFill>
+                        <a:srgbClr val="ffffff"/>
+                      </a:solidFill>
                     </a:lnR>
                     <a:lnT w="12240">
                       <a:solidFill>
-                        <a:srgbClr val="FFFFFF"/>
+                        <a:srgbClr val="ffffff"/>
                       </a:solidFill>
                     </a:lnT>
-                    <a:lnB w="12240" cap="flat" cmpd="sng" algn="ctr">
-                      <a:solidFill>
-                        <a:srgbClr val="FFFFFF"/>
-                      </a:solidFill>
-                      <a:prstDash val="solid"/>
-                      <a:round/>
-                      <a:headEnd type="none" w="med" len="med"/>
-                      <a:tailEnd type="none" w="med" len="med"/>
+                    <a:lnB w="12240">
+                      <a:solidFill>
+                        <a:srgbClr val="ffffff"/>
+                      </a:solidFill>
                     </a:lnB>
                     <a:solidFill>
-                      <a:srgbClr val="E7EAEC"/>
+                      <a:srgbClr val="e7eaec"/>
                     </a:solidFill>
                   </a:tcPr>
                 </a:tc>
                 <a:tc>
                   <a:txBody>
-                    <a:bodyPr/>
-                    <a:lstStyle/>
+                    <a:bodyPr lIns="7560" rIns="7560">
+                      <a:noAutofit/>
+                    </a:bodyPr>
                     <a:p>
                       <a:pPr algn="ctr">
                         <a:lnSpc>
@@ -4471,51 +3899,52 @@
                         </a:lnSpc>
                       </a:pPr>
                       <a:r>
-                        <a:rPr lang="es-ES" sz="1200" b="1" u="sng" strike="noStrike" spc="-1" dirty="0">
-                          <a:latin typeface="Aptos" panose="020B0004020202020204" pitchFamily="34" charset="0"/>
+                        <a:rPr b="1" lang="es-ES" sz="1200" spc="-1" strike="noStrike" u="sng">
+                          <a:solidFill>
+                            <a:srgbClr val="000000"/>
+                          </a:solidFill>
+                          <a:uFillTx/>
+                          <a:latin typeface="Aptos"/>
+                          <a:ea typeface="DejaVu Sans"/>
                         </a:rPr>
                         <a:t>Herencia</a:t>
                       </a:r>
+                      <a:endParaRPr b="0" lang="es-ES" sz="1200" spc="-1" strike="noStrike">
+                        <a:latin typeface="Arial"/>
+                      </a:endParaRPr>
                     </a:p>
                   </a:txBody>
                   <a:tcPr marL="7560" marR="7560">
                     <a:lnL w="12240">
                       <a:solidFill>
-                        <a:srgbClr val="FFFFFF"/>
+                        <a:srgbClr val="ffffff"/>
                       </a:solidFill>
                     </a:lnL>
-                    <a:lnR w="12240" cap="flat" cmpd="sng" algn="ctr">
-                      <a:solidFill>
-                        <a:srgbClr val="FFFFFF"/>
-                      </a:solidFill>
-                      <a:prstDash val="solid"/>
-                      <a:round/>
-                      <a:headEnd type="none" w="med" len="med"/>
-                      <a:tailEnd type="none" w="med" len="med"/>
+                    <a:lnR w="12240">
+                      <a:solidFill>
+                        <a:srgbClr val="ffffff"/>
+                      </a:solidFill>
                     </a:lnR>
                     <a:lnT w="12240">
                       <a:solidFill>
-                        <a:srgbClr val="FFFFFF"/>
+                        <a:srgbClr val="ffffff"/>
                       </a:solidFill>
                     </a:lnT>
-                    <a:lnB w="12240" cap="flat" cmpd="sng" algn="ctr">
-                      <a:solidFill>
-                        <a:srgbClr val="FFFFFF"/>
-                      </a:solidFill>
-                      <a:prstDash val="solid"/>
-                      <a:round/>
-                      <a:headEnd type="none" w="med" len="med"/>
-                      <a:tailEnd type="none" w="med" len="med"/>
+                    <a:lnB w="12240">
+                      <a:solidFill>
+                        <a:srgbClr val="ffffff"/>
+                      </a:solidFill>
                     </a:lnB>
                     <a:solidFill>
-                      <a:srgbClr val="E7EAEC"/>
+                      <a:srgbClr val="e7eaec"/>
                     </a:solidFill>
                   </a:tcPr>
                 </a:tc>
                 <a:tc>
                   <a:txBody>
-                    <a:bodyPr/>
-                    <a:lstStyle/>
+                    <a:bodyPr lIns="7560" rIns="7560">
+                      <a:noAutofit/>
+                    </a:bodyPr>
                     <a:p>
                       <a:pPr algn="ctr">
                         <a:lnSpc>
@@ -4523,57 +3952,54 @@
                         </a:lnSpc>
                       </a:pPr>
                       <a:r>
-                        <a:rPr lang="es-ES" sz="1200" b="1" u="sng" strike="noStrike" spc="-1" dirty="0" err="1">
-                          <a:latin typeface="Aptos" panose="020B0004020202020204" pitchFamily="34" charset="0"/>
+                        <a:rPr b="1" lang="es-ES" sz="1200" spc="-1" strike="noStrike" u="sng">
+                          <a:solidFill>
+                            <a:srgbClr val="000000"/>
+                          </a:solidFill>
+                          <a:uFillTx/>
+                          <a:latin typeface="Aptos"/>
+                          <a:ea typeface="DejaVu Sans"/>
                         </a:rPr>
                         <a:t>Pathway</a:t>
                       </a:r>
-                      <a:endParaRPr lang="es-ES" sz="1200" b="1" u="sng" strike="noStrike" spc="-1" dirty="0">
-                        <a:latin typeface="Aptos" panose="020B0004020202020204" pitchFamily="34" charset="0"/>
+                      <a:endParaRPr b="0" lang="es-ES" sz="1200" spc="-1" strike="noStrike">
+                        <a:latin typeface="Arial"/>
                       </a:endParaRPr>
                     </a:p>
                   </a:txBody>
                   <a:tcPr marL="7560" marR="7560">
                     <a:lnL w="12240">
                       <a:solidFill>
-                        <a:srgbClr val="FFFFFF"/>
+                        <a:srgbClr val="ffffff"/>
                       </a:solidFill>
                     </a:lnL>
                     <a:lnR w="12240">
                       <a:solidFill>
-                        <a:srgbClr val="FFFFFF"/>
+                        <a:srgbClr val="ffffff"/>
                       </a:solidFill>
                     </a:lnR>
                     <a:lnT w="12240">
                       <a:solidFill>
-                        <a:srgbClr val="FFFFFF"/>
+                        <a:srgbClr val="ffffff"/>
                       </a:solidFill>
                     </a:lnT>
-                    <a:lnB w="12240" cap="flat" cmpd="sng" algn="ctr">
-                      <a:solidFill>
-                        <a:srgbClr val="FFFFFF"/>
-                      </a:solidFill>
-                      <a:prstDash val="solid"/>
-                      <a:round/>
-                      <a:headEnd type="none" w="med" len="med"/>
-                      <a:tailEnd type="none" w="med" len="med"/>
+                    <a:lnB w="12240">
+                      <a:solidFill>
+                        <a:srgbClr val="ffffff"/>
+                      </a:solidFill>
                     </a:lnB>
                     <a:solidFill>
-                      <a:srgbClr val="E7EAEC"/>
+                      <a:srgbClr val="e7eaec"/>
                     </a:solidFill>
                   </a:tcPr>
                 </a:tc>
-                <a:extLst>
-                  <a:ext uri="{0D108BD9-81ED-4DB2-BD59-A6C34878D82A}">
-                    <a16:rowId xmlns:a16="http://schemas.microsoft.com/office/drawing/2014/main" val="10000"/>
-                  </a:ext>
-                </a:extLst>
               </a:tr>
-              <a:tr h="600805">
+              <a:tr h="774360">
                 <a:tc>
                   <a:txBody>
-                    <a:bodyPr/>
-                    <a:lstStyle/>
+                    <a:bodyPr lIns="7560" rIns="7560">
+                      <a:noAutofit/>
+                    </a:bodyPr>
                     <a:p>
                       <a:pPr>
                         <a:lnSpc>
@@ -4581,49 +4007,51 @@
                         </a:lnSpc>
                       </a:pPr>
                       <a:r>
-                        <a:rPr lang="es-ES" sz="1200" b="0" strike="noStrike" spc="-1" dirty="0">
+                        <a:rPr b="0" lang="es-ES" sz="1200" spc="-1" strike="noStrike">
                           <a:solidFill>
                             <a:srgbClr val="000000"/>
                           </a:solidFill>
-                          <a:latin typeface="Aptos" panose="020B0004020202020204" pitchFamily="34" charset="0"/>
+                          <a:latin typeface="Aptos"/>
+                          <a:ea typeface="DejaVu Sans"/>
                         </a:rPr>
                         <a:t>LEPR</a:t>
                       </a:r>
-                      <a:endParaRPr lang="es-ES" sz="1200" b="0" strike="noStrike" spc="-1" dirty="0">
-                        <a:latin typeface="Aptos" panose="020B0004020202020204" pitchFamily="34" charset="0"/>
+                      <a:endParaRPr b="0" lang="es-ES" sz="1200" spc="-1" strike="noStrike">
+                        <a:latin typeface="Arial"/>
                       </a:endParaRPr>
                     </a:p>
                   </a:txBody>
                   <a:tcPr marL="7560" marR="7560">
                     <a:lnL w="12240">
                       <a:solidFill>
-                        <a:srgbClr val="FFFFFF"/>
+                        <a:srgbClr val="ffffff"/>
                       </a:solidFill>
                     </a:lnL>
                     <a:lnR w="12240">
                       <a:solidFill>
-                        <a:srgbClr val="FFFFFF"/>
+                        <a:srgbClr val="ffffff"/>
                       </a:solidFill>
                     </a:lnR>
                     <a:lnT w="12240">
                       <a:solidFill>
-                        <a:srgbClr val="FFFFFF"/>
+                        <a:srgbClr val="ffffff"/>
                       </a:solidFill>
                     </a:lnT>
                     <a:lnB w="12240">
                       <a:solidFill>
-                        <a:srgbClr val="FFFFFF"/>
+                        <a:srgbClr val="ffffff"/>
                       </a:solidFill>
                     </a:lnB>
                     <a:solidFill>
-                      <a:srgbClr val="E7EAEC"/>
+                      <a:srgbClr val="e7eaec"/>
                     </a:solidFill>
                   </a:tcPr>
                 </a:tc>
                 <a:tc>
                   <a:txBody>
-                    <a:bodyPr/>
-                    <a:lstStyle/>
+                    <a:bodyPr lIns="7560" rIns="7560">
+                      <a:noAutofit/>
+                    </a:bodyPr>
                     <a:p>
                       <a:pPr algn="ctr">
                         <a:lnSpc>
@@ -4631,49 +4059,51 @@
                         </a:lnSpc>
                       </a:pPr>
                       <a:r>
-                        <a:rPr lang="es-ES" sz="1200" b="0" strike="noStrike" spc="-1" dirty="0">
+                        <a:rPr b="0" lang="es-ES" sz="1200" spc="-1" strike="noStrike">
                           <a:solidFill>
                             <a:srgbClr val="000000"/>
                           </a:solidFill>
-                          <a:latin typeface="Aptos" panose="020B0004020202020204" pitchFamily="34" charset="0"/>
+                          <a:latin typeface="Aptos"/>
+                          <a:ea typeface="DejaVu Sans"/>
                         </a:rPr>
                         <a:t>1:65609984</a:t>
                       </a:r>
-                      <a:endParaRPr lang="es-ES" sz="1200" b="0" strike="noStrike" spc="-1" dirty="0">
-                        <a:latin typeface="Aptos" panose="020B0004020202020204" pitchFamily="34" charset="0"/>
+                      <a:endParaRPr b="0" lang="es-ES" sz="1200" spc="-1" strike="noStrike">
+                        <a:latin typeface="Arial"/>
                       </a:endParaRPr>
                     </a:p>
                   </a:txBody>
                   <a:tcPr marL="7560" marR="7560">
                     <a:lnL w="12240">
                       <a:solidFill>
-                        <a:srgbClr val="FFFFFF"/>
+                        <a:srgbClr val="ffffff"/>
                       </a:solidFill>
                     </a:lnL>
                     <a:lnR w="12240">
                       <a:solidFill>
-                        <a:srgbClr val="FFFFFF"/>
+                        <a:srgbClr val="ffffff"/>
                       </a:solidFill>
                     </a:lnR>
                     <a:lnT w="12240">
                       <a:solidFill>
-                        <a:srgbClr val="FFFFFF"/>
+                        <a:srgbClr val="ffffff"/>
                       </a:solidFill>
                     </a:lnT>
                     <a:lnB w="12240">
                       <a:solidFill>
-                        <a:srgbClr val="FFFFFF"/>
+                        <a:srgbClr val="ffffff"/>
                       </a:solidFill>
                     </a:lnB>
                     <a:solidFill>
-                      <a:srgbClr val="E7EAEC"/>
+                      <a:srgbClr val="e7eaec"/>
                     </a:solidFill>
                   </a:tcPr>
                 </a:tc>
                 <a:tc>
                   <a:txBody>
-                    <a:bodyPr/>
-                    <a:lstStyle/>
+                    <a:bodyPr lIns="7560" rIns="7560">
+                      <a:noAutofit/>
+                    </a:bodyPr>
                     <a:p>
                       <a:pPr algn="ctr">
                         <a:lnSpc>
@@ -4681,49 +4111,51 @@
                         </a:lnSpc>
                       </a:pPr>
                       <a:r>
-                        <a:rPr lang="es-ES" sz="1200" b="0" strike="noStrike" spc="-1">
+                        <a:rPr b="0" lang="es-ES" sz="1200" spc="-1" strike="noStrike">
                           <a:solidFill>
                             <a:srgbClr val="000000"/>
                           </a:solidFill>
-                          <a:latin typeface="Aptos" panose="020B0004020202020204" pitchFamily="34" charset="0"/>
+                          <a:latin typeface="Aptos"/>
+                          <a:ea typeface="DejaVu Sans"/>
                         </a:rPr>
                         <a:t>ENST00000349533.11:c.1790del</a:t>
                       </a:r>
-                      <a:endParaRPr lang="es-ES" sz="1200" b="0" strike="noStrike" spc="-1">
-                        <a:latin typeface="Aptos" panose="020B0004020202020204" pitchFamily="34" charset="0"/>
+                      <a:endParaRPr b="0" lang="es-ES" sz="1200" spc="-1" strike="noStrike">
+                        <a:latin typeface="Arial"/>
                       </a:endParaRPr>
                     </a:p>
                   </a:txBody>
                   <a:tcPr marL="7560" marR="7560">
                     <a:lnL w="12240">
                       <a:solidFill>
-                        <a:srgbClr val="FFFFFF"/>
+                        <a:srgbClr val="ffffff"/>
                       </a:solidFill>
                     </a:lnL>
                     <a:lnR w="12240">
                       <a:solidFill>
-                        <a:srgbClr val="FFFFFF"/>
+                        <a:srgbClr val="ffffff"/>
                       </a:solidFill>
                     </a:lnR>
                     <a:lnT w="12240">
                       <a:solidFill>
-                        <a:srgbClr val="FFFFFF"/>
+                        <a:srgbClr val="ffffff"/>
                       </a:solidFill>
                     </a:lnT>
                     <a:lnB w="12240">
                       <a:solidFill>
-                        <a:srgbClr val="FFFFFF"/>
+                        <a:srgbClr val="ffffff"/>
                       </a:solidFill>
                     </a:lnB>
                     <a:solidFill>
-                      <a:srgbClr val="E7EAEC"/>
+                      <a:srgbClr val="e7eaec"/>
                     </a:solidFill>
                   </a:tcPr>
                 </a:tc>
                 <a:tc>
                   <a:txBody>
-                    <a:bodyPr/>
-                    <a:lstStyle/>
+                    <a:bodyPr lIns="7560" rIns="7560">
+                      <a:noAutofit/>
+                    </a:bodyPr>
                     <a:p>
                       <a:pPr algn="ctr">
                         <a:lnSpc>
@@ -4731,49 +4163,51 @@
                         </a:lnSpc>
                       </a:pPr>
                       <a:r>
-                        <a:rPr lang="es-ES" sz="1200" b="0" strike="noStrike" spc="-1">
+                        <a:rPr b="0" lang="es-ES" sz="1200" spc="-1" strike="noStrike">
                           <a:solidFill>
                             <a:srgbClr val="000000"/>
                           </a:solidFill>
-                          <a:latin typeface="Aptos" panose="020B0004020202020204" pitchFamily="34" charset="0"/>
+                          <a:latin typeface="Aptos"/>
+                          <a:ea typeface="DejaVu Sans"/>
                         </a:rPr>
                         <a:t>Indel</a:t>
                       </a:r>
-                      <a:endParaRPr lang="es-ES" sz="1200" b="0" strike="noStrike" spc="-1" dirty="0">
-                        <a:latin typeface="Aptos" panose="020B0004020202020204" pitchFamily="34" charset="0"/>
+                      <a:endParaRPr b="0" lang="es-ES" sz="1200" spc="-1" strike="noStrike">
+                        <a:latin typeface="Arial"/>
                       </a:endParaRPr>
                     </a:p>
                   </a:txBody>
                   <a:tcPr marL="7560" marR="7560">
                     <a:lnL w="12240">
                       <a:solidFill>
-                        <a:srgbClr val="FFFFFF"/>
+                        <a:srgbClr val="ffffff"/>
                       </a:solidFill>
                     </a:lnL>
                     <a:lnR w="12240">
                       <a:solidFill>
-                        <a:srgbClr val="FFFFFF"/>
+                        <a:srgbClr val="ffffff"/>
                       </a:solidFill>
                     </a:lnR>
                     <a:lnT w="12240">
                       <a:solidFill>
-                        <a:srgbClr val="FFFFFF"/>
+                        <a:srgbClr val="ffffff"/>
                       </a:solidFill>
                     </a:lnT>
                     <a:lnB w="12240">
                       <a:solidFill>
-                        <a:srgbClr val="FFFFFF"/>
+                        <a:srgbClr val="ffffff"/>
                       </a:solidFill>
                     </a:lnB>
                     <a:solidFill>
-                      <a:srgbClr val="E7EAEC"/>
+                      <a:srgbClr val="e7eaec"/>
                     </a:solidFill>
                   </a:tcPr>
                 </a:tc>
                 <a:tc>
                   <a:txBody>
-                    <a:bodyPr/>
-                    <a:lstStyle/>
+                    <a:bodyPr lIns="7560" rIns="7560">
+                      <a:noAutofit/>
+                    </a:bodyPr>
                     <a:p>
                       <a:pPr algn="ctr">
                         <a:lnSpc>
@@ -4781,49 +4215,51 @@
                         </a:lnSpc>
                       </a:pPr>
                       <a:r>
-                        <a:rPr lang="es-ES" sz="1200" b="0" strike="noStrike" spc="-1" dirty="0">
+                        <a:rPr b="0" lang="es-ES" sz="1200" spc="-1" strike="noStrike">
                           <a:solidFill>
                             <a:srgbClr val="000000"/>
                           </a:solidFill>
-                          <a:latin typeface="Aptos" panose="020B0004020202020204" pitchFamily="34" charset="0"/>
+                          <a:latin typeface="Aptos"/>
+                          <a:ea typeface="DejaVu Sans"/>
                         </a:rPr>
                         <a:t>heterocigoto</a:t>
                       </a:r>
-                      <a:endParaRPr lang="es-ES" sz="1200" b="0" strike="noStrike" spc="-1" dirty="0">
-                        <a:latin typeface="Aptos" panose="020B0004020202020204" pitchFamily="34" charset="0"/>
+                      <a:endParaRPr b="0" lang="es-ES" sz="1200" spc="-1" strike="noStrike">
+                        <a:latin typeface="Arial"/>
                       </a:endParaRPr>
                     </a:p>
                   </a:txBody>
                   <a:tcPr marL="7560" marR="7560">
                     <a:lnL w="12240">
                       <a:solidFill>
-                        <a:srgbClr val="FFFFFF"/>
+                        <a:srgbClr val="ffffff"/>
                       </a:solidFill>
                     </a:lnL>
                     <a:lnR w="12240">
                       <a:solidFill>
-                        <a:srgbClr val="FFFFFF"/>
+                        <a:srgbClr val="ffffff"/>
                       </a:solidFill>
                     </a:lnR>
                     <a:lnT w="12240">
                       <a:solidFill>
-                        <a:srgbClr val="FFFFFF"/>
+                        <a:srgbClr val="ffffff"/>
                       </a:solidFill>
                     </a:lnT>
                     <a:lnB w="12240">
                       <a:solidFill>
-                        <a:srgbClr val="FFFFFF"/>
+                        <a:srgbClr val="ffffff"/>
                       </a:solidFill>
                     </a:lnB>
                     <a:solidFill>
-                      <a:srgbClr val="E7EAEC"/>
+                      <a:srgbClr val="e7eaec"/>
                     </a:solidFill>
                   </a:tcPr>
                 </a:tc>
                 <a:tc>
                   <a:txBody>
-                    <a:bodyPr/>
-                    <a:lstStyle/>
+                    <a:bodyPr lIns="7560" rIns="7560">
+                      <a:noAutofit/>
+                    </a:bodyPr>
                     <a:p>
                       <a:pPr algn="ctr">
                         <a:lnSpc>
@@ -4831,49 +4267,51 @@
                         </a:lnSpc>
                       </a:pPr>
                       <a:r>
-                        <a:rPr lang="es-ES" sz="1200" b="0" strike="noStrike" spc="-1" dirty="0">
+                        <a:rPr b="0" lang="es-ES" sz="1200" spc="-1" strike="noStrike">
                           <a:solidFill>
                             <a:srgbClr val="000000"/>
                           </a:solidFill>
-                          <a:latin typeface="Aptos" panose="020B0004020202020204" pitchFamily="34" charset="0"/>
+                          <a:latin typeface="Aptos"/>
+                          <a:ea typeface="DejaVu Sans"/>
                         </a:rPr>
                         <a:t>6.19 x 10-7 (mutación)</a:t>
                       </a:r>
-                      <a:endParaRPr lang="es-ES" sz="1200" b="0" strike="noStrike" spc="-1" dirty="0">
-                        <a:latin typeface="Aptos" panose="020B0004020202020204" pitchFamily="34" charset="0"/>
+                      <a:endParaRPr b="0" lang="es-ES" sz="1200" spc="-1" strike="noStrike">
+                        <a:latin typeface="Arial"/>
                       </a:endParaRPr>
                     </a:p>
                   </a:txBody>
                   <a:tcPr marL="7560" marR="7560">
                     <a:lnL w="12240">
                       <a:solidFill>
-                        <a:srgbClr val="FFFFFF"/>
+                        <a:srgbClr val="ffffff"/>
                       </a:solidFill>
                     </a:lnL>
                     <a:lnR w="12240">
                       <a:solidFill>
-                        <a:srgbClr val="FFFFFF"/>
+                        <a:srgbClr val="ffffff"/>
                       </a:solidFill>
                     </a:lnR>
                     <a:lnT w="12240">
                       <a:solidFill>
-                        <a:srgbClr val="FFFFFF"/>
+                        <a:srgbClr val="ffffff"/>
                       </a:solidFill>
                     </a:lnT>
                     <a:lnB w="12240">
                       <a:solidFill>
-                        <a:srgbClr val="FFFFFF"/>
+                        <a:srgbClr val="ffffff"/>
                       </a:solidFill>
                     </a:lnB>
                     <a:solidFill>
-                      <a:srgbClr val="E7EAEC"/>
+                      <a:srgbClr val="e7eaec"/>
                     </a:solidFill>
                   </a:tcPr>
                 </a:tc>
                 <a:tc>
                   <a:txBody>
-                    <a:bodyPr/>
-                    <a:lstStyle/>
+                    <a:bodyPr lIns="7560" rIns="7560">
+                      <a:noAutofit/>
+                    </a:bodyPr>
                     <a:p>
                       <a:pPr algn="ctr">
                         <a:lnSpc>
@@ -4881,49 +4319,51 @@
                         </a:lnSpc>
                       </a:pPr>
                       <a:r>
-                        <a:rPr lang="es-ES" sz="1200" b="0" strike="noStrike" spc="-1">
+                        <a:rPr b="0" lang="es-ES" sz="1200" spc="-1" strike="noStrike">
                           <a:solidFill>
                             <a:srgbClr val="000000"/>
                           </a:solidFill>
-                          <a:latin typeface="Aptos" panose="020B0004020202020204" pitchFamily="34" charset="0"/>
+                          <a:latin typeface="Aptos"/>
+                          <a:ea typeface="DejaVu Sans"/>
                         </a:rPr>
                         <a:t>ENST00000349533.11</a:t>
                       </a:r>
-                      <a:endParaRPr lang="es-ES" sz="1200" b="0" strike="noStrike" spc="-1">
-                        <a:latin typeface="Aptos" panose="020B0004020202020204" pitchFamily="34" charset="0"/>
+                      <a:endParaRPr b="0" lang="es-ES" sz="1200" spc="-1" strike="noStrike">
+                        <a:latin typeface="Arial"/>
                       </a:endParaRPr>
                     </a:p>
                   </a:txBody>
                   <a:tcPr marL="7560" marR="7560">
                     <a:lnL w="12240">
                       <a:solidFill>
-                        <a:srgbClr val="FFFFFF"/>
+                        <a:srgbClr val="ffffff"/>
                       </a:solidFill>
                     </a:lnL>
                     <a:lnR w="12240">
                       <a:solidFill>
-                        <a:srgbClr val="FFFFFF"/>
+                        <a:srgbClr val="ffffff"/>
                       </a:solidFill>
                     </a:lnR>
                     <a:lnT w="12240">
                       <a:solidFill>
-                        <a:srgbClr val="FFFFFF"/>
+                        <a:srgbClr val="ffffff"/>
                       </a:solidFill>
                     </a:lnT>
                     <a:lnB w="12240">
                       <a:solidFill>
-                        <a:srgbClr val="FFFFFF"/>
+                        <a:srgbClr val="ffffff"/>
                       </a:solidFill>
                     </a:lnB>
                     <a:solidFill>
-                      <a:srgbClr val="E7EAEC"/>
+                      <a:srgbClr val="e7eaec"/>
                     </a:solidFill>
                   </a:tcPr>
                 </a:tc>
                 <a:tc>
                   <a:txBody>
-                    <a:bodyPr/>
-                    <a:lstStyle/>
+                    <a:bodyPr lIns="7560" rIns="7560">
+                      <a:noAutofit/>
+                    </a:bodyPr>
                     <a:p>
                       <a:pPr algn="ctr">
                         <a:lnSpc>
@@ -4931,49 +4371,51 @@
                         </a:lnSpc>
                       </a:pPr>
                       <a:r>
-                        <a:rPr lang="es-ES" sz="1200" b="0" strike="noStrike" spc="-1" dirty="0">
+                        <a:rPr b="0" lang="es-ES" sz="1200" spc="-1" strike="noStrike">
                           <a:solidFill>
                             <a:srgbClr val="000000"/>
                           </a:solidFill>
-                          <a:latin typeface="Aptos" panose="020B0004020202020204" pitchFamily="34" charset="0"/>
+                          <a:latin typeface="Aptos"/>
+                          <a:ea typeface="DejaVu Sans"/>
                         </a:rPr>
                         <a:t>ENSP00000330393.7:p.Ser597IlefsTer20</a:t>
                       </a:r>
-                      <a:endParaRPr lang="es-ES" sz="1200" b="0" strike="noStrike" spc="-1" dirty="0">
-                        <a:latin typeface="Aptos" panose="020B0004020202020204" pitchFamily="34" charset="0"/>
+                      <a:endParaRPr b="0" lang="es-ES" sz="1200" spc="-1" strike="noStrike">
+                        <a:latin typeface="Arial"/>
                       </a:endParaRPr>
                     </a:p>
                   </a:txBody>
                   <a:tcPr marL="7560" marR="7560">
                     <a:lnL w="12240">
                       <a:solidFill>
-                        <a:srgbClr val="FFFFFF"/>
+                        <a:srgbClr val="ffffff"/>
                       </a:solidFill>
                     </a:lnL>
                     <a:lnR w="12240">
                       <a:solidFill>
-                        <a:srgbClr val="FFFFFF"/>
+                        <a:srgbClr val="ffffff"/>
                       </a:solidFill>
                     </a:lnR>
                     <a:lnT w="12240">
                       <a:solidFill>
-                        <a:srgbClr val="FFFFFF"/>
+                        <a:srgbClr val="ffffff"/>
                       </a:solidFill>
                     </a:lnT>
                     <a:lnB w="12240">
                       <a:solidFill>
-                        <a:srgbClr val="FFFFFF"/>
+                        <a:srgbClr val="ffffff"/>
                       </a:solidFill>
                     </a:lnB>
                     <a:solidFill>
-                      <a:srgbClr val="E7EAEC"/>
+                      <a:srgbClr val="e7eaec"/>
                     </a:solidFill>
                   </a:tcPr>
                 </a:tc>
                 <a:tc>
                   <a:txBody>
-                    <a:bodyPr/>
-                    <a:lstStyle/>
+                    <a:bodyPr lIns="7560" rIns="7560">
+                      <a:noAutofit/>
+                    </a:bodyPr>
                     <a:p>
                       <a:pPr algn="ctr">
                         <a:lnSpc>
@@ -4981,49 +4423,51 @@
                         </a:lnSpc>
                       </a:pPr>
                       <a:r>
-                        <a:rPr lang="es-ES" sz="1200" b="0" strike="noStrike" spc="-1" dirty="0" err="1">
+                        <a:rPr b="0" lang="es-ES" sz="1200" spc="-1" strike="noStrike">
                           <a:solidFill>
                             <a:srgbClr val="000000"/>
                           </a:solidFill>
-                          <a:latin typeface="Aptos" panose="020B0004020202020204" pitchFamily="34" charset="0"/>
+                          <a:latin typeface="Aptos"/>
+                          <a:ea typeface="DejaVu Sans"/>
                         </a:rPr>
                         <a:t>Frameshift</a:t>
                       </a:r>
-                      <a:endParaRPr lang="es-ES" sz="1200" b="0" strike="noStrike" spc="-1" dirty="0">
-                        <a:latin typeface="Aptos" panose="020B0004020202020204" pitchFamily="34" charset="0"/>
+                      <a:endParaRPr b="0" lang="es-ES" sz="1200" spc="-1" strike="noStrike">
+                        <a:latin typeface="Arial"/>
                       </a:endParaRPr>
                     </a:p>
                   </a:txBody>
                   <a:tcPr marL="7560" marR="7560">
                     <a:lnL w="12240">
                       <a:solidFill>
-                        <a:srgbClr val="FFFFFF"/>
+                        <a:srgbClr val="ffffff"/>
                       </a:solidFill>
                     </a:lnL>
                     <a:lnR w="12240">
                       <a:solidFill>
-                        <a:srgbClr val="FFFFFF"/>
+                        <a:srgbClr val="ffffff"/>
                       </a:solidFill>
                     </a:lnR>
                     <a:lnT w="12240">
                       <a:solidFill>
-                        <a:srgbClr val="FFFFFF"/>
+                        <a:srgbClr val="ffffff"/>
                       </a:solidFill>
                     </a:lnT>
                     <a:lnB w="12240">
                       <a:solidFill>
-                        <a:srgbClr val="FFFFFF"/>
+                        <a:srgbClr val="ffffff"/>
                       </a:solidFill>
                     </a:lnB>
                     <a:solidFill>
-                      <a:srgbClr val="E7EAEC"/>
+                      <a:srgbClr val="e7eaec"/>
                     </a:solidFill>
                   </a:tcPr>
                 </a:tc>
                 <a:tc>
                   <a:txBody>
-                    <a:bodyPr/>
-                    <a:lstStyle/>
+                    <a:bodyPr lIns="7560" rIns="7560">
+                      <a:noAutofit/>
+                    </a:bodyPr>
                     <a:p>
                       <a:pPr algn="ctr">
                         <a:lnSpc>
@@ -5031,49 +4475,51 @@
                         </a:lnSpc>
                       </a:pPr>
                       <a:r>
-                        <a:rPr lang="es-ES" sz="1200" b="0" strike="noStrike" spc="-1">
+                        <a:rPr b="0" lang="es-ES" sz="1200" spc="-1" strike="noStrike">
                           <a:solidFill>
                             <a:srgbClr val="000000"/>
                           </a:solidFill>
-                          <a:latin typeface="Aptos" panose="020B0004020202020204" pitchFamily="34" charset="0"/>
+                          <a:latin typeface="Aptos"/>
+                          <a:ea typeface="DejaVu Sans"/>
                         </a:rPr>
                         <a:t>???</a:t>
                       </a:r>
-                      <a:endParaRPr lang="es-ES" sz="1200" b="0" strike="noStrike" spc="-1">
-                        <a:latin typeface="Aptos" panose="020B0004020202020204" pitchFamily="34" charset="0"/>
+                      <a:endParaRPr b="0" lang="es-ES" sz="1200" spc="-1" strike="noStrike">
+                        <a:latin typeface="Arial"/>
                       </a:endParaRPr>
                     </a:p>
                   </a:txBody>
                   <a:tcPr marL="7560" marR="7560">
                     <a:lnL w="12240">
                       <a:solidFill>
-                        <a:srgbClr val="FFFFFF"/>
+                        <a:srgbClr val="ffffff"/>
                       </a:solidFill>
                     </a:lnL>
                     <a:lnR w="12240">
                       <a:solidFill>
-                        <a:srgbClr val="FFFFFF"/>
+                        <a:srgbClr val="ffffff"/>
                       </a:solidFill>
                     </a:lnR>
                     <a:lnT w="12240">
                       <a:solidFill>
-                        <a:srgbClr val="FFFFFF"/>
+                        <a:srgbClr val="ffffff"/>
                       </a:solidFill>
                     </a:lnT>
                     <a:lnB w="12240">
                       <a:solidFill>
-                        <a:srgbClr val="FFFFFF"/>
+                        <a:srgbClr val="ffffff"/>
                       </a:solidFill>
                     </a:lnB>
                     <a:solidFill>
-                      <a:srgbClr val="E7EAEC"/>
+                      <a:srgbClr val="e7eaec"/>
                     </a:solidFill>
                   </a:tcPr>
                 </a:tc>
                 <a:tc>
                   <a:txBody>
-                    <a:bodyPr/>
-                    <a:lstStyle/>
+                    <a:bodyPr lIns="7560" rIns="7560">
+                      <a:noAutofit/>
+                    </a:bodyPr>
                     <a:p>
                       <a:pPr algn="ctr">
                         <a:lnSpc>
@@ -5081,53 +4527,51 @@
                         </a:lnSpc>
                       </a:pPr>
                       <a:r>
-                        <a:rPr lang="es-ES" sz="1200" b="0" strike="noStrike" spc="-1" dirty="0">
+                        <a:rPr b="0" lang="es-ES" sz="1200" spc="-1" strike="noStrike">
                           <a:solidFill>
                             <a:srgbClr val="000000"/>
                           </a:solidFill>
-                          <a:latin typeface="Aptos" panose="020B0004020202020204" pitchFamily="34" charset="0"/>
+                          <a:latin typeface="Aptos"/>
+                          <a:ea typeface="DejaVu Sans"/>
                         </a:rPr>
                         <a:t>???</a:t>
                       </a:r>
-                      <a:endParaRPr lang="es-ES" sz="1200" b="0" strike="noStrike" spc="-1" dirty="0">
-                        <a:latin typeface="Aptos" panose="020B0004020202020204" pitchFamily="34" charset="0"/>
+                      <a:endParaRPr b="0" lang="es-ES" sz="1200" spc="-1" strike="noStrike">
+                        <a:latin typeface="Arial"/>
                       </a:endParaRPr>
                     </a:p>
                   </a:txBody>
                   <a:tcPr marL="7560" marR="7560">
                     <a:lnL w="12240">
                       <a:solidFill>
-                        <a:srgbClr val="FFFFFF"/>
+                        <a:srgbClr val="ffffff"/>
                       </a:solidFill>
                     </a:lnL>
-                    <a:lnR w="12240" cap="flat" cmpd="sng" algn="ctr">
-                      <a:solidFill>
-                        <a:srgbClr val="FFFFFF"/>
-                      </a:solidFill>
-                      <a:prstDash val="solid"/>
-                      <a:round/>
-                      <a:headEnd type="none" w="med" len="med"/>
-                      <a:tailEnd type="none" w="med" len="med"/>
+                    <a:lnR w="12240">
+                      <a:solidFill>
+                        <a:srgbClr val="ffffff"/>
+                      </a:solidFill>
                     </a:lnR>
                     <a:lnT w="12240">
                       <a:solidFill>
-                        <a:srgbClr val="FFFFFF"/>
+                        <a:srgbClr val="ffffff"/>
                       </a:solidFill>
                     </a:lnT>
                     <a:lnB w="12240">
                       <a:solidFill>
-                        <a:srgbClr val="FFFFFF"/>
+                        <a:srgbClr val="ffffff"/>
                       </a:solidFill>
                     </a:lnB>
                     <a:solidFill>
-                      <a:srgbClr val="E7EAEC"/>
+                      <a:srgbClr val="e7eaec"/>
                     </a:solidFill>
                   </a:tcPr>
                 </a:tc>
                 <a:tc>
                   <a:txBody>
-                    <a:bodyPr/>
-                    <a:lstStyle/>
+                    <a:bodyPr lIns="7560" rIns="7560">
+                      <a:noAutofit/>
+                    </a:bodyPr>
                     <a:p>
                       <a:pPr algn="ctr">
                         <a:lnSpc>
@@ -5135,55 +4579,51 @@
                         </a:lnSpc>
                       </a:pPr>
                       <a:r>
-                        <a:rPr lang="es-ES" sz="1200" b="0" strike="noStrike" spc="-1" dirty="0">
-                          <a:latin typeface="Aptos" panose="020B0004020202020204" pitchFamily="34" charset="0"/>
+                        <a:rPr b="0" lang="es-ES" sz="1200" spc="-1" strike="noStrike">
+                          <a:solidFill>
+                            <a:srgbClr val="000000"/>
+                          </a:solidFill>
+                          <a:latin typeface="Aptos"/>
+                          <a:ea typeface="DejaVu Sans"/>
                         </a:rPr>
                         <a:t>#614963</a:t>
                       </a:r>
+                      <a:endParaRPr b="0" lang="es-ES" sz="1200" spc="-1" strike="noStrike">
+                        <a:latin typeface="Arial"/>
+                      </a:endParaRPr>
                     </a:p>
                   </a:txBody>
                   <a:tcPr marL="7560" marR="7560">
                     <a:lnL w="12240">
                       <a:solidFill>
-                        <a:srgbClr val="FFFFFF"/>
+                        <a:srgbClr val="ffffff"/>
                       </a:solidFill>
                     </a:lnL>
-                    <a:lnR w="12240" cap="flat" cmpd="sng" algn="ctr">
-                      <a:solidFill>
-                        <a:srgbClr val="FFFFFF"/>
-                      </a:solidFill>
-                      <a:prstDash val="solid"/>
-                      <a:round/>
-                      <a:headEnd type="none" w="med" len="med"/>
-                      <a:tailEnd type="none" w="med" len="med"/>
+                    <a:lnR w="12240">
+                      <a:solidFill>
+                        <a:srgbClr val="ffffff"/>
+                      </a:solidFill>
                     </a:lnR>
-                    <a:lnT w="12240" cap="flat" cmpd="sng" algn="ctr">
-                      <a:solidFill>
-                        <a:srgbClr val="FFFFFF"/>
-                      </a:solidFill>
-                      <a:prstDash val="solid"/>
-                      <a:round/>
-                      <a:headEnd type="none" w="med" len="med"/>
-                      <a:tailEnd type="none" w="med" len="med"/>
+                    <a:lnT w="12240">
+                      <a:solidFill>
+                        <a:srgbClr val="ffffff"/>
+                      </a:solidFill>
                     </a:lnT>
-                    <a:lnB w="12240" cap="flat" cmpd="sng" algn="ctr">
-                      <a:solidFill>
-                        <a:srgbClr val="FFFFFF"/>
-                      </a:solidFill>
-                      <a:prstDash val="solid"/>
-                      <a:round/>
-                      <a:headEnd type="none" w="med" len="med"/>
-                      <a:tailEnd type="none" w="med" len="med"/>
+                    <a:lnB w="12240">
+                      <a:solidFill>
+                        <a:srgbClr val="ffffff"/>
+                      </a:solidFill>
                     </a:lnB>
                     <a:solidFill>
-                      <a:srgbClr val="E7EAEC"/>
+                      <a:srgbClr val="e7eaec"/>
                     </a:solidFill>
                   </a:tcPr>
                 </a:tc>
                 <a:tc>
                   <a:txBody>
-                    <a:bodyPr/>
-                    <a:lstStyle/>
+                    <a:bodyPr lIns="7560" rIns="7560">
+                      <a:noAutofit/>
+                    </a:bodyPr>
                     <a:p>
                       <a:pPr algn="ctr">
                         <a:lnSpc>
@@ -5191,55 +4631,51 @@
                         </a:lnSpc>
                       </a:pPr>
                       <a:r>
-                        <a:rPr lang="es-ES" sz="1200" b="0" strike="noStrike" spc="-1" dirty="0">
-                          <a:latin typeface="Aptos" panose="020B0004020202020204" pitchFamily="34" charset="0"/>
+                        <a:rPr b="0" lang="es-ES" sz="1200" spc="-1" strike="noStrike">
+                          <a:solidFill>
+                            <a:srgbClr val="000000"/>
+                          </a:solidFill>
+                          <a:latin typeface="Aptos"/>
+                          <a:ea typeface="DejaVu Sans"/>
                         </a:rPr>
                         <a:t>Autosómico recesiva</a:t>
                       </a:r>
+                      <a:endParaRPr b="0" lang="es-ES" sz="1200" spc="-1" strike="noStrike">
+                        <a:latin typeface="Arial"/>
+                      </a:endParaRPr>
                     </a:p>
                   </a:txBody>
                   <a:tcPr marL="7560" marR="7560">
                     <a:lnL w="12240">
                       <a:solidFill>
-                        <a:srgbClr val="FFFFFF"/>
+                        <a:srgbClr val="ffffff"/>
                       </a:solidFill>
                     </a:lnL>
-                    <a:lnR w="12240" cap="flat" cmpd="sng" algn="ctr">
-                      <a:solidFill>
-                        <a:srgbClr val="FFFFFF"/>
-                      </a:solidFill>
-                      <a:prstDash val="solid"/>
-                      <a:round/>
-                      <a:headEnd type="none" w="med" len="med"/>
-                      <a:tailEnd type="none" w="med" len="med"/>
+                    <a:lnR w="12240">
+                      <a:solidFill>
+                        <a:srgbClr val="ffffff"/>
+                      </a:solidFill>
                     </a:lnR>
-                    <a:lnT w="12240" cap="flat" cmpd="sng" algn="ctr">
-                      <a:solidFill>
-                        <a:srgbClr val="FFFFFF"/>
-                      </a:solidFill>
-                      <a:prstDash val="solid"/>
-                      <a:round/>
-                      <a:headEnd type="none" w="med" len="med"/>
-                      <a:tailEnd type="none" w="med" len="med"/>
+                    <a:lnT w="12240">
+                      <a:solidFill>
+                        <a:srgbClr val="ffffff"/>
+                      </a:solidFill>
                     </a:lnT>
-                    <a:lnB w="12240" cap="flat" cmpd="sng" algn="ctr">
-                      <a:solidFill>
-                        <a:srgbClr val="FFFFFF"/>
-                      </a:solidFill>
-                      <a:prstDash val="solid"/>
-                      <a:round/>
-                      <a:headEnd type="none" w="med" len="med"/>
-                      <a:tailEnd type="none" w="med" len="med"/>
+                    <a:lnB w="12240">
+                      <a:solidFill>
+                        <a:srgbClr val="ffffff"/>
+                      </a:solidFill>
                     </a:lnB>
                     <a:solidFill>
-                      <a:srgbClr val="E7EAEC"/>
+                      <a:srgbClr val="e7eaec"/>
                     </a:solidFill>
                   </a:tcPr>
                 </a:tc>
                 <a:tc>
                   <a:txBody>
-                    <a:bodyPr/>
-                    <a:lstStyle/>
+                    <a:bodyPr lIns="7560" rIns="7560">
+                      <a:noAutofit/>
+                    </a:bodyPr>
                     <a:p>
                       <a:pPr algn="ctr">
                         <a:lnSpc>
@@ -5247,70 +4683,53 @@
                         </a:lnSpc>
                       </a:pPr>
                       <a:r>
-                        <a:rPr lang="es-ES" sz="1200" b="0" strike="noStrike" spc="-1" dirty="0">
-                          <a:latin typeface="Aptos" panose="020B0004020202020204" pitchFamily="34" charset="0"/>
+                        <a:rPr b="0" lang="es-ES" sz="1200" spc="-1" strike="noStrike">
+                          <a:solidFill>
+                            <a:srgbClr val="000000"/>
+                          </a:solidFill>
+                          <a:latin typeface="Aptos"/>
+                          <a:ea typeface="DejaVu Sans"/>
                         </a:rPr>
-                        <a:t>Vías de señalización de </a:t>
+                        <a:t>Vías de señalización de adipocitocinas y hormonales de AMPK, JAK y STAT</a:t>
                       </a:r>
-                      <a:r>
-                        <a:rPr lang="es-ES" sz="1200" b="0" strike="noStrike" spc="-1" dirty="0" err="1">
-                          <a:latin typeface="Aptos" panose="020B0004020202020204" pitchFamily="34" charset="0"/>
-                        </a:rPr>
-                        <a:t>adipocitocinas</a:t>
-                      </a:r>
-                      <a:r>
-                        <a:rPr lang="es-ES" sz="1200" b="0" strike="noStrike" spc="-1" dirty="0">
-                          <a:latin typeface="Aptos" panose="020B0004020202020204" pitchFamily="34" charset="0"/>
-                        </a:rPr>
-                        <a:t> y hormonales de AMPK, JAK y STAT</a:t>
-                      </a:r>
+                      <a:endParaRPr b="0" lang="es-ES" sz="1200" spc="-1" strike="noStrike">
+                        <a:latin typeface="Arial"/>
+                      </a:endParaRPr>
                     </a:p>
                   </a:txBody>
                   <a:tcPr marL="7560" marR="7560">
                     <a:lnL w="12240">
                       <a:solidFill>
-                        <a:srgbClr val="FFFFFF"/>
+                        <a:srgbClr val="ffffff"/>
                       </a:solidFill>
                     </a:lnL>
                     <a:lnR w="12240">
                       <a:solidFill>
-                        <a:srgbClr val="FFFFFF"/>
+                        <a:srgbClr val="ffffff"/>
                       </a:solidFill>
                     </a:lnR>
-                    <a:lnT w="12240" cap="flat" cmpd="sng" algn="ctr">
-                      <a:solidFill>
-                        <a:srgbClr val="FFFFFF"/>
-                      </a:solidFill>
-                      <a:prstDash val="solid"/>
-                      <a:round/>
-                      <a:headEnd type="none" w="med" len="med"/>
-                      <a:tailEnd type="none" w="med" len="med"/>
+                    <a:lnT w="12240">
+                      <a:solidFill>
+                        <a:srgbClr val="ffffff"/>
+                      </a:solidFill>
                     </a:lnT>
-                    <a:lnB w="12240" cap="flat" cmpd="sng" algn="ctr">
-                      <a:solidFill>
-                        <a:srgbClr val="FFFFFF"/>
-                      </a:solidFill>
-                      <a:prstDash val="solid"/>
-                      <a:round/>
-                      <a:headEnd type="none" w="med" len="med"/>
-                      <a:tailEnd type="none" w="med" len="med"/>
+                    <a:lnB w="12240">
+                      <a:solidFill>
+                        <a:srgbClr val="ffffff"/>
+                      </a:solidFill>
                     </a:lnB>
                     <a:solidFill>
-                      <a:srgbClr val="E7EAEC"/>
+                      <a:srgbClr val="e7eaec"/>
                     </a:solidFill>
                   </a:tcPr>
                 </a:tc>
-                <a:extLst>
-                  <a:ext uri="{0D108BD9-81ED-4DB2-BD59-A6C34878D82A}">
-                    <a16:rowId xmlns:a16="http://schemas.microsoft.com/office/drawing/2014/main" val="10001"/>
-                  </a:ext>
-                </a:extLst>
               </a:tr>
-              <a:tr h="712080">
+              <a:tr h="603720">
                 <a:tc>
                   <a:txBody>
-                    <a:bodyPr/>
-                    <a:lstStyle/>
+                    <a:bodyPr lIns="7560" rIns="7560">
+                      <a:noAutofit/>
+                    </a:bodyPr>
                     <a:p>
                       <a:pPr>
                         <a:lnSpc>
@@ -5318,49 +4737,51 @@
                         </a:lnSpc>
                       </a:pPr>
                       <a:r>
-                        <a:rPr lang="es-ES" sz="1200" b="0" strike="noStrike" spc="-1" dirty="0">
+                        <a:rPr b="0" lang="es-ES" sz="1200" spc="-1" strike="noStrike">
                           <a:solidFill>
                             <a:srgbClr val="000000"/>
                           </a:solidFill>
-                          <a:latin typeface="Aptos" panose="020B0004020202020204" pitchFamily="34" charset="0"/>
+                          <a:latin typeface="Aptos"/>
+                          <a:ea typeface="DejaVu Sans"/>
                         </a:rPr>
                         <a:t>MC4R</a:t>
                       </a:r>
-                      <a:endParaRPr lang="es-ES" sz="1200" b="0" strike="noStrike" spc="-1" dirty="0">
-                        <a:latin typeface="Aptos" panose="020B0004020202020204" pitchFamily="34" charset="0"/>
+                      <a:endParaRPr b="0" lang="es-ES" sz="1200" spc="-1" strike="noStrike">
+                        <a:latin typeface="Arial"/>
                       </a:endParaRPr>
                     </a:p>
                   </a:txBody>
                   <a:tcPr marL="7560" marR="7560">
                     <a:lnL w="12240">
                       <a:solidFill>
-                        <a:srgbClr val="FFFFFF"/>
+                        <a:srgbClr val="ffffff"/>
                       </a:solidFill>
                     </a:lnL>
                     <a:lnR w="12240">
                       <a:solidFill>
-                        <a:srgbClr val="FFFFFF"/>
+                        <a:srgbClr val="ffffff"/>
                       </a:solidFill>
                     </a:lnR>
                     <a:lnT w="12240">
                       <a:solidFill>
-                        <a:srgbClr val="FFFFFF"/>
+                        <a:srgbClr val="ffffff"/>
                       </a:solidFill>
                     </a:lnT>
                     <a:lnB w="12240">
                       <a:solidFill>
-                        <a:srgbClr val="FFFFFF"/>
+                        <a:srgbClr val="ffffff"/>
                       </a:solidFill>
                     </a:lnB>
                     <a:solidFill>
-                      <a:srgbClr val="E7EAEC"/>
+                      <a:srgbClr val="e7eaec"/>
                     </a:solidFill>
                   </a:tcPr>
                 </a:tc>
                 <a:tc>
                   <a:txBody>
-                    <a:bodyPr/>
-                    <a:lstStyle/>
+                    <a:bodyPr lIns="7560" rIns="7560">
+                      <a:noAutofit/>
+                    </a:bodyPr>
                     <a:p>
                       <a:pPr algn="ctr">
                         <a:lnSpc>
@@ -5368,49 +4789,51 @@
                         </a:lnSpc>
                       </a:pPr>
                       <a:r>
-                        <a:rPr lang="es-ES" sz="1200" b="0" strike="noStrike" spc="-1">
+                        <a:rPr b="0" lang="es-ES" sz="1200" spc="-1" strike="noStrike">
                           <a:solidFill>
                             <a:srgbClr val="000000"/>
                           </a:solidFill>
-                          <a:latin typeface="Aptos" panose="020B0004020202020204" pitchFamily="34" charset="0"/>
+                          <a:latin typeface="Aptos"/>
+                          <a:ea typeface="DejaVu Sans"/>
                         </a:rPr>
                         <a:t>18:60371535</a:t>
                       </a:r>
-                      <a:endParaRPr lang="es-ES" sz="1200" b="0" strike="noStrike" spc="-1">
-                        <a:latin typeface="Aptos" panose="020B0004020202020204" pitchFamily="34" charset="0"/>
+                      <a:endParaRPr b="0" lang="es-ES" sz="1200" spc="-1" strike="noStrike">
+                        <a:latin typeface="Arial"/>
                       </a:endParaRPr>
                     </a:p>
                   </a:txBody>
                   <a:tcPr marL="7560" marR="7560">
                     <a:lnL w="12240">
                       <a:solidFill>
-                        <a:srgbClr val="FFFFFF"/>
+                        <a:srgbClr val="ffffff"/>
                       </a:solidFill>
                     </a:lnL>
                     <a:lnR w="12240">
                       <a:solidFill>
-                        <a:srgbClr val="FFFFFF"/>
+                        <a:srgbClr val="ffffff"/>
                       </a:solidFill>
                     </a:lnR>
                     <a:lnT w="12240">
                       <a:solidFill>
-                        <a:srgbClr val="FFFFFF"/>
+                        <a:srgbClr val="ffffff"/>
                       </a:solidFill>
                     </a:lnT>
                     <a:lnB w="12240">
                       <a:solidFill>
-                        <a:srgbClr val="FFFFFF"/>
+                        <a:srgbClr val="ffffff"/>
                       </a:solidFill>
                     </a:lnB>
                     <a:solidFill>
-                      <a:srgbClr val="E7EAEC"/>
+                      <a:srgbClr val="e7eaec"/>
                     </a:solidFill>
                   </a:tcPr>
                 </a:tc>
                 <a:tc>
                   <a:txBody>
-                    <a:bodyPr/>
-                    <a:lstStyle/>
+                    <a:bodyPr lIns="7560" rIns="7560">
+                      <a:noAutofit/>
+                    </a:bodyPr>
                     <a:p>
                       <a:pPr algn="ctr">
                         <a:lnSpc>
@@ -5418,49 +4841,51 @@
                         </a:lnSpc>
                       </a:pPr>
                       <a:r>
-                        <a:rPr lang="es-ES" sz="1200" b="0" strike="noStrike" spc="-1">
+                        <a:rPr b="0" lang="es-ES" sz="1200" spc="-1" strike="noStrike">
                           <a:solidFill>
                             <a:srgbClr val="000000"/>
                           </a:solidFill>
-                          <a:latin typeface="Aptos" panose="020B0004020202020204" pitchFamily="34" charset="0"/>
+                          <a:latin typeface="Aptos"/>
+                          <a:ea typeface="DejaVu Sans"/>
                         </a:rPr>
                         <a:t>ENST00000299766.5:c.815C&gt;A</a:t>
                       </a:r>
-                      <a:endParaRPr lang="es-ES" sz="1200" b="0" strike="noStrike" spc="-1">
-                        <a:latin typeface="Aptos" panose="020B0004020202020204" pitchFamily="34" charset="0"/>
+                      <a:endParaRPr b="0" lang="es-ES" sz="1200" spc="-1" strike="noStrike">
+                        <a:latin typeface="Arial"/>
                       </a:endParaRPr>
                     </a:p>
                   </a:txBody>
                   <a:tcPr marL="7560" marR="7560">
                     <a:lnL w="12240">
                       <a:solidFill>
-                        <a:srgbClr val="FFFFFF"/>
+                        <a:srgbClr val="ffffff"/>
                       </a:solidFill>
                     </a:lnL>
                     <a:lnR w="12240">
                       <a:solidFill>
-                        <a:srgbClr val="FFFFFF"/>
+                        <a:srgbClr val="ffffff"/>
                       </a:solidFill>
                     </a:lnR>
                     <a:lnT w="12240">
                       <a:solidFill>
-                        <a:srgbClr val="FFFFFF"/>
+                        <a:srgbClr val="ffffff"/>
                       </a:solidFill>
                     </a:lnT>
                     <a:lnB w="12240">
                       <a:solidFill>
-                        <a:srgbClr val="FFFFFF"/>
+                        <a:srgbClr val="ffffff"/>
                       </a:solidFill>
                     </a:lnB>
                     <a:solidFill>
-                      <a:srgbClr val="E7EAEC"/>
+                      <a:srgbClr val="e7eaec"/>
                     </a:solidFill>
                   </a:tcPr>
                 </a:tc>
                 <a:tc>
                   <a:txBody>
-                    <a:bodyPr/>
-                    <a:lstStyle/>
+                    <a:bodyPr lIns="7560" rIns="7560">
+                      <a:noAutofit/>
+                    </a:bodyPr>
                     <a:p>
                       <a:pPr algn="ctr">
                         <a:lnSpc>
@@ -5468,49 +4893,51 @@
                         </a:lnSpc>
                       </a:pPr>
                       <a:r>
-                        <a:rPr lang="es-ES" sz="1200" b="0" strike="noStrike" spc="-1" dirty="0">
+                        <a:rPr b="0" lang="es-ES" sz="1200" spc="-1" strike="noStrike">
                           <a:solidFill>
                             <a:srgbClr val="000000"/>
                           </a:solidFill>
-                          <a:latin typeface="Aptos" panose="020B0004020202020204" pitchFamily="34" charset="0"/>
+                          <a:latin typeface="Aptos"/>
+                          <a:ea typeface="DejaVu Sans"/>
                         </a:rPr>
                         <a:t>SNP</a:t>
                       </a:r>
-                      <a:endParaRPr lang="es-ES" sz="1200" b="0" strike="noStrike" spc="-1" dirty="0">
-                        <a:latin typeface="Aptos" panose="020B0004020202020204" pitchFamily="34" charset="0"/>
+                      <a:endParaRPr b="0" lang="es-ES" sz="1200" spc="-1" strike="noStrike">
+                        <a:latin typeface="Arial"/>
                       </a:endParaRPr>
                     </a:p>
                   </a:txBody>
                   <a:tcPr marL="7560" marR="7560">
                     <a:lnL w="12240">
                       <a:solidFill>
-                        <a:srgbClr val="FFFFFF"/>
+                        <a:srgbClr val="ffffff"/>
                       </a:solidFill>
                     </a:lnL>
                     <a:lnR w="12240">
                       <a:solidFill>
-                        <a:srgbClr val="FFFFFF"/>
+                        <a:srgbClr val="ffffff"/>
                       </a:solidFill>
                     </a:lnR>
                     <a:lnT w="12240">
                       <a:solidFill>
-                        <a:srgbClr val="FFFFFF"/>
+                        <a:srgbClr val="ffffff"/>
                       </a:solidFill>
                     </a:lnT>
                     <a:lnB w="12240">
                       <a:solidFill>
-                        <a:srgbClr val="FFFFFF"/>
+                        <a:srgbClr val="ffffff"/>
                       </a:solidFill>
                     </a:lnB>
                     <a:solidFill>
-                      <a:srgbClr val="E7EAEC"/>
+                      <a:srgbClr val="e7eaec"/>
                     </a:solidFill>
                   </a:tcPr>
                 </a:tc>
                 <a:tc>
                   <a:txBody>
-                    <a:bodyPr/>
-                    <a:lstStyle/>
+                    <a:bodyPr lIns="7560" rIns="7560">
+                      <a:noAutofit/>
+                    </a:bodyPr>
                     <a:p>
                       <a:pPr algn="ctr">
                         <a:lnSpc>
@@ -5518,49 +4945,51 @@
                         </a:lnSpc>
                       </a:pPr>
                       <a:r>
-                        <a:rPr lang="es-ES" sz="1200" b="0" strike="noStrike" spc="-1" dirty="0">
+                        <a:rPr b="0" lang="es-ES" sz="1200" spc="-1" strike="noStrike">
                           <a:solidFill>
                             <a:srgbClr val="000000"/>
                           </a:solidFill>
-                          <a:latin typeface="Aptos" panose="020B0004020202020204" pitchFamily="34" charset="0"/>
+                          <a:latin typeface="Aptos"/>
+                          <a:ea typeface="DejaVu Sans"/>
                         </a:rPr>
                         <a:t>heterocigoto</a:t>
                       </a:r>
-                      <a:endParaRPr lang="es-ES" sz="1200" b="0" strike="noStrike" spc="-1" dirty="0">
-                        <a:latin typeface="Aptos" panose="020B0004020202020204" pitchFamily="34" charset="0"/>
+                      <a:endParaRPr b="0" lang="es-ES" sz="1200" spc="-1" strike="noStrike">
+                        <a:latin typeface="Arial"/>
                       </a:endParaRPr>
                     </a:p>
                   </a:txBody>
                   <a:tcPr marL="7560" marR="7560">
                     <a:lnL w="12240">
                       <a:solidFill>
-                        <a:srgbClr val="FFFFFF"/>
+                        <a:srgbClr val="ffffff"/>
                       </a:solidFill>
                     </a:lnL>
                     <a:lnR w="12240">
                       <a:solidFill>
-                        <a:srgbClr val="FFFFFF"/>
+                        <a:srgbClr val="ffffff"/>
                       </a:solidFill>
                     </a:lnR>
                     <a:lnT w="12240">
                       <a:solidFill>
-                        <a:srgbClr val="FFFFFF"/>
+                        <a:srgbClr val="ffffff"/>
                       </a:solidFill>
                     </a:lnT>
                     <a:lnB w="12240">
                       <a:solidFill>
-                        <a:srgbClr val="FFFFFF"/>
+                        <a:srgbClr val="ffffff"/>
                       </a:solidFill>
                     </a:lnB>
                     <a:solidFill>
-                      <a:srgbClr val="E7EAEC"/>
+                      <a:srgbClr val="e7eaec"/>
                     </a:solidFill>
                   </a:tcPr>
                 </a:tc>
                 <a:tc>
                   <a:txBody>
-                    <a:bodyPr/>
-                    <a:lstStyle/>
+                    <a:bodyPr lIns="7560" rIns="7560">
+                      <a:noAutofit/>
+                    </a:bodyPr>
                     <a:p>
                       <a:pPr algn="ctr">
                         <a:lnSpc>
@@ -5568,16 +4997,17 @@
                         </a:lnSpc>
                       </a:pPr>
                       <a:r>
-                        <a:rPr lang="es-ES" sz="1200" b="0" strike="noStrike" spc="-1" dirty="0">
+                        <a:rPr b="0" lang="es-ES" sz="1200" spc="-1" strike="noStrike">
                           <a:solidFill>
                             <a:srgbClr val="000000"/>
                           </a:solidFill>
-                          <a:latin typeface="Aptos" panose="020B0004020202020204" pitchFamily="34" charset="0"/>
+                          <a:latin typeface="Aptos"/>
+                          <a:ea typeface="DejaVu Sans"/>
                         </a:rPr>
                         <a:t>6.195x10-7</a:t>
                       </a:r>
-                      <a:endParaRPr lang="es-ES" sz="1200" b="0" strike="noStrike" spc="-1" dirty="0">
-                        <a:latin typeface="Aptos" panose="020B0004020202020204" pitchFamily="34" charset="0"/>
+                      <a:endParaRPr b="0" lang="es-ES" sz="1200" spc="-1" strike="noStrike">
+                        <a:latin typeface="Arial"/>
                       </a:endParaRPr>
                     </a:p>
                     <a:p>
@@ -5587,49 +5017,51 @@
                         </a:lnSpc>
                       </a:pPr>
                       <a:r>
-                        <a:rPr lang="es-ES" sz="1200" b="0" strike="noStrike" spc="-1" dirty="0">
+                        <a:rPr b="0" lang="es-ES" sz="1200" spc="-1" strike="noStrike">
                           <a:solidFill>
                             <a:srgbClr val="000000"/>
                           </a:solidFill>
-                          <a:latin typeface="Aptos" panose="020B0004020202020204" pitchFamily="34" charset="0"/>
+                          <a:latin typeface="Aptos"/>
+                          <a:ea typeface="DejaVu Sans"/>
                         </a:rPr>
                         <a:t>(mutación)</a:t>
                       </a:r>
-                      <a:endParaRPr lang="es-ES" sz="1200" b="0" strike="noStrike" spc="-1" dirty="0">
-                        <a:latin typeface="Aptos" panose="020B0004020202020204" pitchFamily="34" charset="0"/>
+                      <a:endParaRPr b="0" lang="es-ES" sz="1200" spc="-1" strike="noStrike">
+                        <a:latin typeface="Arial"/>
                       </a:endParaRPr>
                     </a:p>
                   </a:txBody>
                   <a:tcPr marL="7560" marR="7560">
                     <a:lnL w="12240">
                       <a:solidFill>
-                        <a:srgbClr val="FFFFFF"/>
+                        <a:srgbClr val="ffffff"/>
                       </a:solidFill>
                     </a:lnL>
                     <a:lnR w="12240">
                       <a:solidFill>
-                        <a:srgbClr val="FFFFFF"/>
+                        <a:srgbClr val="ffffff"/>
                       </a:solidFill>
                     </a:lnR>
                     <a:lnT w="12240">
                       <a:solidFill>
-                        <a:srgbClr val="FFFFFF"/>
+                        <a:srgbClr val="ffffff"/>
                       </a:solidFill>
                     </a:lnT>
                     <a:lnB w="12240">
                       <a:solidFill>
-                        <a:srgbClr val="FFFFFF"/>
+                        <a:srgbClr val="ffffff"/>
                       </a:solidFill>
                     </a:lnB>
                     <a:solidFill>
-                      <a:srgbClr val="E7EAEC"/>
+                      <a:srgbClr val="e7eaec"/>
                     </a:solidFill>
                   </a:tcPr>
                 </a:tc>
                 <a:tc>
                   <a:txBody>
-                    <a:bodyPr/>
-                    <a:lstStyle/>
+                    <a:bodyPr lIns="7560" rIns="7560">
+                      <a:noAutofit/>
+                    </a:bodyPr>
                     <a:p>
                       <a:pPr algn="ctr">
                         <a:lnSpc>
@@ -5637,49 +5069,51 @@
                         </a:lnSpc>
                       </a:pPr>
                       <a:r>
-                        <a:rPr lang="es-ES" sz="1200" b="0" strike="noStrike" spc="-1">
+                        <a:rPr b="0" lang="es-ES" sz="1200" spc="-1" strike="noStrike">
                           <a:solidFill>
                             <a:srgbClr val="000000"/>
                           </a:solidFill>
-                          <a:latin typeface="Aptos" panose="020B0004020202020204" pitchFamily="34" charset="0"/>
+                          <a:latin typeface="Aptos"/>
+                          <a:ea typeface="DejaVu Sans"/>
                         </a:rPr>
                         <a:t>ENST00000299766.5</a:t>
                       </a:r>
-                      <a:endParaRPr lang="es-ES" sz="1200" b="0" strike="noStrike" spc="-1">
-                        <a:latin typeface="Aptos" panose="020B0004020202020204" pitchFamily="34" charset="0"/>
+                      <a:endParaRPr b="0" lang="es-ES" sz="1200" spc="-1" strike="noStrike">
+                        <a:latin typeface="Arial"/>
                       </a:endParaRPr>
                     </a:p>
                   </a:txBody>
                   <a:tcPr marL="7560" marR="7560">
                     <a:lnL w="12240">
                       <a:solidFill>
-                        <a:srgbClr val="FFFFFF"/>
+                        <a:srgbClr val="ffffff"/>
                       </a:solidFill>
                     </a:lnL>
                     <a:lnR w="12240">
                       <a:solidFill>
-                        <a:srgbClr val="FFFFFF"/>
+                        <a:srgbClr val="ffffff"/>
                       </a:solidFill>
                     </a:lnR>
                     <a:lnT w="12240">
                       <a:solidFill>
-                        <a:srgbClr val="FFFFFF"/>
+                        <a:srgbClr val="ffffff"/>
                       </a:solidFill>
                     </a:lnT>
                     <a:lnB w="12240">
                       <a:solidFill>
-                        <a:srgbClr val="FFFFFF"/>
+                        <a:srgbClr val="ffffff"/>
                       </a:solidFill>
                     </a:lnB>
                     <a:solidFill>
-                      <a:srgbClr val="E7EAEC"/>
+                      <a:srgbClr val="e7eaec"/>
                     </a:solidFill>
                   </a:tcPr>
                 </a:tc>
                 <a:tc>
                   <a:txBody>
-                    <a:bodyPr/>
-                    <a:lstStyle/>
+                    <a:bodyPr lIns="7560" rIns="7560">
+                      <a:noAutofit/>
+                    </a:bodyPr>
                     <a:p>
                       <a:pPr algn="ctr">
                         <a:lnSpc>
@@ -5687,49 +5121,51 @@
                         </a:lnSpc>
                       </a:pPr>
                       <a:r>
-                        <a:rPr lang="es-ES" sz="1200" b="0" strike="noStrike" spc="-1">
+                        <a:rPr b="0" lang="es-ES" sz="1200" spc="-1" strike="noStrike">
                           <a:solidFill>
                             <a:srgbClr val="000000"/>
                           </a:solidFill>
-                          <a:latin typeface="Aptos" panose="020B0004020202020204" pitchFamily="34" charset="0"/>
+                          <a:latin typeface="Aptos"/>
+                          <a:ea typeface="DejaVu Sans"/>
                         </a:rPr>
                         <a:t>ENSP00000299766.3:p.Pro272His</a:t>
                       </a:r>
-                      <a:endParaRPr lang="es-ES" sz="1200" b="0" strike="noStrike" spc="-1">
-                        <a:latin typeface="Aptos" panose="020B0004020202020204" pitchFamily="34" charset="0"/>
+                      <a:endParaRPr b="0" lang="es-ES" sz="1200" spc="-1" strike="noStrike">
+                        <a:latin typeface="Arial"/>
                       </a:endParaRPr>
                     </a:p>
                   </a:txBody>
                   <a:tcPr marL="7560" marR="7560">
                     <a:lnL w="12240">
                       <a:solidFill>
-                        <a:srgbClr val="FFFFFF"/>
+                        <a:srgbClr val="ffffff"/>
                       </a:solidFill>
                     </a:lnL>
                     <a:lnR w="12240">
                       <a:solidFill>
-                        <a:srgbClr val="FFFFFF"/>
+                        <a:srgbClr val="ffffff"/>
                       </a:solidFill>
                     </a:lnR>
                     <a:lnT w="12240">
                       <a:solidFill>
-                        <a:srgbClr val="FFFFFF"/>
+                        <a:srgbClr val="ffffff"/>
                       </a:solidFill>
                     </a:lnT>
                     <a:lnB w="12240">
                       <a:solidFill>
-                        <a:srgbClr val="FFFFFF"/>
+                        <a:srgbClr val="ffffff"/>
                       </a:solidFill>
                     </a:lnB>
                     <a:solidFill>
-                      <a:srgbClr val="E7EAEC"/>
+                      <a:srgbClr val="e7eaec"/>
                     </a:solidFill>
                   </a:tcPr>
                 </a:tc>
                 <a:tc>
                   <a:txBody>
-                    <a:bodyPr/>
-                    <a:lstStyle/>
+                    <a:bodyPr lIns="7560" rIns="7560">
+                      <a:noAutofit/>
+                    </a:bodyPr>
                     <a:p>
                       <a:pPr algn="ctr">
                         <a:lnSpc>
@@ -5737,49 +5173,51 @@
                         </a:lnSpc>
                       </a:pPr>
                       <a:r>
-                        <a:rPr lang="es-ES" sz="1200" b="0" strike="noStrike" spc="-1">
+                        <a:rPr b="0" lang="es-ES" sz="1200" spc="-1" strike="noStrike">
                           <a:solidFill>
                             <a:srgbClr val="000000"/>
                           </a:solidFill>
-                          <a:latin typeface="Aptos" panose="020B0004020202020204" pitchFamily="34" charset="0"/>
+                          <a:latin typeface="Aptos"/>
+                          <a:ea typeface="DejaVu Sans"/>
                         </a:rPr>
                         <a:t>Missense</a:t>
                       </a:r>
-                      <a:endParaRPr lang="es-ES" sz="1200" b="0" strike="noStrike" spc="-1">
-                        <a:latin typeface="Aptos" panose="020B0004020202020204" pitchFamily="34" charset="0"/>
+                      <a:endParaRPr b="0" lang="es-ES" sz="1200" spc="-1" strike="noStrike">
+                        <a:latin typeface="Arial"/>
                       </a:endParaRPr>
                     </a:p>
                   </a:txBody>
                   <a:tcPr marL="7560" marR="7560">
                     <a:lnL w="12240">
                       <a:solidFill>
-                        <a:srgbClr val="FFFFFF"/>
+                        <a:srgbClr val="ffffff"/>
                       </a:solidFill>
                     </a:lnL>
                     <a:lnR w="12240">
                       <a:solidFill>
-                        <a:srgbClr val="FFFFFF"/>
+                        <a:srgbClr val="ffffff"/>
                       </a:solidFill>
                     </a:lnR>
                     <a:lnT w="12240">
                       <a:solidFill>
-                        <a:srgbClr val="FFFFFF"/>
+                        <a:srgbClr val="ffffff"/>
                       </a:solidFill>
                     </a:lnT>
                     <a:lnB w="12240">
                       <a:solidFill>
-                        <a:srgbClr val="FFFFFF"/>
+                        <a:srgbClr val="ffffff"/>
                       </a:solidFill>
                     </a:lnB>
                     <a:solidFill>
-                      <a:srgbClr val="E7EAEC"/>
+                      <a:srgbClr val="e7eaec"/>
                     </a:solidFill>
                   </a:tcPr>
                 </a:tc>
                 <a:tc>
                   <a:txBody>
-                    <a:bodyPr/>
-                    <a:lstStyle/>
+                    <a:bodyPr lIns="7560" rIns="7560">
+                      <a:noAutofit/>
+                    </a:bodyPr>
                     <a:p>
                       <a:pPr algn="ctr">
                         <a:lnSpc>
@@ -5787,58 +5225,51 @@
                         </a:lnSpc>
                       </a:pPr>
                       <a:r>
-                        <a:rPr lang="es-ES" sz="1200" b="0" strike="noStrike" spc="-1" dirty="0" err="1">
+                        <a:rPr b="0" lang="es-ES" sz="1200" spc="-1" strike="noStrike">
                           <a:solidFill>
                             <a:srgbClr val="000000"/>
                           </a:solidFill>
-                          <a:latin typeface="Aptos" panose="020B0004020202020204" pitchFamily="34" charset="0"/>
+                          <a:latin typeface="Aptos"/>
+                          <a:ea typeface="DejaVu Sans"/>
                         </a:rPr>
-                        <a:t>deleterious</a:t>
+                        <a:t>deleterious (0)</a:t>
                       </a:r>
-                      <a:r>
-                        <a:rPr lang="es-ES" sz="1200" b="0" strike="noStrike" spc="-1" dirty="0">
-                          <a:solidFill>
-                            <a:srgbClr val="000000"/>
-                          </a:solidFill>
-                          <a:latin typeface="Aptos" panose="020B0004020202020204" pitchFamily="34" charset="0"/>
-                        </a:rPr>
-                        <a:t> (0)</a:t>
-                      </a:r>
-                      <a:endParaRPr lang="es-ES" sz="1200" b="0" strike="noStrike" spc="-1" dirty="0">
-                        <a:latin typeface="Aptos" panose="020B0004020202020204" pitchFamily="34" charset="0"/>
+                      <a:endParaRPr b="0" lang="es-ES" sz="1200" spc="-1" strike="noStrike">
+                        <a:latin typeface="Arial"/>
                       </a:endParaRPr>
                     </a:p>
                   </a:txBody>
                   <a:tcPr marL="7560" marR="7560">
                     <a:lnL w="12240">
                       <a:solidFill>
-                        <a:srgbClr val="FFFFFF"/>
+                        <a:srgbClr val="ffffff"/>
                       </a:solidFill>
                     </a:lnL>
                     <a:lnR w="12240">
                       <a:solidFill>
-                        <a:srgbClr val="FFFFFF"/>
+                        <a:srgbClr val="ffffff"/>
                       </a:solidFill>
                     </a:lnR>
                     <a:lnT w="12240">
                       <a:solidFill>
-                        <a:srgbClr val="FFFFFF"/>
+                        <a:srgbClr val="ffffff"/>
                       </a:solidFill>
                     </a:lnT>
                     <a:lnB w="12240">
                       <a:solidFill>
-                        <a:srgbClr val="FFFFFF"/>
+                        <a:srgbClr val="ffffff"/>
                       </a:solidFill>
                     </a:lnB>
                     <a:solidFill>
-                      <a:srgbClr val="E7EAEC"/>
+                      <a:srgbClr val="e7eaec"/>
                     </a:solidFill>
                   </a:tcPr>
                 </a:tc>
                 <a:tc>
                   <a:txBody>
-                    <a:bodyPr/>
-                    <a:lstStyle/>
+                    <a:bodyPr lIns="7560" rIns="7560">
+                      <a:noAutofit/>
+                    </a:bodyPr>
                     <a:p>
                       <a:pPr algn="ctr">
                         <a:lnSpc>
@@ -5846,53 +5277,51 @@
                         </a:lnSpc>
                       </a:pPr>
                       <a:r>
-                        <a:rPr lang="es-ES" sz="1200" b="0" strike="noStrike" spc="-1">
+                        <a:rPr b="0" lang="es-ES" sz="1200" spc="-1" strike="noStrike">
                           <a:solidFill>
                             <a:srgbClr val="000000"/>
                           </a:solidFill>
-                          <a:latin typeface="Aptos" panose="020B0004020202020204" pitchFamily="34" charset="0"/>
+                          <a:latin typeface="Aptos"/>
+                          <a:ea typeface="DejaVu Sans"/>
                         </a:rPr>
                         <a:t>probably damaging (1)</a:t>
                       </a:r>
-                      <a:endParaRPr lang="es-ES" sz="1200" b="0" strike="noStrike" spc="-1">
-                        <a:latin typeface="Aptos" panose="020B0004020202020204" pitchFamily="34" charset="0"/>
+                      <a:endParaRPr b="0" lang="es-ES" sz="1200" spc="-1" strike="noStrike">
+                        <a:latin typeface="Arial"/>
                       </a:endParaRPr>
                     </a:p>
                   </a:txBody>
                   <a:tcPr marL="7560" marR="7560">
                     <a:lnL w="12240">
                       <a:solidFill>
-                        <a:srgbClr val="FFFFFF"/>
+                        <a:srgbClr val="ffffff"/>
                       </a:solidFill>
                     </a:lnL>
-                    <a:lnR w="12240" cap="flat" cmpd="sng" algn="ctr">
-                      <a:solidFill>
-                        <a:srgbClr val="FFFFFF"/>
-                      </a:solidFill>
-                      <a:prstDash val="solid"/>
-                      <a:round/>
-                      <a:headEnd type="none" w="med" len="med"/>
-                      <a:tailEnd type="none" w="med" len="med"/>
+                    <a:lnR w="12240">
+                      <a:solidFill>
+                        <a:srgbClr val="ffffff"/>
+                      </a:solidFill>
                     </a:lnR>
                     <a:lnT w="12240">
                       <a:solidFill>
-                        <a:srgbClr val="FFFFFF"/>
+                        <a:srgbClr val="ffffff"/>
                       </a:solidFill>
                     </a:lnT>
                     <a:lnB w="12240">
                       <a:solidFill>
-                        <a:srgbClr val="FFFFFF"/>
+                        <a:srgbClr val="ffffff"/>
                       </a:solidFill>
                     </a:lnB>
                     <a:solidFill>
-                      <a:srgbClr val="E7EAEC"/>
+                      <a:srgbClr val="e7eaec"/>
                     </a:solidFill>
                   </a:tcPr>
                 </a:tc>
                 <a:tc>
                   <a:txBody>
-                    <a:bodyPr/>
-                    <a:lstStyle/>
+                    <a:bodyPr lIns="7560" rIns="7560">
+                      <a:noAutofit/>
+                    </a:bodyPr>
                     <a:p>
                       <a:pPr algn="ctr">
                         <a:lnSpc>
@@ -5900,133 +5329,119 @@
                         </a:lnSpc>
                       </a:pPr>
                       <a:r>
-                        <a:rPr lang="es-ES" sz="1200" b="0" strike="noStrike" spc="-1" dirty="0">
-                          <a:latin typeface="Aptos" panose="020B0004020202020204" pitchFamily="34" charset="0"/>
+                        <a:rPr b="0" lang="es-ES" sz="1200" spc="-1" strike="noStrike">
+                          <a:solidFill>
+                            <a:srgbClr val="000000"/>
+                          </a:solidFill>
+                          <a:latin typeface="Aptos"/>
+                          <a:ea typeface="DejaVu Sans"/>
                         </a:rPr>
                         <a:t>#618406</a:t>
                       </a:r>
+                      <a:endParaRPr b="0" lang="es-ES" sz="1200" spc="-1" strike="noStrike">
+                        <a:latin typeface="Arial"/>
+                      </a:endParaRPr>
                     </a:p>
                   </a:txBody>
                   <a:tcPr marL="7560" marR="7560">
                     <a:lnL w="12240">
                       <a:solidFill>
-                        <a:srgbClr val="FFFFFF"/>
+                        <a:srgbClr val="ffffff"/>
                       </a:solidFill>
                     </a:lnL>
-                    <a:lnR w="12240" cap="flat" cmpd="sng" algn="ctr">
-                      <a:solidFill>
-                        <a:srgbClr val="FFFFFF"/>
-                      </a:solidFill>
-                      <a:prstDash val="solid"/>
-                      <a:round/>
-                      <a:headEnd type="none" w="med" len="med"/>
-                      <a:tailEnd type="none" w="med" len="med"/>
+                    <a:lnR w="12240">
+                      <a:solidFill>
+                        <a:srgbClr val="ffffff"/>
+                      </a:solidFill>
                     </a:lnR>
-                    <a:lnT w="12240" cap="flat" cmpd="sng" algn="ctr">
-                      <a:solidFill>
-                        <a:srgbClr val="FFFFFF"/>
-                      </a:solidFill>
-                      <a:prstDash val="solid"/>
-                      <a:round/>
-                      <a:headEnd type="none" w="med" len="med"/>
-                      <a:tailEnd type="none" w="med" len="med"/>
+                    <a:lnT w="12240">
+                      <a:solidFill>
+                        <a:srgbClr val="ffffff"/>
+                      </a:solidFill>
                     </a:lnT>
-                    <a:lnB w="12240" cap="flat" cmpd="sng" algn="ctr">
-                      <a:solidFill>
-                        <a:srgbClr val="FFFFFF"/>
-                      </a:solidFill>
-                      <a:prstDash val="solid"/>
-                      <a:round/>
-                      <a:headEnd type="none" w="med" len="med"/>
-                      <a:tailEnd type="none" w="med" len="med"/>
+                    <a:lnB w="12240">
+                      <a:solidFill>
+                        <a:srgbClr val="ffffff"/>
+                      </a:solidFill>
                     </a:lnB>
                     <a:solidFill>
-                      <a:srgbClr val="E7EAEC"/>
+                      <a:srgbClr val="e7eaec"/>
                     </a:solidFill>
                   </a:tcPr>
                 </a:tc>
                 <a:tc>
                   <a:txBody>
-                    <a:bodyPr/>
-                    <a:lstStyle/>
+                    <a:bodyPr lIns="7560" rIns="7560">
+                      <a:noAutofit/>
+                    </a:bodyPr>
                     <a:p>
-                      <a:pPr marL="0" marR="0" lvl="0" indent="0" algn="ctr" defTabSz="914400" rtl="0" eaLnBrk="1" fontAlgn="auto" latinLnBrk="0" hangingPunct="1">
+                      <a:pPr algn="ctr">
                         <a:lnSpc>
                           <a:spcPct val="100000"/>
                         </a:lnSpc>
-                        <a:spcBef>
-                          <a:spcPts val="0"/>
-                        </a:spcBef>
-                        <a:spcAft>
-                          <a:spcPts val="0"/>
-                        </a:spcAft>
-                        <a:buClrTx/>
-                        <a:buSzTx/>
-                        <a:buFontTx/>
-                        <a:buNone/>
-                        <a:tabLst/>
-                        <a:defRPr/>
+                        <a:tabLst>
+                          <a:tab algn="l" pos="0"/>
+                        </a:tabLst>
                       </a:pPr>
                       <a:r>
-                        <a:rPr lang="es-ES" sz="1200" b="0" strike="noStrike" spc="-1" dirty="0">
-                          <a:latin typeface="Aptos" panose="020B0004020202020204" pitchFamily="34" charset="0"/>
+                        <a:rPr b="0" lang="es-ES" sz="1200" spc="-1" strike="noStrike">
+                          <a:solidFill>
+                            <a:srgbClr val="000000"/>
+                          </a:solidFill>
+                          <a:latin typeface="Aptos"/>
+                          <a:ea typeface="DejaVu Sans"/>
                         </a:rPr>
                         <a:t>Autosómico recesiva</a:t>
                       </a:r>
+                      <a:endParaRPr b="0" lang="es-ES" sz="1200" spc="-1" strike="noStrike">
+                        <a:latin typeface="Arial"/>
+                      </a:endParaRPr>
                     </a:p>
                     <a:p>
                       <a:pPr algn="ctr">
                         <a:lnSpc>
                           <a:spcPct val="100000"/>
                         </a:lnSpc>
+                        <a:tabLst>
+                          <a:tab algn="l" pos="0"/>
+                        </a:tabLst>
                       </a:pPr>
-                      <a:endParaRPr lang="es-ES" sz="1200" b="0" strike="noStrike" spc="-1" dirty="0">
-                        <a:latin typeface="Aptos" panose="020B0004020202020204" pitchFamily="34" charset="0"/>
+                      <a:endParaRPr b="0" lang="es-ES" sz="1200" spc="-1" strike="noStrike">
+                        <a:latin typeface="Arial"/>
                       </a:endParaRPr>
                     </a:p>
                   </a:txBody>
                   <a:tcPr marL="7560" marR="7560">
                     <a:lnL w="12240">
                       <a:solidFill>
-                        <a:srgbClr val="FFFFFF"/>
+                        <a:srgbClr val="ffffff"/>
                       </a:solidFill>
                     </a:lnL>
-                    <a:lnR w="12240" cap="flat" cmpd="sng" algn="ctr">
-                      <a:solidFill>
-                        <a:srgbClr val="FFFFFF"/>
-                      </a:solidFill>
-                      <a:prstDash val="solid"/>
-                      <a:round/>
-                      <a:headEnd type="none" w="med" len="med"/>
-                      <a:tailEnd type="none" w="med" len="med"/>
+                    <a:lnR w="12240">
+                      <a:solidFill>
+                        <a:srgbClr val="ffffff"/>
+                      </a:solidFill>
                     </a:lnR>
-                    <a:lnT w="12240" cap="flat" cmpd="sng" algn="ctr">
-                      <a:solidFill>
-                        <a:srgbClr val="FFFFFF"/>
-                      </a:solidFill>
-                      <a:prstDash val="solid"/>
-                      <a:round/>
-                      <a:headEnd type="none" w="med" len="med"/>
-                      <a:tailEnd type="none" w="med" len="med"/>
+                    <a:lnT w="12240">
+                      <a:solidFill>
+                        <a:srgbClr val="ffffff"/>
+                      </a:solidFill>
                     </a:lnT>
-                    <a:lnB w="12240" cap="flat" cmpd="sng" algn="ctr">
-                      <a:solidFill>
-                        <a:srgbClr val="FFFFFF"/>
-                      </a:solidFill>
-                      <a:prstDash val="solid"/>
-                      <a:round/>
-                      <a:headEnd type="none" w="med" len="med"/>
-                      <a:tailEnd type="none" w="med" len="med"/>
+                    <a:lnB w="12240">
+                      <a:solidFill>
+                        <a:srgbClr val="ffffff"/>
+                      </a:solidFill>
                     </a:lnB>
                     <a:solidFill>
-                      <a:srgbClr val="E7EAEC"/>
+                      <a:srgbClr val="e7eaec"/>
                     </a:solidFill>
                   </a:tcPr>
                 </a:tc>
                 <a:tc>
                   <a:txBody>
-                    <a:bodyPr/>
-                    <a:lstStyle/>
+                    <a:bodyPr lIns="7560" rIns="7560">
+                      <a:noAutofit/>
+                    </a:bodyPr>
                     <a:p>
                       <a:pPr algn="ctr">
                         <a:lnSpc>
@@ -6034,58 +5449,53 @@
                         </a:lnSpc>
                       </a:pPr>
                       <a:r>
-                        <a:rPr lang="es-ES" sz="1200" b="0" strike="noStrike" spc="-1" dirty="0">
-                          <a:latin typeface="Aptos" panose="020B0004020202020204" pitchFamily="34" charset="0"/>
+                        <a:rPr b="0" lang="es-ES" sz="1200" spc="-1" strike="noStrike">
+                          <a:solidFill>
+                            <a:srgbClr val="000000"/>
+                          </a:solidFill>
+                          <a:latin typeface="Aptos"/>
+                          <a:ea typeface="DejaVu Sans"/>
                         </a:rPr>
                         <a:t>Vía de señalización de la saciedad </a:t>
                       </a:r>
+                      <a:endParaRPr b="0" lang="es-ES" sz="1200" spc="-1" strike="noStrike">
+                        <a:latin typeface="Arial"/>
+                      </a:endParaRPr>
                     </a:p>
                   </a:txBody>
                   <a:tcPr marL="7560" marR="7560">
                     <a:lnL w="12240">
                       <a:solidFill>
-                        <a:srgbClr val="FFFFFF"/>
+                        <a:srgbClr val="ffffff"/>
                       </a:solidFill>
                     </a:lnL>
                     <a:lnR w="12240">
                       <a:solidFill>
-                        <a:srgbClr val="FFFFFF"/>
+                        <a:srgbClr val="ffffff"/>
                       </a:solidFill>
                     </a:lnR>
-                    <a:lnT w="12240" cap="flat" cmpd="sng" algn="ctr">
-                      <a:solidFill>
-                        <a:srgbClr val="FFFFFF"/>
-                      </a:solidFill>
-                      <a:prstDash val="solid"/>
-                      <a:round/>
-                      <a:headEnd type="none" w="med" len="med"/>
-                      <a:tailEnd type="none" w="med" len="med"/>
+                    <a:lnT w="12240">
+                      <a:solidFill>
+                        <a:srgbClr val="ffffff"/>
+                      </a:solidFill>
                     </a:lnT>
-                    <a:lnB w="12240" cap="flat" cmpd="sng" algn="ctr">
-                      <a:solidFill>
-                        <a:srgbClr val="FFFFFF"/>
-                      </a:solidFill>
-                      <a:prstDash val="solid"/>
-                      <a:round/>
-                      <a:headEnd type="none" w="med" len="med"/>
-                      <a:tailEnd type="none" w="med" len="med"/>
+                    <a:lnB w="12240">
+                      <a:solidFill>
+                        <a:srgbClr val="ffffff"/>
+                      </a:solidFill>
                     </a:lnB>
                     <a:solidFill>
-                      <a:srgbClr val="E7EAEC"/>
+                      <a:srgbClr val="e7eaec"/>
                     </a:solidFill>
                   </a:tcPr>
                 </a:tc>
-                <a:extLst>
-                  <a:ext uri="{0D108BD9-81ED-4DB2-BD59-A6C34878D82A}">
-                    <a16:rowId xmlns:a16="http://schemas.microsoft.com/office/drawing/2014/main" val="10002"/>
-                  </a:ext>
-                </a:extLst>
               </a:tr>
-              <a:tr h="648606">
+              <a:tr h="774360">
                 <a:tc>
                   <a:txBody>
-                    <a:bodyPr/>
-                    <a:lstStyle/>
+                    <a:bodyPr lIns="7560" rIns="7560">
+                      <a:noAutofit/>
+                    </a:bodyPr>
                     <a:p>
                       <a:pPr>
                         <a:lnSpc>
@@ -6093,49 +5503,51 @@
                         </a:lnSpc>
                       </a:pPr>
                       <a:r>
-                        <a:rPr lang="es-ES" sz="1200" b="0" strike="noStrike" spc="-1" dirty="0">
+                        <a:rPr b="0" lang="es-ES" sz="1200" spc="-1" strike="noStrike">
                           <a:solidFill>
                             <a:srgbClr val="000000"/>
                           </a:solidFill>
-                          <a:latin typeface="Aptos" panose="020B0004020202020204" pitchFamily="34" charset="0"/>
+                          <a:latin typeface="Aptos"/>
+                          <a:ea typeface="DejaVu Sans"/>
                         </a:rPr>
                         <a:t>MED12</a:t>
                       </a:r>
-                      <a:endParaRPr lang="es-ES" sz="1200" b="0" strike="noStrike" spc="-1" dirty="0">
-                        <a:latin typeface="Aptos" panose="020B0004020202020204" pitchFamily="34" charset="0"/>
+                      <a:endParaRPr b="0" lang="es-ES" sz="1200" spc="-1" strike="noStrike">
+                        <a:latin typeface="Arial"/>
                       </a:endParaRPr>
                     </a:p>
                   </a:txBody>
                   <a:tcPr marL="7560" marR="7560">
                     <a:lnL w="12240">
                       <a:solidFill>
-                        <a:srgbClr val="FFFFFF"/>
+                        <a:srgbClr val="ffffff"/>
                       </a:solidFill>
                     </a:lnL>
                     <a:lnR w="12240">
                       <a:solidFill>
-                        <a:srgbClr val="FFFFFF"/>
+                        <a:srgbClr val="ffffff"/>
                       </a:solidFill>
                     </a:lnR>
                     <a:lnT w="12240">
                       <a:solidFill>
-                        <a:srgbClr val="FFFFFF"/>
+                        <a:srgbClr val="ffffff"/>
                       </a:solidFill>
                     </a:lnT>
                     <a:lnB w="12240">
                       <a:solidFill>
-                        <a:srgbClr val="FFFFFF"/>
+                        <a:srgbClr val="ffffff"/>
                       </a:solidFill>
                     </a:lnB>
                     <a:solidFill>
-                      <a:srgbClr val="E7EAEC"/>
+                      <a:srgbClr val="e7eaec"/>
                     </a:solidFill>
                   </a:tcPr>
                 </a:tc>
                 <a:tc>
                   <a:txBody>
-                    <a:bodyPr/>
-                    <a:lstStyle/>
+                    <a:bodyPr lIns="7560" rIns="7560">
+                      <a:noAutofit/>
+                    </a:bodyPr>
                     <a:p>
                       <a:pPr algn="ctr">
                         <a:lnSpc>
@@ -6143,49 +5555,51 @@
                         </a:lnSpc>
                       </a:pPr>
                       <a:r>
-                        <a:rPr lang="es-ES" sz="1200" b="0" strike="noStrike" spc="-1">
+                        <a:rPr b="0" lang="es-ES" sz="1200" spc="-1" strike="noStrike">
                           <a:solidFill>
                             <a:srgbClr val="000000"/>
                           </a:solidFill>
-                          <a:latin typeface="Aptos" panose="020B0004020202020204" pitchFamily="34" charset="0"/>
+                          <a:latin typeface="Aptos"/>
+                          <a:ea typeface="DejaVu Sans"/>
                         </a:rPr>
                         <a:t>X:71121046</a:t>
                       </a:r>
-                      <a:endParaRPr lang="es-ES" sz="1200" b="0" strike="noStrike" spc="-1">
-                        <a:latin typeface="Aptos" panose="020B0004020202020204" pitchFamily="34" charset="0"/>
+                      <a:endParaRPr b="0" lang="es-ES" sz="1200" spc="-1" strike="noStrike">
+                        <a:latin typeface="Arial"/>
                       </a:endParaRPr>
                     </a:p>
                   </a:txBody>
                   <a:tcPr marL="7560" marR="7560">
                     <a:lnL w="12240">
                       <a:solidFill>
-                        <a:srgbClr val="FFFFFF"/>
+                        <a:srgbClr val="ffffff"/>
                       </a:solidFill>
                     </a:lnL>
                     <a:lnR w="12240">
                       <a:solidFill>
-                        <a:srgbClr val="FFFFFF"/>
+                        <a:srgbClr val="ffffff"/>
                       </a:solidFill>
                     </a:lnR>
                     <a:lnT w="12240">
                       <a:solidFill>
-                        <a:srgbClr val="FFFFFF"/>
+                        <a:srgbClr val="ffffff"/>
                       </a:solidFill>
                     </a:lnT>
                     <a:lnB w="12240">
                       <a:solidFill>
-                        <a:srgbClr val="FFFFFF"/>
+                        <a:srgbClr val="ffffff"/>
                       </a:solidFill>
                     </a:lnB>
                     <a:solidFill>
-                      <a:srgbClr val="E7EAEC"/>
+                      <a:srgbClr val="e7eaec"/>
                     </a:solidFill>
                   </a:tcPr>
                 </a:tc>
                 <a:tc>
                   <a:txBody>
-                    <a:bodyPr/>
-                    <a:lstStyle/>
+                    <a:bodyPr lIns="7560" rIns="7560">
+                      <a:noAutofit/>
+                    </a:bodyPr>
                     <a:p>
                       <a:pPr algn="ctr">
                         <a:lnSpc>
@@ -6193,49 +5607,51 @@
                         </a:lnSpc>
                       </a:pPr>
                       <a:r>
-                        <a:rPr lang="es-ES" sz="1200" b="0" strike="noStrike" spc="-1">
+                        <a:rPr b="0" lang="es-ES" sz="1200" spc="-1" strike="noStrike">
                           <a:solidFill>
                             <a:srgbClr val="000000"/>
                           </a:solidFill>
-                          <a:latin typeface="Aptos" panose="020B0004020202020204" pitchFamily="34" charset="0"/>
+                          <a:latin typeface="Aptos"/>
+                          <a:ea typeface="DejaVu Sans"/>
                         </a:rPr>
                         <a:t>ENST00000374080.8:c.629C&gt;T</a:t>
                       </a:r>
-                      <a:endParaRPr lang="es-ES" sz="1200" b="0" strike="noStrike" spc="-1">
-                        <a:latin typeface="Aptos" panose="020B0004020202020204" pitchFamily="34" charset="0"/>
+                      <a:endParaRPr b="0" lang="es-ES" sz="1200" spc="-1" strike="noStrike">
+                        <a:latin typeface="Arial"/>
                       </a:endParaRPr>
                     </a:p>
                   </a:txBody>
                   <a:tcPr marL="7560" marR="7560">
                     <a:lnL w="12240">
                       <a:solidFill>
-                        <a:srgbClr val="FFFFFF"/>
+                        <a:srgbClr val="ffffff"/>
                       </a:solidFill>
                     </a:lnL>
                     <a:lnR w="12240">
                       <a:solidFill>
-                        <a:srgbClr val="FFFFFF"/>
+                        <a:srgbClr val="ffffff"/>
                       </a:solidFill>
                     </a:lnR>
                     <a:lnT w="12240">
                       <a:solidFill>
-                        <a:srgbClr val="FFFFFF"/>
+                        <a:srgbClr val="ffffff"/>
                       </a:solidFill>
                     </a:lnT>
                     <a:lnB w="12240">
                       <a:solidFill>
-                        <a:srgbClr val="FFFFFF"/>
+                        <a:srgbClr val="ffffff"/>
                       </a:solidFill>
                     </a:lnB>
                     <a:solidFill>
-                      <a:srgbClr val="E7EAEC"/>
+                      <a:srgbClr val="e7eaec"/>
                     </a:solidFill>
                   </a:tcPr>
                 </a:tc>
                 <a:tc>
                   <a:txBody>
-                    <a:bodyPr/>
-                    <a:lstStyle/>
+                    <a:bodyPr lIns="7560" rIns="7560">
+                      <a:noAutofit/>
+                    </a:bodyPr>
                     <a:p>
                       <a:pPr algn="ctr">
                         <a:lnSpc>
@@ -6243,49 +5659,51 @@
                         </a:lnSpc>
                       </a:pPr>
                       <a:r>
-                        <a:rPr lang="es-ES" sz="1200" b="0" strike="noStrike" spc="-1">
+                        <a:rPr b="0" lang="es-ES" sz="1200" spc="-1" strike="noStrike">
                           <a:solidFill>
                             <a:srgbClr val="000000"/>
                           </a:solidFill>
-                          <a:latin typeface="Aptos" panose="020B0004020202020204" pitchFamily="34" charset="0"/>
+                          <a:latin typeface="Aptos"/>
+                          <a:ea typeface="DejaVu Sans"/>
                         </a:rPr>
                         <a:t>SNP</a:t>
                       </a:r>
-                      <a:endParaRPr lang="es-ES" sz="1200" b="0" strike="noStrike" spc="-1">
-                        <a:latin typeface="Aptos" panose="020B0004020202020204" pitchFamily="34" charset="0"/>
+                      <a:endParaRPr b="0" lang="es-ES" sz="1200" spc="-1" strike="noStrike">
+                        <a:latin typeface="Arial"/>
                       </a:endParaRPr>
                     </a:p>
                   </a:txBody>
                   <a:tcPr marL="7560" marR="7560">
                     <a:lnL w="12240">
                       <a:solidFill>
-                        <a:srgbClr val="FFFFFF"/>
+                        <a:srgbClr val="ffffff"/>
                       </a:solidFill>
                     </a:lnL>
                     <a:lnR w="12240">
                       <a:solidFill>
-                        <a:srgbClr val="FFFFFF"/>
+                        <a:srgbClr val="ffffff"/>
                       </a:solidFill>
                     </a:lnR>
                     <a:lnT w="12240">
                       <a:solidFill>
-                        <a:srgbClr val="FFFFFF"/>
+                        <a:srgbClr val="ffffff"/>
                       </a:solidFill>
                     </a:lnT>
                     <a:lnB w="12240">
                       <a:solidFill>
-                        <a:srgbClr val="FFFFFF"/>
+                        <a:srgbClr val="ffffff"/>
                       </a:solidFill>
                     </a:lnB>
                     <a:solidFill>
-                      <a:srgbClr val="E7EAEC"/>
+                      <a:srgbClr val="e7eaec"/>
                     </a:solidFill>
                   </a:tcPr>
                 </a:tc>
                 <a:tc>
                   <a:txBody>
-                    <a:bodyPr/>
-                    <a:lstStyle/>
+                    <a:bodyPr lIns="7560" rIns="7560">
+                      <a:noAutofit/>
+                    </a:bodyPr>
                     <a:p>
                       <a:pPr algn="ctr">
                         <a:lnSpc>
@@ -6293,49 +5711,51 @@
                         </a:lnSpc>
                       </a:pPr>
                       <a:r>
-                        <a:rPr lang="es-ES" sz="1200" b="0" strike="noStrike" spc="-1">
+                        <a:rPr b="0" lang="es-ES" sz="1200" spc="-1" strike="noStrike">
                           <a:solidFill>
                             <a:srgbClr val="000000"/>
                           </a:solidFill>
-                          <a:latin typeface="Aptos" panose="020B0004020202020204" pitchFamily="34" charset="0"/>
+                          <a:latin typeface="Aptos"/>
+                          <a:ea typeface="DejaVu Sans"/>
                         </a:rPr>
                         <a:t>hemicigoto</a:t>
                       </a:r>
-                      <a:endParaRPr lang="es-ES" sz="1200" b="0" strike="noStrike" spc="-1">
-                        <a:latin typeface="Aptos" panose="020B0004020202020204" pitchFamily="34" charset="0"/>
+                      <a:endParaRPr b="0" lang="es-ES" sz="1200" spc="-1" strike="noStrike">
+                        <a:latin typeface="Arial"/>
                       </a:endParaRPr>
                     </a:p>
                   </a:txBody>
                   <a:tcPr marL="7560" marR="7560">
                     <a:lnL w="12240">
                       <a:solidFill>
-                        <a:srgbClr val="FFFFFF"/>
+                        <a:srgbClr val="ffffff"/>
                       </a:solidFill>
                     </a:lnL>
                     <a:lnR w="12240">
                       <a:solidFill>
-                        <a:srgbClr val="FFFFFF"/>
+                        <a:srgbClr val="ffffff"/>
                       </a:solidFill>
                     </a:lnR>
                     <a:lnT w="12240">
                       <a:solidFill>
-                        <a:srgbClr val="FFFFFF"/>
+                        <a:srgbClr val="ffffff"/>
                       </a:solidFill>
                     </a:lnT>
                     <a:lnB w="12240">
                       <a:solidFill>
-                        <a:srgbClr val="FFFFFF"/>
+                        <a:srgbClr val="ffffff"/>
                       </a:solidFill>
                     </a:lnB>
                     <a:solidFill>
-                      <a:srgbClr val="E7EAEC"/>
+                      <a:srgbClr val="e7eaec"/>
                     </a:solidFill>
                   </a:tcPr>
                 </a:tc>
                 <a:tc>
                   <a:txBody>
-                    <a:bodyPr/>
-                    <a:lstStyle/>
+                    <a:bodyPr lIns="7560" rIns="7560">
+                      <a:noAutofit/>
+                    </a:bodyPr>
                     <a:p>
                       <a:pPr algn="ctr">
                         <a:lnSpc>
@@ -6343,49 +5763,51 @@
                         </a:lnSpc>
                       </a:pPr>
                       <a:r>
-                        <a:rPr lang="es-ES" sz="1200" b="0" strike="noStrike" spc="-1">
+                        <a:rPr b="0" lang="es-ES" sz="1200" spc="-1" strike="noStrike">
                           <a:solidFill>
                             <a:srgbClr val="000000"/>
                           </a:solidFill>
-                          <a:latin typeface="Aptos" panose="020B0004020202020204" pitchFamily="34" charset="0"/>
+                          <a:latin typeface="Aptos"/>
+                          <a:ea typeface="DejaVu Sans"/>
                         </a:rPr>
                         <a:t>4.553x10-6 (mutación)</a:t>
                       </a:r>
-                      <a:endParaRPr lang="es-ES" sz="1200" b="0" strike="noStrike" spc="-1">
-                        <a:latin typeface="Aptos" panose="020B0004020202020204" pitchFamily="34" charset="0"/>
+                      <a:endParaRPr b="0" lang="es-ES" sz="1200" spc="-1" strike="noStrike">
+                        <a:latin typeface="Arial"/>
                       </a:endParaRPr>
                     </a:p>
                   </a:txBody>
                   <a:tcPr marL="7560" marR="7560">
                     <a:lnL w="12240">
                       <a:solidFill>
-                        <a:srgbClr val="FFFFFF"/>
+                        <a:srgbClr val="ffffff"/>
                       </a:solidFill>
                     </a:lnL>
                     <a:lnR w="12240">
                       <a:solidFill>
-                        <a:srgbClr val="FFFFFF"/>
+                        <a:srgbClr val="ffffff"/>
                       </a:solidFill>
                     </a:lnR>
                     <a:lnT w="12240">
                       <a:solidFill>
-                        <a:srgbClr val="FFFFFF"/>
+                        <a:srgbClr val="ffffff"/>
                       </a:solidFill>
                     </a:lnT>
                     <a:lnB w="12240">
                       <a:solidFill>
-                        <a:srgbClr val="FFFFFF"/>
+                        <a:srgbClr val="ffffff"/>
                       </a:solidFill>
                     </a:lnB>
                     <a:solidFill>
-                      <a:srgbClr val="E7EAEC"/>
+                      <a:srgbClr val="e7eaec"/>
                     </a:solidFill>
                   </a:tcPr>
                 </a:tc>
                 <a:tc>
                   <a:txBody>
-                    <a:bodyPr/>
-                    <a:lstStyle/>
+                    <a:bodyPr lIns="7560" rIns="7560">
+                      <a:noAutofit/>
+                    </a:bodyPr>
                     <a:p>
                       <a:pPr algn="ctr">
                         <a:lnSpc>
@@ -6393,49 +5815,51 @@
                         </a:lnSpc>
                       </a:pPr>
                       <a:r>
-                        <a:rPr lang="es-ES" sz="1200" b="0" strike="noStrike" spc="-1">
+                        <a:rPr b="0" lang="es-ES" sz="1200" spc="-1" strike="noStrike">
                           <a:solidFill>
                             <a:srgbClr val="000000"/>
                           </a:solidFill>
-                          <a:latin typeface="Aptos" panose="020B0004020202020204" pitchFamily="34" charset="0"/>
+                          <a:latin typeface="Aptos"/>
+                          <a:ea typeface="DejaVu Sans"/>
                         </a:rPr>
                         <a:t>ENST00000374080.8</a:t>
                       </a:r>
-                      <a:endParaRPr lang="es-ES" sz="1200" b="0" strike="noStrike" spc="-1">
-                        <a:latin typeface="Aptos" panose="020B0004020202020204" pitchFamily="34" charset="0"/>
+                      <a:endParaRPr b="0" lang="es-ES" sz="1200" spc="-1" strike="noStrike">
+                        <a:latin typeface="Arial"/>
                       </a:endParaRPr>
                     </a:p>
                   </a:txBody>
                   <a:tcPr marL="7560" marR="7560">
                     <a:lnL w="12240">
                       <a:solidFill>
-                        <a:srgbClr val="FFFFFF"/>
+                        <a:srgbClr val="ffffff"/>
                       </a:solidFill>
                     </a:lnL>
                     <a:lnR w="12240">
                       <a:solidFill>
-                        <a:srgbClr val="FFFFFF"/>
+                        <a:srgbClr val="ffffff"/>
                       </a:solidFill>
                     </a:lnR>
                     <a:lnT w="12240">
                       <a:solidFill>
-                        <a:srgbClr val="FFFFFF"/>
+                        <a:srgbClr val="ffffff"/>
                       </a:solidFill>
                     </a:lnT>
                     <a:lnB w="12240">
                       <a:solidFill>
-                        <a:srgbClr val="FFFFFF"/>
+                        <a:srgbClr val="ffffff"/>
                       </a:solidFill>
                     </a:lnB>
                     <a:solidFill>
-                      <a:srgbClr val="E7EAEC"/>
+                      <a:srgbClr val="e7eaec"/>
                     </a:solidFill>
                   </a:tcPr>
                 </a:tc>
                 <a:tc>
                   <a:txBody>
-                    <a:bodyPr/>
-                    <a:lstStyle/>
+                    <a:bodyPr lIns="7560" rIns="7560">
+                      <a:noAutofit/>
+                    </a:bodyPr>
                     <a:p>
                       <a:pPr algn="ctr">
                         <a:lnSpc>
@@ -6443,49 +5867,51 @@
                         </a:lnSpc>
                       </a:pPr>
                       <a:r>
-                        <a:rPr lang="es-ES" sz="1200" b="0" strike="noStrike" spc="-1">
+                        <a:rPr b="0" lang="es-ES" sz="1200" spc="-1" strike="noStrike">
                           <a:solidFill>
                             <a:srgbClr val="000000"/>
                           </a:solidFill>
-                          <a:latin typeface="Aptos" panose="020B0004020202020204" pitchFamily="34" charset="0"/>
+                          <a:latin typeface="Aptos"/>
+                          <a:ea typeface="DejaVu Sans"/>
                         </a:rPr>
                         <a:t>ENSP00000363193.3:p.Ala210Val</a:t>
                       </a:r>
-                      <a:endParaRPr lang="es-ES" sz="1200" b="0" strike="noStrike" spc="-1">
-                        <a:latin typeface="Aptos" panose="020B0004020202020204" pitchFamily="34" charset="0"/>
+                      <a:endParaRPr b="0" lang="es-ES" sz="1200" spc="-1" strike="noStrike">
+                        <a:latin typeface="Arial"/>
                       </a:endParaRPr>
                     </a:p>
                   </a:txBody>
                   <a:tcPr marL="7560" marR="7560">
                     <a:lnL w="12240">
                       <a:solidFill>
-                        <a:srgbClr val="FFFFFF"/>
+                        <a:srgbClr val="ffffff"/>
                       </a:solidFill>
                     </a:lnL>
                     <a:lnR w="12240">
                       <a:solidFill>
-                        <a:srgbClr val="FFFFFF"/>
+                        <a:srgbClr val="ffffff"/>
                       </a:solidFill>
                     </a:lnR>
                     <a:lnT w="12240">
                       <a:solidFill>
-                        <a:srgbClr val="FFFFFF"/>
+                        <a:srgbClr val="ffffff"/>
                       </a:solidFill>
                     </a:lnT>
                     <a:lnB w="12240">
                       <a:solidFill>
-                        <a:srgbClr val="FFFFFF"/>
+                        <a:srgbClr val="ffffff"/>
                       </a:solidFill>
                     </a:lnB>
                     <a:solidFill>
-                      <a:srgbClr val="E7EAEC"/>
+                      <a:srgbClr val="e7eaec"/>
                     </a:solidFill>
                   </a:tcPr>
                 </a:tc>
                 <a:tc>
                   <a:txBody>
-                    <a:bodyPr/>
-                    <a:lstStyle/>
+                    <a:bodyPr lIns="7560" rIns="7560">
+                      <a:noAutofit/>
+                    </a:bodyPr>
                     <a:p>
                       <a:pPr algn="ctr">
                         <a:lnSpc>
@@ -6493,49 +5919,51 @@
                         </a:lnSpc>
                       </a:pPr>
                       <a:r>
-                        <a:rPr lang="es-ES" sz="1200" b="0" strike="noStrike" spc="-1">
+                        <a:rPr b="0" lang="es-ES" sz="1200" spc="-1" strike="noStrike">
                           <a:solidFill>
                             <a:srgbClr val="000000"/>
                           </a:solidFill>
-                          <a:latin typeface="Aptos" panose="020B0004020202020204" pitchFamily="34" charset="0"/>
+                          <a:latin typeface="Aptos"/>
+                          <a:ea typeface="DejaVu Sans"/>
                         </a:rPr>
                         <a:t>Missense</a:t>
                       </a:r>
-                      <a:endParaRPr lang="es-ES" sz="1200" b="0" strike="noStrike" spc="-1">
-                        <a:latin typeface="Aptos" panose="020B0004020202020204" pitchFamily="34" charset="0"/>
+                      <a:endParaRPr b="0" lang="es-ES" sz="1200" spc="-1" strike="noStrike">
+                        <a:latin typeface="Arial"/>
                       </a:endParaRPr>
                     </a:p>
                   </a:txBody>
                   <a:tcPr marL="7560" marR="7560">
                     <a:lnL w="12240">
                       <a:solidFill>
-                        <a:srgbClr val="FFFFFF"/>
+                        <a:srgbClr val="ffffff"/>
                       </a:solidFill>
                     </a:lnL>
                     <a:lnR w="12240">
                       <a:solidFill>
-                        <a:srgbClr val="FFFFFF"/>
+                        <a:srgbClr val="ffffff"/>
                       </a:solidFill>
                     </a:lnR>
                     <a:lnT w="12240">
                       <a:solidFill>
-                        <a:srgbClr val="FFFFFF"/>
+                        <a:srgbClr val="ffffff"/>
                       </a:solidFill>
                     </a:lnT>
                     <a:lnB w="12240">
                       <a:solidFill>
-                        <a:srgbClr val="FFFFFF"/>
+                        <a:srgbClr val="ffffff"/>
                       </a:solidFill>
                     </a:lnB>
                     <a:solidFill>
-                      <a:srgbClr val="E7EAEC"/>
+                      <a:srgbClr val="e7eaec"/>
                     </a:solidFill>
                   </a:tcPr>
                 </a:tc>
                 <a:tc>
                   <a:txBody>
-                    <a:bodyPr/>
-                    <a:lstStyle/>
+                    <a:bodyPr lIns="7560" rIns="7560">
+                      <a:noAutofit/>
+                    </a:bodyPr>
                     <a:p>
                       <a:pPr algn="ctr">
                         <a:lnSpc>
@@ -6543,49 +5971,51 @@
                         </a:lnSpc>
                       </a:pPr>
                       <a:r>
-                        <a:rPr lang="es-ES" sz="1200" b="0" strike="noStrike" spc="-1">
+                        <a:rPr b="0" lang="es-ES" sz="1200" spc="-1" strike="noStrike">
                           <a:solidFill>
                             <a:srgbClr val="000000"/>
                           </a:solidFill>
-                          <a:latin typeface="Aptos" panose="020B0004020202020204" pitchFamily="34" charset="0"/>
+                          <a:latin typeface="Aptos"/>
+                          <a:ea typeface="DejaVu Sans"/>
                         </a:rPr>
                         <a:t>deleterious low confidence (0.02)</a:t>
                       </a:r>
-                      <a:endParaRPr lang="es-ES" sz="1200" b="0" strike="noStrike" spc="-1">
-                        <a:latin typeface="Aptos" panose="020B0004020202020204" pitchFamily="34" charset="0"/>
+                      <a:endParaRPr b="0" lang="es-ES" sz="1200" spc="-1" strike="noStrike">
+                        <a:latin typeface="Arial"/>
                       </a:endParaRPr>
                     </a:p>
                   </a:txBody>
                   <a:tcPr marL="7560" marR="7560">
                     <a:lnL w="12240">
                       <a:solidFill>
-                        <a:srgbClr val="FFFFFF"/>
+                        <a:srgbClr val="ffffff"/>
                       </a:solidFill>
                     </a:lnL>
                     <a:lnR w="12240">
                       <a:solidFill>
-                        <a:srgbClr val="FFFFFF"/>
+                        <a:srgbClr val="ffffff"/>
                       </a:solidFill>
                     </a:lnR>
                     <a:lnT w="12240">
                       <a:solidFill>
-                        <a:srgbClr val="FFFFFF"/>
+                        <a:srgbClr val="ffffff"/>
                       </a:solidFill>
                     </a:lnT>
                     <a:lnB w="12240">
                       <a:solidFill>
-                        <a:srgbClr val="FFFFFF"/>
+                        <a:srgbClr val="ffffff"/>
                       </a:solidFill>
                     </a:lnB>
                     <a:solidFill>
-                      <a:srgbClr val="E7EAEC"/>
+                      <a:srgbClr val="e7eaec"/>
                     </a:solidFill>
                   </a:tcPr>
                 </a:tc>
                 <a:tc>
                   <a:txBody>
-                    <a:bodyPr/>
-                    <a:lstStyle/>
+                    <a:bodyPr lIns="7560" rIns="7560">
+                      <a:noAutofit/>
+                    </a:bodyPr>
                     <a:p>
                       <a:pPr algn="ctr">
                         <a:lnSpc>
@@ -6593,62 +6023,51 @@
                         </a:lnSpc>
                       </a:pPr>
                       <a:r>
-                        <a:rPr lang="es-ES" sz="1200" b="0" strike="noStrike" spc="-1" dirty="0" err="1">
+                        <a:rPr b="0" lang="es-ES" sz="1200" spc="-1" strike="noStrike">
                           <a:solidFill>
                             <a:srgbClr val="000000"/>
                           </a:solidFill>
-                          <a:latin typeface="Aptos" panose="020B0004020202020204" pitchFamily="34" charset="0"/>
+                          <a:latin typeface="Aptos"/>
+                          <a:ea typeface="DejaVu Sans"/>
                         </a:rPr>
-                        <a:t>benign</a:t>
+                        <a:t>benign (0.19)</a:t>
                       </a:r>
-                      <a:r>
-                        <a:rPr lang="es-ES" sz="1200" b="0" strike="noStrike" spc="-1" dirty="0">
-                          <a:solidFill>
-                            <a:srgbClr val="000000"/>
-                          </a:solidFill>
-                          <a:latin typeface="Aptos" panose="020B0004020202020204" pitchFamily="34" charset="0"/>
-                        </a:rPr>
-                        <a:t> (0.19)</a:t>
-                      </a:r>
-                      <a:endParaRPr lang="es-ES" sz="1200" b="0" strike="noStrike" spc="-1" dirty="0">
-                        <a:latin typeface="Aptos" panose="020B0004020202020204" pitchFamily="34" charset="0"/>
+                      <a:endParaRPr b="0" lang="es-ES" sz="1200" spc="-1" strike="noStrike">
+                        <a:latin typeface="Arial"/>
                       </a:endParaRPr>
                     </a:p>
                   </a:txBody>
                   <a:tcPr marL="7560" marR="7560">
                     <a:lnL w="12240">
                       <a:solidFill>
-                        <a:srgbClr val="FFFFFF"/>
+                        <a:srgbClr val="ffffff"/>
                       </a:solidFill>
                     </a:lnL>
-                    <a:lnR w="12240" cap="flat" cmpd="sng" algn="ctr">
-                      <a:solidFill>
-                        <a:srgbClr val="FFFFFF"/>
-                      </a:solidFill>
-                      <a:prstDash val="solid"/>
-                      <a:round/>
-                      <a:headEnd type="none" w="med" len="med"/>
-                      <a:tailEnd type="none" w="med" len="med"/>
+                    <a:lnR w="12240">
+                      <a:solidFill>
+                        <a:srgbClr val="ffffff"/>
+                      </a:solidFill>
                     </a:lnR>
                     <a:lnT w="12240">
                       <a:solidFill>
-                        <a:srgbClr val="FFFFFF"/>
+                        <a:srgbClr val="ffffff"/>
                       </a:solidFill>
                     </a:lnT>
                     <a:lnB w="12240">
                       <a:solidFill>
-                        <a:srgbClr val="FFFFFF"/>
+                        <a:srgbClr val="ffffff"/>
                       </a:solidFill>
                     </a:lnB>
                     <a:solidFill>
-                      <a:srgbClr val="E7EAEC"/>
+                      <a:srgbClr val="e7eaec"/>
                     </a:solidFill>
                   </a:tcPr>
                 </a:tc>
                 <a:tc>
                   <a:txBody>
-                    <a:bodyPr/>
-                    <a:lstStyle/>
+                    <a:bodyPr lIns="7560" rIns="7560">
+                      <a:noAutofit/>
+                    </a:bodyPr>
                     <a:p>
                       <a:pPr algn="ctr">
                         <a:lnSpc>
@@ -6656,55 +6075,51 @@
                         </a:lnSpc>
                       </a:pPr>
                       <a:r>
-                        <a:rPr lang="es-ES" sz="1200" b="0" strike="noStrike" spc="-1" dirty="0">
-                          <a:latin typeface="Aptos" panose="020B0004020202020204" pitchFamily="34" charset="0"/>
+                        <a:rPr b="0" lang="es-ES" sz="1200" spc="-1" strike="noStrike">
+                          <a:solidFill>
+                            <a:srgbClr val="000000"/>
+                          </a:solidFill>
+                          <a:latin typeface="Aptos"/>
+                          <a:ea typeface="DejaVu Sans"/>
                         </a:rPr>
                         <a:t>???</a:t>
                       </a:r>
+                      <a:endParaRPr b="0" lang="es-ES" sz="1200" spc="-1" strike="noStrike">
+                        <a:latin typeface="Arial"/>
+                      </a:endParaRPr>
                     </a:p>
                   </a:txBody>
                   <a:tcPr marL="7560" marR="7560">
                     <a:lnL w="12240">
                       <a:solidFill>
-                        <a:srgbClr val="FFFFFF"/>
+                        <a:srgbClr val="ffffff"/>
                       </a:solidFill>
                     </a:lnL>
-                    <a:lnR w="12240" cap="flat" cmpd="sng" algn="ctr">
-                      <a:solidFill>
-                        <a:srgbClr val="FFFFFF"/>
-                      </a:solidFill>
-                      <a:prstDash val="solid"/>
-                      <a:round/>
-                      <a:headEnd type="none" w="med" len="med"/>
-                      <a:tailEnd type="none" w="med" len="med"/>
+                    <a:lnR w="12240">
+                      <a:solidFill>
+                        <a:srgbClr val="ffffff"/>
+                      </a:solidFill>
                     </a:lnR>
-                    <a:lnT w="12240" cap="flat" cmpd="sng" algn="ctr">
-                      <a:solidFill>
-                        <a:srgbClr val="FFFFFF"/>
-                      </a:solidFill>
-                      <a:prstDash val="solid"/>
-                      <a:round/>
-                      <a:headEnd type="none" w="med" len="med"/>
-                      <a:tailEnd type="none" w="med" len="med"/>
+                    <a:lnT w="12240">
+                      <a:solidFill>
+                        <a:srgbClr val="ffffff"/>
+                      </a:solidFill>
                     </a:lnT>
-                    <a:lnB w="12240" cap="flat" cmpd="sng" algn="ctr">
-                      <a:solidFill>
-                        <a:srgbClr val="FFFFFF"/>
-                      </a:solidFill>
-                      <a:prstDash val="solid"/>
-                      <a:round/>
-                      <a:headEnd type="none" w="med" len="med"/>
-                      <a:tailEnd type="none" w="med" len="med"/>
+                    <a:lnB w="12240">
+                      <a:solidFill>
+                        <a:srgbClr val="ffffff"/>
+                      </a:solidFill>
                     </a:lnB>
                     <a:solidFill>
-                      <a:srgbClr val="E7EAEC"/>
+                      <a:srgbClr val="e7eaec"/>
                     </a:solidFill>
                   </a:tcPr>
                 </a:tc>
                 <a:tc>
                   <a:txBody>
-                    <a:bodyPr/>
-                    <a:lstStyle/>
+                    <a:bodyPr lIns="7560" rIns="7560">
+                      <a:noAutofit/>
+                    </a:bodyPr>
                     <a:p>
                       <a:pPr algn="ctr">
                         <a:lnSpc>
@@ -6712,55 +6127,51 @@
                         </a:lnSpc>
                       </a:pPr>
                       <a:r>
-                        <a:rPr lang="es-ES" sz="1200" b="0" strike="noStrike" spc="-1" dirty="0">
-                          <a:latin typeface="Aptos" panose="020B0004020202020204" pitchFamily="34" charset="0"/>
+                        <a:rPr b="0" lang="es-ES" sz="1200" spc="-1" strike="noStrike">
+                          <a:solidFill>
+                            <a:srgbClr val="000000"/>
+                          </a:solidFill>
+                          <a:latin typeface="Aptos"/>
+                          <a:ea typeface="DejaVu Sans"/>
                         </a:rPr>
                         <a:t>???</a:t>
                       </a:r>
+                      <a:endParaRPr b="0" lang="es-ES" sz="1200" spc="-1" strike="noStrike">
+                        <a:latin typeface="Arial"/>
+                      </a:endParaRPr>
                     </a:p>
                   </a:txBody>
                   <a:tcPr marL="7560" marR="7560">
                     <a:lnL w="12240">
                       <a:solidFill>
-                        <a:srgbClr val="FFFFFF"/>
+                        <a:srgbClr val="ffffff"/>
                       </a:solidFill>
                     </a:lnL>
-                    <a:lnR w="12240" cap="flat" cmpd="sng" algn="ctr">
-                      <a:solidFill>
-                        <a:srgbClr val="FFFFFF"/>
-                      </a:solidFill>
-                      <a:prstDash val="solid"/>
-                      <a:round/>
-                      <a:headEnd type="none" w="med" len="med"/>
-                      <a:tailEnd type="none" w="med" len="med"/>
+                    <a:lnR w="12240">
+                      <a:solidFill>
+                        <a:srgbClr val="ffffff"/>
+                      </a:solidFill>
                     </a:lnR>
-                    <a:lnT w="12240" cap="flat" cmpd="sng" algn="ctr">
-                      <a:solidFill>
-                        <a:srgbClr val="FFFFFF"/>
-                      </a:solidFill>
-                      <a:prstDash val="solid"/>
-                      <a:round/>
-                      <a:headEnd type="none" w="med" len="med"/>
-                      <a:tailEnd type="none" w="med" len="med"/>
+                    <a:lnT w="12240">
+                      <a:solidFill>
+                        <a:srgbClr val="ffffff"/>
+                      </a:solidFill>
                     </a:lnT>
-                    <a:lnB w="12240" cap="flat" cmpd="sng" algn="ctr">
-                      <a:solidFill>
-                        <a:srgbClr val="FFFFFF"/>
-                      </a:solidFill>
-                      <a:prstDash val="solid"/>
-                      <a:round/>
-                      <a:headEnd type="none" w="med" len="med"/>
-                      <a:tailEnd type="none" w="med" len="med"/>
+                    <a:lnB w="12240">
+                      <a:solidFill>
+                        <a:srgbClr val="ffffff"/>
+                      </a:solidFill>
                     </a:lnB>
                     <a:solidFill>
-                      <a:srgbClr val="E7EAEC"/>
+                      <a:srgbClr val="e7eaec"/>
                     </a:solidFill>
                   </a:tcPr>
                 </a:tc>
                 <a:tc>
                   <a:txBody>
-                    <a:bodyPr/>
-                    <a:lstStyle/>
+                    <a:bodyPr lIns="7560" rIns="7560">
+                      <a:noAutofit/>
+                    </a:bodyPr>
                     <a:p>
                       <a:pPr algn="ctr">
                         <a:lnSpc>
@@ -6768,58 +6179,53 @@
                         </a:lnSpc>
                       </a:pPr>
                       <a:r>
-                        <a:rPr lang="es-ES" sz="1200" b="0" strike="noStrike" spc="-1" dirty="0">
-                          <a:latin typeface="Aptos" panose="020B0004020202020204" pitchFamily="34" charset="0"/>
+                        <a:rPr b="0" lang="es-ES" sz="1200" spc="-1" strike="noStrike">
+                          <a:solidFill>
+                            <a:srgbClr val="000000"/>
+                          </a:solidFill>
+                          <a:latin typeface="Aptos"/>
+                          <a:ea typeface="DejaVu Sans"/>
                         </a:rPr>
                         <a:t>Vía de señalización de la hormona tiroidea</a:t>
                       </a:r>
+                      <a:endParaRPr b="0" lang="es-ES" sz="1200" spc="-1" strike="noStrike">
+                        <a:latin typeface="Arial"/>
+                      </a:endParaRPr>
                     </a:p>
                   </a:txBody>
                   <a:tcPr marL="7560" marR="7560">
                     <a:lnL w="12240">
                       <a:solidFill>
-                        <a:srgbClr val="FFFFFF"/>
+                        <a:srgbClr val="ffffff"/>
                       </a:solidFill>
                     </a:lnL>
                     <a:lnR w="12240">
                       <a:solidFill>
-                        <a:srgbClr val="FFFFFF"/>
+                        <a:srgbClr val="ffffff"/>
                       </a:solidFill>
                     </a:lnR>
-                    <a:lnT w="12240" cap="flat" cmpd="sng" algn="ctr">
-                      <a:solidFill>
-                        <a:srgbClr val="FFFFFF"/>
-                      </a:solidFill>
-                      <a:prstDash val="solid"/>
-                      <a:round/>
-                      <a:headEnd type="none" w="med" len="med"/>
-                      <a:tailEnd type="none" w="med" len="med"/>
+                    <a:lnT w="12240">
+                      <a:solidFill>
+                        <a:srgbClr val="ffffff"/>
+                      </a:solidFill>
                     </a:lnT>
-                    <a:lnB w="12240" cap="flat" cmpd="sng" algn="ctr">
-                      <a:solidFill>
-                        <a:srgbClr val="FFFFFF"/>
-                      </a:solidFill>
-                      <a:prstDash val="solid"/>
-                      <a:round/>
-                      <a:headEnd type="none" w="med" len="med"/>
-                      <a:tailEnd type="none" w="med" len="med"/>
+                    <a:lnB w="12240">
+                      <a:solidFill>
+                        <a:srgbClr val="ffffff"/>
+                      </a:solidFill>
                     </a:lnB>
                     <a:solidFill>
-                      <a:srgbClr val="E7EAEC"/>
+                      <a:srgbClr val="e7eaec"/>
                     </a:solidFill>
                   </a:tcPr>
                 </a:tc>
-                <a:extLst>
-                  <a:ext uri="{0D108BD9-81ED-4DB2-BD59-A6C34878D82A}">
-                    <a16:rowId xmlns:a16="http://schemas.microsoft.com/office/drawing/2014/main" val="10003"/>
-                  </a:ext>
-                </a:extLst>
               </a:tr>
-              <a:tr h="477360">
+              <a:tr h="433080">
                 <a:tc>
                   <a:txBody>
-                    <a:bodyPr/>
-                    <a:lstStyle/>
+                    <a:bodyPr lIns="7560" rIns="7560">
+                      <a:noAutofit/>
+                    </a:bodyPr>
                     <a:p>
                       <a:pPr>
                         <a:lnSpc>
@@ -6827,49 +6233,51 @@
                         </a:lnSpc>
                       </a:pPr>
                       <a:r>
-                        <a:rPr lang="es-ES" sz="1200" b="0" strike="noStrike" spc="-1" dirty="0">
+                        <a:rPr b="0" lang="es-ES" sz="1200" spc="-1" strike="noStrike">
                           <a:solidFill>
                             <a:srgbClr val="000000"/>
                           </a:solidFill>
-                          <a:latin typeface="Aptos" panose="020B0004020202020204" pitchFamily="34" charset="0"/>
+                          <a:latin typeface="Aptos"/>
+                          <a:ea typeface="DejaVu Sans"/>
                         </a:rPr>
                         <a:t>TP53</a:t>
                       </a:r>
-                      <a:endParaRPr lang="es-ES" sz="1200" b="0" strike="noStrike" spc="-1" dirty="0">
-                        <a:latin typeface="Aptos" panose="020B0004020202020204" pitchFamily="34" charset="0"/>
+                      <a:endParaRPr b="0" lang="es-ES" sz="1200" spc="-1" strike="noStrike">
+                        <a:latin typeface="Arial"/>
                       </a:endParaRPr>
                     </a:p>
                   </a:txBody>
                   <a:tcPr marL="7560" marR="7560">
                     <a:lnL w="12240">
                       <a:solidFill>
-                        <a:srgbClr val="FFFFFF"/>
+                        <a:srgbClr val="ffffff"/>
                       </a:solidFill>
                     </a:lnL>
                     <a:lnR w="12240">
                       <a:solidFill>
-                        <a:srgbClr val="FFFFFF"/>
+                        <a:srgbClr val="ffffff"/>
                       </a:solidFill>
                     </a:lnR>
                     <a:lnT w="12240">
                       <a:solidFill>
-                        <a:srgbClr val="FFFFFF"/>
+                        <a:srgbClr val="ffffff"/>
                       </a:solidFill>
                     </a:lnT>
                     <a:lnB w="12240">
                       <a:solidFill>
-                        <a:srgbClr val="FFFFFF"/>
+                        <a:srgbClr val="ffffff"/>
                       </a:solidFill>
                     </a:lnB>
                     <a:solidFill>
-                      <a:srgbClr val="E7EAEC"/>
+                      <a:srgbClr val="e7eaec"/>
                     </a:solidFill>
                   </a:tcPr>
                 </a:tc>
                 <a:tc>
                   <a:txBody>
-                    <a:bodyPr/>
-                    <a:lstStyle/>
+                    <a:bodyPr lIns="7560" rIns="7560">
+                      <a:noAutofit/>
+                    </a:bodyPr>
                     <a:p>
                       <a:pPr algn="ctr">
                         <a:lnSpc>
@@ -6877,49 +6285,51 @@
                         </a:lnSpc>
                       </a:pPr>
                       <a:r>
-                        <a:rPr lang="es-ES" sz="1200" b="0" strike="noStrike" spc="-1" dirty="0">
+                        <a:rPr b="0" lang="es-ES" sz="1200" spc="-1" strike="noStrike">
                           <a:solidFill>
                             <a:srgbClr val="000000"/>
                           </a:solidFill>
-                          <a:latin typeface="Aptos" panose="020B0004020202020204" pitchFamily="34" charset="0"/>
+                          <a:latin typeface="Aptos"/>
+                          <a:ea typeface="DejaVu Sans"/>
                         </a:rPr>
                         <a:t>17:7676154</a:t>
                       </a:r>
-                      <a:endParaRPr lang="es-ES" sz="1200" b="0" strike="noStrike" spc="-1" dirty="0">
-                        <a:latin typeface="Aptos" panose="020B0004020202020204" pitchFamily="34" charset="0"/>
+                      <a:endParaRPr b="0" lang="es-ES" sz="1200" spc="-1" strike="noStrike">
+                        <a:latin typeface="Arial"/>
                       </a:endParaRPr>
                     </a:p>
                   </a:txBody>
                   <a:tcPr marL="7560" marR="7560">
                     <a:lnL w="12240">
                       <a:solidFill>
-                        <a:srgbClr val="FFFFFF"/>
+                        <a:srgbClr val="ffffff"/>
                       </a:solidFill>
                     </a:lnL>
                     <a:lnR w="12240">
                       <a:solidFill>
-                        <a:srgbClr val="FFFFFF"/>
+                        <a:srgbClr val="ffffff"/>
                       </a:solidFill>
                     </a:lnR>
                     <a:lnT w="12240">
                       <a:solidFill>
-                        <a:srgbClr val="FFFFFF"/>
+                        <a:srgbClr val="ffffff"/>
                       </a:solidFill>
                     </a:lnT>
                     <a:lnB w="12240">
                       <a:solidFill>
-                        <a:srgbClr val="FFFFFF"/>
+                        <a:srgbClr val="ffffff"/>
                       </a:solidFill>
                     </a:lnB>
                     <a:solidFill>
-                      <a:srgbClr val="E7EAEC"/>
+                      <a:srgbClr val="e7eaec"/>
                     </a:solidFill>
                   </a:tcPr>
                 </a:tc>
                 <a:tc>
                   <a:txBody>
-                    <a:bodyPr/>
-                    <a:lstStyle/>
+                    <a:bodyPr lIns="7560" rIns="7560">
+                      <a:noAutofit/>
+                    </a:bodyPr>
                     <a:p>
                       <a:pPr algn="ctr">
                         <a:lnSpc>
@@ -6927,49 +6337,51 @@
                         </a:lnSpc>
                       </a:pPr>
                       <a:r>
-                        <a:rPr lang="es-ES" sz="1200" b="0" strike="noStrike" spc="-1" dirty="0">
+                        <a:rPr b="0" lang="es-ES" sz="1200" spc="-1" strike="noStrike">
                           <a:solidFill>
                             <a:srgbClr val="000000"/>
                           </a:solidFill>
-                          <a:latin typeface="Aptos" panose="020B0004020202020204" pitchFamily="34" charset="0"/>
+                          <a:latin typeface="Aptos"/>
+                          <a:ea typeface="DejaVu Sans"/>
                         </a:rPr>
                         <a:t>ENST00000269305.9:c.215C&gt;T</a:t>
                       </a:r>
-                      <a:endParaRPr lang="es-ES" sz="1200" b="0" strike="noStrike" spc="-1" dirty="0">
-                        <a:latin typeface="Aptos" panose="020B0004020202020204" pitchFamily="34" charset="0"/>
+                      <a:endParaRPr b="0" lang="es-ES" sz="1200" spc="-1" strike="noStrike">
+                        <a:latin typeface="Arial"/>
                       </a:endParaRPr>
                     </a:p>
                   </a:txBody>
                   <a:tcPr marL="7560" marR="7560">
                     <a:lnL w="12240">
                       <a:solidFill>
-                        <a:srgbClr val="FFFFFF"/>
+                        <a:srgbClr val="ffffff"/>
                       </a:solidFill>
                     </a:lnL>
                     <a:lnR w="12240">
                       <a:solidFill>
-                        <a:srgbClr val="FFFFFF"/>
+                        <a:srgbClr val="ffffff"/>
                       </a:solidFill>
                     </a:lnR>
                     <a:lnT w="12240">
                       <a:solidFill>
-                        <a:srgbClr val="FFFFFF"/>
+                        <a:srgbClr val="ffffff"/>
                       </a:solidFill>
                     </a:lnT>
                     <a:lnB w="12240">
                       <a:solidFill>
-                        <a:srgbClr val="FFFFFF"/>
+                        <a:srgbClr val="ffffff"/>
                       </a:solidFill>
                     </a:lnB>
                     <a:solidFill>
-                      <a:srgbClr val="E7EAEC"/>
+                      <a:srgbClr val="e7eaec"/>
                     </a:solidFill>
                   </a:tcPr>
                 </a:tc>
                 <a:tc>
                   <a:txBody>
-                    <a:bodyPr/>
-                    <a:lstStyle/>
+                    <a:bodyPr lIns="7560" rIns="7560">
+                      <a:noAutofit/>
+                    </a:bodyPr>
                     <a:p>
                       <a:pPr algn="ctr">
                         <a:lnSpc>
@@ -6977,49 +6389,51 @@
                         </a:lnSpc>
                       </a:pPr>
                       <a:r>
-                        <a:rPr lang="es-ES" sz="1200" b="0" strike="noStrike" spc="-1" dirty="0">
+                        <a:rPr b="0" lang="es-ES" sz="1200" spc="-1" strike="noStrike">
                           <a:solidFill>
                             <a:srgbClr val="000000"/>
                           </a:solidFill>
-                          <a:latin typeface="Aptos" panose="020B0004020202020204" pitchFamily="34" charset="0"/>
+                          <a:latin typeface="Aptos"/>
+                          <a:ea typeface="DejaVu Sans"/>
                         </a:rPr>
                         <a:t>SNP</a:t>
                       </a:r>
-                      <a:endParaRPr lang="es-ES" sz="1200" b="0" strike="noStrike" spc="-1" dirty="0">
-                        <a:latin typeface="Aptos" panose="020B0004020202020204" pitchFamily="34" charset="0"/>
+                      <a:endParaRPr b="0" lang="es-ES" sz="1200" spc="-1" strike="noStrike">
+                        <a:latin typeface="Arial"/>
                       </a:endParaRPr>
                     </a:p>
                   </a:txBody>
                   <a:tcPr marL="7560" marR="7560">
                     <a:lnL w="12240">
                       <a:solidFill>
-                        <a:srgbClr val="FFFFFF"/>
+                        <a:srgbClr val="ffffff"/>
                       </a:solidFill>
                     </a:lnL>
                     <a:lnR w="12240">
                       <a:solidFill>
-                        <a:srgbClr val="FFFFFF"/>
+                        <a:srgbClr val="ffffff"/>
                       </a:solidFill>
                     </a:lnR>
                     <a:lnT w="12240">
                       <a:solidFill>
-                        <a:srgbClr val="FFFFFF"/>
+                        <a:srgbClr val="ffffff"/>
                       </a:solidFill>
                     </a:lnT>
                     <a:lnB w="12240">
                       <a:solidFill>
-                        <a:srgbClr val="FFFFFF"/>
+                        <a:srgbClr val="ffffff"/>
                       </a:solidFill>
                     </a:lnB>
                     <a:solidFill>
-                      <a:srgbClr val="E7EAEC"/>
+                      <a:srgbClr val="e7eaec"/>
                     </a:solidFill>
                   </a:tcPr>
                 </a:tc>
                 <a:tc>
                   <a:txBody>
-                    <a:bodyPr/>
-                    <a:lstStyle/>
+                    <a:bodyPr lIns="7560" rIns="7560">
+                      <a:noAutofit/>
+                    </a:bodyPr>
                     <a:p>
                       <a:pPr algn="ctr">
                         <a:lnSpc>
@@ -7027,49 +6441,51 @@
                         </a:lnSpc>
                       </a:pPr>
                       <a:r>
-                        <a:rPr lang="es-ES" sz="1200" b="0" strike="noStrike" spc="-1" dirty="0">
+                        <a:rPr b="0" lang="es-ES" sz="1200" spc="-1" strike="noStrike">
                           <a:solidFill>
                             <a:srgbClr val="000000"/>
                           </a:solidFill>
-                          <a:latin typeface="Aptos" panose="020B0004020202020204" pitchFamily="34" charset="0"/>
+                          <a:latin typeface="Aptos"/>
+                          <a:ea typeface="DejaVu Sans"/>
                         </a:rPr>
                         <a:t>heterocigoto</a:t>
                       </a:r>
-                      <a:endParaRPr lang="es-ES" sz="1200" b="0" strike="noStrike" spc="-1" dirty="0">
-                        <a:latin typeface="Aptos" panose="020B0004020202020204" pitchFamily="34" charset="0"/>
+                      <a:endParaRPr b="0" lang="es-ES" sz="1200" spc="-1" strike="noStrike">
+                        <a:latin typeface="Arial"/>
                       </a:endParaRPr>
                     </a:p>
                   </a:txBody>
                   <a:tcPr marL="7560" marR="7560">
                     <a:lnL w="12240">
                       <a:solidFill>
-                        <a:srgbClr val="FFFFFF"/>
+                        <a:srgbClr val="ffffff"/>
                       </a:solidFill>
                     </a:lnL>
                     <a:lnR w="12240">
                       <a:solidFill>
-                        <a:srgbClr val="FFFFFF"/>
+                        <a:srgbClr val="ffffff"/>
                       </a:solidFill>
                     </a:lnR>
                     <a:lnT w="12240">
                       <a:solidFill>
-                        <a:srgbClr val="FFFFFF"/>
+                        <a:srgbClr val="ffffff"/>
                       </a:solidFill>
                     </a:lnT>
                     <a:lnB w="12240">
                       <a:solidFill>
-                        <a:srgbClr val="FFFFFF"/>
+                        <a:srgbClr val="ffffff"/>
                       </a:solidFill>
                     </a:lnB>
                     <a:solidFill>
-                      <a:srgbClr val="E7EAEC"/>
+                      <a:srgbClr val="e7eaec"/>
                     </a:solidFill>
                   </a:tcPr>
                 </a:tc>
                 <a:tc>
                   <a:txBody>
-                    <a:bodyPr/>
-                    <a:lstStyle/>
+                    <a:bodyPr lIns="7560" rIns="7560">
+                      <a:noAutofit/>
+                    </a:bodyPr>
                     <a:p>
                       <a:pPr algn="ctr">
                         <a:lnSpc>
@@ -7077,49 +6493,51 @@
                         </a:lnSpc>
                       </a:pPr>
                       <a:r>
-                        <a:rPr lang="es-ES" sz="1200" b="0" strike="noStrike" spc="-1" dirty="0">
+                        <a:rPr b="0" lang="es-ES" sz="1200" spc="-1" strike="noStrike">
                           <a:solidFill>
                             <a:srgbClr val="000000"/>
                           </a:solidFill>
-                          <a:latin typeface="Aptos" panose="020B0004020202020204" pitchFamily="34" charset="0"/>
+                          <a:latin typeface="Aptos"/>
+                          <a:ea typeface="DejaVu Sans"/>
                         </a:rPr>
                         <a:t>6.19 x 10-7 (mutación)</a:t>
                       </a:r>
-                      <a:endParaRPr lang="es-ES" sz="1200" b="0" strike="noStrike" spc="-1" dirty="0">
-                        <a:latin typeface="Aptos" panose="020B0004020202020204" pitchFamily="34" charset="0"/>
+                      <a:endParaRPr b="0" lang="es-ES" sz="1200" spc="-1" strike="noStrike">
+                        <a:latin typeface="Arial"/>
                       </a:endParaRPr>
                     </a:p>
                   </a:txBody>
                   <a:tcPr marL="7560" marR="7560">
                     <a:lnL w="12240">
                       <a:solidFill>
-                        <a:srgbClr val="FFFFFF"/>
+                        <a:srgbClr val="ffffff"/>
                       </a:solidFill>
                     </a:lnL>
                     <a:lnR w="12240">
                       <a:solidFill>
-                        <a:srgbClr val="FFFFFF"/>
+                        <a:srgbClr val="ffffff"/>
                       </a:solidFill>
                     </a:lnR>
                     <a:lnT w="12240">
                       <a:solidFill>
-                        <a:srgbClr val="FFFFFF"/>
+                        <a:srgbClr val="ffffff"/>
                       </a:solidFill>
                     </a:lnT>
                     <a:lnB w="12240">
                       <a:solidFill>
-                        <a:srgbClr val="FFFFFF"/>
+                        <a:srgbClr val="ffffff"/>
                       </a:solidFill>
                     </a:lnB>
                     <a:solidFill>
-                      <a:srgbClr val="E7EAEC"/>
+                      <a:srgbClr val="e7eaec"/>
                     </a:solidFill>
                   </a:tcPr>
                 </a:tc>
                 <a:tc>
                   <a:txBody>
-                    <a:bodyPr/>
-                    <a:lstStyle/>
+                    <a:bodyPr lIns="7560" rIns="7560">
+                      <a:noAutofit/>
+                    </a:bodyPr>
                     <a:p>
                       <a:pPr algn="ctr">
                         <a:lnSpc>
@@ -7127,49 +6545,51 @@
                         </a:lnSpc>
                       </a:pPr>
                       <a:r>
-                        <a:rPr lang="es-ES" sz="1200" b="0" strike="noStrike" spc="-1" dirty="0">
+                        <a:rPr b="0" lang="es-ES" sz="1200" spc="-1" strike="noStrike">
                           <a:solidFill>
                             <a:srgbClr val="000000"/>
                           </a:solidFill>
-                          <a:latin typeface="Aptos" panose="020B0004020202020204" pitchFamily="34" charset="0"/>
+                          <a:latin typeface="Aptos"/>
+                          <a:ea typeface="DejaVu Sans"/>
                         </a:rPr>
                         <a:t>ENST00000269305.9</a:t>
                       </a:r>
-                      <a:endParaRPr lang="es-ES" sz="1200" b="0" strike="noStrike" spc="-1" dirty="0">
-                        <a:latin typeface="Aptos" panose="020B0004020202020204" pitchFamily="34" charset="0"/>
+                      <a:endParaRPr b="0" lang="es-ES" sz="1200" spc="-1" strike="noStrike">
+                        <a:latin typeface="Arial"/>
                       </a:endParaRPr>
                     </a:p>
                   </a:txBody>
                   <a:tcPr marL="7560" marR="7560">
                     <a:lnL w="12240">
                       <a:solidFill>
-                        <a:srgbClr val="FFFFFF"/>
+                        <a:srgbClr val="ffffff"/>
                       </a:solidFill>
                     </a:lnL>
                     <a:lnR w="12240">
                       <a:solidFill>
-                        <a:srgbClr val="FFFFFF"/>
+                        <a:srgbClr val="ffffff"/>
                       </a:solidFill>
                     </a:lnR>
                     <a:lnT w="12240">
                       <a:solidFill>
-                        <a:srgbClr val="FFFFFF"/>
+                        <a:srgbClr val="ffffff"/>
                       </a:solidFill>
                     </a:lnT>
                     <a:lnB w="12240">
                       <a:solidFill>
-                        <a:srgbClr val="FFFFFF"/>
+                        <a:srgbClr val="ffffff"/>
                       </a:solidFill>
                     </a:lnB>
                     <a:solidFill>
-                      <a:srgbClr val="E7EAEC"/>
+                      <a:srgbClr val="e7eaec"/>
                     </a:solidFill>
                   </a:tcPr>
                 </a:tc>
                 <a:tc>
                   <a:txBody>
-                    <a:bodyPr/>
-                    <a:lstStyle/>
+                    <a:bodyPr lIns="7560" rIns="7560">
+                      <a:noAutofit/>
+                    </a:bodyPr>
                     <a:p>
                       <a:pPr algn="ctr">
                         <a:lnSpc>
@@ -7177,49 +6597,51 @@
                         </a:lnSpc>
                       </a:pPr>
                       <a:r>
-                        <a:rPr lang="es-ES" sz="1200" b="0" strike="noStrike" spc="-1" dirty="0">
+                        <a:rPr b="0" lang="es-ES" sz="1200" spc="-1" strike="noStrike">
                           <a:solidFill>
                             <a:srgbClr val="000000"/>
                           </a:solidFill>
-                          <a:latin typeface="Aptos" panose="020B0004020202020204" pitchFamily="34" charset="0"/>
+                          <a:latin typeface="Aptos"/>
+                          <a:ea typeface="DejaVu Sans"/>
                         </a:rPr>
                         <a:t>ENSP00000269305.4:p.Pro72Leu</a:t>
                       </a:r>
-                      <a:endParaRPr lang="es-ES" sz="1200" b="0" strike="noStrike" spc="-1" dirty="0">
-                        <a:latin typeface="Aptos" panose="020B0004020202020204" pitchFamily="34" charset="0"/>
+                      <a:endParaRPr b="0" lang="es-ES" sz="1200" spc="-1" strike="noStrike">
+                        <a:latin typeface="Arial"/>
                       </a:endParaRPr>
                     </a:p>
                   </a:txBody>
                   <a:tcPr marL="7560" marR="7560">
                     <a:lnL w="12240">
                       <a:solidFill>
-                        <a:srgbClr val="FFFFFF"/>
+                        <a:srgbClr val="ffffff"/>
                       </a:solidFill>
                     </a:lnL>
                     <a:lnR w="12240">
                       <a:solidFill>
-                        <a:srgbClr val="FFFFFF"/>
+                        <a:srgbClr val="ffffff"/>
                       </a:solidFill>
                     </a:lnR>
                     <a:lnT w="12240">
                       <a:solidFill>
-                        <a:srgbClr val="FFFFFF"/>
+                        <a:srgbClr val="ffffff"/>
                       </a:solidFill>
                     </a:lnT>
                     <a:lnB w="12240">
                       <a:solidFill>
-                        <a:srgbClr val="FFFFFF"/>
+                        <a:srgbClr val="ffffff"/>
                       </a:solidFill>
                     </a:lnB>
                     <a:solidFill>
-                      <a:srgbClr val="E7EAEC"/>
+                      <a:srgbClr val="e7eaec"/>
                     </a:solidFill>
                   </a:tcPr>
                 </a:tc>
                 <a:tc>
                   <a:txBody>
-                    <a:bodyPr/>
-                    <a:lstStyle/>
+                    <a:bodyPr lIns="7560" rIns="7560">
+                      <a:noAutofit/>
+                    </a:bodyPr>
                     <a:p>
                       <a:pPr algn="ctr">
                         <a:lnSpc>
@@ -7227,49 +6649,51 @@
                         </a:lnSpc>
                       </a:pPr>
                       <a:r>
-                        <a:rPr lang="es-ES" sz="1200" b="0" strike="noStrike" spc="-1" dirty="0" err="1">
+                        <a:rPr b="0" lang="es-ES" sz="1200" spc="-1" strike="noStrike">
                           <a:solidFill>
                             <a:srgbClr val="000000"/>
                           </a:solidFill>
-                          <a:latin typeface="Aptos" panose="020B0004020202020204" pitchFamily="34" charset="0"/>
+                          <a:latin typeface="Aptos"/>
+                          <a:ea typeface="DejaVu Sans"/>
                         </a:rPr>
                         <a:t>Missense</a:t>
                       </a:r>
-                      <a:endParaRPr lang="es-ES" sz="1200" b="0" strike="noStrike" spc="-1" dirty="0">
-                        <a:latin typeface="Aptos" panose="020B0004020202020204" pitchFamily="34" charset="0"/>
+                      <a:endParaRPr b="0" lang="es-ES" sz="1200" spc="-1" strike="noStrike">
+                        <a:latin typeface="Arial"/>
                       </a:endParaRPr>
                     </a:p>
                   </a:txBody>
                   <a:tcPr marL="7560" marR="7560">
                     <a:lnL w="12240">
                       <a:solidFill>
-                        <a:srgbClr val="FFFFFF"/>
+                        <a:srgbClr val="ffffff"/>
                       </a:solidFill>
                     </a:lnL>
                     <a:lnR w="12240">
                       <a:solidFill>
-                        <a:srgbClr val="FFFFFF"/>
+                        <a:srgbClr val="ffffff"/>
                       </a:solidFill>
                     </a:lnR>
                     <a:lnT w="12240">
                       <a:solidFill>
-                        <a:srgbClr val="FFFFFF"/>
+                        <a:srgbClr val="ffffff"/>
                       </a:solidFill>
                     </a:lnT>
                     <a:lnB w="12240">
                       <a:solidFill>
-                        <a:srgbClr val="FFFFFF"/>
+                        <a:srgbClr val="ffffff"/>
                       </a:solidFill>
                     </a:lnB>
                     <a:solidFill>
-                      <a:srgbClr val="E7EAEC"/>
+                      <a:srgbClr val="e7eaec"/>
                     </a:solidFill>
                   </a:tcPr>
                 </a:tc>
                 <a:tc>
                   <a:txBody>
-                    <a:bodyPr/>
-                    <a:lstStyle/>
+                    <a:bodyPr lIns="7560" rIns="7560">
+                      <a:noAutofit/>
+                    </a:bodyPr>
                     <a:p>
                       <a:pPr algn="ctr">
                         <a:lnSpc>
@@ -7277,58 +6701,51 @@
                         </a:lnSpc>
                       </a:pPr>
                       <a:r>
-                        <a:rPr lang="es-ES" sz="1200" b="0" strike="noStrike" spc="-1" dirty="0" err="1">
+                        <a:rPr b="0" lang="es-ES" sz="1200" spc="-1" strike="noStrike">
                           <a:solidFill>
                             <a:srgbClr val="000000"/>
                           </a:solidFill>
-                          <a:latin typeface="Aptos" panose="020B0004020202020204" pitchFamily="34" charset="0"/>
+                          <a:latin typeface="Aptos"/>
+                          <a:ea typeface="DejaVu Sans"/>
                         </a:rPr>
-                        <a:t>tolerated</a:t>
+                        <a:t>tolerated (0.13)</a:t>
                       </a:r>
-                      <a:r>
-                        <a:rPr lang="es-ES" sz="1200" b="0" strike="noStrike" spc="-1" dirty="0">
-                          <a:solidFill>
-                            <a:srgbClr val="000000"/>
-                          </a:solidFill>
-                          <a:latin typeface="Aptos" panose="020B0004020202020204" pitchFamily="34" charset="0"/>
-                        </a:rPr>
-                        <a:t> (0.13)</a:t>
-                      </a:r>
-                      <a:endParaRPr lang="es-ES" sz="1200" b="0" strike="noStrike" spc="-1" dirty="0">
-                        <a:latin typeface="Aptos" panose="020B0004020202020204" pitchFamily="34" charset="0"/>
+                      <a:endParaRPr b="0" lang="es-ES" sz="1200" spc="-1" strike="noStrike">
+                        <a:latin typeface="Arial"/>
                       </a:endParaRPr>
                     </a:p>
                   </a:txBody>
                   <a:tcPr marL="7560" marR="7560">
                     <a:lnL w="12240">
                       <a:solidFill>
-                        <a:srgbClr val="FFFFFF"/>
+                        <a:srgbClr val="ffffff"/>
                       </a:solidFill>
                     </a:lnL>
                     <a:lnR w="12240">
                       <a:solidFill>
-                        <a:srgbClr val="FFFFFF"/>
+                        <a:srgbClr val="ffffff"/>
                       </a:solidFill>
                     </a:lnR>
                     <a:lnT w="12240">
                       <a:solidFill>
-                        <a:srgbClr val="FFFFFF"/>
+                        <a:srgbClr val="ffffff"/>
                       </a:solidFill>
                     </a:lnT>
                     <a:lnB w="12240">
                       <a:solidFill>
-                        <a:srgbClr val="FFFFFF"/>
+                        <a:srgbClr val="ffffff"/>
                       </a:solidFill>
                     </a:lnB>
                     <a:solidFill>
-                      <a:srgbClr val="E7EAEC"/>
+                      <a:srgbClr val="e7eaec"/>
                     </a:solidFill>
                   </a:tcPr>
                 </a:tc>
                 <a:tc>
                   <a:txBody>
-                    <a:bodyPr/>
-                    <a:lstStyle/>
+                    <a:bodyPr lIns="7560" rIns="7560">
+                      <a:noAutofit/>
+                    </a:bodyPr>
                     <a:p>
                       <a:pPr algn="ctr">
                         <a:lnSpc>
@@ -7336,62 +6753,51 @@
                         </a:lnSpc>
                       </a:pPr>
                       <a:r>
-                        <a:rPr lang="es-ES" sz="1200" b="0" strike="noStrike" spc="-1" dirty="0" err="1">
+                        <a:rPr b="0" lang="es-ES" sz="1200" spc="-1" strike="noStrike">
                           <a:solidFill>
                             <a:srgbClr val="000000"/>
                           </a:solidFill>
-                          <a:latin typeface="Aptos" panose="020B0004020202020204" pitchFamily="34" charset="0"/>
+                          <a:latin typeface="Aptos"/>
+                          <a:ea typeface="DejaVu Sans"/>
                         </a:rPr>
-                        <a:t>benign</a:t>
+                        <a:t>benign (0.003)</a:t>
                       </a:r>
-                      <a:r>
-                        <a:rPr lang="es-ES" sz="1200" b="0" strike="noStrike" spc="-1" dirty="0">
-                          <a:solidFill>
-                            <a:srgbClr val="000000"/>
-                          </a:solidFill>
-                          <a:latin typeface="Aptos" panose="020B0004020202020204" pitchFamily="34" charset="0"/>
-                        </a:rPr>
-                        <a:t> (0.003)</a:t>
-                      </a:r>
-                      <a:endParaRPr lang="es-ES" sz="1200" b="0" strike="noStrike" spc="-1" dirty="0">
-                        <a:latin typeface="Aptos" panose="020B0004020202020204" pitchFamily="34" charset="0"/>
+                      <a:endParaRPr b="0" lang="es-ES" sz="1200" spc="-1" strike="noStrike">
+                        <a:latin typeface="Arial"/>
                       </a:endParaRPr>
                     </a:p>
                   </a:txBody>
                   <a:tcPr marL="7560" marR="7560">
                     <a:lnL w="12240">
                       <a:solidFill>
-                        <a:srgbClr val="FFFFFF"/>
+                        <a:srgbClr val="ffffff"/>
                       </a:solidFill>
                     </a:lnL>
-                    <a:lnR w="12240" cap="flat" cmpd="sng" algn="ctr">
-                      <a:solidFill>
-                        <a:srgbClr val="FFFFFF"/>
-                      </a:solidFill>
-                      <a:prstDash val="solid"/>
-                      <a:round/>
-                      <a:headEnd type="none" w="med" len="med"/>
-                      <a:tailEnd type="none" w="med" len="med"/>
+                    <a:lnR w="12240">
+                      <a:solidFill>
+                        <a:srgbClr val="ffffff"/>
+                      </a:solidFill>
                     </a:lnR>
                     <a:lnT w="12240">
                       <a:solidFill>
-                        <a:srgbClr val="FFFFFF"/>
+                        <a:srgbClr val="ffffff"/>
                       </a:solidFill>
                     </a:lnT>
                     <a:lnB w="12240">
                       <a:solidFill>
-                        <a:srgbClr val="FFFFFF"/>
+                        <a:srgbClr val="ffffff"/>
                       </a:solidFill>
                     </a:lnB>
                     <a:solidFill>
-                      <a:srgbClr val="E7EAEC"/>
+                      <a:srgbClr val="e7eaec"/>
                     </a:solidFill>
                   </a:tcPr>
                 </a:tc>
                 <a:tc>
                   <a:txBody>
-                    <a:bodyPr/>
-                    <a:lstStyle/>
+                    <a:bodyPr lIns="7560" rIns="7560">
+                      <a:noAutofit/>
+                    </a:bodyPr>
                     <a:p>
                       <a:pPr algn="ctr">
                         <a:lnSpc>
@@ -7399,51 +6805,51 @@
                         </a:lnSpc>
                       </a:pPr>
                       <a:r>
-                        <a:rPr lang="es-ES" sz="1200" b="0" strike="noStrike" spc="-1" dirty="0">
-                          <a:latin typeface="Aptos" panose="020B0004020202020204" pitchFamily="34" charset="0"/>
+                        <a:rPr b="0" lang="es-ES" sz="1200" spc="-1" strike="noStrike">
+                          <a:solidFill>
+                            <a:srgbClr val="000000"/>
+                          </a:solidFill>
+                          <a:latin typeface="Aptos"/>
+                          <a:ea typeface="DejaVu Sans"/>
                         </a:rPr>
                         <a:t>#151623</a:t>
                       </a:r>
+                      <a:endParaRPr b="0" lang="es-ES" sz="1200" spc="-1" strike="noStrike">
+                        <a:latin typeface="Arial"/>
+                      </a:endParaRPr>
                     </a:p>
                   </a:txBody>
                   <a:tcPr marL="7560" marR="7560">
                     <a:lnL w="12240">
                       <a:solidFill>
-                        <a:srgbClr val="FFFFFF"/>
+                        <a:srgbClr val="ffffff"/>
                       </a:solidFill>
                     </a:lnL>
-                    <a:lnR w="12240" cap="flat" cmpd="sng" algn="ctr">
-                      <a:solidFill>
-                        <a:srgbClr val="FFFFFF"/>
-                      </a:solidFill>
-                      <a:prstDash val="solid"/>
-                      <a:round/>
-                      <a:headEnd type="none" w="med" len="med"/>
-                      <a:tailEnd type="none" w="med" len="med"/>
+                    <a:lnR w="12240">
+                      <a:solidFill>
+                        <a:srgbClr val="ffffff"/>
+                      </a:solidFill>
                     </a:lnR>
-                    <a:lnT w="12240" cap="flat" cmpd="sng" algn="ctr">
-                      <a:solidFill>
-                        <a:srgbClr val="FFFFFF"/>
-                      </a:solidFill>
-                      <a:prstDash val="solid"/>
-                      <a:round/>
-                      <a:headEnd type="none" w="med" len="med"/>
-                      <a:tailEnd type="none" w="med" len="med"/>
+                    <a:lnT w="12240">
+                      <a:solidFill>
+                        <a:srgbClr val="ffffff"/>
+                      </a:solidFill>
                     </a:lnT>
                     <a:lnB w="12240">
                       <a:solidFill>
-                        <a:srgbClr val="FFFFFF"/>
+                        <a:srgbClr val="ffffff"/>
                       </a:solidFill>
                     </a:lnB>
                     <a:solidFill>
-                      <a:srgbClr val="E7EAEC"/>
+                      <a:srgbClr val="e7eaec"/>
                     </a:solidFill>
                   </a:tcPr>
                 </a:tc>
                 <a:tc>
                   <a:txBody>
-                    <a:bodyPr/>
-                    <a:lstStyle/>
+                    <a:bodyPr lIns="7560" rIns="7560">
+                      <a:noAutofit/>
+                    </a:bodyPr>
                     <a:p>
                       <a:pPr algn="ctr">
                         <a:lnSpc>
@@ -7451,51 +6857,51 @@
                         </a:lnSpc>
                       </a:pPr>
                       <a:r>
-                        <a:rPr lang="es-ES" sz="1200" b="0" strike="noStrike" spc="-1" dirty="0">
-                          <a:latin typeface="Aptos" panose="020B0004020202020204" pitchFamily="34" charset="0"/>
+                        <a:rPr b="0" lang="es-ES" sz="1200" spc="-1" strike="noStrike">
+                          <a:solidFill>
+                            <a:srgbClr val="000000"/>
+                          </a:solidFill>
+                          <a:latin typeface="Aptos"/>
+                          <a:ea typeface="DejaVu Sans"/>
                         </a:rPr>
                         <a:t>Autosómica dominante</a:t>
                       </a:r>
+                      <a:endParaRPr b="0" lang="es-ES" sz="1200" spc="-1" strike="noStrike">
+                        <a:latin typeface="Arial"/>
+                      </a:endParaRPr>
                     </a:p>
                   </a:txBody>
                   <a:tcPr marL="7560" marR="7560">
                     <a:lnL w="12240">
                       <a:solidFill>
-                        <a:srgbClr val="FFFFFF"/>
+                        <a:srgbClr val="ffffff"/>
                       </a:solidFill>
                     </a:lnL>
-                    <a:lnR w="12240" cap="flat" cmpd="sng" algn="ctr">
-                      <a:solidFill>
-                        <a:srgbClr val="FFFFFF"/>
-                      </a:solidFill>
-                      <a:prstDash val="solid"/>
-                      <a:round/>
-                      <a:headEnd type="none" w="med" len="med"/>
-                      <a:tailEnd type="none" w="med" len="med"/>
+                    <a:lnR w="12240">
+                      <a:solidFill>
+                        <a:srgbClr val="ffffff"/>
+                      </a:solidFill>
                     </a:lnR>
-                    <a:lnT w="12240" cap="flat" cmpd="sng" algn="ctr">
-                      <a:solidFill>
-                        <a:srgbClr val="FFFFFF"/>
-                      </a:solidFill>
-                      <a:prstDash val="solid"/>
-                      <a:round/>
-                      <a:headEnd type="none" w="med" len="med"/>
-                      <a:tailEnd type="none" w="med" len="med"/>
+                    <a:lnT w="12240">
+                      <a:solidFill>
+                        <a:srgbClr val="ffffff"/>
+                      </a:solidFill>
                     </a:lnT>
                     <a:lnB w="12240">
                       <a:solidFill>
-                        <a:srgbClr val="FFFFFF"/>
+                        <a:srgbClr val="ffffff"/>
                       </a:solidFill>
                     </a:lnB>
                     <a:solidFill>
-                      <a:srgbClr val="E7EAEC"/>
+                      <a:srgbClr val="e7eaec"/>
                     </a:solidFill>
                   </a:tcPr>
                 </a:tc>
                 <a:tc>
                   <a:txBody>
-                    <a:bodyPr/>
-                    <a:lstStyle/>
+                    <a:bodyPr lIns="7560" rIns="7560">
+                      <a:noAutofit/>
+                    </a:bodyPr>
                     <a:p>
                       <a:pPr algn="ctr">
                         <a:lnSpc>
@@ -7503,48 +6909,46 @@
                         </a:lnSpc>
                       </a:pPr>
                       <a:r>
-                        <a:rPr lang="es-ES" sz="1200" b="0" strike="noStrike" spc="-1" dirty="0">
-                          <a:latin typeface="Aptos" panose="020B0004020202020204" pitchFamily="34" charset="0"/>
+                        <a:rPr b="0" lang="es-ES" sz="1200" spc="-1" strike="noStrike">
+                          <a:solidFill>
+                            <a:srgbClr val="000000"/>
+                          </a:solidFill>
+                          <a:latin typeface="Aptos"/>
+                          <a:ea typeface="DejaVu Sans"/>
                         </a:rPr>
                         <a:t>Ruta de lípidos y aterosclerosis</a:t>
                       </a:r>
+                      <a:endParaRPr b="0" lang="es-ES" sz="1200" spc="-1" strike="noStrike">
+                        <a:latin typeface="Arial"/>
+                      </a:endParaRPr>
                     </a:p>
                   </a:txBody>
                   <a:tcPr marL="7560" marR="7560">
                     <a:lnL w="12240">
                       <a:solidFill>
-                        <a:srgbClr val="FFFFFF"/>
+                        <a:srgbClr val="ffffff"/>
                       </a:solidFill>
                     </a:lnL>
                     <a:lnR w="12240">
                       <a:solidFill>
-                        <a:srgbClr val="FFFFFF"/>
+                        <a:srgbClr val="ffffff"/>
                       </a:solidFill>
                     </a:lnR>
-                    <a:lnT w="12240" cap="flat" cmpd="sng" algn="ctr">
-                      <a:solidFill>
-                        <a:srgbClr val="FFFFFF"/>
-                      </a:solidFill>
-                      <a:prstDash val="solid"/>
-                      <a:round/>
-                      <a:headEnd type="none" w="med" len="med"/>
-                      <a:tailEnd type="none" w="med" len="med"/>
+                    <a:lnT w="12240">
+                      <a:solidFill>
+                        <a:srgbClr val="ffffff"/>
+                      </a:solidFill>
                     </a:lnT>
                     <a:lnB w="12240">
                       <a:solidFill>
-                        <a:srgbClr val="FFFFFF"/>
+                        <a:srgbClr val="ffffff"/>
                       </a:solidFill>
                     </a:lnB>
                     <a:solidFill>
-                      <a:srgbClr val="E7EAEC"/>
+                      <a:srgbClr val="e7eaec"/>
                     </a:solidFill>
                   </a:tcPr>
                 </a:tc>
-                <a:extLst>
-                  <a:ext uri="{0D108BD9-81ED-4DB2-BD59-A6C34878D82A}">
-                    <a16:rowId xmlns:a16="http://schemas.microsoft.com/office/drawing/2014/main" val="10004"/>
-                  </a:ext>
-                </a:extLst>
               </a:tr>
             </a:tbl>
           </a:graphicData>
@@ -7552,18 +6956,18 @@
       </p:graphicFrame>
       <p:pic>
         <p:nvPicPr>
-          <p:cNvPr id="65" name="Imagen 64"/>
+          <p:cNvPr id="62" name="Imagen 64" descr=""/>
           <p:cNvPicPr/>
           <p:nvPr/>
         </p:nvPicPr>
         <p:blipFill>
-          <a:blip r:embed="rId14"/>
+          <a:blip r:embed="rId13"/>
           <a:stretch/>
         </p:blipFill>
         <p:spPr>
           <a:xfrm>
             <a:off x="6952320" y="12456000"/>
-            <a:ext cx="7416000" cy="1434600"/>
+            <a:ext cx="7415640" cy="1434240"/>
           </a:xfrm>
           <a:prstGeom prst="rect">
             <a:avLst/>
@@ -7575,21 +6979,20 @@
       </p:pic>
       <p:sp>
         <p:nvSpPr>
-          <p:cNvPr id="66" name="CustomShape 23"/>
+          <p:cNvPr id="63" name="CustomShape 23"/>
           <p:cNvSpPr/>
           <p:nvPr/>
         </p:nvSpPr>
         <p:spPr>
           <a:xfrm>
             <a:off x="11448000" y="12312000"/>
-            <a:ext cx="144000" cy="288000"/>
+            <a:ext cx="143640" cy="287640"/>
           </a:xfrm>
           <a:custGeom>
             <a:avLst/>
             <a:gdLst/>
             <a:ahLst/>
-            <a:cxnLst/>
-            <a:rect l="0" t="0" r="r" b="b"/>
+            <a:rect l="l" t="t" r="r" b="b"/>
             <a:pathLst>
               <a:path w="402" h="802">
                 <a:moveTo>
@@ -7620,42 +7023,36 @@
             </a:pathLst>
           </a:custGeom>
           <a:solidFill>
-            <a:srgbClr val="729FCF"/>
+            <a:srgbClr val="729fcf"/>
           </a:solidFill>
           <a:ln>
             <a:solidFill>
-              <a:srgbClr val="3465A4"/>
+              <a:srgbClr val="3465a4"/>
             </a:solidFill>
           </a:ln>
         </p:spPr>
         <p:style>
-          <a:lnRef idx="0">
-            <a:scrgbClr r="0" g="0" b="0"/>
-          </a:lnRef>
-          <a:fillRef idx="0">
-            <a:scrgbClr r="0" g="0" b="0"/>
-          </a:fillRef>
-          <a:effectRef idx="0">
-            <a:scrgbClr r="0" g="0" b="0"/>
-          </a:effectRef>
+          <a:lnRef idx="0"/>
+          <a:fillRef idx="0"/>
+          <a:effectRef idx="0"/>
           <a:fontRef idx="minor"/>
         </p:style>
       </p:sp>
       <p:pic>
         <p:nvPicPr>
-          <p:cNvPr id="67" name="Imagen 66"/>
+          <p:cNvPr id="64" name="Imagen 66" descr=""/>
           <p:cNvPicPr/>
           <p:nvPr/>
         </p:nvPicPr>
         <p:blipFill>
-          <a:blip r:embed="rId15"/>
-          <a:srcRect t="54151"/>
+          <a:blip r:embed="rId14"/>
+          <a:srcRect l="0" t="54155" r="0" b="0"/>
           <a:stretch/>
         </p:blipFill>
         <p:spPr>
           <a:xfrm>
             <a:off x="8064000" y="15120000"/>
-            <a:ext cx="5400000" cy="2016000"/>
+            <a:ext cx="5399640" cy="2015640"/>
           </a:xfrm>
           <a:prstGeom prst="rect">
             <a:avLst/>
@@ -7667,14 +7064,14 @@
       </p:pic>
       <p:sp>
         <p:nvSpPr>
-          <p:cNvPr id="68" name="CustomShape 24"/>
+          <p:cNvPr id="65" name="CustomShape 24"/>
           <p:cNvSpPr/>
           <p:nvPr/>
         </p:nvSpPr>
         <p:spPr>
           <a:xfrm>
             <a:off x="7056000" y="14256000"/>
-            <a:ext cx="7291440" cy="632520"/>
+            <a:ext cx="7291080" cy="632160"/>
           </a:xfrm>
           <a:prstGeom prst="roundRect">
             <a:avLst>
@@ -7703,38 +7100,39 @@
           <a:fontRef idx="minor"/>
         </p:style>
         <p:txBody>
-          <a:bodyPr lIns="90000" tIns="45000" rIns="90000" bIns="45000" anchor="ctr">
+          <a:bodyPr lIns="90000" rIns="90000" tIns="45000" bIns="45000" anchor="ctr">
             <a:noAutofit/>
           </a:bodyPr>
-          <a:lstStyle/>
           <a:p>
             <a:pPr>
               <a:lnSpc>
                 <a:spcPct val="80000"/>
               </a:lnSpc>
               <a:tabLst>
-                <a:tab pos="0" algn="l"/>
+                <a:tab algn="l" pos="0"/>
               </a:tabLst>
             </a:pPr>
             <a:r>
-              <a:rPr lang="es-ES_tradnl" sz="1800" b="1" strike="noStrike" spc="-1">
+              <a:rPr b="1" lang="es-ES_tradnl" sz="1800" spc="-1" strike="noStrike">
                 <a:solidFill>
-                  <a:srgbClr val="4196C9"/>
+                  <a:srgbClr val="4196c9"/>
                 </a:solidFill>
                 <a:latin typeface="Aptos"/>
+                <a:ea typeface="DejaVu Sans"/>
               </a:rPr>
               <a:t>Figura 3. </a:t>
             </a:r>
             <a:r>
-              <a:rPr lang="es-ES_tradnl" sz="1800" b="0" strike="noStrike" spc="-1">
+              <a:rPr b="0" lang="es-ES_tradnl" sz="1800" spc="-1" strike="noStrike">
                 <a:solidFill>
                   <a:srgbClr val="000000"/>
                 </a:solidFill>
                 <a:latin typeface="Aptos"/>
+                <a:ea typeface="DejaVu Sans"/>
               </a:rPr>
               <a:t>Rutas metabolicas implicadas en MC4R en KEGG.</a:t>
             </a:r>
-            <a:endParaRPr lang="es-ES" sz="1800" b="0" strike="noStrike" spc="-1">
+            <a:endParaRPr b="0" lang="es-ES" sz="1800" spc="-1" strike="noStrike">
               <a:latin typeface="Arial"/>
             </a:endParaRPr>
           </a:p>
@@ -7742,14 +7140,14 @@
       </p:sp>
       <p:sp>
         <p:nvSpPr>
-          <p:cNvPr id="69" name="TextShape 25"/>
-          <p:cNvSpPr txBox="1"/>
+          <p:cNvPr id="66" name="CustomShape 25"/>
+          <p:cNvSpPr/>
           <p:nvPr/>
         </p:nvSpPr>
         <p:spPr>
           <a:xfrm>
             <a:off x="8064000" y="17138520"/>
-            <a:ext cx="5760000" cy="432000"/>
+            <a:ext cx="5759640" cy="431640"/>
           </a:xfrm>
           <a:prstGeom prst="rect">
             <a:avLst/>
@@ -7759,46 +7157,53 @@
             <a:noFill/>
           </a:ln>
         </p:spPr>
+        <p:style>
+          <a:lnRef idx="0"/>
+          <a:fillRef idx="0"/>
+          <a:effectRef idx="0"/>
+          <a:fontRef idx="minor"/>
+        </p:style>
         <p:txBody>
-          <a:bodyPr lIns="90000" tIns="45000" rIns="90000" bIns="45000">
+          <a:bodyPr lIns="90000" rIns="90000" tIns="45000" bIns="45000">
             <a:noAutofit/>
           </a:bodyPr>
-          <a:lstStyle/>
           <a:p>
+            <a:pPr>
+              <a:lnSpc>
+                <a:spcPct val="100000"/>
+              </a:lnSpc>
+            </a:pPr>
             <a:r>
-              <a:rPr lang="es-ES" sz="1500" b="0" strike="noStrike" spc="-1">
+              <a:rPr b="0" lang="es-ES" sz="1500" spc="-1" strike="noStrike">
+                <a:solidFill>
+                  <a:srgbClr val="000000"/>
+                </a:solidFill>
                 <a:latin typeface="Arial"/>
+                <a:ea typeface="DejaVu Sans"/>
               </a:rPr>
               <a:t>MC4R. Via de la señalización hormonal del AMP cíclico </a:t>
             </a:r>
+            <a:endParaRPr b="0" lang="es-ES" sz="1500" spc="-1" strike="noStrike">
+              <a:latin typeface="Arial"/>
+            </a:endParaRPr>
           </a:p>
         </p:txBody>
       </p:sp>
       <p:pic>
         <p:nvPicPr>
-          <p:cNvPr id="2" name="Imagen 1">
-            <a:extLst>
-              <a:ext uri="{FF2B5EF4-FFF2-40B4-BE49-F238E27FC236}">
-                <a16:creationId xmlns:a16="http://schemas.microsoft.com/office/drawing/2014/main" id="{FAC392D4-A3C8-7C62-9F7C-71F947C655D0}"/>
-              </a:ext>
-            </a:extLst>
-          </p:cNvPr>
-          <p:cNvPicPr>
-            <a:picLocks noChangeAspect="1"/>
-          </p:cNvPicPr>
+          <p:cNvPr id="67" name="Imagen 1" descr=""/>
+          <p:cNvPicPr/>
           <p:nvPr/>
         </p:nvPicPr>
-        <p:blipFill rotWithShape="1">
-          <a:blip r:embed="rId16"/>
-          <a:srcRect l="16029" t="12976" r="35240" b="5277"/>
-          <a:stretch>
-            <a:fillRect/>
-          </a:stretch>
+        <p:blipFill>
+          <a:blip r:embed="rId15"/>
+          <a:srcRect l="16030" t="12976" r="35241" b="5276"/>
+          <a:stretch/>
         </p:blipFill>
-        <p:spPr bwMode="auto">
+        <p:spPr>
           <a:xfrm>
-            <a:off x="437039" y="12239460"/>
-            <a:ext cx="5526721" cy="5215686"/>
+            <a:off x="437040" y="12239640"/>
+            <a:ext cx="5526360" cy="5215320"/>
           </a:xfrm>
           <a:prstGeom prst="rect">
             <a:avLst/>
@@ -7808,18 +7213,18 @@
               <a:schemeClr val="tx1"/>
             </a:solidFill>
           </a:ln>
-          <a:extLst>
-            <a:ext uri="{53640926-AAD7-44D8-BBD7-CCE9431645EC}">
-              <a14:shadowObscured xmlns:a14="http://schemas.microsoft.com/office/drawing/2010/main"/>
-            </a:ext>
-          </a:extLst>
         </p:spPr>
       </p:pic>
     </p:spTree>
   </p:cSld>
-  <p:clrMapOvr>
-    <a:masterClrMapping/>
-  </p:clrMapOvr>
+  <mc:AlternateContent>
+    <mc:Choice Requires="p14">
+      <p:transition spd="slow" p14:dur="2000"/>
+    </mc:Choice>
+    <mc:Fallback>
+      <p:transition spd="slow"/>
+    </mc:Fallback>
+  </mc:AlternateContent>
 </p:sld>
 </file>
 
@@ -7834,34 +7239,34 @@
         <a:sysClr val="window" lastClr="FFFFFF"/>
       </a:lt1>
       <a:dk2>
-        <a:srgbClr val="0E2841"/>
+        <a:srgbClr val="0e2841"/>
       </a:dk2>
       <a:lt2>
-        <a:srgbClr val="E8E8E8"/>
+        <a:srgbClr val="e8e8e8"/>
       </a:lt2>
       <a:accent1>
         <a:srgbClr val="156082"/>
       </a:accent1>
       <a:accent2>
-        <a:srgbClr val="E97132"/>
+        <a:srgbClr val="e97132"/>
       </a:accent2>
       <a:accent3>
-        <a:srgbClr val="196B24"/>
+        <a:srgbClr val="196b24"/>
       </a:accent3>
       <a:accent4>
-        <a:srgbClr val="0F9ED5"/>
+        <a:srgbClr val="0f9ed5"/>
       </a:accent4>
       <a:accent5>
-        <a:srgbClr val="A02B93"/>
+        <a:srgbClr val="a02b93"/>
       </a:accent5>
       <a:accent6>
-        <a:srgbClr val="4EA72E"/>
+        <a:srgbClr val="4ea72e"/>
       </a:accent6>
       <a:hlink>
         <a:srgbClr val="467886"/>
       </a:hlink>
       <a:folHlink>
-        <a:srgbClr val="96607D"/>
+        <a:srgbClr val="96607d"/>
       </a:folHlink>
     </a:clrScheme>
     <a:fontScheme name="Office">
@@ -8046,8 +7451,6 @@
       </a:bgFillStyleLst>
     </a:fmtScheme>
   </a:themeElements>
-  <a:objectDefaults/>
-  <a:extraClrSchemeLst/>
 </a:theme>
 </file>
 

--- a/Genetica Grupal/Poster_bioinfo_grupo12_v4.pptx
+++ b/Genetica Grupal/Poster_bioinfo_grupo12_v4.pptx
@@ -1,19 +1,587 @@
 
 <file path=ppt/presentation.xml><?xml version="1.0" encoding="utf-8"?>
-<p:presentation xmlns:a="http://schemas.openxmlformats.org/drawingml/2006/main" xmlns:p="http://schemas.openxmlformats.org/presentationml/2006/main" xmlns:r="http://schemas.openxmlformats.org/officeDocument/2006/relationships" xmlns:p14="http://schemas.microsoft.com/office/powerpoint/2010/main" xmlns:p15="http://schemas.microsoft.com/office/powerpoint/2012/main" xmlns:mc="http://schemas.openxmlformats.org/markup-compatibility/2006">
+<p:presentation xmlns:a="http://schemas.openxmlformats.org/drawingml/2006/main" xmlns:r="http://schemas.openxmlformats.org/officeDocument/2006/relationships" xmlns:p="http://schemas.openxmlformats.org/presentationml/2006/main">
   <p:sldMasterIdLst>
-    <p:sldMasterId id="2147483648" r:id="rId2"/>
+    <p:sldMasterId id="2147483648" r:id="rId1"/>
   </p:sldMasterIdLst>
+  <p:notesMasterIdLst>
+    <p:notesMasterId r:id="rId3"/>
+  </p:notesMasterIdLst>
   <p:sldIdLst>
-    <p:sldId id="256" r:id="rId3"/>
+    <p:sldId id="256" r:id="rId2"/>
   </p:sldIdLst>
   <p:sldSz cx="15119350" cy="21383625"/>
-  <p:notesSz cx="7559675" cy="10691812"/>
+  <p:notesSz cx="7559675" cy="10691813"/>
+  <p:defaultTextStyle>
+    <a:defPPr>
+      <a:defRPr lang="es-ES"/>
+    </a:defPPr>
+    <a:lvl1pPr marL="0" algn="l" defTabSz="914400" rtl="0" eaLnBrk="1" latinLnBrk="0" hangingPunct="1">
+      <a:defRPr sz="1800" kern="1200">
+        <a:solidFill>
+          <a:schemeClr val="tx1"/>
+        </a:solidFill>
+        <a:latin typeface="+mn-lt"/>
+        <a:ea typeface="+mn-ea"/>
+        <a:cs typeface="+mn-cs"/>
+      </a:defRPr>
+    </a:lvl1pPr>
+    <a:lvl2pPr marL="457200" algn="l" defTabSz="914400" rtl="0" eaLnBrk="1" latinLnBrk="0" hangingPunct="1">
+      <a:defRPr sz="1800" kern="1200">
+        <a:solidFill>
+          <a:schemeClr val="tx1"/>
+        </a:solidFill>
+        <a:latin typeface="+mn-lt"/>
+        <a:ea typeface="+mn-ea"/>
+        <a:cs typeface="+mn-cs"/>
+      </a:defRPr>
+    </a:lvl2pPr>
+    <a:lvl3pPr marL="914400" algn="l" defTabSz="914400" rtl="0" eaLnBrk="1" latinLnBrk="0" hangingPunct="1">
+      <a:defRPr sz="1800" kern="1200">
+        <a:solidFill>
+          <a:schemeClr val="tx1"/>
+        </a:solidFill>
+        <a:latin typeface="+mn-lt"/>
+        <a:ea typeface="+mn-ea"/>
+        <a:cs typeface="+mn-cs"/>
+      </a:defRPr>
+    </a:lvl3pPr>
+    <a:lvl4pPr marL="1371600" algn="l" defTabSz="914400" rtl="0" eaLnBrk="1" latinLnBrk="0" hangingPunct="1">
+      <a:defRPr sz="1800" kern="1200">
+        <a:solidFill>
+          <a:schemeClr val="tx1"/>
+        </a:solidFill>
+        <a:latin typeface="+mn-lt"/>
+        <a:ea typeface="+mn-ea"/>
+        <a:cs typeface="+mn-cs"/>
+      </a:defRPr>
+    </a:lvl4pPr>
+    <a:lvl5pPr marL="1828800" algn="l" defTabSz="914400" rtl="0" eaLnBrk="1" latinLnBrk="0" hangingPunct="1">
+      <a:defRPr sz="1800" kern="1200">
+        <a:solidFill>
+          <a:schemeClr val="tx1"/>
+        </a:solidFill>
+        <a:latin typeface="+mn-lt"/>
+        <a:ea typeface="+mn-ea"/>
+        <a:cs typeface="+mn-cs"/>
+      </a:defRPr>
+    </a:lvl5pPr>
+    <a:lvl6pPr marL="2286000" algn="l" defTabSz="914400" rtl="0" eaLnBrk="1" latinLnBrk="0" hangingPunct="1">
+      <a:defRPr sz="1800" kern="1200">
+        <a:solidFill>
+          <a:schemeClr val="tx1"/>
+        </a:solidFill>
+        <a:latin typeface="+mn-lt"/>
+        <a:ea typeface="+mn-ea"/>
+        <a:cs typeface="+mn-cs"/>
+      </a:defRPr>
+    </a:lvl6pPr>
+    <a:lvl7pPr marL="2743200" algn="l" defTabSz="914400" rtl="0" eaLnBrk="1" latinLnBrk="0" hangingPunct="1">
+      <a:defRPr sz="1800" kern="1200">
+        <a:solidFill>
+          <a:schemeClr val="tx1"/>
+        </a:solidFill>
+        <a:latin typeface="+mn-lt"/>
+        <a:ea typeface="+mn-ea"/>
+        <a:cs typeface="+mn-cs"/>
+      </a:defRPr>
+    </a:lvl7pPr>
+    <a:lvl8pPr marL="3200400" algn="l" defTabSz="914400" rtl="0" eaLnBrk="1" latinLnBrk="0" hangingPunct="1">
+      <a:defRPr sz="1800" kern="1200">
+        <a:solidFill>
+          <a:schemeClr val="tx1"/>
+        </a:solidFill>
+        <a:latin typeface="+mn-lt"/>
+        <a:ea typeface="+mn-ea"/>
+        <a:cs typeface="+mn-cs"/>
+      </a:defRPr>
+    </a:lvl8pPr>
+    <a:lvl9pPr marL="3657600" algn="l" defTabSz="914400" rtl="0" eaLnBrk="1" latinLnBrk="0" hangingPunct="1">
+      <a:defRPr sz="1800" kern="1200">
+        <a:solidFill>
+          <a:schemeClr val="tx1"/>
+        </a:solidFill>
+        <a:latin typeface="+mn-lt"/>
+        <a:ea typeface="+mn-ea"/>
+        <a:cs typeface="+mn-cs"/>
+      </a:defRPr>
+    </a:lvl9pPr>
+  </p:defaultTextStyle>
 </p:presentation>
 </file>
 
+<file path=ppt/revisionInfo.xml><?xml version="1.0" encoding="utf-8"?>
+<p1510:revInfo xmlns:a="http://schemas.openxmlformats.org/drawingml/2006/main" xmlns:r="http://schemas.openxmlformats.org/officeDocument/2006/relationships" xmlns:p1510="http://schemas.microsoft.com/office/powerpoint/2015/10/main">
+  <p1510:revLst>
+    <p1510:client id="{60014813-A212-B44D-BCA9-51EC712DEE5A}" v="1" dt="2026-02-01T19:09:10.499"/>
+  </p1510:revLst>
+</p1510:revInfo>
+</file>
+
+<file path=ppt/changesInfos/changesInfo1.xml><?xml version="1.0" encoding="utf-8"?>
+<pc:chgInfo xmlns:a="http://schemas.openxmlformats.org/drawingml/2006/main" xmlns:r="http://schemas.openxmlformats.org/officeDocument/2006/relationships" xmlns:ac="http://schemas.microsoft.com/office/drawing/2013/main/command" xmlns:pc="http://schemas.microsoft.com/office/powerpoint/2013/main/command">
+  <pc:docChgLst>
+    <pc:chgData name="Paula Norniella Jamart" userId="92dcd70e170e53a7" providerId="LiveId" clId="{963EB8FB-3F3D-597D-A817-5FBE33DBCB47}"/>
+    <pc:docChg chg="modSld">
+      <pc:chgData name="Paula Norniella Jamart" userId="92dcd70e170e53a7" providerId="LiveId" clId="{963EB8FB-3F3D-597D-A817-5FBE33DBCB47}" dt="2026-02-01T19:09:40.260" v="6" actId="1076"/>
+      <pc:docMkLst>
+        <pc:docMk/>
+      </pc:docMkLst>
+      <pc:sldChg chg="addSp modSp mod">
+        <pc:chgData name="Paula Norniella Jamart" userId="92dcd70e170e53a7" providerId="LiveId" clId="{963EB8FB-3F3D-597D-A817-5FBE33DBCB47}" dt="2026-02-01T19:09:40.260" v="6" actId="1076"/>
+        <pc:sldMkLst>
+          <pc:docMk/>
+          <pc:sldMk cId="0" sldId="256"/>
+        </pc:sldMkLst>
+        <pc:picChg chg="add mod">
+          <ac:chgData name="Paula Norniella Jamart" userId="92dcd70e170e53a7" providerId="LiveId" clId="{963EB8FB-3F3D-597D-A817-5FBE33DBCB47}" dt="2026-02-01T19:09:40.260" v="6" actId="1076"/>
+          <ac:picMkLst>
+            <pc:docMk/>
+            <pc:sldMk cId="0" sldId="256"/>
+            <ac:picMk id="3" creationId="{77ED0077-7CDA-5232-C64C-3CA3DBB9B7DD}"/>
+          </ac:picMkLst>
+        </pc:picChg>
+      </pc:sldChg>
+    </pc:docChg>
+  </pc:docChgLst>
+</pc:chgInfo>
+</file>
+
+<file path=ppt/notesMasters/notesMaster1.xml><?xml version="1.0" encoding="utf-8"?>
+<p:notesMaster xmlns:a="http://schemas.openxmlformats.org/drawingml/2006/main" xmlns:r="http://schemas.openxmlformats.org/officeDocument/2006/relationships" xmlns:p="http://schemas.openxmlformats.org/presentationml/2006/main">
+  <p:cSld>
+    <p:bg>
+      <p:bgRef idx="1001">
+        <a:schemeClr val="bg1"/>
+      </p:bgRef>
+    </p:bg>
+    <p:spTree>
+      <p:nvGrpSpPr>
+        <p:cNvPr id="1" name=""/>
+        <p:cNvGrpSpPr/>
+        <p:nvPr/>
+      </p:nvGrpSpPr>
+      <p:grpSpPr>
+        <a:xfrm>
+          <a:off x="0" y="0"/>
+          <a:ext cx="0" cy="0"/>
+          <a:chOff x="0" y="0"/>
+          <a:chExt cx="0" cy="0"/>
+        </a:xfrm>
+      </p:grpSpPr>
+      <p:sp>
+        <p:nvSpPr>
+          <p:cNvPr id="2" name="Marcador de encabezado 1"/>
+          <p:cNvSpPr>
+            <a:spLocks noGrp="1"/>
+          </p:cNvSpPr>
+          <p:nvPr>
+            <p:ph type="hdr" sz="quarter"/>
+          </p:nvPr>
+        </p:nvSpPr>
+        <p:spPr>
+          <a:xfrm>
+            <a:off x="0" y="0"/>
+            <a:ext cx="3276600" cy="536575"/>
+          </a:xfrm>
+          <a:prstGeom prst="rect">
+            <a:avLst/>
+          </a:prstGeom>
+        </p:spPr>
+        <p:txBody>
+          <a:bodyPr vert="horz" lIns="91440" tIns="45720" rIns="91440" bIns="45720" rtlCol="0"/>
+          <a:lstStyle>
+            <a:lvl1pPr algn="l">
+              <a:defRPr sz="1200"/>
+            </a:lvl1pPr>
+          </a:lstStyle>
+          <a:p>
+            <a:endParaRPr lang="es-ES"/>
+          </a:p>
+        </p:txBody>
+      </p:sp>
+      <p:sp>
+        <p:nvSpPr>
+          <p:cNvPr id="3" name="Marcador de fecha 2"/>
+          <p:cNvSpPr>
+            <a:spLocks noGrp="1"/>
+          </p:cNvSpPr>
+          <p:nvPr>
+            <p:ph type="dt" idx="1"/>
+          </p:nvPr>
+        </p:nvSpPr>
+        <p:spPr>
+          <a:xfrm>
+            <a:off x="4281488" y="0"/>
+            <a:ext cx="3276600" cy="536575"/>
+          </a:xfrm>
+          <a:prstGeom prst="rect">
+            <a:avLst/>
+          </a:prstGeom>
+        </p:spPr>
+        <p:txBody>
+          <a:bodyPr vert="horz" lIns="91440" tIns="45720" rIns="91440" bIns="45720" rtlCol="0"/>
+          <a:lstStyle>
+            <a:lvl1pPr algn="r">
+              <a:defRPr sz="1200"/>
+            </a:lvl1pPr>
+          </a:lstStyle>
+          <a:p>
+            <a:fld id="{48C9869D-3451-6C43-8CCE-BBD265B9C833}" type="datetimeFigureOut">
+              <a:rPr lang="es-ES" smtClean="0"/>
+              <a:t>1/2/26</a:t>
+            </a:fld>
+            <a:endParaRPr lang="es-ES"/>
+          </a:p>
+        </p:txBody>
+      </p:sp>
+      <p:sp>
+        <p:nvSpPr>
+          <p:cNvPr id="4" name="Marcador de imagen de diapositiva 3"/>
+          <p:cNvSpPr>
+            <a:spLocks noGrp="1" noRot="1" noChangeAspect="1"/>
+          </p:cNvSpPr>
+          <p:nvPr>
+            <p:ph type="sldImg" idx="2"/>
+          </p:nvPr>
+        </p:nvSpPr>
+        <p:spPr>
+          <a:xfrm>
+            <a:off x="2503488" y="1336675"/>
+            <a:ext cx="2552700" cy="3608388"/>
+          </a:xfrm>
+          <a:prstGeom prst="rect">
+            <a:avLst/>
+          </a:prstGeom>
+          <a:noFill/>
+          <a:ln w="12700">
+            <a:solidFill>
+              <a:prstClr val="black"/>
+            </a:solidFill>
+          </a:ln>
+        </p:spPr>
+        <p:txBody>
+          <a:bodyPr vert="horz" lIns="91440" tIns="45720" rIns="91440" bIns="45720" rtlCol="0" anchor="ctr"/>
+          <a:lstStyle/>
+          <a:p>
+            <a:endParaRPr lang="es-ES"/>
+          </a:p>
+        </p:txBody>
+      </p:sp>
+      <p:sp>
+        <p:nvSpPr>
+          <p:cNvPr id="5" name="Marcador de notas 4"/>
+          <p:cNvSpPr>
+            <a:spLocks noGrp="1"/>
+          </p:cNvSpPr>
+          <p:nvPr>
+            <p:ph type="body" sz="quarter" idx="3"/>
+          </p:nvPr>
+        </p:nvSpPr>
+        <p:spPr>
+          <a:xfrm>
+            <a:off x="755650" y="5145088"/>
+            <a:ext cx="6048375" cy="4210050"/>
+          </a:xfrm>
+          <a:prstGeom prst="rect">
+            <a:avLst/>
+          </a:prstGeom>
+        </p:spPr>
+        <p:txBody>
+          <a:bodyPr vert="horz" lIns="91440" tIns="45720" rIns="91440" bIns="45720" rtlCol="0"/>
+          <a:lstStyle/>
+          <a:p>
+            <a:pPr lvl="0"/>
+            <a:r>
+              <a:rPr lang="es-ES"/>
+              <a:t>Haga clic para modificar los estilos de texto del patrón</a:t>
+            </a:r>
+          </a:p>
+          <a:p>
+            <a:pPr lvl="1"/>
+            <a:r>
+              <a:rPr lang="es-ES"/>
+              <a:t>Segundo nivel</a:t>
+            </a:r>
+          </a:p>
+          <a:p>
+            <a:pPr lvl="2"/>
+            <a:r>
+              <a:rPr lang="es-ES"/>
+              <a:t>Tercer nivel</a:t>
+            </a:r>
+          </a:p>
+          <a:p>
+            <a:pPr lvl="3"/>
+            <a:r>
+              <a:rPr lang="es-ES"/>
+              <a:t>Cuarto nivel</a:t>
+            </a:r>
+          </a:p>
+          <a:p>
+            <a:pPr lvl="4"/>
+            <a:r>
+              <a:rPr lang="es-ES"/>
+              <a:t>Quinto nivel</a:t>
+            </a:r>
+          </a:p>
+        </p:txBody>
+      </p:sp>
+      <p:sp>
+        <p:nvSpPr>
+          <p:cNvPr id="6" name="Marcador de pie de página 5"/>
+          <p:cNvSpPr>
+            <a:spLocks noGrp="1"/>
+          </p:cNvSpPr>
+          <p:nvPr>
+            <p:ph type="ftr" sz="quarter" idx="4"/>
+          </p:nvPr>
+        </p:nvSpPr>
+        <p:spPr>
+          <a:xfrm>
+            <a:off x="0" y="10155238"/>
+            <a:ext cx="3276600" cy="536575"/>
+          </a:xfrm>
+          <a:prstGeom prst="rect">
+            <a:avLst/>
+          </a:prstGeom>
+        </p:spPr>
+        <p:txBody>
+          <a:bodyPr vert="horz" lIns="91440" tIns="45720" rIns="91440" bIns="45720" rtlCol="0" anchor="b"/>
+          <a:lstStyle>
+            <a:lvl1pPr algn="l">
+              <a:defRPr sz="1200"/>
+            </a:lvl1pPr>
+          </a:lstStyle>
+          <a:p>
+            <a:endParaRPr lang="es-ES"/>
+          </a:p>
+        </p:txBody>
+      </p:sp>
+      <p:sp>
+        <p:nvSpPr>
+          <p:cNvPr id="7" name="Marcador de número de diapositiva 6"/>
+          <p:cNvSpPr>
+            <a:spLocks noGrp="1"/>
+          </p:cNvSpPr>
+          <p:nvPr>
+            <p:ph type="sldNum" sz="quarter" idx="5"/>
+          </p:nvPr>
+        </p:nvSpPr>
+        <p:spPr>
+          <a:xfrm>
+            <a:off x="4281488" y="10155238"/>
+            <a:ext cx="3276600" cy="536575"/>
+          </a:xfrm>
+          <a:prstGeom prst="rect">
+            <a:avLst/>
+          </a:prstGeom>
+        </p:spPr>
+        <p:txBody>
+          <a:bodyPr vert="horz" lIns="91440" tIns="45720" rIns="91440" bIns="45720" rtlCol="0" anchor="b"/>
+          <a:lstStyle>
+            <a:lvl1pPr algn="r">
+              <a:defRPr sz="1200"/>
+            </a:lvl1pPr>
+          </a:lstStyle>
+          <a:p>
+            <a:fld id="{B2462F95-8DF0-804F-B599-A38CA395DDBC}" type="slidenum">
+              <a:rPr lang="es-ES" smtClean="0"/>
+              <a:t>‹Nº›</a:t>
+            </a:fld>
+            <a:endParaRPr lang="es-ES"/>
+          </a:p>
+        </p:txBody>
+      </p:sp>
+    </p:spTree>
+    <p:extLst>
+      <p:ext uri="{BB962C8B-B14F-4D97-AF65-F5344CB8AC3E}">
+        <p14:creationId xmlns:p14="http://schemas.microsoft.com/office/powerpoint/2010/main" val="1564107220"/>
+      </p:ext>
+    </p:extLst>
+  </p:cSld>
+  <p:clrMap bg1="lt1" tx1="dk1" bg2="lt2" tx2="dk2" accent1="accent1" accent2="accent2" accent3="accent3" accent4="accent4" accent5="accent5" accent6="accent6" hlink="hlink" folHlink="folHlink"/>
+  <p:notesStyle>
+    <a:lvl1pPr marL="0" algn="l" defTabSz="914400" rtl="0" eaLnBrk="1" latinLnBrk="0" hangingPunct="1">
+      <a:defRPr sz="1200" kern="1200">
+        <a:solidFill>
+          <a:schemeClr val="tx1"/>
+        </a:solidFill>
+        <a:latin typeface="+mn-lt"/>
+        <a:ea typeface="+mn-ea"/>
+        <a:cs typeface="+mn-cs"/>
+      </a:defRPr>
+    </a:lvl1pPr>
+    <a:lvl2pPr marL="457200" algn="l" defTabSz="914400" rtl="0" eaLnBrk="1" latinLnBrk="0" hangingPunct="1">
+      <a:defRPr sz="1200" kern="1200">
+        <a:solidFill>
+          <a:schemeClr val="tx1"/>
+        </a:solidFill>
+        <a:latin typeface="+mn-lt"/>
+        <a:ea typeface="+mn-ea"/>
+        <a:cs typeface="+mn-cs"/>
+      </a:defRPr>
+    </a:lvl2pPr>
+    <a:lvl3pPr marL="914400" algn="l" defTabSz="914400" rtl="0" eaLnBrk="1" latinLnBrk="0" hangingPunct="1">
+      <a:defRPr sz="1200" kern="1200">
+        <a:solidFill>
+          <a:schemeClr val="tx1"/>
+        </a:solidFill>
+        <a:latin typeface="+mn-lt"/>
+        <a:ea typeface="+mn-ea"/>
+        <a:cs typeface="+mn-cs"/>
+      </a:defRPr>
+    </a:lvl3pPr>
+    <a:lvl4pPr marL="1371600" algn="l" defTabSz="914400" rtl="0" eaLnBrk="1" latinLnBrk="0" hangingPunct="1">
+      <a:defRPr sz="1200" kern="1200">
+        <a:solidFill>
+          <a:schemeClr val="tx1"/>
+        </a:solidFill>
+        <a:latin typeface="+mn-lt"/>
+        <a:ea typeface="+mn-ea"/>
+        <a:cs typeface="+mn-cs"/>
+      </a:defRPr>
+    </a:lvl4pPr>
+    <a:lvl5pPr marL="1828800" algn="l" defTabSz="914400" rtl="0" eaLnBrk="1" latinLnBrk="0" hangingPunct="1">
+      <a:defRPr sz="1200" kern="1200">
+        <a:solidFill>
+          <a:schemeClr val="tx1"/>
+        </a:solidFill>
+        <a:latin typeface="+mn-lt"/>
+        <a:ea typeface="+mn-ea"/>
+        <a:cs typeface="+mn-cs"/>
+      </a:defRPr>
+    </a:lvl5pPr>
+    <a:lvl6pPr marL="2286000" algn="l" defTabSz="914400" rtl="0" eaLnBrk="1" latinLnBrk="0" hangingPunct="1">
+      <a:defRPr sz="1200" kern="1200">
+        <a:solidFill>
+          <a:schemeClr val="tx1"/>
+        </a:solidFill>
+        <a:latin typeface="+mn-lt"/>
+        <a:ea typeface="+mn-ea"/>
+        <a:cs typeface="+mn-cs"/>
+      </a:defRPr>
+    </a:lvl6pPr>
+    <a:lvl7pPr marL="2743200" algn="l" defTabSz="914400" rtl="0" eaLnBrk="1" latinLnBrk="0" hangingPunct="1">
+      <a:defRPr sz="1200" kern="1200">
+        <a:solidFill>
+          <a:schemeClr val="tx1"/>
+        </a:solidFill>
+        <a:latin typeface="+mn-lt"/>
+        <a:ea typeface="+mn-ea"/>
+        <a:cs typeface="+mn-cs"/>
+      </a:defRPr>
+    </a:lvl7pPr>
+    <a:lvl8pPr marL="3200400" algn="l" defTabSz="914400" rtl="0" eaLnBrk="1" latinLnBrk="0" hangingPunct="1">
+      <a:defRPr sz="1200" kern="1200">
+        <a:solidFill>
+          <a:schemeClr val="tx1"/>
+        </a:solidFill>
+        <a:latin typeface="+mn-lt"/>
+        <a:ea typeface="+mn-ea"/>
+        <a:cs typeface="+mn-cs"/>
+      </a:defRPr>
+    </a:lvl8pPr>
+    <a:lvl9pPr marL="3657600" algn="l" defTabSz="914400" rtl="0" eaLnBrk="1" latinLnBrk="0" hangingPunct="1">
+      <a:defRPr sz="1200" kern="1200">
+        <a:solidFill>
+          <a:schemeClr val="tx1"/>
+        </a:solidFill>
+        <a:latin typeface="+mn-lt"/>
+        <a:ea typeface="+mn-ea"/>
+        <a:cs typeface="+mn-cs"/>
+      </a:defRPr>
+    </a:lvl9pPr>
+  </p:notesStyle>
+</p:notesMaster>
+</file>
+
+<file path=ppt/notesSlides/notesSlide1.xml><?xml version="1.0" encoding="utf-8"?>
+<p:notes xmlns:a="http://schemas.openxmlformats.org/drawingml/2006/main" xmlns:r="http://schemas.openxmlformats.org/officeDocument/2006/relationships" xmlns:p="http://schemas.openxmlformats.org/presentationml/2006/main">
+  <p:cSld>
+    <p:spTree>
+      <p:nvGrpSpPr>
+        <p:cNvPr id="1" name=""/>
+        <p:cNvGrpSpPr/>
+        <p:nvPr/>
+      </p:nvGrpSpPr>
+      <p:grpSpPr>
+        <a:xfrm>
+          <a:off x="0" y="0"/>
+          <a:ext cx="0" cy="0"/>
+          <a:chOff x="0" y="0"/>
+          <a:chExt cx="0" cy="0"/>
+        </a:xfrm>
+      </p:grpSpPr>
+      <p:sp>
+        <p:nvSpPr>
+          <p:cNvPr id="2" name="Marcador de imagen de diapositiva 1"/>
+          <p:cNvSpPr>
+            <a:spLocks noGrp="1" noRot="1" noChangeAspect="1"/>
+          </p:cNvSpPr>
+          <p:nvPr>
+            <p:ph type="sldImg"/>
+          </p:nvPr>
+        </p:nvSpPr>
+        <p:spPr/>
+      </p:sp>
+      <p:sp>
+        <p:nvSpPr>
+          <p:cNvPr id="3" name="Marcador de notas 2"/>
+          <p:cNvSpPr>
+            <a:spLocks noGrp="1"/>
+          </p:cNvSpPr>
+          <p:nvPr>
+            <p:ph type="body" idx="1"/>
+          </p:nvPr>
+        </p:nvSpPr>
+        <p:spPr/>
+        <p:txBody>
+          <a:bodyPr/>
+          <a:lstStyle/>
+          <a:p>
+            <a:endParaRPr lang="es-ES" dirty="0"/>
+          </a:p>
+        </p:txBody>
+      </p:sp>
+      <p:sp>
+        <p:nvSpPr>
+          <p:cNvPr id="4" name="Marcador de número de diapositiva 3"/>
+          <p:cNvSpPr>
+            <a:spLocks noGrp="1"/>
+          </p:cNvSpPr>
+          <p:nvPr>
+            <p:ph type="sldNum" sz="quarter" idx="5"/>
+          </p:nvPr>
+        </p:nvSpPr>
+        <p:spPr/>
+        <p:txBody>
+          <a:bodyPr/>
+          <a:lstStyle/>
+          <a:p>
+            <a:fld id="{B2462F95-8DF0-804F-B599-A38CA395DDBC}" type="slidenum">
+              <a:rPr lang="es-ES" smtClean="0"/>
+              <a:t>1</a:t>
+            </a:fld>
+            <a:endParaRPr lang="es-ES"/>
+          </a:p>
+        </p:txBody>
+      </p:sp>
+    </p:spTree>
+    <p:extLst>
+      <p:ext uri="{BB962C8B-B14F-4D97-AF65-F5344CB8AC3E}">
+        <p14:creationId xmlns:p14="http://schemas.microsoft.com/office/powerpoint/2010/main" val="592594583"/>
+      </p:ext>
+    </p:extLst>
+  </p:cSld>
+  <p:clrMapOvr>
+    <a:masterClrMapping/>
+  </p:clrMapOvr>
+</p:notes>
+</file>
+
 <file path=ppt/slideLayouts/slideLayout1.xml><?xml version="1.0" encoding="utf-8"?>
-<p:sldLayout xmlns:a="http://schemas.openxmlformats.org/drawingml/2006/main" xmlns:p="http://schemas.openxmlformats.org/presentationml/2006/main" xmlns:r="http://schemas.openxmlformats.org/officeDocument/2006/relationships" xmlns:p14="http://schemas.microsoft.com/office/powerpoint/2010/main" xmlns:p15="http://schemas.microsoft.com/office/powerpoint/2012/main" xmlns:mc="http://schemas.openxmlformats.org/markup-compatibility/2006" type="blank" preserve="1">
+<p:sldLayout xmlns:a="http://schemas.openxmlformats.org/drawingml/2006/main" xmlns:r="http://schemas.openxmlformats.org/officeDocument/2006/relationships" xmlns:p="http://schemas.openxmlformats.org/presentationml/2006/main" type="blank" preserve="1">
   <p:cSld name="Blank Slide">
     <p:spTree>
       <p:nvGrpSpPr>
@@ -31,11 +599,14 @@
       </p:grpSpPr>
     </p:spTree>
   </p:cSld>
+  <p:clrMapOvr>
+    <a:masterClrMapping/>
+  </p:clrMapOvr>
 </p:sldLayout>
 </file>
 
 <file path=ppt/slideLayouts/slideLayout10.xml><?xml version="1.0" encoding="utf-8"?>
-<p:sldLayout xmlns:a="http://schemas.openxmlformats.org/drawingml/2006/main" xmlns:p="http://schemas.openxmlformats.org/presentationml/2006/main" xmlns:r="http://schemas.openxmlformats.org/officeDocument/2006/relationships" xmlns:p14="http://schemas.microsoft.com/office/powerpoint/2010/main" xmlns:p15="http://schemas.microsoft.com/office/powerpoint/2012/main" xmlns:mc="http://schemas.openxmlformats.org/markup-compatibility/2006" type="objOverTx" preserve="1">
+<p:sldLayout xmlns:a="http://schemas.openxmlformats.org/drawingml/2006/main" xmlns:r="http://schemas.openxmlformats.org/officeDocument/2006/relationships" xmlns:p="http://schemas.openxmlformats.org/presentationml/2006/main" type="objOverTx" preserve="1">
   <p:cSld name="Title, Content over Content">
     <p:spTree>
       <p:nvGrpSpPr>
@@ -71,11 +642,12 @@
           </a:prstGeom>
         </p:spPr>
         <p:txBody>
-          <a:bodyPr lIns="0" rIns="0" tIns="0" bIns="0" anchor="ctr">
+          <a:bodyPr lIns="0" tIns="0" rIns="0" bIns="0" anchor="ctr">
             <a:noAutofit/>
           </a:bodyPr>
+          <a:lstStyle/>
           <a:p>
-            <a:endParaRPr b="0" lang="es-ES" sz="1800" spc="-1" strike="noStrike">
+            <a:endParaRPr lang="es-ES" sz="1800" b="0" strike="noStrike" spc="-1">
               <a:solidFill>
                 <a:srgbClr val="000000"/>
               </a:solidFill>
@@ -104,11 +676,12 @@
           </a:prstGeom>
         </p:spPr>
         <p:txBody>
-          <a:bodyPr lIns="0" rIns="0" tIns="0" bIns="0">
+          <a:bodyPr lIns="0" tIns="0" rIns="0" bIns="0">
             <a:normAutofit/>
           </a:bodyPr>
+          <a:lstStyle/>
           <a:p>
-            <a:endParaRPr b="0" lang="es-ES" sz="2800" spc="-1" strike="noStrike">
+            <a:endParaRPr lang="es-ES" sz="2800" b="0" strike="noStrike" spc="-1">
               <a:solidFill>
                 <a:srgbClr val="000000"/>
               </a:solidFill>
@@ -137,11 +710,12 @@
           </a:prstGeom>
         </p:spPr>
         <p:txBody>
-          <a:bodyPr lIns="0" rIns="0" tIns="0" bIns="0">
+          <a:bodyPr lIns="0" tIns="0" rIns="0" bIns="0">
             <a:normAutofit/>
           </a:bodyPr>
+          <a:lstStyle/>
           <a:p>
-            <a:endParaRPr b="0" lang="es-ES" sz="2800" spc="-1" strike="noStrike">
+            <a:endParaRPr lang="es-ES" sz="2800" b="0" strike="noStrike" spc="-1">
               <a:solidFill>
                 <a:srgbClr val="000000"/>
               </a:solidFill>
@@ -152,11 +726,14 @@
       </p:sp>
     </p:spTree>
   </p:cSld>
+  <p:clrMapOvr>
+    <a:masterClrMapping/>
+  </p:clrMapOvr>
 </p:sldLayout>
 </file>
 
 <file path=ppt/slideLayouts/slideLayout11.xml><?xml version="1.0" encoding="utf-8"?>
-<p:sldLayout xmlns:a="http://schemas.openxmlformats.org/drawingml/2006/main" xmlns:p="http://schemas.openxmlformats.org/presentationml/2006/main" xmlns:r="http://schemas.openxmlformats.org/officeDocument/2006/relationships" xmlns:p14="http://schemas.microsoft.com/office/powerpoint/2010/main" xmlns:p15="http://schemas.microsoft.com/office/powerpoint/2012/main" xmlns:mc="http://schemas.openxmlformats.org/markup-compatibility/2006" type="fourObj" preserve="1">
+<p:sldLayout xmlns:a="http://schemas.openxmlformats.org/drawingml/2006/main" xmlns:r="http://schemas.openxmlformats.org/officeDocument/2006/relationships" xmlns:p="http://schemas.openxmlformats.org/presentationml/2006/main" type="fourObj" preserve="1">
   <p:cSld name="Title, 4 Content">
     <p:spTree>
       <p:nvGrpSpPr>
@@ -192,11 +769,12 @@
           </a:prstGeom>
         </p:spPr>
         <p:txBody>
-          <a:bodyPr lIns="0" rIns="0" tIns="0" bIns="0" anchor="ctr">
+          <a:bodyPr lIns="0" tIns="0" rIns="0" bIns="0" anchor="ctr">
             <a:noAutofit/>
           </a:bodyPr>
+          <a:lstStyle/>
           <a:p>
-            <a:endParaRPr b="0" lang="es-ES" sz="1800" spc="-1" strike="noStrike">
+            <a:endParaRPr lang="es-ES" sz="1800" b="0" strike="noStrike" spc="-1">
               <a:solidFill>
                 <a:srgbClr val="000000"/>
               </a:solidFill>
@@ -225,11 +803,12 @@
           </a:prstGeom>
         </p:spPr>
         <p:txBody>
-          <a:bodyPr lIns="0" rIns="0" tIns="0" bIns="0">
+          <a:bodyPr lIns="0" tIns="0" rIns="0" bIns="0">
             <a:normAutofit/>
           </a:bodyPr>
+          <a:lstStyle/>
           <a:p>
-            <a:endParaRPr b="0" lang="es-ES" sz="2800" spc="-1" strike="noStrike">
+            <a:endParaRPr lang="es-ES" sz="2800" b="0" strike="noStrike" spc="-1">
               <a:solidFill>
                 <a:srgbClr val="000000"/>
               </a:solidFill>
@@ -258,11 +837,12 @@
           </a:prstGeom>
         </p:spPr>
         <p:txBody>
-          <a:bodyPr lIns="0" rIns="0" tIns="0" bIns="0">
+          <a:bodyPr lIns="0" tIns="0" rIns="0" bIns="0">
             <a:normAutofit/>
           </a:bodyPr>
+          <a:lstStyle/>
           <a:p>
-            <a:endParaRPr b="0" lang="es-ES" sz="2800" spc="-1" strike="noStrike">
+            <a:endParaRPr lang="es-ES" sz="2800" b="0" strike="noStrike" spc="-1">
               <a:solidFill>
                 <a:srgbClr val="000000"/>
               </a:solidFill>
@@ -291,11 +871,12 @@
           </a:prstGeom>
         </p:spPr>
         <p:txBody>
-          <a:bodyPr lIns="0" rIns="0" tIns="0" bIns="0">
+          <a:bodyPr lIns="0" tIns="0" rIns="0" bIns="0">
             <a:normAutofit/>
           </a:bodyPr>
+          <a:lstStyle/>
           <a:p>
-            <a:endParaRPr b="0" lang="es-ES" sz="2800" spc="-1" strike="noStrike">
+            <a:endParaRPr lang="es-ES" sz="2800" b="0" strike="noStrike" spc="-1">
               <a:solidFill>
                 <a:srgbClr val="000000"/>
               </a:solidFill>
@@ -324,11 +905,12 @@
           </a:prstGeom>
         </p:spPr>
         <p:txBody>
-          <a:bodyPr lIns="0" rIns="0" tIns="0" bIns="0">
+          <a:bodyPr lIns="0" tIns="0" rIns="0" bIns="0">
             <a:normAutofit/>
           </a:bodyPr>
+          <a:lstStyle/>
           <a:p>
-            <a:endParaRPr b="0" lang="es-ES" sz="2800" spc="-1" strike="noStrike">
+            <a:endParaRPr lang="es-ES" sz="2800" b="0" strike="noStrike" spc="-1">
               <a:solidFill>
                 <a:srgbClr val="000000"/>
               </a:solidFill>
@@ -339,11 +921,14 @@
       </p:sp>
     </p:spTree>
   </p:cSld>
+  <p:clrMapOvr>
+    <a:masterClrMapping/>
+  </p:clrMapOvr>
 </p:sldLayout>
 </file>
 
 <file path=ppt/slideLayouts/slideLayout12.xml><?xml version="1.0" encoding="utf-8"?>
-<p:sldLayout xmlns:a="http://schemas.openxmlformats.org/drawingml/2006/main" xmlns:p="http://schemas.openxmlformats.org/presentationml/2006/main" xmlns:r="http://schemas.openxmlformats.org/officeDocument/2006/relationships" xmlns:p14="http://schemas.microsoft.com/office/powerpoint/2010/main" xmlns:p15="http://schemas.microsoft.com/office/powerpoint/2012/main" xmlns:mc="http://schemas.openxmlformats.org/markup-compatibility/2006" type="blank" preserve="1">
+<p:sldLayout xmlns:a="http://schemas.openxmlformats.org/drawingml/2006/main" xmlns:r="http://schemas.openxmlformats.org/officeDocument/2006/relationships" xmlns:p="http://schemas.openxmlformats.org/presentationml/2006/main" type="blank" preserve="1">
   <p:cSld name="Title, 6 Content">
     <p:spTree>
       <p:nvGrpSpPr>
@@ -379,11 +964,12 @@
           </a:prstGeom>
         </p:spPr>
         <p:txBody>
-          <a:bodyPr lIns="0" rIns="0" tIns="0" bIns="0" anchor="ctr">
+          <a:bodyPr lIns="0" tIns="0" rIns="0" bIns="0" anchor="ctr">
             <a:noAutofit/>
           </a:bodyPr>
+          <a:lstStyle/>
           <a:p>
-            <a:endParaRPr b="0" lang="es-ES" sz="1800" spc="-1" strike="noStrike">
+            <a:endParaRPr lang="es-ES" sz="1800" b="0" strike="noStrike" spc="-1">
               <a:solidFill>
                 <a:srgbClr val="000000"/>
               </a:solidFill>
@@ -412,11 +998,12 @@
           </a:prstGeom>
         </p:spPr>
         <p:txBody>
-          <a:bodyPr lIns="0" rIns="0" tIns="0" bIns="0">
+          <a:bodyPr lIns="0" tIns="0" rIns="0" bIns="0">
             <a:normAutofit/>
           </a:bodyPr>
+          <a:lstStyle/>
           <a:p>
-            <a:endParaRPr b="0" lang="es-ES" sz="2800" spc="-1" strike="noStrike">
+            <a:endParaRPr lang="es-ES" sz="2800" b="0" strike="noStrike" spc="-1">
               <a:solidFill>
                 <a:srgbClr val="000000"/>
               </a:solidFill>
@@ -445,11 +1032,12 @@
           </a:prstGeom>
         </p:spPr>
         <p:txBody>
-          <a:bodyPr lIns="0" rIns="0" tIns="0" bIns="0">
+          <a:bodyPr lIns="0" tIns="0" rIns="0" bIns="0">
             <a:normAutofit/>
           </a:bodyPr>
+          <a:lstStyle/>
           <a:p>
-            <a:endParaRPr b="0" lang="es-ES" sz="2800" spc="-1" strike="noStrike">
+            <a:endParaRPr lang="es-ES" sz="2800" b="0" strike="noStrike" spc="-1">
               <a:solidFill>
                 <a:srgbClr val="000000"/>
               </a:solidFill>
@@ -478,11 +1066,12 @@
           </a:prstGeom>
         </p:spPr>
         <p:txBody>
-          <a:bodyPr lIns="0" rIns="0" tIns="0" bIns="0">
+          <a:bodyPr lIns="0" tIns="0" rIns="0" bIns="0">
             <a:normAutofit/>
           </a:bodyPr>
+          <a:lstStyle/>
           <a:p>
-            <a:endParaRPr b="0" lang="es-ES" sz="2800" spc="-1" strike="noStrike">
+            <a:endParaRPr lang="es-ES" sz="2800" b="0" strike="noStrike" spc="-1">
               <a:solidFill>
                 <a:srgbClr val="000000"/>
               </a:solidFill>
@@ -511,11 +1100,12 @@
           </a:prstGeom>
         </p:spPr>
         <p:txBody>
-          <a:bodyPr lIns="0" rIns="0" tIns="0" bIns="0">
+          <a:bodyPr lIns="0" tIns="0" rIns="0" bIns="0">
             <a:normAutofit/>
           </a:bodyPr>
+          <a:lstStyle/>
           <a:p>
-            <a:endParaRPr b="0" lang="es-ES" sz="2800" spc="-1" strike="noStrike">
+            <a:endParaRPr lang="es-ES" sz="2800" b="0" strike="noStrike" spc="-1">
               <a:solidFill>
                 <a:srgbClr val="000000"/>
               </a:solidFill>
@@ -544,11 +1134,12 @@
           </a:prstGeom>
         </p:spPr>
         <p:txBody>
-          <a:bodyPr lIns="0" rIns="0" tIns="0" bIns="0">
+          <a:bodyPr lIns="0" tIns="0" rIns="0" bIns="0">
             <a:normAutofit/>
           </a:bodyPr>
+          <a:lstStyle/>
           <a:p>
-            <a:endParaRPr b="0" lang="es-ES" sz="2800" spc="-1" strike="noStrike">
+            <a:endParaRPr lang="es-ES" sz="2800" b="0" strike="noStrike" spc="-1">
               <a:solidFill>
                 <a:srgbClr val="000000"/>
               </a:solidFill>
@@ -577,11 +1168,12 @@
           </a:prstGeom>
         </p:spPr>
         <p:txBody>
-          <a:bodyPr lIns="0" rIns="0" tIns="0" bIns="0">
+          <a:bodyPr lIns="0" tIns="0" rIns="0" bIns="0">
             <a:normAutofit/>
           </a:bodyPr>
+          <a:lstStyle/>
           <a:p>
-            <a:endParaRPr b="0" lang="es-ES" sz="2800" spc="-1" strike="noStrike">
+            <a:endParaRPr lang="es-ES" sz="2800" b="0" strike="noStrike" spc="-1">
               <a:solidFill>
                 <a:srgbClr val="000000"/>
               </a:solidFill>
@@ -592,11 +1184,14 @@
       </p:sp>
     </p:spTree>
   </p:cSld>
+  <p:clrMapOvr>
+    <a:masterClrMapping/>
+  </p:clrMapOvr>
 </p:sldLayout>
 </file>
 
 <file path=ppt/slideLayouts/slideLayout2.xml><?xml version="1.0" encoding="utf-8"?>
-<p:sldLayout xmlns:a="http://schemas.openxmlformats.org/drawingml/2006/main" xmlns:p="http://schemas.openxmlformats.org/presentationml/2006/main" xmlns:r="http://schemas.openxmlformats.org/officeDocument/2006/relationships" xmlns:p14="http://schemas.microsoft.com/office/powerpoint/2010/main" xmlns:p15="http://schemas.microsoft.com/office/powerpoint/2012/main" xmlns:mc="http://schemas.openxmlformats.org/markup-compatibility/2006" type="tx" preserve="1">
+<p:sldLayout xmlns:a="http://schemas.openxmlformats.org/drawingml/2006/main" xmlns:r="http://schemas.openxmlformats.org/officeDocument/2006/relationships" xmlns:p="http://schemas.openxmlformats.org/presentationml/2006/main" type="tx" preserve="1">
   <p:cSld name="Title Slide">
     <p:spTree>
       <p:nvGrpSpPr>
@@ -632,11 +1227,12 @@
           </a:prstGeom>
         </p:spPr>
         <p:txBody>
-          <a:bodyPr lIns="0" rIns="0" tIns="0" bIns="0" anchor="ctr">
+          <a:bodyPr lIns="0" tIns="0" rIns="0" bIns="0" anchor="ctr">
             <a:noAutofit/>
           </a:bodyPr>
+          <a:lstStyle/>
           <a:p>
-            <a:endParaRPr b="0" lang="es-ES" sz="1800" spc="-1" strike="noStrike">
+            <a:endParaRPr lang="es-ES" sz="1800" b="0" strike="noStrike" spc="-1">
               <a:solidFill>
                 <a:srgbClr val="000000"/>
               </a:solidFill>
@@ -665,12 +1261,13 @@
           </a:prstGeom>
         </p:spPr>
         <p:txBody>
-          <a:bodyPr lIns="0" rIns="0" tIns="0" bIns="0" anchor="ctr">
+          <a:bodyPr lIns="0" tIns="0" rIns="0" bIns="0" anchor="ctr">
             <a:noAutofit/>
           </a:bodyPr>
+          <a:lstStyle/>
           <a:p>
             <a:pPr algn="ctr"/>
-            <a:endParaRPr b="0" lang="es-ES" sz="3200" spc="-1" strike="noStrike">
+            <a:endParaRPr lang="es-ES" sz="3200" b="0" strike="noStrike" spc="-1">
               <a:latin typeface="Arial"/>
             </a:endParaRPr>
           </a:p>
@@ -678,11 +1275,14 @@
       </p:sp>
     </p:spTree>
   </p:cSld>
+  <p:clrMapOvr>
+    <a:masterClrMapping/>
+  </p:clrMapOvr>
 </p:sldLayout>
 </file>
 
 <file path=ppt/slideLayouts/slideLayout3.xml><?xml version="1.0" encoding="utf-8"?>
-<p:sldLayout xmlns:a="http://schemas.openxmlformats.org/drawingml/2006/main" xmlns:p="http://schemas.openxmlformats.org/presentationml/2006/main" xmlns:r="http://schemas.openxmlformats.org/officeDocument/2006/relationships" xmlns:p14="http://schemas.microsoft.com/office/powerpoint/2010/main" xmlns:p15="http://schemas.microsoft.com/office/powerpoint/2012/main" xmlns:mc="http://schemas.openxmlformats.org/markup-compatibility/2006" type="obj" preserve="1">
+<p:sldLayout xmlns:a="http://schemas.openxmlformats.org/drawingml/2006/main" xmlns:r="http://schemas.openxmlformats.org/officeDocument/2006/relationships" xmlns:p="http://schemas.openxmlformats.org/presentationml/2006/main" type="obj" preserve="1">
   <p:cSld name="Title, Content">
     <p:spTree>
       <p:nvGrpSpPr>
@@ -718,11 +1318,12 @@
           </a:prstGeom>
         </p:spPr>
         <p:txBody>
-          <a:bodyPr lIns="0" rIns="0" tIns="0" bIns="0" anchor="ctr">
+          <a:bodyPr lIns="0" tIns="0" rIns="0" bIns="0" anchor="ctr">
             <a:noAutofit/>
           </a:bodyPr>
+          <a:lstStyle/>
           <a:p>
-            <a:endParaRPr b="0" lang="es-ES" sz="1800" spc="-1" strike="noStrike">
+            <a:endParaRPr lang="es-ES" sz="1800" b="0" strike="noStrike" spc="-1">
               <a:solidFill>
                 <a:srgbClr val="000000"/>
               </a:solidFill>
@@ -751,11 +1352,12 @@
           </a:prstGeom>
         </p:spPr>
         <p:txBody>
-          <a:bodyPr lIns="0" rIns="0" tIns="0" bIns="0">
+          <a:bodyPr lIns="0" tIns="0" rIns="0" bIns="0">
             <a:normAutofit/>
           </a:bodyPr>
+          <a:lstStyle/>
           <a:p>
-            <a:endParaRPr b="0" lang="es-ES" sz="2800" spc="-1" strike="noStrike">
+            <a:endParaRPr lang="es-ES" sz="2800" b="0" strike="noStrike" spc="-1">
               <a:solidFill>
                 <a:srgbClr val="000000"/>
               </a:solidFill>
@@ -766,11 +1368,14 @@
       </p:sp>
     </p:spTree>
   </p:cSld>
+  <p:clrMapOvr>
+    <a:masterClrMapping/>
+  </p:clrMapOvr>
 </p:sldLayout>
 </file>
 
 <file path=ppt/slideLayouts/slideLayout4.xml><?xml version="1.0" encoding="utf-8"?>
-<p:sldLayout xmlns:a="http://schemas.openxmlformats.org/drawingml/2006/main" xmlns:p="http://schemas.openxmlformats.org/presentationml/2006/main" xmlns:r="http://schemas.openxmlformats.org/officeDocument/2006/relationships" xmlns:p14="http://schemas.microsoft.com/office/powerpoint/2010/main" xmlns:p15="http://schemas.microsoft.com/office/powerpoint/2012/main" xmlns:mc="http://schemas.openxmlformats.org/markup-compatibility/2006" type="twoObj" preserve="1">
+<p:sldLayout xmlns:a="http://schemas.openxmlformats.org/drawingml/2006/main" xmlns:r="http://schemas.openxmlformats.org/officeDocument/2006/relationships" xmlns:p="http://schemas.openxmlformats.org/presentationml/2006/main" type="twoObj" preserve="1">
   <p:cSld name="Title, 2 Content">
     <p:spTree>
       <p:nvGrpSpPr>
@@ -806,11 +1411,12 @@
           </a:prstGeom>
         </p:spPr>
         <p:txBody>
-          <a:bodyPr lIns="0" rIns="0" tIns="0" bIns="0" anchor="ctr">
+          <a:bodyPr lIns="0" tIns="0" rIns="0" bIns="0" anchor="ctr">
             <a:noAutofit/>
           </a:bodyPr>
+          <a:lstStyle/>
           <a:p>
-            <a:endParaRPr b="0" lang="es-ES" sz="1800" spc="-1" strike="noStrike">
+            <a:endParaRPr lang="es-ES" sz="1800" b="0" strike="noStrike" spc="-1">
               <a:solidFill>
                 <a:srgbClr val="000000"/>
               </a:solidFill>
@@ -839,11 +1445,12 @@
           </a:prstGeom>
         </p:spPr>
         <p:txBody>
-          <a:bodyPr lIns="0" rIns="0" tIns="0" bIns="0">
+          <a:bodyPr lIns="0" tIns="0" rIns="0" bIns="0">
             <a:normAutofit/>
           </a:bodyPr>
+          <a:lstStyle/>
           <a:p>
-            <a:endParaRPr b="0" lang="es-ES" sz="2800" spc="-1" strike="noStrike">
+            <a:endParaRPr lang="es-ES" sz="2800" b="0" strike="noStrike" spc="-1">
               <a:solidFill>
                 <a:srgbClr val="000000"/>
               </a:solidFill>
@@ -872,11 +1479,12 @@
           </a:prstGeom>
         </p:spPr>
         <p:txBody>
-          <a:bodyPr lIns="0" rIns="0" tIns="0" bIns="0">
+          <a:bodyPr lIns="0" tIns="0" rIns="0" bIns="0">
             <a:normAutofit/>
           </a:bodyPr>
+          <a:lstStyle/>
           <a:p>
-            <a:endParaRPr b="0" lang="es-ES" sz="2800" spc="-1" strike="noStrike">
+            <a:endParaRPr lang="es-ES" sz="2800" b="0" strike="noStrike" spc="-1">
               <a:solidFill>
                 <a:srgbClr val="000000"/>
               </a:solidFill>
@@ -887,11 +1495,14 @@
       </p:sp>
     </p:spTree>
   </p:cSld>
+  <p:clrMapOvr>
+    <a:masterClrMapping/>
+  </p:clrMapOvr>
 </p:sldLayout>
 </file>
 
 <file path=ppt/slideLayouts/slideLayout5.xml><?xml version="1.0" encoding="utf-8"?>
-<p:sldLayout xmlns:a="http://schemas.openxmlformats.org/drawingml/2006/main" xmlns:p="http://schemas.openxmlformats.org/presentationml/2006/main" xmlns:r="http://schemas.openxmlformats.org/officeDocument/2006/relationships" xmlns:p14="http://schemas.microsoft.com/office/powerpoint/2010/main" xmlns:p15="http://schemas.microsoft.com/office/powerpoint/2012/main" xmlns:mc="http://schemas.openxmlformats.org/markup-compatibility/2006" type="titleOnly" preserve="1">
+<p:sldLayout xmlns:a="http://schemas.openxmlformats.org/drawingml/2006/main" xmlns:r="http://schemas.openxmlformats.org/officeDocument/2006/relationships" xmlns:p="http://schemas.openxmlformats.org/presentationml/2006/main" type="titleOnly" preserve="1">
   <p:cSld name="Title Only">
     <p:spTree>
       <p:nvGrpSpPr>
@@ -927,11 +1538,12 @@
           </a:prstGeom>
         </p:spPr>
         <p:txBody>
-          <a:bodyPr lIns="0" rIns="0" tIns="0" bIns="0" anchor="ctr">
+          <a:bodyPr lIns="0" tIns="0" rIns="0" bIns="0" anchor="ctr">
             <a:noAutofit/>
           </a:bodyPr>
+          <a:lstStyle/>
           <a:p>
-            <a:endParaRPr b="0" lang="es-ES" sz="1800" spc="-1" strike="noStrike">
+            <a:endParaRPr lang="es-ES" sz="1800" b="0" strike="noStrike" spc="-1">
               <a:solidFill>
                 <a:srgbClr val="000000"/>
               </a:solidFill>
@@ -942,11 +1554,14 @@
       </p:sp>
     </p:spTree>
   </p:cSld>
+  <p:clrMapOvr>
+    <a:masterClrMapping/>
+  </p:clrMapOvr>
 </p:sldLayout>
 </file>
 
 <file path=ppt/slideLayouts/slideLayout6.xml><?xml version="1.0" encoding="utf-8"?>
-<p:sldLayout xmlns:a="http://schemas.openxmlformats.org/drawingml/2006/main" xmlns:p="http://schemas.openxmlformats.org/presentationml/2006/main" xmlns:r="http://schemas.openxmlformats.org/officeDocument/2006/relationships" xmlns:p14="http://schemas.microsoft.com/office/powerpoint/2010/main" xmlns:p15="http://schemas.microsoft.com/office/powerpoint/2012/main" xmlns:mc="http://schemas.openxmlformats.org/markup-compatibility/2006" type="objOnly" preserve="1">
+<p:sldLayout xmlns:a="http://schemas.openxmlformats.org/drawingml/2006/main" xmlns:r="http://schemas.openxmlformats.org/officeDocument/2006/relationships" xmlns:p="http://schemas.openxmlformats.org/presentationml/2006/main" type="objOnly" preserve="1">
   <p:cSld name="Centered Text">
     <p:spTree>
       <p:nvGrpSpPr>
@@ -982,12 +1597,13 @@
           </a:prstGeom>
         </p:spPr>
         <p:txBody>
-          <a:bodyPr lIns="0" rIns="0" tIns="0" bIns="0" anchor="ctr">
+          <a:bodyPr lIns="0" tIns="0" rIns="0" bIns="0" anchor="ctr">
             <a:noAutofit/>
           </a:bodyPr>
+          <a:lstStyle/>
           <a:p>
             <a:pPr algn="ctr"/>
-            <a:endParaRPr b="0" lang="es-ES" sz="3200" spc="-1" strike="noStrike">
+            <a:endParaRPr lang="es-ES" sz="3200" b="0" strike="noStrike" spc="-1">
               <a:latin typeface="Arial"/>
             </a:endParaRPr>
           </a:p>
@@ -995,11 +1611,14 @@
       </p:sp>
     </p:spTree>
   </p:cSld>
+  <p:clrMapOvr>
+    <a:masterClrMapping/>
+  </p:clrMapOvr>
 </p:sldLayout>
 </file>
 
 <file path=ppt/slideLayouts/slideLayout7.xml><?xml version="1.0" encoding="utf-8"?>
-<p:sldLayout xmlns:a="http://schemas.openxmlformats.org/drawingml/2006/main" xmlns:p="http://schemas.openxmlformats.org/presentationml/2006/main" xmlns:r="http://schemas.openxmlformats.org/officeDocument/2006/relationships" xmlns:p14="http://schemas.microsoft.com/office/powerpoint/2010/main" xmlns:p15="http://schemas.microsoft.com/office/powerpoint/2012/main" xmlns:mc="http://schemas.openxmlformats.org/markup-compatibility/2006" type="twoObjAndObj" preserve="1">
+<p:sldLayout xmlns:a="http://schemas.openxmlformats.org/drawingml/2006/main" xmlns:r="http://schemas.openxmlformats.org/officeDocument/2006/relationships" xmlns:p="http://schemas.openxmlformats.org/presentationml/2006/main" type="twoObjAndObj" preserve="1">
   <p:cSld name="Title, 2 Content and Content">
     <p:spTree>
       <p:nvGrpSpPr>
@@ -1035,11 +1654,12 @@
           </a:prstGeom>
         </p:spPr>
         <p:txBody>
-          <a:bodyPr lIns="0" rIns="0" tIns="0" bIns="0" anchor="ctr">
+          <a:bodyPr lIns="0" tIns="0" rIns="0" bIns="0" anchor="ctr">
             <a:noAutofit/>
           </a:bodyPr>
+          <a:lstStyle/>
           <a:p>
-            <a:endParaRPr b="0" lang="es-ES" sz="1800" spc="-1" strike="noStrike">
+            <a:endParaRPr lang="es-ES" sz="1800" b="0" strike="noStrike" spc="-1">
               <a:solidFill>
                 <a:srgbClr val="000000"/>
               </a:solidFill>
@@ -1068,11 +1688,12 @@
           </a:prstGeom>
         </p:spPr>
         <p:txBody>
-          <a:bodyPr lIns="0" rIns="0" tIns="0" bIns="0">
+          <a:bodyPr lIns="0" tIns="0" rIns="0" bIns="0">
             <a:normAutofit/>
           </a:bodyPr>
+          <a:lstStyle/>
           <a:p>
-            <a:endParaRPr b="0" lang="es-ES" sz="2800" spc="-1" strike="noStrike">
+            <a:endParaRPr lang="es-ES" sz="2800" b="0" strike="noStrike" spc="-1">
               <a:solidFill>
                 <a:srgbClr val="000000"/>
               </a:solidFill>
@@ -1101,11 +1722,12 @@
           </a:prstGeom>
         </p:spPr>
         <p:txBody>
-          <a:bodyPr lIns="0" rIns="0" tIns="0" bIns="0">
+          <a:bodyPr lIns="0" tIns="0" rIns="0" bIns="0">
             <a:normAutofit/>
           </a:bodyPr>
+          <a:lstStyle/>
           <a:p>
-            <a:endParaRPr b="0" lang="es-ES" sz="2800" spc="-1" strike="noStrike">
+            <a:endParaRPr lang="es-ES" sz="2800" b="0" strike="noStrike" spc="-1">
               <a:solidFill>
                 <a:srgbClr val="000000"/>
               </a:solidFill>
@@ -1134,11 +1756,12 @@
           </a:prstGeom>
         </p:spPr>
         <p:txBody>
-          <a:bodyPr lIns="0" rIns="0" tIns="0" bIns="0">
+          <a:bodyPr lIns="0" tIns="0" rIns="0" bIns="0">
             <a:normAutofit/>
           </a:bodyPr>
+          <a:lstStyle/>
           <a:p>
-            <a:endParaRPr b="0" lang="es-ES" sz="2800" spc="-1" strike="noStrike">
+            <a:endParaRPr lang="es-ES" sz="2800" b="0" strike="noStrike" spc="-1">
               <a:solidFill>
                 <a:srgbClr val="000000"/>
               </a:solidFill>
@@ -1149,11 +1772,14 @@
       </p:sp>
     </p:spTree>
   </p:cSld>
+  <p:clrMapOvr>
+    <a:masterClrMapping/>
+  </p:clrMapOvr>
 </p:sldLayout>
 </file>
 
 <file path=ppt/slideLayouts/slideLayout8.xml><?xml version="1.0" encoding="utf-8"?>
-<p:sldLayout xmlns:a="http://schemas.openxmlformats.org/drawingml/2006/main" xmlns:p="http://schemas.openxmlformats.org/presentationml/2006/main" xmlns:r="http://schemas.openxmlformats.org/officeDocument/2006/relationships" xmlns:p14="http://schemas.microsoft.com/office/powerpoint/2010/main" xmlns:p15="http://schemas.microsoft.com/office/powerpoint/2012/main" xmlns:mc="http://schemas.openxmlformats.org/markup-compatibility/2006" type="objAndTwoObj" preserve="1">
+<p:sldLayout xmlns:a="http://schemas.openxmlformats.org/drawingml/2006/main" xmlns:r="http://schemas.openxmlformats.org/officeDocument/2006/relationships" xmlns:p="http://schemas.openxmlformats.org/presentationml/2006/main" type="objAndTwoObj" preserve="1">
   <p:cSld name="Title Content and 2 Content">
     <p:spTree>
       <p:nvGrpSpPr>
@@ -1189,11 +1815,12 @@
           </a:prstGeom>
         </p:spPr>
         <p:txBody>
-          <a:bodyPr lIns="0" rIns="0" tIns="0" bIns="0" anchor="ctr">
+          <a:bodyPr lIns="0" tIns="0" rIns="0" bIns="0" anchor="ctr">
             <a:noAutofit/>
           </a:bodyPr>
+          <a:lstStyle/>
           <a:p>
-            <a:endParaRPr b="0" lang="es-ES" sz="1800" spc="-1" strike="noStrike">
+            <a:endParaRPr lang="es-ES" sz="1800" b="0" strike="noStrike" spc="-1">
               <a:solidFill>
                 <a:srgbClr val="000000"/>
               </a:solidFill>
@@ -1222,11 +1849,12 @@
           </a:prstGeom>
         </p:spPr>
         <p:txBody>
-          <a:bodyPr lIns="0" rIns="0" tIns="0" bIns="0">
+          <a:bodyPr lIns="0" tIns="0" rIns="0" bIns="0">
             <a:normAutofit/>
           </a:bodyPr>
+          <a:lstStyle/>
           <a:p>
-            <a:endParaRPr b="0" lang="es-ES" sz="2800" spc="-1" strike="noStrike">
+            <a:endParaRPr lang="es-ES" sz="2800" b="0" strike="noStrike" spc="-1">
               <a:solidFill>
                 <a:srgbClr val="000000"/>
               </a:solidFill>
@@ -1255,11 +1883,12 @@
           </a:prstGeom>
         </p:spPr>
         <p:txBody>
-          <a:bodyPr lIns="0" rIns="0" tIns="0" bIns="0">
+          <a:bodyPr lIns="0" tIns="0" rIns="0" bIns="0">
             <a:normAutofit/>
           </a:bodyPr>
+          <a:lstStyle/>
           <a:p>
-            <a:endParaRPr b="0" lang="es-ES" sz="2800" spc="-1" strike="noStrike">
+            <a:endParaRPr lang="es-ES" sz="2800" b="0" strike="noStrike" spc="-1">
               <a:solidFill>
                 <a:srgbClr val="000000"/>
               </a:solidFill>
@@ -1288,11 +1917,12 @@
           </a:prstGeom>
         </p:spPr>
         <p:txBody>
-          <a:bodyPr lIns="0" rIns="0" tIns="0" bIns="0">
+          <a:bodyPr lIns="0" tIns="0" rIns="0" bIns="0">
             <a:normAutofit/>
           </a:bodyPr>
+          <a:lstStyle/>
           <a:p>
-            <a:endParaRPr b="0" lang="es-ES" sz="2800" spc="-1" strike="noStrike">
+            <a:endParaRPr lang="es-ES" sz="2800" b="0" strike="noStrike" spc="-1">
               <a:solidFill>
                 <a:srgbClr val="000000"/>
               </a:solidFill>
@@ -1303,11 +1933,14 @@
       </p:sp>
     </p:spTree>
   </p:cSld>
+  <p:clrMapOvr>
+    <a:masterClrMapping/>
+  </p:clrMapOvr>
 </p:sldLayout>
 </file>
 
 <file path=ppt/slideLayouts/slideLayout9.xml><?xml version="1.0" encoding="utf-8"?>
-<p:sldLayout xmlns:a="http://schemas.openxmlformats.org/drawingml/2006/main" xmlns:p="http://schemas.openxmlformats.org/presentationml/2006/main" xmlns:r="http://schemas.openxmlformats.org/officeDocument/2006/relationships" xmlns:p14="http://schemas.microsoft.com/office/powerpoint/2010/main" xmlns:p15="http://schemas.microsoft.com/office/powerpoint/2012/main" xmlns:mc="http://schemas.openxmlformats.org/markup-compatibility/2006" type="twoObjOverTx" preserve="1">
+<p:sldLayout xmlns:a="http://schemas.openxmlformats.org/drawingml/2006/main" xmlns:r="http://schemas.openxmlformats.org/officeDocument/2006/relationships" xmlns:p="http://schemas.openxmlformats.org/presentationml/2006/main" type="twoObjOverTx" preserve="1">
   <p:cSld name="Title, 2 Content over Content">
     <p:spTree>
       <p:nvGrpSpPr>
@@ -1343,11 +1976,12 @@
           </a:prstGeom>
         </p:spPr>
         <p:txBody>
-          <a:bodyPr lIns="0" rIns="0" tIns="0" bIns="0" anchor="ctr">
+          <a:bodyPr lIns="0" tIns="0" rIns="0" bIns="0" anchor="ctr">
             <a:noAutofit/>
           </a:bodyPr>
+          <a:lstStyle/>
           <a:p>
-            <a:endParaRPr b="0" lang="es-ES" sz="1800" spc="-1" strike="noStrike">
+            <a:endParaRPr lang="es-ES" sz="1800" b="0" strike="noStrike" spc="-1">
               <a:solidFill>
                 <a:srgbClr val="000000"/>
               </a:solidFill>
@@ -1376,11 +2010,12 @@
           </a:prstGeom>
         </p:spPr>
         <p:txBody>
-          <a:bodyPr lIns="0" rIns="0" tIns="0" bIns="0">
+          <a:bodyPr lIns="0" tIns="0" rIns="0" bIns="0">
             <a:normAutofit/>
           </a:bodyPr>
+          <a:lstStyle/>
           <a:p>
-            <a:endParaRPr b="0" lang="es-ES" sz="2800" spc="-1" strike="noStrike">
+            <a:endParaRPr lang="es-ES" sz="2800" b="0" strike="noStrike" spc="-1">
               <a:solidFill>
                 <a:srgbClr val="000000"/>
               </a:solidFill>
@@ -1409,11 +2044,12 @@
           </a:prstGeom>
         </p:spPr>
         <p:txBody>
-          <a:bodyPr lIns="0" rIns="0" tIns="0" bIns="0">
+          <a:bodyPr lIns="0" tIns="0" rIns="0" bIns="0">
             <a:normAutofit/>
           </a:bodyPr>
+          <a:lstStyle/>
           <a:p>
-            <a:endParaRPr b="0" lang="es-ES" sz="2800" spc="-1" strike="noStrike">
+            <a:endParaRPr lang="es-ES" sz="2800" b="0" strike="noStrike" spc="-1">
               <a:solidFill>
                 <a:srgbClr val="000000"/>
               </a:solidFill>
@@ -1442,11 +2078,12 @@
           </a:prstGeom>
         </p:spPr>
         <p:txBody>
-          <a:bodyPr lIns="0" rIns="0" tIns="0" bIns="0">
+          <a:bodyPr lIns="0" tIns="0" rIns="0" bIns="0">
             <a:normAutofit/>
           </a:bodyPr>
+          <a:lstStyle/>
           <a:p>
-            <a:endParaRPr b="0" lang="es-ES" sz="2800" spc="-1" strike="noStrike">
+            <a:endParaRPr lang="es-ES" sz="2800" b="0" strike="noStrike" spc="-1">
               <a:solidFill>
                 <a:srgbClr val="000000"/>
               </a:solidFill>
@@ -1457,17 +2094,21 @@
       </p:sp>
     </p:spTree>
   </p:cSld>
+  <p:clrMapOvr>
+    <a:masterClrMapping/>
+  </p:clrMapOvr>
 </p:sldLayout>
 </file>
 
 <file path=ppt/slideMasters/slideMaster1.xml><?xml version="1.0" encoding="utf-8"?>
-<p:sldMaster xmlns:a="http://schemas.openxmlformats.org/drawingml/2006/main" xmlns:p="http://schemas.openxmlformats.org/presentationml/2006/main" xmlns:r="http://schemas.openxmlformats.org/officeDocument/2006/relationships" xmlns:p14="http://schemas.microsoft.com/office/powerpoint/2010/main" xmlns:p15="http://schemas.microsoft.com/office/powerpoint/2012/main" xmlns:mc="http://schemas.openxmlformats.org/markup-compatibility/2006">
+<p:sldMaster xmlns:a="http://schemas.openxmlformats.org/drawingml/2006/main" xmlns:r="http://schemas.openxmlformats.org/officeDocument/2006/relationships" xmlns:p="http://schemas.openxmlformats.org/presentationml/2006/main">
   <p:cSld>
     <p:bg>
       <p:bgPr>
         <a:solidFill>
-          <a:srgbClr val="ffffff"/>
+          <a:srgbClr val="FFFFFF"/>
         </a:solidFill>
+        <a:effectLst/>
       </p:bgPr>
     </p:bg>
     <p:spTree>
@@ -1486,7 +2127,7 @@
       </p:grpSpPr>
       <p:sp>
         <p:nvSpPr>
-          <p:cNvPr id="0" name="PlaceHolder 1"/>
+          <p:cNvPr id="2" name="PlaceHolder 1"/>
           <p:cNvSpPr>
             <a:spLocks noGrp="1"/>
           </p:cNvSpPr>
@@ -1504,13 +2145,14 @@
           </a:prstGeom>
         </p:spPr>
         <p:txBody>
-          <a:bodyPr lIns="0" rIns="0" tIns="0" bIns="0" anchor="ctr">
+          <a:bodyPr lIns="0" tIns="0" rIns="0" bIns="0" anchor="ctr">
             <a:noAutofit/>
           </a:bodyPr>
+          <a:lstStyle/>
           <a:p>
             <a:pPr algn="ctr"/>
             <a:r>
-              <a:rPr b="0" lang="es-ES" sz="4400" spc="-1" strike="noStrike">
+              <a:rPr lang="es-ES" sz="4400" b="0" strike="noStrike" spc="-1">
                 <a:solidFill>
                   <a:srgbClr val="000000"/>
                 </a:solidFill>
@@ -1518,18 +2160,12 @@
               </a:rPr>
               <a:t>Pulse para editar el formato del texto de título</a:t>
             </a:r>
-            <a:endParaRPr b="0" lang="es-ES" sz="4400" spc="-1" strike="noStrike">
-              <a:solidFill>
-                <a:srgbClr val="000000"/>
-              </a:solidFill>
-              <a:latin typeface="Arial"/>
-            </a:endParaRPr>
           </a:p>
         </p:txBody>
       </p:sp>
       <p:sp>
         <p:nvSpPr>
-          <p:cNvPr id="1" name="PlaceHolder 2"/>
+          <p:cNvPr id="3" name="PlaceHolder 2"/>
           <p:cNvSpPr>
             <a:spLocks noGrp="1"/>
           </p:cNvSpPr>
@@ -1547,9 +2183,10 @@
           </a:prstGeom>
         </p:spPr>
         <p:txBody>
-          <a:bodyPr lIns="0" rIns="0" tIns="0" bIns="0">
+          <a:bodyPr lIns="0" tIns="0" rIns="0" bIns="0">
             <a:normAutofit/>
           </a:bodyPr>
+          <a:lstStyle/>
           <a:p>
             <a:pPr marL="432000" indent="-324000">
               <a:spcBef>
@@ -1563,7 +2200,7 @@
               <a:buChar char=""/>
             </a:pPr>
             <a:r>
-              <a:rPr b="0" lang="es-ES" sz="2800" spc="-1" strike="noStrike">
+              <a:rPr lang="es-ES" sz="2800" b="0" strike="noStrike" spc="-1">
                 <a:solidFill>
                   <a:srgbClr val="000000"/>
                 </a:solidFill>
@@ -1571,15 +2208,9 @@
               </a:rPr>
               <a:t>Pulse para editar el formato de texto del esquema</a:t>
             </a:r>
-            <a:endParaRPr b="0" lang="es-ES" sz="2800" spc="-1" strike="noStrike">
-              <a:solidFill>
-                <a:srgbClr val="000000"/>
-              </a:solidFill>
-              <a:latin typeface="Arial"/>
-            </a:endParaRPr>
           </a:p>
           <a:p>
-            <a:pPr lvl="1" marL="864000" indent="-324000">
+            <a:pPr marL="864000" lvl="1" indent="-324000">
               <a:spcBef>
                 <a:spcPts val="1134"/>
               </a:spcBef>
@@ -1591,7 +2222,7 @@
               <a:buChar char=""/>
             </a:pPr>
             <a:r>
-              <a:rPr b="0" lang="es-ES" sz="2000" spc="-1" strike="noStrike">
+              <a:rPr lang="es-ES" sz="2000" b="0" strike="noStrike" spc="-1">
                 <a:solidFill>
                   <a:srgbClr val="000000"/>
                 </a:solidFill>
@@ -1599,15 +2230,9 @@
               </a:rPr>
               <a:t>Segundo nivel del esquema</a:t>
             </a:r>
-            <a:endParaRPr b="0" lang="es-ES" sz="2000" spc="-1" strike="noStrike">
-              <a:solidFill>
-                <a:srgbClr val="000000"/>
-              </a:solidFill>
-              <a:latin typeface="Arial"/>
-            </a:endParaRPr>
           </a:p>
           <a:p>
-            <a:pPr lvl="2" marL="1296000" indent="-288000">
+            <a:pPr marL="1296000" lvl="2" indent="-288000">
               <a:spcBef>
                 <a:spcPts val="850"/>
               </a:spcBef>
@@ -1619,7 +2244,7 @@
               <a:buChar char=""/>
             </a:pPr>
             <a:r>
-              <a:rPr b="0" lang="es-ES" sz="1800" spc="-1" strike="noStrike">
+              <a:rPr lang="es-ES" sz="1800" b="0" strike="noStrike" spc="-1">
                 <a:solidFill>
                   <a:srgbClr val="000000"/>
                 </a:solidFill>
@@ -1627,15 +2252,9 @@
               </a:rPr>
               <a:t>Tercer nivel del esquema</a:t>
             </a:r>
-            <a:endParaRPr b="0" lang="es-ES" sz="1800" spc="-1" strike="noStrike">
-              <a:solidFill>
-                <a:srgbClr val="000000"/>
-              </a:solidFill>
-              <a:latin typeface="Arial"/>
-            </a:endParaRPr>
           </a:p>
           <a:p>
-            <a:pPr lvl="3" marL="1728000" indent="-216000">
+            <a:pPr marL="1728000" lvl="3" indent="-216000">
               <a:spcBef>
                 <a:spcPts val="567"/>
               </a:spcBef>
@@ -1647,7 +2266,7 @@
               <a:buChar char=""/>
             </a:pPr>
             <a:r>
-              <a:rPr b="0" lang="es-ES" sz="1800" spc="-1" strike="noStrike">
+              <a:rPr lang="es-ES" sz="1800" b="0" strike="noStrike" spc="-1">
                 <a:solidFill>
                   <a:srgbClr val="000000"/>
                 </a:solidFill>
@@ -1655,15 +2274,9 @@
               </a:rPr>
               <a:t>Cuarto nivel del esquema</a:t>
             </a:r>
-            <a:endParaRPr b="0" lang="es-ES" sz="1800" spc="-1" strike="noStrike">
-              <a:solidFill>
-                <a:srgbClr val="000000"/>
-              </a:solidFill>
-              <a:latin typeface="Arial"/>
-            </a:endParaRPr>
           </a:p>
           <a:p>
-            <a:pPr lvl="4" marL="2160000" indent="-216000">
+            <a:pPr marL="2160000" lvl="4" indent="-216000">
               <a:spcBef>
                 <a:spcPts val="283"/>
               </a:spcBef>
@@ -1675,7 +2288,7 @@
               <a:buChar char=""/>
             </a:pPr>
             <a:r>
-              <a:rPr b="0" lang="es-ES" sz="2000" spc="-1" strike="noStrike">
+              <a:rPr lang="es-ES" sz="2000" b="0" strike="noStrike" spc="-1">
                 <a:solidFill>
                   <a:srgbClr val="000000"/>
                 </a:solidFill>
@@ -1683,15 +2296,9 @@
               </a:rPr>
               <a:t>Quinto nivel del esquema</a:t>
             </a:r>
-            <a:endParaRPr b="0" lang="es-ES" sz="2000" spc="-1" strike="noStrike">
-              <a:solidFill>
-                <a:srgbClr val="000000"/>
-              </a:solidFill>
-              <a:latin typeface="Arial"/>
-            </a:endParaRPr>
           </a:p>
           <a:p>
-            <a:pPr lvl="5" marL="2592000" indent="-216000">
+            <a:pPr marL="2592000" lvl="5" indent="-216000">
               <a:spcBef>
                 <a:spcPts val="283"/>
               </a:spcBef>
@@ -1703,7 +2310,7 @@
               <a:buChar char=""/>
             </a:pPr>
             <a:r>
-              <a:rPr b="0" lang="es-ES" sz="2000" spc="-1" strike="noStrike">
+              <a:rPr lang="es-ES" sz="2000" b="0" strike="noStrike" spc="-1">
                 <a:solidFill>
                   <a:srgbClr val="000000"/>
                 </a:solidFill>
@@ -1711,15 +2318,9 @@
               </a:rPr>
               <a:t>Sexto nivel del esquema</a:t>
             </a:r>
-            <a:endParaRPr b="0" lang="es-ES" sz="2000" spc="-1" strike="noStrike">
-              <a:solidFill>
-                <a:srgbClr val="000000"/>
-              </a:solidFill>
-              <a:latin typeface="Arial"/>
-            </a:endParaRPr>
           </a:p>
           <a:p>
-            <a:pPr lvl="6" marL="3024000" indent="-216000">
+            <a:pPr marL="3024000" lvl="6" indent="-216000">
               <a:spcBef>
                 <a:spcPts val="283"/>
               </a:spcBef>
@@ -1731,7 +2332,7 @@
               <a:buChar char=""/>
             </a:pPr>
             <a:r>
-              <a:rPr b="0" lang="es-ES" sz="2000" spc="-1" strike="noStrike">
+              <a:rPr lang="es-ES" sz="2000" b="0" strike="noStrike" spc="-1">
                 <a:solidFill>
                   <a:srgbClr val="000000"/>
                 </a:solidFill>
@@ -1739,53 +2340,328 @@
               </a:rPr>
               <a:t>Séptimo nivel del esquema</a:t>
             </a:r>
-            <a:endParaRPr b="0" lang="es-ES" sz="2000" spc="-1" strike="noStrike">
-              <a:solidFill>
-                <a:srgbClr val="000000"/>
-              </a:solidFill>
-              <a:latin typeface="Arial"/>
-            </a:endParaRPr>
           </a:p>
         </p:txBody>
       </p:sp>
     </p:spTree>
   </p:cSld>
-  <p:clrMap bg1="lt1" bg2="lt2" tx1="dk1" tx2="dk2" accent1="accent1" accent2="accent2" accent3="accent3" accent4="accent4" accent5="accent5" accent6="accent6" hlink="hlink" folHlink="folHlink"/>
+  <p:clrMap bg1="lt1" tx1="dk1" bg2="lt2" tx2="dk2" accent1="accent1" accent2="accent2" accent3="accent3" accent4="accent4" accent5="accent5" accent6="accent6" hlink="hlink" folHlink="folHlink"/>
   <p:sldLayoutIdLst>
-    <p:sldLayoutId id="2147483649" r:id="rId2"/>
-    <p:sldLayoutId id="2147483650" r:id="rId3"/>
-    <p:sldLayoutId id="2147483651" r:id="rId4"/>
-    <p:sldLayoutId id="2147483652" r:id="rId5"/>
-    <p:sldLayoutId id="2147483653" r:id="rId6"/>
-    <p:sldLayoutId id="2147483654" r:id="rId7"/>
-    <p:sldLayoutId id="2147483655" r:id="rId8"/>
-    <p:sldLayoutId id="2147483656" r:id="rId9"/>
-    <p:sldLayoutId id="2147483657" r:id="rId10"/>
-    <p:sldLayoutId id="2147483658" r:id="rId11"/>
-    <p:sldLayoutId id="2147483659" r:id="rId12"/>
-    <p:sldLayoutId id="2147483660" r:id="rId13"/>
+    <p:sldLayoutId id="2147483649" r:id="rId1"/>
+    <p:sldLayoutId id="2147483650" r:id="rId2"/>
+    <p:sldLayoutId id="2147483651" r:id="rId3"/>
+    <p:sldLayoutId id="2147483652" r:id="rId4"/>
+    <p:sldLayoutId id="2147483653" r:id="rId5"/>
+    <p:sldLayoutId id="2147483654" r:id="rId6"/>
+    <p:sldLayoutId id="2147483655" r:id="rId7"/>
+    <p:sldLayoutId id="2147483656" r:id="rId8"/>
+    <p:sldLayoutId id="2147483657" r:id="rId9"/>
+    <p:sldLayoutId id="2147483658" r:id="rId10"/>
+    <p:sldLayoutId id="2147483659" r:id="rId11"/>
+    <p:sldLayoutId id="2147483660" r:id="rId12"/>
   </p:sldLayoutIdLst>
+  <p:txStyles>
+    <p:titleStyle>
+      <a:lvl1pPr algn="l" defTabSz="914400" rtl="0" eaLnBrk="1" latinLnBrk="0" hangingPunct="1">
+        <a:lnSpc>
+          <a:spcPct val="90000"/>
+        </a:lnSpc>
+        <a:spcBef>
+          <a:spcPct val="0"/>
+        </a:spcBef>
+        <a:buNone/>
+        <a:defRPr sz="4400" kern="1200">
+          <a:solidFill>
+            <a:schemeClr val="tx1"/>
+          </a:solidFill>
+          <a:latin typeface="+mj-lt"/>
+          <a:ea typeface="+mj-ea"/>
+          <a:cs typeface="+mj-cs"/>
+        </a:defRPr>
+      </a:lvl1pPr>
+    </p:titleStyle>
+    <p:bodyStyle>
+      <a:lvl1pPr marL="228600" indent="-228600" algn="l" defTabSz="914400" rtl="0" eaLnBrk="1" latinLnBrk="0" hangingPunct="1">
+        <a:lnSpc>
+          <a:spcPct val="90000"/>
+        </a:lnSpc>
+        <a:spcBef>
+          <a:spcPts val="1000"/>
+        </a:spcBef>
+        <a:buFont typeface="Arial" panose="020B0604020202020204" pitchFamily="34" charset="0"/>
+        <a:buChar char="•"/>
+        <a:defRPr sz="2800" kern="1200">
+          <a:solidFill>
+            <a:schemeClr val="tx1"/>
+          </a:solidFill>
+          <a:latin typeface="+mn-lt"/>
+          <a:ea typeface="+mn-ea"/>
+          <a:cs typeface="+mn-cs"/>
+        </a:defRPr>
+      </a:lvl1pPr>
+      <a:lvl2pPr marL="685800" indent="-228600" algn="l" defTabSz="914400" rtl="0" eaLnBrk="1" latinLnBrk="0" hangingPunct="1">
+        <a:lnSpc>
+          <a:spcPct val="90000"/>
+        </a:lnSpc>
+        <a:spcBef>
+          <a:spcPts val="500"/>
+        </a:spcBef>
+        <a:buFont typeface="Arial" panose="020B0604020202020204" pitchFamily="34" charset="0"/>
+        <a:buChar char="•"/>
+        <a:defRPr sz="2400" kern="1200">
+          <a:solidFill>
+            <a:schemeClr val="tx1"/>
+          </a:solidFill>
+          <a:latin typeface="+mn-lt"/>
+          <a:ea typeface="+mn-ea"/>
+          <a:cs typeface="+mn-cs"/>
+        </a:defRPr>
+      </a:lvl2pPr>
+      <a:lvl3pPr marL="1143000" indent="-228600" algn="l" defTabSz="914400" rtl="0" eaLnBrk="1" latinLnBrk="0" hangingPunct="1">
+        <a:lnSpc>
+          <a:spcPct val="90000"/>
+        </a:lnSpc>
+        <a:spcBef>
+          <a:spcPts val="500"/>
+        </a:spcBef>
+        <a:buFont typeface="Arial" panose="020B0604020202020204" pitchFamily="34" charset="0"/>
+        <a:buChar char="•"/>
+        <a:defRPr sz="2000" kern="1200">
+          <a:solidFill>
+            <a:schemeClr val="tx1"/>
+          </a:solidFill>
+          <a:latin typeface="+mn-lt"/>
+          <a:ea typeface="+mn-ea"/>
+          <a:cs typeface="+mn-cs"/>
+        </a:defRPr>
+      </a:lvl3pPr>
+      <a:lvl4pPr marL="1600200" indent="-228600" algn="l" defTabSz="914400" rtl="0" eaLnBrk="1" latinLnBrk="0" hangingPunct="1">
+        <a:lnSpc>
+          <a:spcPct val="90000"/>
+        </a:lnSpc>
+        <a:spcBef>
+          <a:spcPts val="500"/>
+        </a:spcBef>
+        <a:buFont typeface="Arial" panose="020B0604020202020204" pitchFamily="34" charset="0"/>
+        <a:buChar char="•"/>
+        <a:defRPr sz="1800" kern="1200">
+          <a:solidFill>
+            <a:schemeClr val="tx1"/>
+          </a:solidFill>
+          <a:latin typeface="+mn-lt"/>
+          <a:ea typeface="+mn-ea"/>
+          <a:cs typeface="+mn-cs"/>
+        </a:defRPr>
+      </a:lvl4pPr>
+      <a:lvl5pPr marL="2057400" indent="-228600" algn="l" defTabSz="914400" rtl="0" eaLnBrk="1" latinLnBrk="0" hangingPunct="1">
+        <a:lnSpc>
+          <a:spcPct val="90000"/>
+        </a:lnSpc>
+        <a:spcBef>
+          <a:spcPts val="500"/>
+        </a:spcBef>
+        <a:buFont typeface="Arial" panose="020B0604020202020204" pitchFamily="34" charset="0"/>
+        <a:buChar char="•"/>
+        <a:defRPr sz="1800" kern="1200">
+          <a:solidFill>
+            <a:schemeClr val="tx1"/>
+          </a:solidFill>
+          <a:latin typeface="+mn-lt"/>
+          <a:ea typeface="+mn-ea"/>
+          <a:cs typeface="+mn-cs"/>
+        </a:defRPr>
+      </a:lvl5pPr>
+      <a:lvl6pPr marL="2514600" indent="-228600" algn="l" defTabSz="914400" rtl="0" eaLnBrk="1" latinLnBrk="0" hangingPunct="1">
+        <a:lnSpc>
+          <a:spcPct val="90000"/>
+        </a:lnSpc>
+        <a:spcBef>
+          <a:spcPts val="500"/>
+        </a:spcBef>
+        <a:buFont typeface="Arial" panose="020B0604020202020204" pitchFamily="34" charset="0"/>
+        <a:buChar char="•"/>
+        <a:defRPr sz="1800" kern="1200">
+          <a:solidFill>
+            <a:schemeClr val="tx1"/>
+          </a:solidFill>
+          <a:latin typeface="+mn-lt"/>
+          <a:ea typeface="+mn-ea"/>
+          <a:cs typeface="+mn-cs"/>
+        </a:defRPr>
+      </a:lvl6pPr>
+      <a:lvl7pPr marL="2971800" indent="-228600" algn="l" defTabSz="914400" rtl="0" eaLnBrk="1" latinLnBrk="0" hangingPunct="1">
+        <a:lnSpc>
+          <a:spcPct val="90000"/>
+        </a:lnSpc>
+        <a:spcBef>
+          <a:spcPts val="500"/>
+        </a:spcBef>
+        <a:buFont typeface="Arial" panose="020B0604020202020204" pitchFamily="34" charset="0"/>
+        <a:buChar char="•"/>
+        <a:defRPr sz="1800" kern="1200">
+          <a:solidFill>
+            <a:schemeClr val="tx1"/>
+          </a:solidFill>
+          <a:latin typeface="+mn-lt"/>
+          <a:ea typeface="+mn-ea"/>
+          <a:cs typeface="+mn-cs"/>
+        </a:defRPr>
+      </a:lvl7pPr>
+      <a:lvl8pPr marL="3429000" indent="-228600" algn="l" defTabSz="914400" rtl="0" eaLnBrk="1" latinLnBrk="0" hangingPunct="1">
+        <a:lnSpc>
+          <a:spcPct val="90000"/>
+        </a:lnSpc>
+        <a:spcBef>
+          <a:spcPts val="500"/>
+        </a:spcBef>
+        <a:buFont typeface="Arial" panose="020B0604020202020204" pitchFamily="34" charset="0"/>
+        <a:buChar char="•"/>
+        <a:defRPr sz="1800" kern="1200">
+          <a:solidFill>
+            <a:schemeClr val="tx1"/>
+          </a:solidFill>
+          <a:latin typeface="+mn-lt"/>
+          <a:ea typeface="+mn-ea"/>
+          <a:cs typeface="+mn-cs"/>
+        </a:defRPr>
+      </a:lvl8pPr>
+      <a:lvl9pPr marL="3886200" indent="-228600" algn="l" defTabSz="914400" rtl="0" eaLnBrk="1" latinLnBrk="0" hangingPunct="1">
+        <a:lnSpc>
+          <a:spcPct val="90000"/>
+        </a:lnSpc>
+        <a:spcBef>
+          <a:spcPts val="500"/>
+        </a:spcBef>
+        <a:buFont typeface="Arial" panose="020B0604020202020204" pitchFamily="34" charset="0"/>
+        <a:buChar char="•"/>
+        <a:defRPr sz="1800" kern="1200">
+          <a:solidFill>
+            <a:schemeClr val="tx1"/>
+          </a:solidFill>
+          <a:latin typeface="+mn-lt"/>
+          <a:ea typeface="+mn-ea"/>
+          <a:cs typeface="+mn-cs"/>
+        </a:defRPr>
+      </a:lvl9pPr>
+    </p:bodyStyle>
+    <p:otherStyle>
+      <a:defPPr>
+        <a:defRPr lang="es-ES"/>
+      </a:defPPr>
+      <a:lvl1pPr marL="0" algn="l" defTabSz="914400" rtl="0" eaLnBrk="1" latinLnBrk="0" hangingPunct="1">
+        <a:defRPr sz="1800" kern="1200">
+          <a:solidFill>
+            <a:schemeClr val="tx1"/>
+          </a:solidFill>
+          <a:latin typeface="+mn-lt"/>
+          <a:ea typeface="+mn-ea"/>
+          <a:cs typeface="+mn-cs"/>
+        </a:defRPr>
+      </a:lvl1pPr>
+      <a:lvl2pPr marL="457200" algn="l" defTabSz="914400" rtl="0" eaLnBrk="1" latinLnBrk="0" hangingPunct="1">
+        <a:defRPr sz="1800" kern="1200">
+          <a:solidFill>
+            <a:schemeClr val="tx1"/>
+          </a:solidFill>
+          <a:latin typeface="+mn-lt"/>
+          <a:ea typeface="+mn-ea"/>
+          <a:cs typeface="+mn-cs"/>
+        </a:defRPr>
+      </a:lvl2pPr>
+      <a:lvl3pPr marL="914400" algn="l" defTabSz="914400" rtl="0" eaLnBrk="1" latinLnBrk="0" hangingPunct="1">
+        <a:defRPr sz="1800" kern="1200">
+          <a:solidFill>
+            <a:schemeClr val="tx1"/>
+          </a:solidFill>
+          <a:latin typeface="+mn-lt"/>
+          <a:ea typeface="+mn-ea"/>
+          <a:cs typeface="+mn-cs"/>
+        </a:defRPr>
+      </a:lvl3pPr>
+      <a:lvl4pPr marL="1371600" algn="l" defTabSz="914400" rtl="0" eaLnBrk="1" latinLnBrk="0" hangingPunct="1">
+        <a:defRPr sz="1800" kern="1200">
+          <a:solidFill>
+            <a:schemeClr val="tx1"/>
+          </a:solidFill>
+          <a:latin typeface="+mn-lt"/>
+          <a:ea typeface="+mn-ea"/>
+          <a:cs typeface="+mn-cs"/>
+        </a:defRPr>
+      </a:lvl4pPr>
+      <a:lvl5pPr marL="1828800" algn="l" defTabSz="914400" rtl="0" eaLnBrk="1" latinLnBrk="0" hangingPunct="1">
+        <a:defRPr sz="1800" kern="1200">
+          <a:solidFill>
+            <a:schemeClr val="tx1"/>
+          </a:solidFill>
+          <a:latin typeface="+mn-lt"/>
+          <a:ea typeface="+mn-ea"/>
+          <a:cs typeface="+mn-cs"/>
+        </a:defRPr>
+      </a:lvl5pPr>
+      <a:lvl6pPr marL="2286000" algn="l" defTabSz="914400" rtl="0" eaLnBrk="1" latinLnBrk="0" hangingPunct="1">
+        <a:defRPr sz="1800" kern="1200">
+          <a:solidFill>
+            <a:schemeClr val="tx1"/>
+          </a:solidFill>
+          <a:latin typeface="+mn-lt"/>
+          <a:ea typeface="+mn-ea"/>
+          <a:cs typeface="+mn-cs"/>
+        </a:defRPr>
+      </a:lvl6pPr>
+      <a:lvl7pPr marL="2743200" algn="l" defTabSz="914400" rtl="0" eaLnBrk="1" latinLnBrk="0" hangingPunct="1">
+        <a:defRPr sz="1800" kern="1200">
+          <a:solidFill>
+            <a:schemeClr val="tx1"/>
+          </a:solidFill>
+          <a:latin typeface="+mn-lt"/>
+          <a:ea typeface="+mn-ea"/>
+          <a:cs typeface="+mn-cs"/>
+        </a:defRPr>
+      </a:lvl7pPr>
+      <a:lvl8pPr marL="3200400" algn="l" defTabSz="914400" rtl="0" eaLnBrk="1" latinLnBrk="0" hangingPunct="1">
+        <a:defRPr sz="1800" kern="1200">
+          <a:solidFill>
+            <a:schemeClr val="tx1"/>
+          </a:solidFill>
+          <a:latin typeface="+mn-lt"/>
+          <a:ea typeface="+mn-ea"/>
+          <a:cs typeface="+mn-cs"/>
+        </a:defRPr>
+      </a:lvl8pPr>
+      <a:lvl9pPr marL="3657600" algn="l" defTabSz="914400" rtl="0" eaLnBrk="1" latinLnBrk="0" hangingPunct="1">
+        <a:defRPr sz="1800" kern="1200">
+          <a:solidFill>
+            <a:schemeClr val="tx1"/>
+          </a:solidFill>
+          <a:latin typeface="+mn-lt"/>
+          <a:ea typeface="+mn-ea"/>
+          <a:cs typeface="+mn-cs"/>
+        </a:defRPr>
+      </a:lvl9pPr>
+    </p:otherStyle>
+  </p:txStyles>
 </p:sldMaster>
 </file>
 
 <file path=ppt/slides/slide1.xml><?xml version="1.0" encoding="utf-8"?>
-<p:sld xmlns:a="http://schemas.openxmlformats.org/drawingml/2006/main" xmlns:p="http://schemas.openxmlformats.org/presentationml/2006/main" xmlns:r="http://schemas.openxmlformats.org/officeDocument/2006/relationships" xmlns:p14="http://schemas.microsoft.com/office/powerpoint/2010/main" xmlns:p15="http://schemas.microsoft.com/office/powerpoint/2012/main" xmlns:mc="http://schemas.openxmlformats.org/markup-compatibility/2006">
+<p:sld xmlns:a="http://schemas.openxmlformats.org/drawingml/2006/main" xmlns:r="http://schemas.openxmlformats.org/officeDocument/2006/relationships" xmlns:p="http://schemas.openxmlformats.org/presentationml/2006/main">
   <p:cSld>
     <p:bg>
       <p:bgPr>
         <a:gradFill rotWithShape="0">
           <a:gsLst>
             <a:gs pos="0">
-              <a:srgbClr val="ffffff"/>
+              <a:srgbClr val="FFFFFF"/>
             </a:gs>
             <a:gs pos="100000">
-              <a:srgbClr val="59c2e3">
+              <a:srgbClr val="59C2E3">
                 <a:alpha val="25098"/>
               </a:srgbClr>
             </a:gs>
           </a:gsLst>
           <a:lin ang="2700000"/>
         </a:gradFill>
+        <a:effectLst/>
       </p:bgPr>
     </p:bg>
     <p:spTree>
@@ -1858,9 +2734,10 @@
             <a:fontRef idx="minor"/>
           </p:style>
           <p:txBody>
-            <a:bodyPr lIns="90000" rIns="90000" tIns="360000" bIns="45000">
+            <a:bodyPr lIns="90000" tIns="360000" rIns="90000" bIns="45000">
               <a:noAutofit/>
             </a:bodyPr>
+            <a:lstStyle/>
             <a:p>
               <a:pPr algn="just">
                 <a:lnSpc>
@@ -1868,7 +2745,7 @@
                 </a:lnSpc>
               </a:pPr>
               <a:r>
-                <a:rPr b="0" i="1" lang="es-ES_tradnl" sz="1800" spc="-1" strike="noStrike">
+                <a:rPr lang="es-ES_tradnl" sz="1800" b="0" i="1" strike="noStrike" spc="-1">
                   <a:solidFill>
                     <a:srgbClr val="000000"/>
                   </a:solidFill>
@@ -1877,7 +2754,7 @@
                 </a:rPr>
                 <a:t>La obesidad, o acumulación excesiva de grasa corporal, causa graves problemas de salud y enfermedades crónicas. Como caso de estudio, se han estudiado las variantes genéticas en diferentes miembros de la familia Simpson para establecer la posible relación de esta patología con alteraciones a nivel genético.</a:t>
               </a:r>
-              <a:endParaRPr b="0" lang="es-ES" sz="1800" spc="-1" strike="noStrike">
+              <a:endParaRPr lang="es-ES" sz="1800" b="0" strike="noStrike" spc="-1">
                 <a:latin typeface="Arial"/>
               </a:endParaRPr>
             </a:p>
@@ -1902,10 +2779,10 @@
             <a:gradFill rotWithShape="0">
               <a:gsLst>
                 <a:gs pos="0">
-                  <a:srgbClr val="59c2e3"/>
+                  <a:srgbClr val="59C2E3"/>
                 </a:gs>
                 <a:gs pos="100000">
-                  <a:srgbClr val="4196c9"/>
+                  <a:srgbClr val="4196C9"/>
                 </a:gs>
               </a:gsLst>
               <a:lin ang="2700000"/>
@@ -1927,9 +2804,10 @@
             <a:fontRef idx="minor"/>
           </p:style>
           <p:txBody>
-            <a:bodyPr lIns="90000" rIns="90000" tIns="45000" bIns="45000" anchor="ctr">
+            <a:bodyPr lIns="90000" tIns="45000" rIns="90000" bIns="45000" anchor="ctr">
               <a:noAutofit/>
             </a:bodyPr>
+            <a:lstStyle/>
             <a:p>
               <a:pPr algn="ctr">
                 <a:lnSpc>
@@ -1937,16 +2815,16 @@
                 </a:lnSpc>
               </a:pPr>
               <a:r>
-                <a:rPr b="1" lang="es-ES_tradnl" sz="2800" spc="-1" strike="noStrike">
+                <a:rPr lang="es-ES_tradnl" sz="2800" b="1" strike="noStrike" spc="-1">
                   <a:solidFill>
-                    <a:srgbClr val="ffffff"/>
+                    <a:srgbClr val="FFFFFF"/>
                   </a:solidFill>
                   <a:latin typeface="Aptos"/>
                   <a:ea typeface="DejaVu Sans"/>
                 </a:rPr>
                 <a:t>INTRODUCCIÓN</a:t>
               </a:r>
-              <a:endParaRPr b="0" lang="es-ES" sz="2800" spc="-1" strike="noStrike">
+              <a:endParaRPr lang="es-ES" sz="2800" b="0" strike="noStrike" spc="-1">
                 <a:latin typeface="Arial"/>
               </a:endParaRPr>
             </a:p>
@@ -2009,9 +2887,10 @@
             <a:fontRef idx="minor"/>
           </p:style>
           <p:txBody>
-            <a:bodyPr lIns="90000" rIns="90000" tIns="360000" bIns="45000">
+            <a:bodyPr lIns="90000" tIns="360000" rIns="90000" bIns="45000">
               <a:noAutofit/>
             </a:bodyPr>
+            <a:lstStyle/>
             <a:p>
               <a:pPr algn="just">
                 <a:lnSpc>
@@ -2019,7 +2898,7 @@
                 </a:lnSpc>
               </a:pPr>
               <a:r>
-                <a:rPr b="0" i="1" lang="es-ES_tradnl" sz="1700" spc="-1" strike="noStrike">
+                <a:rPr lang="es-ES_tradnl" sz="1700" b="0" i="1" strike="noStrike" spc="-1">
                   <a:solidFill>
                     <a:srgbClr val="000000"/>
                   </a:solidFill>
@@ -2029,19 +2908,19 @@
                 <a:t>Se analizaron tres variantes de Abraham y Maggie Simpson con </a:t>
               </a:r>
               <a:r>
-                <a:rPr b="0" i="1" lang="es-ES_tradnl" sz="1700" spc="-1" strike="noStrike" u="sng">
+                <a:rPr lang="es-ES_tradnl" sz="1700" b="0" i="1" u="sng" strike="noStrike" spc="-1">
                   <a:solidFill>
                     <a:srgbClr val="467886"/>
                   </a:solidFill>
                   <a:uFillTx/>
                   <a:latin typeface="Aptos"/>
                   <a:ea typeface="DejaVu Sans"/>
-                  <a:hlinkClick r:id="rId1"/>
+                  <a:hlinkClick r:id="rId3"/>
                 </a:rPr>
                 <a:t>VEP</a:t>
               </a:r>
               <a:r>
-                <a:rPr b="0" i="1" lang="es-ES_tradnl" sz="1700" spc="-1" strike="noStrike">
+                <a:rPr lang="es-ES_tradnl" sz="1700" b="0" i="1" strike="noStrike" spc="-1">
                   <a:solidFill>
                     <a:srgbClr val="000000"/>
                   </a:solidFill>
@@ -2051,19 +2930,19 @@
                 <a:t>. Se exploraron la prevalencia en la población con </a:t>
               </a:r>
               <a:r>
-                <a:rPr b="0" i="1" lang="es-ES_tradnl" sz="1700" spc="-1" strike="noStrike" u="sng">
+                <a:rPr lang="es-ES_tradnl" sz="1700" b="0" i="1" u="sng" strike="noStrike" spc="-1">
                   <a:solidFill>
                     <a:srgbClr val="467886"/>
                   </a:solidFill>
                   <a:uFillTx/>
                   <a:latin typeface="Aptos"/>
                   <a:ea typeface="DejaVu Sans"/>
-                  <a:hlinkClick r:id="rId2"/>
+                  <a:hlinkClick r:id="rId4"/>
                 </a:rPr>
                 <a:t>gnomAD</a:t>
               </a:r>
               <a:r>
-                <a:rPr b="0" i="1" lang="es-ES_tradnl" sz="1700" spc="-1" strike="noStrike">
+                <a:rPr lang="es-ES_tradnl" sz="1700" b="0" i="1" strike="noStrike" spc="-1">
                   <a:solidFill>
                     <a:srgbClr val="000000"/>
                   </a:solidFill>
@@ -2073,19 +2952,19 @@
                 <a:t>; y su patogenicidad con </a:t>
               </a:r>
               <a:r>
-                <a:rPr b="0" i="1" lang="es-ES_tradnl" sz="1700" spc="-1" strike="noStrike" u="sng">
+                <a:rPr lang="es-ES_tradnl" sz="1700" b="0" i="1" u="sng" strike="noStrike" spc="-1">
                   <a:solidFill>
                     <a:srgbClr val="467886"/>
                   </a:solidFill>
                   <a:uFillTx/>
                   <a:latin typeface="Aptos"/>
                   <a:ea typeface="DejaVu Sans"/>
-                  <a:hlinkClick r:id="rId3"/>
+                  <a:hlinkClick r:id="rId5"/>
                 </a:rPr>
                 <a:t>SIFT</a:t>
               </a:r>
               <a:r>
-                <a:rPr b="0" i="1" lang="es-ES_tradnl" sz="1700" spc="-1" strike="noStrike">
+                <a:rPr lang="es-ES_tradnl" sz="1700" b="0" i="1" strike="noStrike" spc="-1">
                   <a:solidFill>
                     <a:srgbClr val="000000"/>
                   </a:solidFill>
@@ -2095,19 +2974,19 @@
                 <a:t>, </a:t>
               </a:r>
               <a:r>
-                <a:rPr b="0" i="1" lang="es-ES_tradnl" sz="1700" spc="-1" strike="noStrike" u="sng">
+                <a:rPr lang="es-ES_tradnl" sz="1700" b="0" i="1" u="sng" strike="noStrike" spc="-1">
                   <a:solidFill>
                     <a:srgbClr val="467886"/>
                   </a:solidFill>
                   <a:uFillTx/>
                   <a:latin typeface="Aptos"/>
                   <a:ea typeface="DejaVu Sans"/>
-                  <a:hlinkClick r:id="rId4"/>
+                  <a:hlinkClick r:id="rId6"/>
                 </a:rPr>
                 <a:t>PolyPhen</a:t>
               </a:r>
               <a:r>
-                <a:rPr b="0" i="1" lang="es-ES_tradnl" sz="1700" spc="-1" strike="noStrike">
+                <a:rPr lang="es-ES_tradnl" sz="1700" b="0" i="1" strike="noStrike" spc="-1">
                   <a:solidFill>
                     <a:srgbClr val="000000"/>
                   </a:solidFill>
@@ -2117,19 +2996,19 @@
                 <a:t>, y </a:t>
               </a:r>
               <a:r>
-                <a:rPr b="0" i="1" lang="es-ES_tradnl" sz="1700" spc="-1" strike="noStrike" u="sng">
+                <a:rPr lang="es-ES_tradnl" sz="1700" b="0" i="1" u="sng" strike="noStrike" spc="-1">
                   <a:solidFill>
                     <a:srgbClr val="467886"/>
                   </a:solidFill>
                   <a:uFillTx/>
                   <a:latin typeface="Aptos"/>
                   <a:ea typeface="DejaVu Sans"/>
-                  <a:hlinkClick r:id="rId5"/>
+                  <a:hlinkClick r:id="rId7"/>
                 </a:rPr>
                 <a:t>OMIM</a:t>
               </a:r>
               <a:r>
-                <a:rPr b="0" i="1" lang="es-ES_tradnl" sz="1700" spc="-1" strike="noStrike">
+                <a:rPr lang="es-ES_tradnl" sz="1700" b="0" i="1" strike="noStrike" spc="-1">
                   <a:solidFill>
                     <a:srgbClr val="000000"/>
                   </a:solidFill>
@@ -2139,19 +3018,19 @@
                 <a:t>. Las variantes “missense” se analizaron con </a:t>
               </a:r>
               <a:r>
-                <a:rPr b="0" i="1" lang="es-ES_tradnl" sz="1700" spc="-1" strike="noStrike" u="sng">
+                <a:rPr lang="es-ES_tradnl" sz="1700" b="0" i="1" u="sng" strike="noStrike" spc="-1">
                   <a:solidFill>
                     <a:srgbClr val="467886"/>
                   </a:solidFill>
                   <a:uFillTx/>
                   <a:latin typeface="Aptos"/>
                   <a:ea typeface="DejaVu Sans"/>
-                  <a:hlinkClick r:id="rId6"/>
+                  <a:hlinkClick r:id="rId8"/>
                 </a:rPr>
                 <a:t>CLUSTAL omega</a:t>
               </a:r>
               <a:r>
-                <a:rPr b="0" i="1" lang="es-ES_tradnl" sz="1700" spc="-1" strike="noStrike">
+                <a:rPr lang="es-ES_tradnl" sz="1700" b="0" i="1" strike="noStrike" spc="-1">
                   <a:solidFill>
                     <a:srgbClr val="000000"/>
                   </a:solidFill>
@@ -2161,19 +3040,19 @@
                 <a:t> para detectar si la región afectada estaba conservada. Las variantes “frameshift” se analizaron con </a:t>
               </a:r>
               <a:r>
-                <a:rPr b="0" i="1" lang="es-ES_tradnl" sz="1700" spc="-1" strike="noStrike" u="sng">
+                <a:rPr lang="es-ES_tradnl" sz="1700" b="0" i="1" u="sng" strike="noStrike" spc="-1">
                   <a:solidFill>
                     <a:srgbClr val="467886"/>
                   </a:solidFill>
                   <a:uFillTx/>
                   <a:latin typeface="Aptos"/>
                   <a:ea typeface="DejaVu Sans"/>
-                  <a:hlinkClick r:id="rId7"/>
+                  <a:hlinkClick r:id="rId9"/>
                 </a:rPr>
                 <a:t>Mutalyzer</a:t>
               </a:r>
               <a:r>
-                <a:rPr b="0" i="1" lang="es-ES_tradnl" sz="1700" spc="-1" strike="noStrike">
+                <a:rPr lang="es-ES_tradnl" sz="1700" b="0" i="1" strike="noStrike" spc="-1">
                   <a:solidFill>
                     <a:srgbClr val="000000"/>
                   </a:solidFill>
@@ -2183,19 +3062,19 @@
                 <a:t> para comprobar la estructura del la proteína mutada. Consultamos </a:t>
               </a:r>
               <a:r>
-                <a:rPr b="0" i="1" lang="es-ES_tradnl" sz="1700" spc="-1" strike="noStrike" u="sng">
+                <a:rPr lang="es-ES_tradnl" sz="1700" b="0" i="1" u="sng" strike="noStrike" spc="-1">
                   <a:solidFill>
                     <a:srgbClr val="467886"/>
                   </a:solidFill>
                   <a:uFillTx/>
                   <a:latin typeface="Aptos"/>
                   <a:ea typeface="DejaVu Sans"/>
-                  <a:hlinkClick r:id="rId8"/>
+                  <a:hlinkClick r:id="rId10"/>
                 </a:rPr>
                 <a:t>UniProt</a:t>
               </a:r>
               <a:r>
-                <a:rPr b="0" i="1" lang="es-ES_tradnl" sz="1700" spc="-1" strike="noStrike">
+                <a:rPr lang="es-ES_tradnl" sz="1700" b="0" i="1" strike="noStrike" spc="-1">
                   <a:solidFill>
                     <a:srgbClr val="000000"/>
                   </a:solidFill>
@@ -2205,19 +3084,19 @@
                 <a:t> e </a:t>
               </a:r>
               <a:r>
-                <a:rPr b="0" i="1" lang="es-ES_tradnl" sz="1700" spc="-1" strike="noStrike" u="sng">
+                <a:rPr lang="es-ES_tradnl" sz="1700" b="0" i="1" u="sng" strike="noStrike" spc="-1">
                   <a:solidFill>
                     <a:srgbClr val="467886"/>
                   </a:solidFill>
                   <a:uFillTx/>
                   <a:latin typeface="Aptos"/>
                   <a:ea typeface="DejaVu Sans"/>
-                  <a:hlinkClick r:id="rId9"/>
+                  <a:hlinkClick r:id="rId11"/>
                 </a:rPr>
                 <a:t>InterPro</a:t>
               </a:r>
               <a:r>
-                <a:rPr b="0" i="1" lang="es-ES_tradnl" sz="1700" spc="-1" strike="noStrike">
+                <a:rPr lang="es-ES_tradnl" sz="1700" b="0" i="1" strike="noStrike" spc="-1">
                   <a:solidFill>
                     <a:srgbClr val="000000"/>
                   </a:solidFill>
@@ -2227,19 +3106,19 @@
                 <a:t> para comprobar los dominios proteicos afectados en las variantes, y las entradas en </a:t>
               </a:r>
               <a:r>
-                <a:rPr b="0" i="1" lang="es-ES_tradnl" sz="1700" spc="-1" strike="noStrike" u="sng">
+                <a:rPr lang="es-ES_tradnl" sz="1700" b="0" i="1" u="sng" strike="noStrike" spc="-1">
                   <a:solidFill>
                     <a:srgbClr val="467886"/>
                   </a:solidFill>
                   <a:uFillTx/>
                   <a:latin typeface="Aptos"/>
                   <a:ea typeface="DejaVu Sans"/>
-                  <a:hlinkClick r:id="rId10"/>
+                  <a:hlinkClick r:id="rId12"/>
                 </a:rPr>
                 <a:t>KEGG</a:t>
               </a:r>
               <a:r>
-                <a:rPr b="0" i="1" lang="es-ES_tradnl" sz="1700" spc="-1" strike="noStrike">
+                <a:rPr lang="es-ES_tradnl" sz="1700" b="0" i="1" strike="noStrike" spc="-1">
                   <a:solidFill>
                     <a:srgbClr val="000000"/>
                   </a:solidFill>
@@ -2248,7 +3127,7 @@
                 </a:rPr>
                 <a:t> de los genes afectados para comprobar en qué rutas metabólicas está implicados.</a:t>
               </a:r>
-              <a:endParaRPr b="0" lang="es-ES" sz="1700" spc="-1" strike="noStrike">
+              <a:endParaRPr lang="es-ES" sz="1700" b="0" strike="noStrike" spc="-1">
                 <a:latin typeface="Arial"/>
               </a:endParaRPr>
             </a:p>
@@ -2273,10 +3152,10 @@
             <a:gradFill rotWithShape="0">
               <a:gsLst>
                 <a:gs pos="0">
-                  <a:srgbClr val="59c2e3"/>
+                  <a:srgbClr val="59C2E3"/>
                 </a:gs>
                 <a:gs pos="100000">
-                  <a:srgbClr val="4196c9"/>
+                  <a:srgbClr val="4196C9"/>
                 </a:gs>
               </a:gsLst>
               <a:lin ang="2700000"/>
@@ -2298,9 +3177,10 @@
             <a:fontRef idx="minor"/>
           </p:style>
           <p:txBody>
-            <a:bodyPr lIns="90000" rIns="90000" tIns="45000" bIns="45000" anchor="ctr">
+            <a:bodyPr lIns="90000" tIns="45000" rIns="90000" bIns="45000" anchor="ctr">
               <a:noAutofit/>
             </a:bodyPr>
+            <a:lstStyle/>
             <a:p>
               <a:pPr algn="ctr">
                 <a:lnSpc>
@@ -2308,16 +3188,16 @@
                 </a:lnSpc>
               </a:pPr>
               <a:r>
-                <a:rPr b="1" lang="es-ES_tradnl" sz="2800" spc="-1" strike="noStrike">
+                <a:rPr lang="es-ES_tradnl" sz="2800" b="1" strike="noStrike" spc="-1">
                   <a:solidFill>
-                    <a:srgbClr val="ffffff"/>
+                    <a:srgbClr val="FFFFFF"/>
                   </a:solidFill>
                   <a:latin typeface="Aptos"/>
                   <a:ea typeface="DejaVu Sans"/>
                 </a:rPr>
                 <a:t>METODOLOGÍA</a:t>
               </a:r>
-              <a:endParaRPr b="0" lang="es-ES" sz="2800" spc="-1" strike="noStrike">
+              <a:endParaRPr lang="es-ES" sz="2800" b="0" strike="noStrike" spc="-1">
                 <a:latin typeface="Arial"/>
               </a:endParaRPr>
             </a:p>
@@ -2379,6 +3259,13 @@
             </a:effectRef>
             <a:fontRef idx="minor"/>
           </p:style>
+          <p:txBody>
+            <a:bodyPr/>
+            <a:lstStyle/>
+            <a:p>
+              <a:endParaRPr lang="es-ES"/>
+            </a:p>
+          </p:txBody>
         </p:sp>
         <p:sp>
           <p:nvSpPr>
@@ -2399,10 +3286,10 @@
             <a:gradFill rotWithShape="0">
               <a:gsLst>
                 <a:gs pos="0">
-                  <a:srgbClr val="59c2e3"/>
+                  <a:srgbClr val="59C2E3"/>
                 </a:gs>
                 <a:gs pos="100000">
-                  <a:srgbClr val="4196c9"/>
+                  <a:srgbClr val="4196C9"/>
                 </a:gs>
               </a:gsLst>
               <a:lin ang="2700000"/>
@@ -2424,9 +3311,10 @@
             <a:fontRef idx="minor"/>
           </p:style>
           <p:txBody>
-            <a:bodyPr lIns="90000" rIns="90000" tIns="45000" bIns="45000" anchor="ctr">
+            <a:bodyPr lIns="90000" tIns="45000" rIns="90000" bIns="45000" anchor="ctr">
               <a:noAutofit/>
             </a:bodyPr>
+            <a:lstStyle/>
             <a:p>
               <a:pPr algn="ctr">
                 <a:lnSpc>
@@ -2434,16 +3322,16 @@
                 </a:lnSpc>
               </a:pPr>
               <a:r>
-                <a:rPr b="1" lang="es-ES_tradnl" sz="2800" spc="-1" strike="noStrike">
+                <a:rPr lang="es-ES_tradnl" sz="2800" b="1" strike="noStrike" spc="-1">
                   <a:solidFill>
-                    <a:srgbClr val="ffffff"/>
+                    <a:srgbClr val="FFFFFF"/>
                   </a:solidFill>
                   <a:latin typeface="Aptos"/>
                   <a:ea typeface="DejaVu Sans"/>
                 </a:rPr>
                 <a:t>RESULTADOS</a:t>
               </a:r>
-              <a:endParaRPr b="0" lang="es-ES" sz="2800" spc="-1" strike="noStrike">
+              <a:endParaRPr lang="es-ES" sz="2800" b="0" strike="noStrike" spc="-1">
                 <a:latin typeface="Arial"/>
               </a:endParaRPr>
             </a:p>
@@ -2452,12 +3340,12 @@
       </p:grpSp>
       <p:pic>
         <p:nvPicPr>
-          <p:cNvPr id="47" name="Picture 4" descr=""/>
+          <p:cNvPr id="47" name="Picture 4"/>
           <p:cNvPicPr/>
           <p:nvPr/>
         </p:nvPicPr>
         <p:blipFill>
-          <a:blip r:embed="rId11"/>
+          <a:blip r:embed="rId13"/>
           <a:stretch/>
         </p:blipFill>
         <p:spPr>
@@ -2489,12 +3377,12 @@
         </p:grpSpPr>
         <p:pic>
           <p:nvPicPr>
-            <p:cNvPr id="49" name="Imagen 4" descr=""/>
+            <p:cNvPr id="49" name="Imagen 4"/>
             <p:cNvPicPr/>
             <p:nvPr/>
           </p:nvPicPr>
           <p:blipFill>
-            <a:blip r:embed="rId12"/>
+            <a:blip r:embed="rId14"/>
             <a:stretch/>
           </p:blipFill>
           <p:spPr>
@@ -2545,6 +3433,13 @@
             </a:effectRef>
             <a:fontRef idx="minor"/>
           </p:style>
+          <p:txBody>
+            <a:bodyPr/>
+            <a:lstStyle/>
+            <a:p>
+              <a:endParaRPr lang="es-ES"/>
+            </a:p>
+          </p:txBody>
         </p:sp>
       </p:grpSp>
       <p:sp>
@@ -2564,7 +3459,7 @@
             </a:avLst>
           </a:prstGeom>
           <a:solidFill>
-            <a:srgbClr val="4196c9"/>
+            <a:srgbClr val="4196C9"/>
           </a:solidFill>
           <a:ln>
             <a:noFill/>
@@ -2585,9 +3480,10 @@
           <a:fontRef idx="minor"/>
         </p:style>
         <p:txBody>
-          <a:bodyPr lIns="90000" rIns="90000" tIns="46800" bIns="45000" anchor="ctr">
+          <a:bodyPr lIns="90000" tIns="46800" rIns="90000" bIns="45000" anchor="ctr">
             <a:noAutofit/>
           </a:bodyPr>
+          <a:lstStyle/>
           <a:p>
             <a:pPr algn="ctr">
               <a:lnSpc>
@@ -2595,16 +3491,16 @@
               </a:lnSpc>
             </a:pPr>
             <a:r>
-              <a:rPr b="1" lang="es-ES_tradnl" sz="4000" spc="-1" strike="noStrike">
+              <a:rPr lang="es-ES_tradnl" sz="4000" b="1" strike="noStrike" spc="-1">
                 <a:solidFill>
-                  <a:srgbClr val="ffffff"/>
+                  <a:srgbClr val="FFFFFF"/>
                 </a:solidFill>
                 <a:latin typeface="Aptos"/>
                 <a:ea typeface="DejaVu Sans"/>
               </a:rPr>
               <a:t>Anotación e interpretación de variantes</a:t>
             </a:r>
-            <a:endParaRPr b="0" lang="es-ES" sz="4000" spc="-1" strike="noStrike">
+            <a:endParaRPr lang="es-ES" sz="4000" b="0" strike="noStrike" spc="-1">
               <a:latin typeface="Arial"/>
             </a:endParaRPr>
           </a:p>
@@ -2615,16 +3511,16 @@
               </a:lnSpc>
             </a:pPr>
             <a:r>
-              <a:rPr b="1" i="1" lang="es-ES_tradnl" sz="2800" spc="-1" strike="noStrike">
+              <a:rPr lang="es-ES_tradnl" sz="2800" b="1" i="1" strike="noStrike" spc="-1">
                 <a:solidFill>
-                  <a:srgbClr val="ffffff"/>
+                  <a:srgbClr val="FFFFFF"/>
                 </a:solidFill>
                 <a:latin typeface="Aptos"/>
                 <a:ea typeface="DejaVu Sans"/>
               </a:rPr>
               <a:t>Genética clínica y de poblaciones</a:t>
             </a:r>
-            <a:endParaRPr b="0" lang="es-ES" sz="2800" spc="-1" strike="noStrike">
+            <a:endParaRPr lang="es-ES" sz="2800" b="0" strike="noStrike" spc="-1">
               <a:latin typeface="Arial"/>
             </a:endParaRPr>
           </a:p>
@@ -2635,16 +3531,16 @@
               </a:lnSpc>
             </a:pPr>
             <a:r>
-              <a:rPr b="1" i="1" lang="es-ES_tradnl" sz="2000" spc="-1" strike="noStrike">
+              <a:rPr lang="es-ES_tradnl" sz="2000" b="1" i="1" strike="noStrike" spc="-1">
                 <a:solidFill>
-                  <a:srgbClr val="ffffff"/>
+                  <a:srgbClr val="FFFFFF"/>
                 </a:solidFill>
                 <a:latin typeface="Aptos"/>
                 <a:ea typeface="DejaVu Sans"/>
               </a:rPr>
               <a:t>Paula Damián Moral - Paula Sofía Norniella Jamart - Pedro García Sáez - Pedro Manuel Rodríguez Santos - Pilar Navarro Sánchez - Rubén Martín Blázquez </a:t>
             </a:r>
-            <a:endParaRPr b="0" lang="es-ES" sz="2000" spc="-1" strike="noStrike">
+            <a:endParaRPr lang="es-ES" sz="2000" b="0" strike="noStrike" spc="-1">
               <a:latin typeface="Arial"/>
             </a:endParaRPr>
           </a:p>
@@ -2706,9 +3602,10 @@
             <a:fontRef idx="minor"/>
           </p:style>
           <p:txBody>
-            <a:bodyPr lIns="90000" rIns="90000" tIns="360000" bIns="45000">
+            <a:bodyPr lIns="90000" tIns="360000" rIns="90000" bIns="45000">
               <a:noAutofit/>
             </a:bodyPr>
+            <a:lstStyle/>
             <a:p>
               <a:pPr algn="just">
                 <a:lnSpc>
@@ -2716,7 +3613,7 @@
                 </a:lnSpc>
               </a:pPr>
               <a:r>
-                <a:rPr b="0" i="1" lang="es-ES_tradnl" sz="1800" spc="-1" strike="noStrike">
+                <a:rPr lang="es-ES_tradnl" sz="1800" b="0" i="1" strike="noStrike" spc="-1">
                   <a:solidFill>
                     <a:srgbClr val="000000"/>
                   </a:solidFill>
@@ -2725,7 +3622,7 @@
                 </a:rPr>
                 <a:t>Maggie: presenta una deleción en el gen receptor de leptina (LEPR), produciendo una mutación “frameshift”. Esta deleción provoca la pérdida de dominios necesarios para activar vías de señalización de la hormona leptina (encargada de disminuir la ingesta y aumentar el consumo de energía).</a:t>
               </a:r>
-              <a:endParaRPr b="0" lang="es-ES" sz="1800" spc="-1" strike="noStrike">
+              <a:endParaRPr lang="es-ES" sz="1800" b="0" strike="noStrike" spc="-1">
                 <a:latin typeface="Arial"/>
               </a:endParaRPr>
             </a:p>
@@ -2736,7 +3633,7 @@
                 </a:lnSpc>
               </a:pPr>
               <a:r>
-                <a:rPr b="0" i="1" lang="es-ES_tradnl" sz="1800" spc="-1" strike="noStrike">
+                <a:rPr lang="es-ES_tradnl" sz="1800" b="0" i="1" strike="noStrike" spc="-1">
                   <a:solidFill>
                     <a:srgbClr val="000000"/>
                   </a:solidFill>
@@ -2745,7 +3642,7 @@
                 </a:rPr>
                 <a:t>Abraham y Maggie: presentan una sustitución en el gen receptor de la melanocortin 4 (MC4R) que provoca una mutación “missense” que altera un dominio extracelular y crucial para la señalizacon. Esta alteración es altamente patogénica, afectando a una región altamente conservada evolutivamente. Se ve alterada la ruta de señalizacion hormonal del cAMP implicado en el control de la saciedad. Como consecuencia, se altera el control del apetito a nivel hipotalámico, derivando en la característica hiperfagia típica de pacientes con obesidad monogénica.</a:t>
               </a:r>
-              <a:endParaRPr b="0" lang="es-ES" sz="1800" spc="-1" strike="noStrike">
+              <a:endParaRPr lang="es-ES" sz="1800" b="0" strike="noStrike" spc="-1">
                 <a:latin typeface="Arial"/>
               </a:endParaRPr>
             </a:p>
@@ -2756,7 +3653,7 @@
                 </a:lnSpc>
               </a:pPr>
               <a:r>
-                <a:rPr b="0" i="1" lang="es-ES_tradnl" sz="1800" spc="-1" strike="noStrike">
+                <a:rPr lang="es-ES_tradnl" sz="1800" b="0" i="1" strike="noStrike" spc="-1">
                   <a:solidFill>
                     <a:srgbClr val="000000"/>
                   </a:solidFill>
@@ -2765,7 +3662,7 @@
                 </a:rPr>
                 <a:t>Ambos presentan mutaciones en TP53, y Abraham es hemicigoto para la variante detectada en MED12, pero ambas tienen un nivel de patogenicidad bajo o ambiguo.</a:t>
               </a:r>
-              <a:endParaRPr b="0" lang="es-ES" sz="1800" spc="-1" strike="noStrike">
+              <a:endParaRPr lang="es-ES" sz="1800" b="0" strike="noStrike" spc="-1">
                 <a:latin typeface="Arial"/>
               </a:endParaRPr>
             </a:p>
@@ -2790,10 +3687,10 @@
             <a:gradFill rotWithShape="0">
               <a:gsLst>
                 <a:gs pos="0">
-                  <a:srgbClr val="59c2e3"/>
+                  <a:srgbClr val="59C2E3"/>
                 </a:gs>
                 <a:gs pos="100000">
-                  <a:srgbClr val="4196c9"/>
+                  <a:srgbClr val="4196C9"/>
                 </a:gs>
               </a:gsLst>
               <a:lin ang="2700000"/>
@@ -2815,9 +3712,10 @@
             <a:fontRef idx="minor"/>
           </p:style>
           <p:txBody>
-            <a:bodyPr lIns="90000" rIns="90000" tIns="45000" bIns="45000" anchor="ctr">
+            <a:bodyPr lIns="90000" tIns="45000" rIns="90000" bIns="45000" anchor="ctr">
               <a:noAutofit/>
             </a:bodyPr>
+            <a:lstStyle/>
             <a:p>
               <a:pPr algn="ctr">
                 <a:lnSpc>
@@ -2825,16 +3723,16 @@
                 </a:lnSpc>
               </a:pPr>
               <a:r>
-                <a:rPr b="1" lang="es-ES_tradnl" sz="2800" spc="-1" strike="noStrike">
+                <a:rPr lang="es-ES_tradnl" sz="2800" b="1" strike="noStrike" spc="-1">
                   <a:solidFill>
-                    <a:srgbClr val="ffffff"/>
+                    <a:srgbClr val="FFFFFF"/>
                   </a:solidFill>
                   <a:latin typeface="Aptos"/>
                   <a:ea typeface="DejaVu Sans"/>
                 </a:rPr>
                 <a:t>DISCUSIÓN</a:t>
               </a:r>
-              <a:endParaRPr b="0" lang="es-ES" sz="2800" spc="-1" strike="noStrike">
+              <a:endParaRPr lang="es-ES" sz="2800" b="0" strike="noStrike" spc="-1">
                 <a:latin typeface="Arial"/>
               </a:endParaRPr>
             </a:p>
@@ -2897,9 +3795,10 @@
             <a:fontRef idx="minor"/>
           </p:style>
           <p:txBody>
-            <a:bodyPr lIns="90000" rIns="90000" tIns="360000" bIns="45000">
+            <a:bodyPr lIns="90000" tIns="360000" rIns="90000" bIns="45000">
               <a:noAutofit/>
             </a:bodyPr>
+            <a:lstStyle/>
             <a:p>
               <a:pPr algn="just">
                 <a:lnSpc>
@@ -2907,7 +3806,7 @@
                 </a:lnSpc>
               </a:pPr>
               <a:r>
-                <a:rPr b="0" i="1" lang="es-ES_tradnl" sz="1800" spc="-1" strike="noStrike">
+                <a:rPr lang="es-ES_tradnl" sz="1800" b="0" i="1" strike="noStrike" spc="-1">
                   <a:solidFill>
                     <a:srgbClr val="000000"/>
                   </a:solidFill>
@@ -2916,7 +3815,7 @@
                 </a:rPr>
                 <a:t>Las variantes de los genes LEPR (portada por Maggie) y MC4R (portada por Abraham y Maggie) pueden indicar que los Simpson sean propensos a desarrollar obesidad. Por otro lado, mutaciones que comparten ambos en los genes MED12 y TP53, no se consideran patogénicas ni se observa relación con el fenotipo observado. Por lo tanto, la familia Simpson debe tener una dieta controlada y hábitos de vida saludable si no desean desarrollar obesidad.</a:t>
               </a:r>
-              <a:endParaRPr b="0" lang="es-ES" sz="1800" spc="-1" strike="noStrike">
+              <a:endParaRPr lang="es-ES" sz="1800" b="0" strike="noStrike" spc="-1">
                 <a:latin typeface="Arial"/>
               </a:endParaRPr>
             </a:p>
@@ -2941,10 +3840,10 @@
             <a:gradFill rotWithShape="0">
               <a:gsLst>
                 <a:gs pos="0">
-                  <a:srgbClr val="59c2e3"/>
+                  <a:srgbClr val="59C2E3"/>
                 </a:gs>
                 <a:gs pos="100000">
-                  <a:srgbClr val="4196c9"/>
+                  <a:srgbClr val="4196C9"/>
                 </a:gs>
               </a:gsLst>
               <a:lin ang="2700000"/>
@@ -2966,9 +3865,10 @@
             <a:fontRef idx="minor"/>
           </p:style>
           <p:txBody>
-            <a:bodyPr lIns="90000" rIns="90000" tIns="45000" bIns="45000" anchor="ctr">
+            <a:bodyPr lIns="90000" tIns="45000" rIns="90000" bIns="45000" anchor="ctr">
               <a:noAutofit/>
             </a:bodyPr>
+            <a:lstStyle/>
             <a:p>
               <a:pPr algn="ctr">
                 <a:lnSpc>
@@ -2976,16 +3876,16 @@
                 </a:lnSpc>
               </a:pPr>
               <a:r>
-                <a:rPr b="1" lang="es-ES_tradnl" sz="2800" spc="-1" strike="noStrike">
+                <a:rPr lang="es-ES_tradnl" sz="2800" b="1" strike="noStrike" spc="-1">
                   <a:solidFill>
-                    <a:srgbClr val="ffffff"/>
+                    <a:srgbClr val="FFFFFF"/>
                   </a:solidFill>
                   <a:latin typeface="Aptos"/>
                   <a:ea typeface="DejaVu Sans"/>
                 </a:rPr>
                 <a:t>CONCLUSIONES</a:t>
               </a:r>
-              <a:endParaRPr b="0" lang="es-ES" sz="2800" spc="-1" strike="noStrike">
+              <a:endParaRPr lang="es-ES" sz="2800" b="0" strike="noStrike" spc="-1">
                 <a:latin typeface="Arial"/>
               </a:endParaRPr>
             </a:p>
@@ -3030,22 +3930,23 @@
           <a:fontRef idx="minor"/>
         </p:style>
         <p:txBody>
-          <a:bodyPr lIns="90000" rIns="90000" tIns="45000" bIns="45000" anchor="ctr">
+          <a:bodyPr lIns="90000" tIns="45000" rIns="90000" bIns="45000" anchor="ctr">
             <a:noAutofit/>
           </a:bodyPr>
+          <a:lstStyle/>
           <a:p>
             <a:pPr>
               <a:lnSpc>
                 <a:spcPct val="80000"/>
               </a:lnSpc>
               <a:tabLst>
-                <a:tab algn="l" pos="0"/>
+                <a:tab pos="0" algn="l"/>
               </a:tabLst>
             </a:pPr>
             <a:r>
-              <a:rPr b="1" lang="es-ES_tradnl" sz="1800" spc="-1" strike="noStrike">
+              <a:rPr lang="es-ES_tradnl" sz="1800" b="1" strike="noStrike" spc="-1">
                 <a:solidFill>
-                  <a:srgbClr val="4196c9"/>
+                  <a:srgbClr val="4196C9"/>
                 </a:solidFill>
                 <a:latin typeface="Aptos"/>
                 <a:ea typeface="DejaVu Sans"/>
@@ -3053,7 +3954,7 @@
               <a:t>Tabla 1. </a:t>
             </a:r>
             <a:r>
-              <a:rPr b="0" lang="es-ES_tradnl" sz="1800" spc="-1" strike="noStrike">
+              <a:rPr lang="es-ES_tradnl" sz="1800" b="0" strike="noStrike" spc="-1">
                 <a:solidFill>
                   <a:srgbClr val="000000"/>
                 </a:solidFill>
@@ -3062,7 +3963,7 @@
               </a:rPr>
               <a:t>Información de las variantes analizadas con VEP.</a:t>
             </a:r>
-            <a:endParaRPr b="0" lang="es-ES" sz="1800" spc="-1" strike="noStrike">
+            <a:endParaRPr lang="es-ES" sz="1800" b="0" strike="noStrike" spc="-1">
               <a:latin typeface="Arial"/>
             </a:endParaRPr>
           </a:p>
@@ -3106,22 +4007,23 @@
           <a:fontRef idx="minor"/>
         </p:style>
         <p:txBody>
-          <a:bodyPr lIns="90000" rIns="90000" tIns="45000" bIns="45000" anchor="ctr">
+          <a:bodyPr lIns="90000" tIns="45000" rIns="90000" bIns="45000" anchor="ctr">
             <a:noAutofit/>
           </a:bodyPr>
+          <a:lstStyle/>
           <a:p>
             <a:pPr>
               <a:lnSpc>
                 <a:spcPct val="80000"/>
               </a:lnSpc>
               <a:tabLst>
-                <a:tab algn="l" pos="0"/>
+                <a:tab pos="0" algn="l"/>
               </a:tabLst>
             </a:pPr>
             <a:r>
-              <a:rPr b="1" lang="es-ES_tradnl" sz="1800" spc="-1" strike="noStrike">
+              <a:rPr lang="es-ES_tradnl" sz="1800" b="1" strike="noStrike" spc="-1">
                 <a:solidFill>
-                  <a:srgbClr val="4196c9"/>
+                  <a:srgbClr val="4196C9"/>
                 </a:solidFill>
                 <a:latin typeface="Aptos"/>
                 <a:ea typeface="DejaVu Sans"/>
@@ -3129,7 +4031,7 @@
               <a:t>Figura 1. </a:t>
             </a:r>
             <a:r>
-              <a:rPr b="0" lang="es-ES_tradnl" sz="1800" spc="-1" strike="noStrike">
+              <a:rPr lang="es-ES_tradnl" sz="1800" b="0" strike="noStrike" spc="-1">
                 <a:solidFill>
                   <a:srgbClr val="000000"/>
                 </a:solidFill>
@@ -3138,7 +4040,7 @@
               </a:rPr>
               <a:t>Estructura de LEPR wt y variante.</a:t>
             </a:r>
-            <a:endParaRPr b="0" lang="es-ES" sz="1800" spc="-1" strike="noStrike">
+            <a:endParaRPr lang="es-ES" sz="1800" b="0" strike="noStrike" spc="-1">
               <a:latin typeface="Arial"/>
             </a:endParaRPr>
           </a:p>
@@ -3182,22 +4084,23 @@
           <a:fontRef idx="minor"/>
         </p:style>
         <p:txBody>
-          <a:bodyPr lIns="90000" rIns="90000" tIns="45000" bIns="45000" anchor="ctr">
+          <a:bodyPr lIns="90000" tIns="45000" rIns="90000" bIns="45000" anchor="ctr">
             <a:noAutofit/>
           </a:bodyPr>
+          <a:lstStyle/>
           <a:p>
             <a:pPr>
               <a:lnSpc>
                 <a:spcPct val="80000"/>
               </a:lnSpc>
               <a:tabLst>
-                <a:tab algn="l" pos="0"/>
+                <a:tab pos="0" algn="l"/>
               </a:tabLst>
             </a:pPr>
             <a:r>
-              <a:rPr b="1" lang="es-ES_tradnl" sz="1800" spc="-1" strike="noStrike">
+              <a:rPr lang="es-ES_tradnl" sz="1800" b="1" strike="noStrike" spc="-1">
                 <a:solidFill>
-                  <a:srgbClr val="4196c9"/>
+                  <a:srgbClr val="4196C9"/>
                 </a:solidFill>
                 <a:latin typeface="Aptos"/>
                 <a:ea typeface="DejaVu Sans"/>
@@ -3205,7 +4108,7 @@
               <a:t>Figura 2. </a:t>
             </a:r>
             <a:r>
-              <a:rPr b="0" lang="es-ES_tradnl" sz="1800" spc="-1" strike="noStrike">
+              <a:rPr lang="es-ES_tradnl" sz="1800" b="0" strike="noStrike" spc="-1">
                 <a:solidFill>
                   <a:srgbClr val="000000"/>
                 </a:solidFill>
@@ -3214,7 +4117,7 @@
               </a:rPr>
               <a:t>Alineamiento múltiple de MCR4 por Custal Omega.</a:t>
             </a:r>
-            <a:endParaRPr b="0" lang="es-ES" sz="1800" spc="-1" strike="noStrike">
+            <a:endParaRPr lang="es-ES" sz="1800" b="0" strike="noStrike" spc="-1">
               <a:latin typeface="Arial"/>
             </a:endParaRPr>
           </a:p>
@@ -3228,34 +4131,117 @@
         </p:nvGraphicFramePr>
         <p:xfrm>
           <a:off x="207720" y="8313480"/>
-          <a:ext cx="14436720" cy="2681280"/>
+          <a:ext cx="14436720" cy="3216240"/>
         </p:xfrm>
         <a:graphic>
           <a:graphicData uri="http://schemas.openxmlformats.org/drawingml/2006/table">
             <a:tbl>
               <a:tblPr/>
               <a:tblGrid>
-                <a:gridCol w="528120"/>
-                <a:gridCol w="992160"/>
-                <a:gridCol w="1226520"/>
-                <a:gridCol w="434880"/>
-                <a:gridCol w="880920"/>
-                <a:gridCol w="1025640"/>
-                <a:gridCol w="1460520"/>
-                <a:gridCol w="1482840"/>
-                <a:gridCol w="958680"/>
-                <a:gridCol w="825120"/>
-                <a:gridCol w="947520"/>
-                <a:gridCol w="780480"/>
-                <a:gridCol w="955080"/>
-                <a:gridCol w="1938240"/>
+                <a:gridCol w="528120">
+                  <a:extLst>
+                    <a:ext uri="{9D8B030D-6E8A-4147-A177-3AD203B41FA5}">
+                      <a16:colId xmlns:a16="http://schemas.microsoft.com/office/drawing/2014/main" val="20000"/>
+                    </a:ext>
+                  </a:extLst>
+                </a:gridCol>
+                <a:gridCol w="992160">
+                  <a:extLst>
+                    <a:ext uri="{9D8B030D-6E8A-4147-A177-3AD203B41FA5}">
+                      <a16:colId xmlns:a16="http://schemas.microsoft.com/office/drawing/2014/main" val="20001"/>
+                    </a:ext>
+                  </a:extLst>
+                </a:gridCol>
+                <a:gridCol w="1226520">
+                  <a:extLst>
+                    <a:ext uri="{9D8B030D-6E8A-4147-A177-3AD203B41FA5}">
+                      <a16:colId xmlns:a16="http://schemas.microsoft.com/office/drawing/2014/main" val="20002"/>
+                    </a:ext>
+                  </a:extLst>
+                </a:gridCol>
+                <a:gridCol w="434880">
+                  <a:extLst>
+                    <a:ext uri="{9D8B030D-6E8A-4147-A177-3AD203B41FA5}">
+                      <a16:colId xmlns:a16="http://schemas.microsoft.com/office/drawing/2014/main" val="20003"/>
+                    </a:ext>
+                  </a:extLst>
+                </a:gridCol>
+                <a:gridCol w="880920">
+                  <a:extLst>
+                    <a:ext uri="{9D8B030D-6E8A-4147-A177-3AD203B41FA5}">
+                      <a16:colId xmlns:a16="http://schemas.microsoft.com/office/drawing/2014/main" val="20004"/>
+                    </a:ext>
+                  </a:extLst>
+                </a:gridCol>
+                <a:gridCol w="1025640">
+                  <a:extLst>
+                    <a:ext uri="{9D8B030D-6E8A-4147-A177-3AD203B41FA5}">
+                      <a16:colId xmlns:a16="http://schemas.microsoft.com/office/drawing/2014/main" val="20005"/>
+                    </a:ext>
+                  </a:extLst>
+                </a:gridCol>
+                <a:gridCol w="1460520">
+                  <a:extLst>
+                    <a:ext uri="{9D8B030D-6E8A-4147-A177-3AD203B41FA5}">
+                      <a16:colId xmlns:a16="http://schemas.microsoft.com/office/drawing/2014/main" val="20006"/>
+                    </a:ext>
+                  </a:extLst>
+                </a:gridCol>
+                <a:gridCol w="1482840">
+                  <a:extLst>
+                    <a:ext uri="{9D8B030D-6E8A-4147-A177-3AD203B41FA5}">
+                      <a16:colId xmlns:a16="http://schemas.microsoft.com/office/drawing/2014/main" val="20007"/>
+                    </a:ext>
+                  </a:extLst>
+                </a:gridCol>
+                <a:gridCol w="958680">
+                  <a:extLst>
+                    <a:ext uri="{9D8B030D-6E8A-4147-A177-3AD203B41FA5}">
+                      <a16:colId xmlns:a16="http://schemas.microsoft.com/office/drawing/2014/main" val="20008"/>
+                    </a:ext>
+                  </a:extLst>
+                </a:gridCol>
+                <a:gridCol w="825120">
+                  <a:extLst>
+                    <a:ext uri="{9D8B030D-6E8A-4147-A177-3AD203B41FA5}">
+                      <a16:colId xmlns:a16="http://schemas.microsoft.com/office/drawing/2014/main" val="20009"/>
+                    </a:ext>
+                  </a:extLst>
+                </a:gridCol>
+                <a:gridCol w="947520">
+                  <a:extLst>
+                    <a:ext uri="{9D8B030D-6E8A-4147-A177-3AD203B41FA5}">
+                      <a16:colId xmlns:a16="http://schemas.microsoft.com/office/drawing/2014/main" val="20010"/>
+                    </a:ext>
+                  </a:extLst>
+                </a:gridCol>
+                <a:gridCol w="780480">
+                  <a:extLst>
+                    <a:ext uri="{9D8B030D-6E8A-4147-A177-3AD203B41FA5}">
+                      <a16:colId xmlns:a16="http://schemas.microsoft.com/office/drawing/2014/main" val="20011"/>
+                    </a:ext>
+                  </a:extLst>
+                </a:gridCol>
+                <a:gridCol w="955080">
+                  <a:extLst>
+                    <a:ext uri="{9D8B030D-6E8A-4147-A177-3AD203B41FA5}">
+                      <a16:colId xmlns:a16="http://schemas.microsoft.com/office/drawing/2014/main" val="20012"/>
+                    </a:ext>
+                  </a:extLst>
+                </a:gridCol>
+                <a:gridCol w="1938240">
+                  <a:extLst>
+                    <a:ext uri="{9D8B030D-6E8A-4147-A177-3AD203B41FA5}">
+                      <a16:colId xmlns:a16="http://schemas.microsoft.com/office/drawing/2014/main" val="20013"/>
+                    </a:ext>
+                  </a:extLst>
+                </a:gridCol>
               </a:tblGrid>
               <a:tr h="521640">
                 <a:tc>
                   <a:txBody>
-                    <a:bodyPr lIns="7560" rIns="7560">
-                      <a:noAutofit/>
-                    </a:bodyPr>
+                    <a:bodyPr/>
+                    <a:lstStyle/>
                     <a:p>
                       <a:pPr>
                         <a:lnSpc>
@@ -3263,7 +4249,7 @@
                         </a:lnSpc>
                       </a:pPr>
                       <a:r>
-                        <a:rPr b="1" lang="es-ES" sz="1200" spc="-1" strike="noStrike" u="sng">
+                        <a:rPr lang="es-ES" sz="1200" b="1" u="sng" strike="noStrike" spc="-1">
                           <a:solidFill>
                             <a:srgbClr val="000000"/>
                           </a:solidFill>
@@ -3273,7 +4259,7 @@
                         </a:rPr>
                         <a:t>Gen</a:t>
                       </a:r>
-                      <a:endParaRPr b="0" lang="es-ES" sz="1200" spc="-1" strike="noStrike">
+                      <a:endParaRPr lang="es-ES" sz="1200" b="0" strike="noStrike" spc="-1">
                         <a:latin typeface="Arial"/>
                       </a:endParaRPr>
                     </a:p>
@@ -3281,34 +4267,33 @@
                   <a:tcPr marL="7560" marR="7560">
                     <a:lnL w="12240">
                       <a:solidFill>
-                        <a:srgbClr val="ffffff"/>
+                        <a:srgbClr val="FFFFFF"/>
                       </a:solidFill>
                     </a:lnL>
                     <a:lnR w="12240">
                       <a:solidFill>
-                        <a:srgbClr val="ffffff"/>
+                        <a:srgbClr val="FFFFFF"/>
                       </a:solidFill>
                     </a:lnR>
                     <a:lnT w="12240">
                       <a:solidFill>
-                        <a:srgbClr val="ffffff"/>
+                        <a:srgbClr val="FFFFFF"/>
                       </a:solidFill>
                     </a:lnT>
                     <a:lnB w="12240">
                       <a:solidFill>
-                        <a:srgbClr val="ffffff"/>
+                        <a:srgbClr val="FFFFFF"/>
                       </a:solidFill>
                     </a:lnB>
                     <a:solidFill>
-                      <a:srgbClr val="e7eaec"/>
+                      <a:srgbClr val="E7EAEC"/>
                     </a:solidFill>
                   </a:tcPr>
                 </a:tc>
                 <a:tc>
                   <a:txBody>
-                    <a:bodyPr lIns="7560" rIns="7560">
-                      <a:noAutofit/>
-                    </a:bodyPr>
+                    <a:bodyPr/>
+                    <a:lstStyle/>
                     <a:p>
                       <a:pPr algn="ctr">
                         <a:lnSpc>
@@ -3316,7 +4301,7 @@
                         </a:lnSpc>
                       </a:pPr>
                       <a:r>
-                        <a:rPr b="1" lang="es-ES" sz="1200" spc="-1" strike="noStrike" u="sng">
+                        <a:rPr lang="es-ES" sz="1200" b="1" u="sng" strike="noStrike" spc="-1">
                           <a:solidFill>
                             <a:srgbClr val="000000"/>
                           </a:solidFill>
@@ -3326,7 +4311,7 @@
                         </a:rPr>
                         <a:t>Coordenada</a:t>
                       </a:r>
-                      <a:endParaRPr b="0" lang="es-ES" sz="1200" spc="-1" strike="noStrike">
+                      <a:endParaRPr lang="es-ES" sz="1200" b="0" strike="noStrike" spc="-1">
                         <a:latin typeface="Arial"/>
                       </a:endParaRPr>
                     </a:p>
@@ -3334,34 +4319,33 @@
                   <a:tcPr marL="7560" marR="7560">
                     <a:lnL w="12240">
                       <a:solidFill>
-                        <a:srgbClr val="ffffff"/>
+                        <a:srgbClr val="FFFFFF"/>
                       </a:solidFill>
                     </a:lnL>
                     <a:lnR w="12240">
                       <a:solidFill>
-                        <a:srgbClr val="ffffff"/>
+                        <a:srgbClr val="FFFFFF"/>
                       </a:solidFill>
                     </a:lnR>
                     <a:lnT w="12240">
                       <a:solidFill>
-                        <a:srgbClr val="ffffff"/>
+                        <a:srgbClr val="FFFFFF"/>
                       </a:solidFill>
                     </a:lnT>
                     <a:lnB w="12240">
                       <a:solidFill>
-                        <a:srgbClr val="ffffff"/>
+                        <a:srgbClr val="FFFFFF"/>
                       </a:solidFill>
                     </a:lnB>
                     <a:solidFill>
-                      <a:srgbClr val="e7eaec"/>
+                      <a:srgbClr val="E7EAEC"/>
                     </a:solidFill>
                   </a:tcPr>
                 </a:tc>
                 <a:tc>
                   <a:txBody>
-                    <a:bodyPr lIns="7560" rIns="7560">
-                      <a:noAutofit/>
-                    </a:bodyPr>
+                    <a:bodyPr/>
+                    <a:lstStyle/>
                     <a:p>
                       <a:pPr algn="ctr">
                         <a:lnSpc>
@@ -3369,7 +4353,7 @@
                         </a:lnSpc>
                       </a:pPr>
                       <a:r>
-                        <a:rPr b="1" lang="es-ES" sz="1200" spc="-1" strike="noStrike" u="sng">
+                        <a:rPr lang="es-ES" sz="1200" b="1" u="sng" strike="noStrike" spc="-1">
                           <a:solidFill>
                             <a:srgbClr val="000000"/>
                           </a:solidFill>
@@ -3379,7 +4363,7 @@
                         </a:rPr>
                         <a:t>Nomenclatura.c</a:t>
                       </a:r>
-                      <a:endParaRPr b="0" lang="es-ES" sz="1200" spc="-1" strike="noStrike">
+                      <a:endParaRPr lang="es-ES" sz="1200" b="0" strike="noStrike" spc="-1">
                         <a:latin typeface="Arial"/>
                       </a:endParaRPr>
                     </a:p>
@@ -3387,34 +4371,33 @@
                   <a:tcPr marL="7560" marR="7560">
                     <a:lnL w="12240">
                       <a:solidFill>
-                        <a:srgbClr val="ffffff"/>
+                        <a:srgbClr val="FFFFFF"/>
                       </a:solidFill>
                     </a:lnL>
                     <a:lnR w="12240">
                       <a:solidFill>
-                        <a:srgbClr val="ffffff"/>
+                        <a:srgbClr val="FFFFFF"/>
                       </a:solidFill>
                     </a:lnR>
                     <a:lnT w="12240">
                       <a:solidFill>
-                        <a:srgbClr val="ffffff"/>
+                        <a:srgbClr val="FFFFFF"/>
                       </a:solidFill>
                     </a:lnT>
                     <a:lnB w="12240">
                       <a:solidFill>
-                        <a:srgbClr val="ffffff"/>
+                        <a:srgbClr val="FFFFFF"/>
                       </a:solidFill>
                     </a:lnB>
                     <a:solidFill>
-                      <a:srgbClr val="e7eaec"/>
+                      <a:srgbClr val="E7EAEC"/>
                     </a:solidFill>
                   </a:tcPr>
                 </a:tc>
                 <a:tc>
                   <a:txBody>
-                    <a:bodyPr lIns="7560" rIns="7560">
-                      <a:noAutofit/>
-                    </a:bodyPr>
+                    <a:bodyPr/>
+                    <a:lstStyle/>
                     <a:p>
                       <a:pPr algn="ctr">
                         <a:lnSpc>
@@ -3422,7 +4405,7 @@
                         </a:lnSpc>
                       </a:pPr>
                       <a:r>
-                        <a:rPr b="1" lang="es-ES" sz="1200" spc="-1" strike="noStrike" u="sng">
+                        <a:rPr lang="es-ES" sz="1200" b="1" u="sng" strike="noStrike" spc="-1">
                           <a:solidFill>
                             <a:srgbClr val="000000"/>
                           </a:solidFill>
@@ -3432,7 +4415,7 @@
                         </a:rPr>
                         <a:t>Tipo</a:t>
                       </a:r>
-                      <a:endParaRPr b="0" lang="es-ES" sz="1200" spc="-1" strike="noStrike">
+                      <a:endParaRPr lang="es-ES" sz="1200" b="0" strike="noStrike" spc="-1">
                         <a:latin typeface="Arial"/>
                       </a:endParaRPr>
                     </a:p>
@@ -3440,34 +4423,33 @@
                   <a:tcPr marL="7560" marR="7560">
                     <a:lnL w="12240">
                       <a:solidFill>
-                        <a:srgbClr val="ffffff"/>
+                        <a:srgbClr val="FFFFFF"/>
                       </a:solidFill>
                     </a:lnL>
                     <a:lnR w="12240">
                       <a:solidFill>
-                        <a:srgbClr val="ffffff"/>
+                        <a:srgbClr val="FFFFFF"/>
                       </a:solidFill>
                     </a:lnR>
                     <a:lnT w="12240">
                       <a:solidFill>
-                        <a:srgbClr val="ffffff"/>
+                        <a:srgbClr val="FFFFFF"/>
                       </a:solidFill>
                     </a:lnT>
                     <a:lnB w="12240">
                       <a:solidFill>
-                        <a:srgbClr val="ffffff"/>
+                        <a:srgbClr val="FFFFFF"/>
                       </a:solidFill>
                     </a:lnB>
                     <a:solidFill>
-                      <a:srgbClr val="e7eaec"/>
+                      <a:srgbClr val="E7EAEC"/>
                     </a:solidFill>
                   </a:tcPr>
                 </a:tc>
                 <a:tc>
                   <a:txBody>
-                    <a:bodyPr lIns="7560" rIns="7560">
-                      <a:noAutofit/>
-                    </a:bodyPr>
+                    <a:bodyPr/>
+                    <a:lstStyle/>
                     <a:p>
                       <a:pPr algn="ctr">
                         <a:lnSpc>
@@ -3475,7 +4457,7 @@
                         </a:lnSpc>
                       </a:pPr>
                       <a:r>
-                        <a:rPr b="1" lang="es-ES" sz="1200" spc="-1" strike="noStrike" u="sng">
+                        <a:rPr lang="es-ES" sz="1200" b="1" u="sng" strike="noStrike" spc="-1">
                           <a:solidFill>
                             <a:srgbClr val="000000"/>
                           </a:solidFill>
@@ -3485,7 +4467,7 @@
                         </a:rPr>
                         <a:t>Genotipo</a:t>
                       </a:r>
-                      <a:endParaRPr b="0" lang="es-ES" sz="1200" spc="-1" strike="noStrike">
+                      <a:endParaRPr lang="es-ES" sz="1200" b="0" strike="noStrike" spc="-1">
                         <a:latin typeface="Arial"/>
                       </a:endParaRPr>
                     </a:p>
@@ -3493,34 +4475,33 @@
                   <a:tcPr marL="7560" marR="7560">
                     <a:lnL w="12240">
                       <a:solidFill>
-                        <a:srgbClr val="ffffff"/>
+                        <a:srgbClr val="FFFFFF"/>
                       </a:solidFill>
                     </a:lnL>
                     <a:lnR w="12240">
                       <a:solidFill>
-                        <a:srgbClr val="ffffff"/>
+                        <a:srgbClr val="FFFFFF"/>
                       </a:solidFill>
                     </a:lnR>
                     <a:lnT w="12240">
                       <a:solidFill>
-                        <a:srgbClr val="ffffff"/>
+                        <a:srgbClr val="FFFFFF"/>
                       </a:solidFill>
                     </a:lnT>
                     <a:lnB w="12240">
                       <a:solidFill>
-                        <a:srgbClr val="ffffff"/>
+                        <a:srgbClr val="FFFFFF"/>
                       </a:solidFill>
                     </a:lnB>
                     <a:solidFill>
-                      <a:srgbClr val="e7eaec"/>
+                      <a:srgbClr val="E7EAEC"/>
                     </a:solidFill>
                   </a:tcPr>
                 </a:tc>
                 <a:tc>
                   <a:txBody>
-                    <a:bodyPr lIns="7560" rIns="7560">
-                      <a:noAutofit/>
-                    </a:bodyPr>
+                    <a:bodyPr/>
+                    <a:lstStyle/>
                     <a:p>
                       <a:pPr algn="ctr">
                         <a:lnSpc>
@@ -3528,7 +4509,7 @@
                         </a:lnSpc>
                       </a:pPr>
                       <a:r>
-                        <a:rPr b="1" lang="es-ES" sz="1200" spc="-1" strike="noStrike" u="sng">
+                        <a:rPr lang="es-ES" sz="1200" b="1" u="sng" strike="noStrike" spc="-1">
                           <a:solidFill>
                             <a:srgbClr val="000000"/>
                           </a:solidFill>
@@ -3538,7 +4519,7 @@
                         </a:rPr>
                         <a:t>Frecuencia</a:t>
                       </a:r>
-                      <a:endParaRPr b="0" lang="es-ES" sz="1200" spc="-1" strike="noStrike">
+                      <a:endParaRPr lang="es-ES" sz="1200" b="0" strike="noStrike" spc="-1">
                         <a:latin typeface="Arial"/>
                       </a:endParaRPr>
                     </a:p>
@@ -3546,34 +4527,33 @@
                   <a:tcPr marL="7560" marR="7560">
                     <a:lnL w="12240">
                       <a:solidFill>
-                        <a:srgbClr val="ffffff"/>
+                        <a:srgbClr val="FFFFFF"/>
                       </a:solidFill>
                     </a:lnL>
                     <a:lnR w="12240">
                       <a:solidFill>
-                        <a:srgbClr val="ffffff"/>
+                        <a:srgbClr val="FFFFFF"/>
                       </a:solidFill>
                     </a:lnR>
                     <a:lnT w="12240">
                       <a:solidFill>
-                        <a:srgbClr val="ffffff"/>
+                        <a:srgbClr val="FFFFFF"/>
                       </a:solidFill>
                     </a:lnT>
                     <a:lnB w="12240">
                       <a:solidFill>
-                        <a:srgbClr val="ffffff"/>
+                        <a:srgbClr val="FFFFFF"/>
                       </a:solidFill>
                     </a:lnB>
                     <a:solidFill>
-                      <a:srgbClr val="e7eaec"/>
+                      <a:srgbClr val="E7EAEC"/>
                     </a:solidFill>
                   </a:tcPr>
                 </a:tc>
                 <a:tc>
                   <a:txBody>
-                    <a:bodyPr lIns="7560" rIns="7560">
-                      <a:noAutofit/>
-                    </a:bodyPr>
+                    <a:bodyPr/>
+                    <a:lstStyle/>
                     <a:p>
                       <a:pPr algn="ctr">
                         <a:lnSpc>
@@ -3581,7 +4561,7 @@
                         </a:lnSpc>
                       </a:pPr>
                       <a:r>
-                        <a:rPr b="1" lang="es-ES" sz="1200" spc="-1" strike="noStrike" u="sng">
+                        <a:rPr lang="es-ES" sz="1200" b="1" u="sng" strike="noStrike" spc="-1">
                           <a:solidFill>
                             <a:srgbClr val="000000"/>
                           </a:solidFill>
@@ -3591,7 +4571,7 @@
                         </a:rPr>
                         <a:t>Proteína</a:t>
                       </a:r>
-                      <a:endParaRPr b="0" lang="es-ES" sz="1200" spc="-1" strike="noStrike">
+                      <a:endParaRPr lang="es-ES" sz="1200" b="0" strike="noStrike" spc="-1">
                         <a:latin typeface="Arial"/>
                       </a:endParaRPr>
                     </a:p>
@@ -3599,34 +4579,33 @@
                   <a:tcPr marL="7560" marR="7560">
                     <a:lnL w="12240">
                       <a:solidFill>
-                        <a:srgbClr val="ffffff"/>
+                        <a:srgbClr val="FFFFFF"/>
                       </a:solidFill>
                     </a:lnL>
                     <a:lnR w="12240">
                       <a:solidFill>
-                        <a:srgbClr val="ffffff"/>
+                        <a:srgbClr val="FFFFFF"/>
                       </a:solidFill>
                     </a:lnR>
                     <a:lnT w="12240">
                       <a:solidFill>
-                        <a:srgbClr val="ffffff"/>
+                        <a:srgbClr val="FFFFFF"/>
                       </a:solidFill>
                     </a:lnT>
                     <a:lnB w="12240">
                       <a:solidFill>
-                        <a:srgbClr val="ffffff"/>
+                        <a:srgbClr val="FFFFFF"/>
                       </a:solidFill>
                     </a:lnB>
                     <a:solidFill>
-                      <a:srgbClr val="e7eaec"/>
+                      <a:srgbClr val="E7EAEC"/>
                     </a:solidFill>
                   </a:tcPr>
                 </a:tc>
                 <a:tc>
                   <a:txBody>
-                    <a:bodyPr lIns="7560" rIns="7560">
-                      <a:noAutofit/>
-                    </a:bodyPr>
+                    <a:bodyPr/>
+                    <a:lstStyle/>
                     <a:p>
                       <a:pPr algn="ctr">
                         <a:lnSpc>
@@ -3634,7 +4613,7 @@
                         </a:lnSpc>
                       </a:pPr>
                       <a:r>
-                        <a:rPr b="1" lang="es-ES" sz="1200" spc="-1" strike="noStrike" u="sng">
+                        <a:rPr lang="es-ES" sz="1200" b="1" u="sng" strike="noStrike" spc="-1">
                           <a:solidFill>
                             <a:srgbClr val="000000"/>
                           </a:solidFill>
@@ -3644,7 +4623,7 @@
                         </a:rPr>
                         <a:t>Nomenclatura.p</a:t>
                       </a:r>
-                      <a:endParaRPr b="0" lang="es-ES" sz="1200" spc="-1" strike="noStrike">
+                      <a:endParaRPr lang="es-ES" sz="1200" b="0" strike="noStrike" spc="-1">
                         <a:latin typeface="Arial"/>
                       </a:endParaRPr>
                     </a:p>
@@ -3652,34 +4631,33 @@
                   <a:tcPr marL="7560" marR="7560">
                     <a:lnL w="12240">
                       <a:solidFill>
-                        <a:srgbClr val="ffffff"/>
+                        <a:srgbClr val="FFFFFF"/>
                       </a:solidFill>
                     </a:lnL>
                     <a:lnR w="12240">
                       <a:solidFill>
-                        <a:srgbClr val="ffffff"/>
+                        <a:srgbClr val="FFFFFF"/>
                       </a:solidFill>
                     </a:lnR>
                     <a:lnT w="12240">
                       <a:solidFill>
-                        <a:srgbClr val="ffffff"/>
+                        <a:srgbClr val="FFFFFF"/>
                       </a:solidFill>
                     </a:lnT>
                     <a:lnB w="12240">
                       <a:solidFill>
-                        <a:srgbClr val="ffffff"/>
+                        <a:srgbClr val="FFFFFF"/>
                       </a:solidFill>
                     </a:lnB>
                     <a:solidFill>
-                      <a:srgbClr val="e7eaec"/>
+                      <a:srgbClr val="E7EAEC"/>
                     </a:solidFill>
                   </a:tcPr>
                 </a:tc>
                 <a:tc>
                   <a:txBody>
-                    <a:bodyPr lIns="7560" rIns="7560">
-                      <a:noAutofit/>
-                    </a:bodyPr>
+                    <a:bodyPr/>
+                    <a:lstStyle/>
                     <a:p>
                       <a:pPr algn="ctr">
                         <a:lnSpc>
@@ -3687,7 +4665,7 @@
                         </a:lnSpc>
                       </a:pPr>
                       <a:r>
-                        <a:rPr b="1" lang="es-ES" sz="1200" spc="-1" strike="noStrike" u="sng">
+                        <a:rPr lang="es-ES" sz="1200" b="1" u="sng" strike="noStrike" spc="-1">
                           <a:solidFill>
                             <a:srgbClr val="000000"/>
                           </a:solidFill>
@@ -3697,7 +4675,7 @@
                         </a:rPr>
                         <a:t>Efecto</a:t>
                       </a:r>
-                      <a:endParaRPr b="0" lang="es-ES" sz="1200" spc="-1" strike="noStrike">
+                      <a:endParaRPr lang="es-ES" sz="1200" b="0" strike="noStrike" spc="-1">
                         <a:latin typeface="Arial"/>
                       </a:endParaRPr>
                     </a:p>
@@ -3705,34 +4683,33 @@
                   <a:tcPr marL="7560" marR="7560">
                     <a:lnL w="12240">
                       <a:solidFill>
-                        <a:srgbClr val="ffffff"/>
+                        <a:srgbClr val="FFFFFF"/>
                       </a:solidFill>
                     </a:lnL>
                     <a:lnR w="12240">
                       <a:solidFill>
-                        <a:srgbClr val="ffffff"/>
+                        <a:srgbClr val="FFFFFF"/>
                       </a:solidFill>
                     </a:lnR>
                     <a:lnT w="12240">
                       <a:solidFill>
-                        <a:srgbClr val="ffffff"/>
+                        <a:srgbClr val="FFFFFF"/>
                       </a:solidFill>
                     </a:lnT>
                     <a:lnB w="12240">
                       <a:solidFill>
-                        <a:srgbClr val="ffffff"/>
+                        <a:srgbClr val="FFFFFF"/>
                       </a:solidFill>
                     </a:lnB>
                     <a:solidFill>
-                      <a:srgbClr val="e7eaec"/>
+                      <a:srgbClr val="E7EAEC"/>
                     </a:solidFill>
                   </a:tcPr>
                 </a:tc>
                 <a:tc>
                   <a:txBody>
-                    <a:bodyPr lIns="7560" rIns="7560">
-                      <a:noAutofit/>
-                    </a:bodyPr>
+                    <a:bodyPr/>
+                    <a:lstStyle/>
                     <a:p>
                       <a:pPr algn="ctr">
                         <a:lnSpc>
@@ -3740,7 +4717,7 @@
                         </a:lnSpc>
                       </a:pPr>
                       <a:r>
-                        <a:rPr b="1" lang="es-ES" sz="1200" spc="-1" strike="noStrike" u="sng">
+                        <a:rPr lang="es-ES" sz="1200" b="1" u="sng" strike="noStrike" spc="-1">
                           <a:solidFill>
                             <a:srgbClr val="000000"/>
                           </a:solidFill>
@@ -3750,7 +4727,7 @@
                         </a:rPr>
                         <a:t>SIFT</a:t>
                       </a:r>
-                      <a:endParaRPr b="0" lang="es-ES" sz="1200" spc="-1" strike="noStrike">
+                      <a:endParaRPr lang="es-ES" sz="1200" b="0" strike="noStrike" spc="-1">
                         <a:latin typeface="Arial"/>
                       </a:endParaRPr>
                     </a:p>
@@ -3758,34 +4735,33 @@
                   <a:tcPr marL="7560" marR="7560">
                     <a:lnL w="12240">
                       <a:solidFill>
-                        <a:srgbClr val="ffffff"/>
+                        <a:srgbClr val="FFFFFF"/>
                       </a:solidFill>
                     </a:lnL>
                     <a:lnR w="12240">
                       <a:solidFill>
-                        <a:srgbClr val="ffffff"/>
+                        <a:srgbClr val="FFFFFF"/>
                       </a:solidFill>
                     </a:lnR>
                     <a:lnT w="12240">
                       <a:solidFill>
-                        <a:srgbClr val="ffffff"/>
+                        <a:srgbClr val="FFFFFF"/>
                       </a:solidFill>
                     </a:lnT>
                     <a:lnB w="12240">
                       <a:solidFill>
-                        <a:srgbClr val="ffffff"/>
+                        <a:srgbClr val="FFFFFF"/>
                       </a:solidFill>
                     </a:lnB>
                     <a:solidFill>
-                      <a:srgbClr val="e7eaec"/>
+                      <a:srgbClr val="E7EAEC"/>
                     </a:solidFill>
                   </a:tcPr>
                 </a:tc>
                 <a:tc>
                   <a:txBody>
-                    <a:bodyPr lIns="7560" rIns="7560">
-                      <a:noAutofit/>
-                    </a:bodyPr>
+                    <a:bodyPr/>
+                    <a:lstStyle/>
                     <a:p>
                       <a:pPr algn="ctr">
                         <a:lnSpc>
@@ -3793,7 +4769,7 @@
                         </a:lnSpc>
                       </a:pPr>
                       <a:r>
-                        <a:rPr b="1" lang="es-ES" sz="1200" spc="-1" strike="noStrike" u="sng">
+                        <a:rPr lang="es-ES" sz="1200" b="1" u="sng" strike="noStrike" spc="-1">
                           <a:solidFill>
                             <a:srgbClr val="000000"/>
                           </a:solidFill>
@@ -3803,7 +4779,7 @@
                         </a:rPr>
                         <a:t>PolyPhen</a:t>
                       </a:r>
-                      <a:endParaRPr b="0" lang="es-ES" sz="1200" spc="-1" strike="noStrike">
+                      <a:endParaRPr lang="es-ES" sz="1200" b="0" strike="noStrike" spc="-1">
                         <a:latin typeface="Arial"/>
                       </a:endParaRPr>
                     </a:p>
@@ -3811,34 +4787,33 @@
                   <a:tcPr marL="7560" marR="7560">
                     <a:lnL w="12240">
                       <a:solidFill>
-                        <a:srgbClr val="ffffff"/>
+                        <a:srgbClr val="FFFFFF"/>
                       </a:solidFill>
                     </a:lnL>
                     <a:lnR w="12240">
                       <a:solidFill>
-                        <a:srgbClr val="ffffff"/>
+                        <a:srgbClr val="FFFFFF"/>
                       </a:solidFill>
                     </a:lnR>
                     <a:lnT w="12240">
                       <a:solidFill>
-                        <a:srgbClr val="ffffff"/>
+                        <a:srgbClr val="FFFFFF"/>
                       </a:solidFill>
                     </a:lnT>
                     <a:lnB w="12240">
                       <a:solidFill>
-                        <a:srgbClr val="ffffff"/>
+                        <a:srgbClr val="FFFFFF"/>
                       </a:solidFill>
                     </a:lnB>
                     <a:solidFill>
-                      <a:srgbClr val="e7eaec"/>
+                      <a:srgbClr val="E7EAEC"/>
                     </a:solidFill>
                   </a:tcPr>
                 </a:tc>
                 <a:tc>
                   <a:txBody>
-                    <a:bodyPr lIns="7560" rIns="7560">
-                      <a:noAutofit/>
-                    </a:bodyPr>
+                    <a:bodyPr/>
+                    <a:lstStyle/>
                     <a:p>
                       <a:pPr algn="ctr">
                         <a:lnSpc>
@@ -3846,7 +4821,7 @@
                         </a:lnSpc>
                       </a:pPr>
                       <a:r>
-                        <a:rPr b="1" lang="es-ES" sz="1200" spc="-1" strike="noStrike" u="sng">
+                        <a:rPr lang="es-ES" sz="1200" b="1" u="sng" strike="noStrike" spc="-1">
                           <a:solidFill>
                             <a:srgbClr val="000000"/>
                           </a:solidFill>
@@ -3856,7 +4831,7 @@
                         </a:rPr>
                         <a:t>MIM</a:t>
                       </a:r>
-                      <a:endParaRPr b="0" lang="es-ES" sz="1200" spc="-1" strike="noStrike">
+                      <a:endParaRPr lang="es-ES" sz="1200" b="0" strike="noStrike" spc="-1">
                         <a:latin typeface="Arial"/>
                       </a:endParaRPr>
                     </a:p>
@@ -3864,34 +4839,33 @@
                   <a:tcPr marL="7560" marR="7560">
                     <a:lnL w="12240">
                       <a:solidFill>
-                        <a:srgbClr val="ffffff"/>
+                        <a:srgbClr val="FFFFFF"/>
                       </a:solidFill>
                     </a:lnL>
                     <a:lnR w="12240">
                       <a:solidFill>
-                        <a:srgbClr val="ffffff"/>
+                        <a:srgbClr val="FFFFFF"/>
                       </a:solidFill>
                     </a:lnR>
                     <a:lnT w="12240">
                       <a:solidFill>
-                        <a:srgbClr val="ffffff"/>
+                        <a:srgbClr val="FFFFFF"/>
                       </a:solidFill>
                     </a:lnT>
                     <a:lnB w="12240">
                       <a:solidFill>
-                        <a:srgbClr val="ffffff"/>
+                        <a:srgbClr val="FFFFFF"/>
                       </a:solidFill>
                     </a:lnB>
                     <a:solidFill>
-                      <a:srgbClr val="e7eaec"/>
+                      <a:srgbClr val="E7EAEC"/>
                     </a:solidFill>
                   </a:tcPr>
                 </a:tc>
                 <a:tc>
                   <a:txBody>
-                    <a:bodyPr lIns="7560" rIns="7560">
-                      <a:noAutofit/>
-                    </a:bodyPr>
+                    <a:bodyPr/>
+                    <a:lstStyle/>
                     <a:p>
                       <a:pPr algn="ctr">
                         <a:lnSpc>
@@ -3899,7 +4873,7 @@
                         </a:lnSpc>
                       </a:pPr>
                       <a:r>
-                        <a:rPr b="1" lang="es-ES" sz="1200" spc="-1" strike="noStrike" u="sng">
+                        <a:rPr lang="es-ES" sz="1200" b="1" u="sng" strike="noStrike" spc="-1">
                           <a:solidFill>
                             <a:srgbClr val="000000"/>
                           </a:solidFill>
@@ -3909,7 +4883,7 @@
                         </a:rPr>
                         <a:t>Herencia</a:t>
                       </a:r>
-                      <a:endParaRPr b="0" lang="es-ES" sz="1200" spc="-1" strike="noStrike">
+                      <a:endParaRPr lang="es-ES" sz="1200" b="0" strike="noStrike" spc="-1">
                         <a:latin typeface="Arial"/>
                       </a:endParaRPr>
                     </a:p>
@@ -3917,34 +4891,33 @@
                   <a:tcPr marL="7560" marR="7560">
                     <a:lnL w="12240">
                       <a:solidFill>
-                        <a:srgbClr val="ffffff"/>
+                        <a:srgbClr val="FFFFFF"/>
                       </a:solidFill>
                     </a:lnL>
                     <a:lnR w="12240">
                       <a:solidFill>
-                        <a:srgbClr val="ffffff"/>
+                        <a:srgbClr val="FFFFFF"/>
                       </a:solidFill>
                     </a:lnR>
                     <a:lnT w="12240">
                       <a:solidFill>
-                        <a:srgbClr val="ffffff"/>
+                        <a:srgbClr val="FFFFFF"/>
                       </a:solidFill>
                     </a:lnT>
                     <a:lnB w="12240">
                       <a:solidFill>
-                        <a:srgbClr val="ffffff"/>
+                        <a:srgbClr val="FFFFFF"/>
                       </a:solidFill>
                     </a:lnB>
                     <a:solidFill>
-                      <a:srgbClr val="e7eaec"/>
+                      <a:srgbClr val="E7EAEC"/>
                     </a:solidFill>
                   </a:tcPr>
                 </a:tc>
                 <a:tc>
                   <a:txBody>
-                    <a:bodyPr lIns="7560" rIns="7560">
-                      <a:noAutofit/>
-                    </a:bodyPr>
+                    <a:bodyPr/>
+                    <a:lstStyle/>
                     <a:p>
                       <a:pPr algn="ctr">
                         <a:lnSpc>
@@ -3952,7 +4925,7 @@
                         </a:lnSpc>
                       </a:pPr>
                       <a:r>
-                        <a:rPr b="1" lang="es-ES" sz="1200" spc="-1" strike="noStrike" u="sng">
+                        <a:rPr lang="es-ES" sz="1200" b="1" u="sng" strike="noStrike" spc="-1">
                           <a:solidFill>
                             <a:srgbClr val="000000"/>
                           </a:solidFill>
@@ -3962,7 +4935,7 @@
                         </a:rPr>
                         <a:t>Pathway</a:t>
                       </a:r>
-                      <a:endParaRPr b="0" lang="es-ES" sz="1200" spc="-1" strike="noStrike">
+                      <a:endParaRPr lang="es-ES" sz="1200" b="0" strike="noStrike" spc="-1">
                         <a:latin typeface="Arial"/>
                       </a:endParaRPr>
                     </a:p>
@@ -3970,36 +4943,40 @@
                   <a:tcPr marL="7560" marR="7560">
                     <a:lnL w="12240">
                       <a:solidFill>
-                        <a:srgbClr val="ffffff"/>
+                        <a:srgbClr val="FFFFFF"/>
                       </a:solidFill>
                     </a:lnL>
                     <a:lnR w="12240">
                       <a:solidFill>
-                        <a:srgbClr val="ffffff"/>
+                        <a:srgbClr val="FFFFFF"/>
                       </a:solidFill>
                     </a:lnR>
                     <a:lnT w="12240">
                       <a:solidFill>
-                        <a:srgbClr val="ffffff"/>
+                        <a:srgbClr val="FFFFFF"/>
                       </a:solidFill>
                     </a:lnT>
                     <a:lnB w="12240">
                       <a:solidFill>
-                        <a:srgbClr val="ffffff"/>
+                        <a:srgbClr val="FFFFFF"/>
                       </a:solidFill>
                     </a:lnB>
                     <a:solidFill>
-                      <a:srgbClr val="e7eaec"/>
+                      <a:srgbClr val="E7EAEC"/>
                     </a:solidFill>
                   </a:tcPr>
                 </a:tc>
+                <a:extLst>
+                  <a:ext uri="{0D108BD9-81ED-4DB2-BD59-A6C34878D82A}">
+                    <a16:rowId xmlns:a16="http://schemas.microsoft.com/office/drawing/2014/main" val="10000"/>
+                  </a:ext>
+                </a:extLst>
               </a:tr>
               <a:tr h="774360">
                 <a:tc>
                   <a:txBody>
-                    <a:bodyPr lIns="7560" rIns="7560">
-                      <a:noAutofit/>
-                    </a:bodyPr>
+                    <a:bodyPr/>
+                    <a:lstStyle/>
                     <a:p>
                       <a:pPr>
                         <a:lnSpc>
@@ -4007,7 +4984,7 @@
                         </a:lnSpc>
                       </a:pPr>
                       <a:r>
-                        <a:rPr b="0" lang="es-ES" sz="1200" spc="-1" strike="noStrike">
+                        <a:rPr lang="es-ES" sz="1200" b="0" strike="noStrike" spc="-1">
                           <a:solidFill>
                             <a:srgbClr val="000000"/>
                           </a:solidFill>
@@ -4016,7 +4993,7 @@
                         </a:rPr>
                         <a:t>LEPR</a:t>
                       </a:r>
-                      <a:endParaRPr b="0" lang="es-ES" sz="1200" spc="-1" strike="noStrike">
+                      <a:endParaRPr lang="es-ES" sz="1200" b="0" strike="noStrike" spc="-1">
                         <a:latin typeface="Arial"/>
                       </a:endParaRPr>
                     </a:p>
@@ -4024,34 +5001,33 @@
                   <a:tcPr marL="7560" marR="7560">
                     <a:lnL w="12240">
                       <a:solidFill>
-                        <a:srgbClr val="ffffff"/>
+                        <a:srgbClr val="FFFFFF"/>
                       </a:solidFill>
                     </a:lnL>
                     <a:lnR w="12240">
                       <a:solidFill>
-                        <a:srgbClr val="ffffff"/>
+                        <a:srgbClr val="FFFFFF"/>
                       </a:solidFill>
                     </a:lnR>
                     <a:lnT w="12240">
                       <a:solidFill>
-                        <a:srgbClr val="ffffff"/>
+                        <a:srgbClr val="FFFFFF"/>
                       </a:solidFill>
                     </a:lnT>
                     <a:lnB w="12240">
                       <a:solidFill>
-                        <a:srgbClr val="ffffff"/>
+                        <a:srgbClr val="FFFFFF"/>
                       </a:solidFill>
                     </a:lnB>
                     <a:solidFill>
-                      <a:srgbClr val="e7eaec"/>
+                      <a:srgbClr val="E7EAEC"/>
                     </a:solidFill>
                   </a:tcPr>
                 </a:tc>
                 <a:tc>
                   <a:txBody>
-                    <a:bodyPr lIns="7560" rIns="7560">
-                      <a:noAutofit/>
-                    </a:bodyPr>
+                    <a:bodyPr/>
+                    <a:lstStyle/>
                     <a:p>
                       <a:pPr algn="ctr">
                         <a:lnSpc>
@@ -4059,7 +5035,7 @@
                         </a:lnSpc>
                       </a:pPr>
                       <a:r>
-                        <a:rPr b="0" lang="es-ES" sz="1200" spc="-1" strike="noStrike">
+                        <a:rPr lang="es-ES" sz="1200" b="0" strike="noStrike" spc="-1">
                           <a:solidFill>
                             <a:srgbClr val="000000"/>
                           </a:solidFill>
@@ -4068,7 +5044,7 @@
                         </a:rPr>
                         <a:t>1:65609984</a:t>
                       </a:r>
-                      <a:endParaRPr b="0" lang="es-ES" sz="1200" spc="-1" strike="noStrike">
+                      <a:endParaRPr lang="es-ES" sz="1200" b="0" strike="noStrike" spc="-1">
                         <a:latin typeface="Arial"/>
                       </a:endParaRPr>
                     </a:p>
@@ -4076,34 +5052,33 @@
                   <a:tcPr marL="7560" marR="7560">
                     <a:lnL w="12240">
                       <a:solidFill>
-                        <a:srgbClr val="ffffff"/>
+                        <a:srgbClr val="FFFFFF"/>
                       </a:solidFill>
                     </a:lnL>
                     <a:lnR w="12240">
                       <a:solidFill>
-                        <a:srgbClr val="ffffff"/>
+                        <a:srgbClr val="FFFFFF"/>
                       </a:solidFill>
                     </a:lnR>
                     <a:lnT w="12240">
                       <a:solidFill>
-                        <a:srgbClr val="ffffff"/>
+                        <a:srgbClr val="FFFFFF"/>
                       </a:solidFill>
                     </a:lnT>
                     <a:lnB w="12240">
                       <a:solidFill>
-                        <a:srgbClr val="ffffff"/>
+                        <a:srgbClr val="FFFFFF"/>
                       </a:solidFill>
                     </a:lnB>
                     <a:solidFill>
-                      <a:srgbClr val="e7eaec"/>
+                      <a:srgbClr val="E7EAEC"/>
                     </a:solidFill>
                   </a:tcPr>
                 </a:tc>
                 <a:tc>
                   <a:txBody>
-                    <a:bodyPr lIns="7560" rIns="7560">
-                      <a:noAutofit/>
-                    </a:bodyPr>
+                    <a:bodyPr/>
+                    <a:lstStyle/>
                     <a:p>
                       <a:pPr algn="ctr">
                         <a:lnSpc>
@@ -4111,7 +5086,7 @@
                         </a:lnSpc>
                       </a:pPr>
                       <a:r>
-                        <a:rPr b="0" lang="es-ES" sz="1200" spc="-1" strike="noStrike">
+                        <a:rPr lang="es-ES" sz="1200" b="0" strike="noStrike" spc="-1">
                           <a:solidFill>
                             <a:srgbClr val="000000"/>
                           </a:solidFill>
@@ -4120,7 +5095,7 @@
                         </a:rPr>
                         <a:t>ENST00000349533.11:c.1790del</a:t>
                       </a:r>
-                      <a:endParaRPr b="0" lang="es-ES" sz="1200" spc="-1" strike="noStrike">
+                      <a:endParaRPr lang="es-ES" sz="1200" b="0" strike="noStrike" spc="-1">
                         <a:latin typeface="Arial"/>
                       </a:endParaRPr>
                     </a:p>
@@ -4128,34 +5103,33 @@
                   <a:tcPr marL="7560" marR="7560">
                     <a:lnL w="12240">
                       <a:solidFill>
-                        <a:srgbClr val="ffffff"/>
+                        <a:srgbClr val="FFFFFF"/>
                       </a:solidFill>
                     </a:lnL>
                     <a:lnR w="12240">
                       <a:solidFill>
-                        <a:srgbClr val="ffffff"/>
+                        <a:srgbClr val="FFFFFF"/>
                       </a:solidFill>
                     </a:lnR>
                     <a:lnT w="12240">
                       <a:solidFill>
-                        <a:srgbClr val="ffffff"/>
+                        <a:srgbClr val="FFFFFF"/>
                       </a:solidFill>
                     </a:lnT>
                     <a:lnB w="12240">
                       <a:solidFill>
-                        <a:srgbClr val="ffffff"/>
+                        <a:srgbClr val="FFFFFF"/>
                       </a:solidFill>
                     </a:lnB>
                     <a:solidFill>
-                      <a:srgbClr val="e7eaec"/>
+                      <a:srgbClr val="E7EAEC"/>
                     </a:solidFill>
                   </a:tcPr>
                 </a:tc>
                 <a:tc>
                   <a:txBody>
-                    <a:bodyPr lIns="7560" rIns="7560">
-                      <a:noAutofit/>
-                    </a:bodyPr>
+                    <a:bodyPr/>
+                    <a:lstStyle/>
                     <a:p>
                       <a:pPr algn="ctr">
                         <a:lnSpc>
@@ -4163,7 +5137,7 @@
                         </a:lnSpc>
                       </a:pPr>
                       <a:r>
-                        <a:rPr b="0" lang="es-ES" sz="1200" spc="-1" strike="noStrike">
+                        <a:rPr lang="es-ES" sz="1200" b="0" strike="noStrike" spc="-1">
                           <a:solidFill>
                             <a:srgbClr val="000000"/>
                           </a:solidFill>
@@ -4172,7 +5146,7 @@
                         </a:rPr>
                         <a:t>Indel</a:t>
                       </a:r>
-                      <a:endParaRPr b="0" lang="es-ES" sz="1200" spc="-1" strike="noStrike">
+                      <a:endParaRPr lang="es-ES" sz="1200" b="0" strike="noStrike" spc="-1">
                         <a:latin typeface="Arial"/>
                       </a:endParaRPr>
                     </a:p>
@@ -4180,34 +5154,33 @@
                   <a:tcPr marL="7560" marR="7560">
                     <a:lnL w="12240">
                       <a:solidFill>
-                        <a:srgbClr val="ffffff"/>
+                        <a:srgbClr val="FFFFFF"/>
                       </a:solidFill>
                     </a:lnL>
                     <a:lnR w="12240">
                       <a:solidFill>
-                        <a:srgbClr val="ffffff"/>
+                        <a:srgbClr val="FFFFFF"/>
                       </a:solidFill>
                     </a:lnR>
                     <a:lnT w="12240">
                       <a:solidFill>
-                        <a:srgbClr val="ffffff"/>
+                        <a:srgbClr val="FFFFFF"/>
                       </a:solidFill>
                     </a:lnT>
                     <a:lnB w="12240">
                       <a:solidFill>
-                        <a:srgbClr val="ffffff"/>
+                        <a:srgbClr val="FFFFFF"/>
                       </a:solidFill>
                     </a:lnB>
                     <a:solidFill>
-                      <a:srgbClr val="e7eaec"/>
+                      <a:srgbClr val="E7EAEC"/>
                     </a:solidFill>
                   </a:tcPr>
                 </a:tc>
                 <a:tc>
                   <a:txBody>
-                    <a:bodyPr lIns="7560" rIns="7560">
-                      <a:noAutofit/>
-                    </a:bodyPr>
+                    <a:bodyPr/>
+                    <a:lstStyle/>
                     <a:p>
                       <a:pPr algn="ctr">
                         <a:lnSpc>
@@ -4215,7 +5188,7 @@
                         </a:lnSpc>
                       </a:pPr>
                       <a:r>
-                        <a:rPr b="0" lang="es-ES" sz="1200" spc="-1" strike="noStrike">
+                        <a:rPr lang="es-ES" sz="1200" b="0" strike="noStrike" spc="-1">
                           <a:solidFill>
                             <a:srgbClr val="000000"/>
                           </a:solidFill>
@@ -4224,7 +5197,7 @@
                         </a:rPr>
                         <a:t>heterocigoto</a:t>
                       </a:r>
-                      <a:endParaRPr b="0" lang="es-ES" sz="1200" spc="-1" strike="noStrike">
+                      <a:endParaRPr lang="es-ES" sz="1200" b="0" strike="noStrike" spc="-1">
                         <a:latin typeface="Arial"/>
                       </a:endParaRPr>
                     </a:p>
@@ -4232,34 +5205,33 @@
                   <a:tcPr marL="7560" marR="7560">
                     <a:lnL w="12240">
                       <a:solidFill>
-                        <a:srgbClr val="ffffff"/>
+                        <a:srgbClr val="FFFFFF"/>
                       </a:solidFill>
                     </a:lnL>
                     <a:lnR w="12240">
                       <a:solidFill>
-                        <a:srgbClr val="ffffff"/>
+                        <a:srgbClr val="FFFFFF"/>
                       </a:solidFill>
                     </a:lnR>
                     <a:lnT w="12240">
                       <a:solidFill>
-                        <a:srgbClr val="ffffff"/>
+                        <a:srgbClr val="FFFFFF"/>
                       </a:solidFill>
                     </a:lnT>
                     <a:lnB w="12240">
                       <a:solidFill>
-                        <a:srgbClr val="ffffff"/>
+                        <a:srgbClr val="FFFFFF"/>
                       </a:solidFill>
                     </a:lnB>
                     <a:solidFill>
-                      <a:srgbClr val="e7eaec"/>
+                      <a:srgbClr val="E7EAEC"/>
                     </a:solidFill>
                   </a:tcPr>
                 </a:tc>
                 <a:tc>
                   <a:txBody>
-                    <a:bodyPr lIns="7560" rIns="7560">
-                      <a:noAutofit/>
-                    </a:bodyPr>
+                    <a:bodyPr/>
+                    <a:lstStyle/>
                     <a:p>
                       <a:pPr algn="ctr">
                         <a:lnSpc>
@@ -4267,7 +5239,7 @@
                         </a:lnSpc>
                       </a:pPr>
                       <a:r>
-                        <a:rPr b="0" lang="es-ES" sz="1200" spc="-1" strike="noStrike">
+                        <a:rPr lang="es-ES" sz="1200" b="0" strike="noStrike" spc="-1">
                           <a:solidFill>
                             <a:srgbClr val="000000"/>
                           </a:solidFill>
@@ -4276,7 +5248,7 @@
                         </a:rPr>
                         <a:t>6.19 x 10-7 (mutación)</a:t>
                       </a:r>
-                      <a:endParaRPr b="0" lang="es-ES" sz="1200" spc="-1" strike="noStrike">
+                      <a:endParaRPr lang="es-ES" sz="1200" b="0" strike="noStrike" spc="-1">
                         <a:latin typeface="Arial"/>
                       </a:endParaRPr>
                     </a:p>
@@ -4284,34 +5256,33 @@
                   <a:tcPr marL="7560" marR="7560">
                     <a:lnL w="12240">
                       <a:solidFill>
-                        <a:srgbClr val="ffffff"/>
+                        <a:srgbClr val="FFFFFF"/>
                       </a:solidFill>
                     </a:lnL>
                     <a:lnR w="12240">
                       <a:solidFill>
-                        <a:srgbClr val="ffffff"/>
+                        <a:srgbClr val="FFFFFF"/>
                       </a:solidFill>
                     </a:lnR>
                     <a:lnT w="12240">
                       <a:solidFill>
-                        <a:srgbClr val="ffffff"/>
+                        <a:srgbClr val="FFFFFF"/>
                       </a:solidFill>
                     </a:lnT>
                     <a:lnB w="12240">
                       <a:solidFill>
-                        <a:srgbClr val="ffffff"/>
+                        <a:srgbClr val="FFFFFF"/>
                       </a:solidFill>
                     </a:lnB>
                     <a:solidFill>
-                      <a:srgbClr val="e7eaec"/>
+                      <a:srgbClr val="E7EAEC"/>
                     </a:solidFill>
                   </a:tcPr>
                 </a:tc>
                 <a:tc>
                   <a:txBody>
-                    <a:bodyPr lIns="7560" rIns="7560">
-                      <a:noAutofit/>
-                    </a:bodyPr>
+                    <a:bodyPr/>
+                    <a:lstStyle/>
                     <a:p>
                       <a:pPr algn="ctr">
                         <a:lnSpc>
@@ -4319,7 +5290,7 @@
                         </a:lnSpc>
                       </a:pPr>
                       <a:r>
-                        <a:rPr b="0" lang="es-ES" sz="1200" spc="-1" strike="noStrike">
+                        <a:rPr lang="es-ES" sz="1200" b="0" strike="noStrike" spc="-1">
                           <a:solidFill>
                             <a:srgbClr val="000000"/>
                           </a:solidFill>
@@ -4328,7 +5299,7 @@
                         </a:rPr>
                         <a:t>ENST00000349533.11</a:t>
                       </a:r>
-                      <a:endParaRPr b="0" lang="es-ES" sz="1200" spc="-1" strike="noStrike">
+                      <a:endParaRPr lang="es-ES" sz="1200" b="0" strike="noStrike" spc="-1">
                         <a:latin typeface="Arial"/>
                       </a:endParaRPr>
                     </a:p>
@@ -4336,34 +5307,33 @@
                   <a:tcPr marL="7560" marR="7560">
                     <a:lnL w="12240">
                       <a:solidFill>
-                        <a:srgbClr val="ffffff"/>
+                        <a:srgbClr val="FFFFFF"/>
                       </a:solidFill>
                     </a:lnL>
                     <a:lnR w="12240">
                       <a:solidFill>
-                        <a:srgbClr val="ffffff"/>
+                        <a:srgbClr val="FFFFFF"/>
                       </a:solidFill>
                     </a:lnR>
                     <a:lnT w="12240">
                       <a:solidFill>
-                        <a:srgbClr val="ffffff"/>
+                        <a:srgbClr val="FFFFFF"/>
                       </a:solidFill>
                     </a:lnT>
                     <a:lnB w="12240">
                       <a:solidFill>
-                        <a:srgbClr val="ffffff"/>
+                        <a:srgbClr val="FFFFFF"/>
                       </a:solidFill>
                     </a:lnB>
                     <a:solidFill>
-                      <a:srgbClr val="e7eaec"/>
+                      <a:srgbClr val="E7EAEC"/>
                     </a:solidFill>
                   </a:tcPr>
                 </a:tc>
                 <a:tc>
                   <a:txBody>
-                    <a:bodyPr lIns="7560" rIns="7560">
-                      <a:noAutofit/>
-                    </a:bodyPr>
+                    <a:bodyPr/>
+                    <a:lstStyle/>
                     <a:p>
                       <a:pPr algn="ctr">
                         <a:lnSpc>
@@ -4371,7 +5341,7 @@
                         </a:lnSpc>
                       </a:pPr>
                       <a:r>
-                        <a:rPr b="0" lang="es-ES" sz="1200" spc="-1" strike="noStrike">
+                        <a:rPr lang="es-ES" sz="1200" b="0" strike="noStrike" spc="-1">
                           <a:solidFill>
                             <a:srgbClr val="000000"/>
                           </a:solidFill>
@@ -4380,7 +5350,7 @@
                         </a:rPr>
                         <a:t>ENSP00000330393.7:p.Ser597IlefsTer20</a:t>
                       </a:r>
-                      <a:endParaRPr b="0" lang="es-ES" sz="1200" spc="-1" strike="noStrike">
+                      <a:endParaRPr lang="es-ES" sz="1200" b="0" strike="noStrike" spc="-1">
                         <a:latin typeface="Arial"/>
                       </a:endParaRPr>
                     </a:p>
@@ -4388,34 +5358,33 @@
                   <a:tcPr marL="7560" marR="7560">
                     <a:lnL w="12240">
                       <a:solidFill>
-                        <a:srgbClr val="ffffff"/>
+                        <a:srgbClr val="FFFFFF"/>
                       </a:solidFill>
                     </a:lnL>
                     <a:lnR w="12240">
                       <a:solidFill>
-                        <a:srgbClr val="ffffff"/>
+                        <a:srgbClr val="FFFFFF"/>
                       </a:solidFill>
                     </a:lnR>
                     <a:lnT w="12240">
                       <a:solidFill>
-                        <a:srgbClr val="ffffff"/>
+                        <a:srgbClr val="FFFFFF"/>
                       </a:solidFill>
                     </a:lnT>
                     <a:lnB w="12240">
                       <a:solidFill>
-                        <a:srgbClr val="ffffff"/>
+                        <a:srgbClr val="FFFFFF"/>
                       </a:solidFill>
                     </a:lnB>
                     <a:solidFill>
-                      <a:srgbClr val="e7eaec"/>
+                      <a:srgbClr val="E7EAEC"/>
                     </a:solidFill>
                   </a:tcPr>
                 </a:tc>
                 <a:tc>
                   <a:txBody>
-                    <a:bodyPr lIns="7560" rIns="7560">
-                      <a:noAutofit/>
-                    </a:bodyPr>
+                    <a:bodyPr/>
+                    <a:lstStyle/>
                     <a:p>
                       <a:pPr algn="ctr">
                         <a:lnSpc>
@@ -4423,7 +5392,7 @@
                         </a:lnSpc>
                       </a:pPr>
                       <a:r>
-                        <a:rPr b="0" lang="es-ES" sz="1200" spc="-1" strike="noStrike">
+                        <a:rPr lang="es-ES" sz="1200" b="0" strike="noStrike" spc="-1">
                           <a:solidFill>
                             <a:srgbClr val="000000"/>
                           </a:solidFill>
@@ -4432,7 +5401,7 @@
                         </a:rPr>
                         <a:t>Frameshift</a:t>
                       </a:r>
-                      <a:endParaRPr b="0" lang="es-ES" sz="1200" spc="-1" strike="noStrike">
+                      <a:endParaRPr lang="es-ES" sz="1200" b="0" strike="noStrike" spc="-1">
                         <a:latin typeface="Arial"/>
                       </a:endParaRPr>
                     </a:p>
@@ -4440,34 +5409,33 @@
                   <a:tcPr marL="7560" marR="7560">
                     <a:lnL w="12240">
                       <a:solidFill>
-                        <a:srgbClr val="ffffff"/>
+                        <a:srgbClr val="FFFFFF"/>
                       </a:solidFill>
                     </a:lnL>
                     <a:lnR w="12240">
                       <a:solidFill>
-                        <a:srgbClr val="ffffff"/>
+                        <a:srgbClr val="FFFFFF"/>
                       </a:solidFill>
                     </a:lnR>
                     <a:lnT w="12240">
                       <a:solidFill>
-                        <a:srgbClr val="ffffff"/>
+                        <a:srgbClr val="FFFFFF"/>
                       </a:solidFill>
                     </a:lnT>
                     <a:lnB w="12240">
                       <a:solidFill>
-                        <a:srgbClr val="ffffff"/>
+                        <a:srgbClr val="FFFFFF"/>
                       </a:solidFill>
                     </a:lnB>
                     <a:solidFill>
-                      <a:srgbClr val="e7eaec"/>
+                      <a:srgbClr val="E7EAEC"/>
                     </a:solidFill>
                   </a:tcPr>
                 </a:tc>
                 <a:tc>
                   <a:txBody>
-                    <a:bodyPr lIns="7560" rIns="7560">
-                      <a:noAutofit/>
-                    </a:bodyPr>
+                    <a:bodyPr/>
+                    <a:lstStyle/>
                     <a:p>
                       <a:pPr algn="ctr">
                         <a:lnSpc>
@@ -4475,7 +5443,7 @@
                         </a:lnSpc>
                       </a:pPr>
                       <a:r>
-                        <a:rPr b="0" lang="es-ES" sz="1200" spc="-1" strike="noStrike">
+                        <a:rPr lang="es-ES" sz="1200" b="0" strike="noStrike" spc="-1">
                           <a:solidFill>
                             <a:srgbClr val="000000"/>
                           </a:solidFill>
@@ -4484,7 +5452,7 @@
                         </a:rPr>
                         <a:t>???</a:t>
                       </a:r>
-                      <a:endParaRPr b="0" lang="es-ES" sz="1200" spc="-1" strike="noStrike">
+                      <a:endParaRPr lang="es-ES" sz="1200" b="0" strike="noStrike" spc="-1">
                         <a:latin typeface="Arial"/>
                       </a:endParaRPr>
                     </a:p>
@@ -4492,34 +5460,33 @@
                   <a:tcPr marL="7560" marR="7560">
                     <a:lnL w="12240">
                       <a:solidFill>
-                        <a:srgbClr val="ffffff"/>
+                        <a:srgbClr val="FFFFFF"/>
                       </a:solidFill>
                     </a:lnL>
                     <a:lnR w="12240">
                       <a:solidFill>
-                        <a:srgbClr val="ffffff"/>
+                        <a:srgbClr val="FFFFFF"/>
                       </a:solidFill>
                     </a:lnR>
                     <a:lnT w="12240">
                       <a:solidFill>
-                        <a:srgbClr val="ffffff"/>
+                        <a:srgbClr val="FFFFFF"/>
                       </a:solidFill>
                     </a:lnT>
                     <a:lnB w="12240">
                       <a:solidFill>
-                        <a:srgbClr val="ffffff"/>
+                        <a:srgbClr val="FFFFFF"/>
                       </a:solidFill>
                     </a:lnB>
                     <a:solidFill>
-                      <a:srgbClr val="e7eaec"/>
+                      <a:srgbClr val="E7EAEC"/>
                     </a:solidFill>
                   </a:tcPr>
                 </a:tc>
                 <a:tc>
                   <a:txBody>
-                    <a:bodyPr lIns="7560" rIns="7560">
-                      <a:noAutofit/>
-                    </a:bodyPr>
+                    <a:bodyPr/>
+                    <a:lstStyle/>
                     <a:p>
                       <a:pPr algn="ctr">
                         <a:lnSpc>
@@ -4527,7 +5494,7 @@
                         </a:lnSpc>
                       </a:pPr>
                       <a:r>
-                        <a:rPr b="0" lang="es-ES" sz="1200" spc="-1" strike="noStrike">
+                        <a:rPr lang="es-ES" sz="1200" b="0" strike="noStrike" spc="-1">
                           <a:solidFill>
                             <a:srgbClr val="000000"/>
                           </a:solidFill>
@@ -4536,7 +5503,7 @@
                         </a:rPr>
                         <a:t>???</a:t>
                       </a:r>
-                      <a:endParaRPr b="0" lang="es-ES" sz="1200" spc="-1" strike="noStrike">
+                      <a:endParaRPr lang="es-ES" sz="1200" b="0" strike="noStrike" spc="-1">
                         <a:latin typeface="Arial"/>
                       </a:endParaRPr>
                     </a:p>
@@ -4544,34 +5511,33 @@
                   <a:tcPr marL="7560" marR="7560">
                     <a:lnL w="12240">
                       <a:solidFill>
-                        <a:srgbClr val="ffffff"/>
+                        <a:srgbClr val="FFFFFF"/>
                       </a:solidFill>
                     </a:lnL>
                     <a:lnR w="12240">
                       <a:solidFill>
-                        <a:srgbClr val="ffffff"/>
+                        <a:srgbClr val="FFFFFF"/>
                       </a:solidFill>
                     </a:lnR>
                     <a:lnT w="12240">
                       <a:solidFill>
-                        <a:srgbClr val="ffffff"/>
+                        <a:srgbClr val="FFFFFF"/>
                       </a:solidFill>
                     </a:lnT>
                     <a:lnB w="12240">
                       <a:solidFill>
-                        <a:srgbClr val="ffffff"/>
+                        <a:srgbClr val="FFFFFF"/>
                       </a:solidFill>
                     </a:lnB>
                     <a:solidFill>
-                      <a:srgbClr val="e7eaec"/>
+                      <a:srgbClr val="E7EAEC"/>
                     </a:solidFill>
                   </a:tcPr>
                 </a:tc>
                 <a:tc>
                   <a:txBody>
-                    <a:bodyPr lIns="7560" rIns="7560">
-                      <a:noAutofit/>
-                    </a:bodyPr>
+                    <a:bodyPr/>
+                    <a:lstStyle/>
                     <a:p>
                       <a:pPr algn="ctr">
                         <a:lnSpc>
@@ -4579,7 +5545,7 @@
                         </a:lnSpc>
                       </a:pPr>
                       <a:r>
-                        <a:rPr b="0" lang="es-ES" sz="1200" spc="-1" strike="noStrike">
+                        <a:rPr lang="es-ES" sz="1200" b="0" strike="noStrike" spc="-1">
                           <a:solidFill>
                             <a:srgbClr val="000000"/>
                           </a:solidFill>
@@ -4588,7 +5554,7 @@
                         </a:rPr>
                         <a:t>#614963</a:t>
                       </a:r>
-                      <a:endParaRPr b="0" lang="es-ES" sz="1200" spc="-1" strike="noStrike">
+                      <a:endParaRPr lang="es-ES" sz="1200" b="0" strike="noStrike" spc="-1">
                         <a:latin typeface="Arial"/>
                       </a:endParaRPr>
                     </a:p>
@@ -4596,34 +5562,33 @@
                   <a:tcPr marL="7560" marR="7560">
                     <a:lnL w="12240">
                       <a:solidFill>
-                        <a:srgbClr val="ffffff"/>
+                        <a:srgbClr val="FFFFFF"/>
                       </a:solidFill>
                     </a:lnL>
                     <a:lnR w="12240">
                       <a:solidFill>
-                        <a:srgbClr val="ffffff"/>
+                        <a:srgbClr val="FFFFFF"/>
                       </a:solidFill>
                     </a:lnR>
                     <a:lnT w="12240">
                       <a:solidFill>
-                        <a:srgbClr val="ffffff"/>
+                        <a:srgbClr val="FFFFFF"/>
                       </a:solidFill>
                     </a:lnT>
                     <a:lnB w="12240">
                       <a:solidFill>
-                        <a:srgbClr val="ffffff"/>
+                        <a:srgbClr val="FFFFFF"/>
                       </a:solidFill>
                     </a:lnB>
                     <a:solidFill>
-                      <a:srgbClr val="e7eaec"/>
+                      <a:srgbClr val="E7EAEC"/>
                     </a:solidFill>
                   </a:tcPr>
                 </a:tc>
                 <a:tc>
                   <a:txBody>
-                    <a:bodyPr lIns="7560" rIns="7560">
-                      <a:noAutofit/>
-                    </a:bodyPr>
+                    <a:bodyPr/>
+                    <a:lstStyle/>
                     <a:p>
                       <a:pPr algn="ctr">
                         <a:lnSpc>
@@ -4631,7 +5596,7 @@
                         </a:lnSpc>
                       </a:pPr>
                       <a:r>
-                        <a:rPr b="0" lang="es-ES" sz="1200" spc="-1" strike="noStrike">
+                        <a:rPr lang="es-ES" sz="1200" b="0" strike="noStrike" spc="-1">
                           <a:solidFill>
                             <a:srgbClr val="000000"/>
                           </a:solidFill>
@@ -4640,7 +5605,7 @@
                         </a:rPr>
                         <a:t>Autosómico recesiva</a:t>
                       </a:r>
-                      <a:endParaRPr b="0" lang="es-ES" sz="1200" spc="-1" strike="noStrike">
+                      <a:endParaRPr lang="es-ES" sz="1200" b="0" strike="noStrike" spc="-1">
                         <a:latin typeface="Arial"/>
                       </a:endParaRPr>
                     </a:p>
@@ -4648,34 +5613,33 @@
                   <a:tcPr marL="7560" marR="7560">
                     <a:lnL w="12240">
                       <a:solidFill>
-                        <a:srgbClr val="ffffff"/>
+                        <a:srgbClr val="FFFFFF"/>
                       </a:solidFill>
                     </a:lnL>
                     <a:lnR w="12240">
                       <a:solidFill>
-                        <a:srgbClr val="ffffff"/>
+                        <a:srgbClr val="FFFFFF"/>
                       </a:solidFill>
                     </a:lnR>
                     <a:lnT w="12240">
                       <a:solidFill>
-                        <a:srgbClr val="ffffff"/>
+                        <a:srgbClr val="FFFFFF"/>
                       </a:solidFill>
                     </a:lnT>
                     <a:lnB w="12240">
                       <a:solidFill>
-                        <a:srgbClr val="ffffff"/>
+                        <a:srgbClr val="FFFFFF"/>
                       </a:solidFill>
                     </a:lnB>
                     <a:solidFill>
-                      <a:srgbClr val="e7eaec"/>
+                      <a:srgbClr val="E7EAEC"/>
                     </a:solidFill>
                   </a:tcPr>
                 </a:tc>
                 <a:tc>
                   <a:txBody>
-                    <a:bodyPr lIns="7560" rIns="7560">
-                      <a:noAutofit/>
-                    </a:bodyPr>
+                    <a:bodyPr/>
+                    <a:lstStyle/>
                     <a:p>
                       <a:pPr algn="ctr">
                         <a:lnSpc>
@@ -4683,7 +5647,7 @@
                         </a:lnSpc>
                       </a:pPr>
                       <a:r>
-                        <a:rPr b="0" lang="es-ES" sz="1200" spc="-1" strike="noStrike">
+                        <a:rPr lang="es-ES" sz="1200" b="0" strike="noStrike" spc="-1">
                           <a:solidFill>
                             <a:srgbClr val="000000"/>
                           </a:solidFill>
@@ -4692,7 +5656,7 @@
                         </a:rPr>
                         <a:t>Vías de señalización de adipocitocinas y hormonales de AMPK, JAK y STAT</a:t>
                       </a:r>
-                      <a:endParaRPr b="0" lang="es-ES" sz="1200" spc="-1" strike="noStrike">
+                      <a:endParaRPr lang="es-ES" sz="1200" b="0" strike="noStrike" spc="-1">
                         <a:latin typeface="Arial"/>
                       </a:endParaRPr>
                     </a:p>
@@ -4700,36 +5664,40 @@
                   <a:tcPr marL="7560" marR="7560">
                     <a:lnL w="12240">
                       <a:solidFill>
-                        <a:srgbClr val="ffffff"/>
+                        <a:srgbClr val="FFFFFF"/>
                       </a:solidFill>
                     </a:lnL>
                     <a:lnR w="12240">
                       <a:solidFill>
-                        <a:srgbClr val="ffffff"/>
+                        <a:srgbClr val="FFFFFF"/>
                       </a:solidFill>
                     </a:lnR>
                     <a:lnT w="12240">
                       <a:solidFill>
-                        <a:srgbClr val="ffffff"/>
+                        <a:srgbClr val="FFFFFF"/>
                       </a:solidFill>
                     </a:lnT>
                     <a:lnB w="12240">
                       <a:solidFill>
-                        <a:srgbClr val="ffffff"/>
+                        <a:srgbClr val="FFFFFF"/>
                       </a:solidFill>
                     </a:lnB>
                     <a:solidFill>
-                      <a:srgbClr val="e7eaec"/>
+                      <a:srgbClr val="E7EAEC"/>
                     </a:solidFill>
                   </a:tcPr>
                 </a:tc>
+                <a:extLst>
+                  <a:ext uri="{0D108BD9-81ED-4DB2-BD59-A6C34878D82A}">
+                    <a16:rowId xmlns:a16="http://schemas.microsoft.com/office/drawing/2014/main" val="10001"/>
+                  </a:ext>
+                </a:extLst>
               </a:tr>
               <a:tr h="603720">
                 <a:tc>
                   <a:txBody>
-                    <a:bodyPr lIns="7560" rIns="7560">
-                      <a:noAutofit/>
-                    </a:bodyPr>
+                    <a:bodyPr/>
+                    <a:lstStyle/>
                     <a:p>
                       <a:pPr>
                         <a:lnSpc>
@@ -4737,7 +5705,7 @@
                         </a:lnSpc>
                       </a:pPr>
                       <a:r>
-                        <a:rPr b="0" lang="es-ES" sz="1200" spc="-1" strike="noStrike">
+                        <a:rPr lang="es-ES" sz="1200" b="0" strike="noStrike" spc="-1">
                           <a:solidFill>
                             <a:srgbClr val="000000"/>
                           </a:solidFill>
@@ -4746,7 +5714,7 @@
                         </a:rPr>
                         <a:t>MC4R</a:t>
                       </a:r>
-                      <a:endParaRPr b="0" lang="es-ES" sz="1200" spc="-1" strike="noStrike">
+                      <a:endParaRPr lang="es-ES" sz="1200" b="0" strike="noStrike" spc="-1">
                         <a:latin typeface="Arial"/>
                       </a:endParaRPr>
                     </a:p>
@@ -4754,34 +5722,33 @@
                   <a:tcPr marL="7560" marR="7560">
                     <a:lnL w="12240">
                       <a:solidFill>
-                        <a:srgbClr val="ffffff"/>
+                        <a:srgbClr val="FFFFFF"/>
                       </a:solidFill>
                     </a:lnL>
                     <a:lnR w="12240">
                       <a:solidFill>
-                        <a:srgbClr val="ffffff"/>
+                        <a:srgbClr val="FFFFFF"/>
                       </a:solidFill>
                     </a:lnR>
                     <a:lnT w="12240">
                       <a:solidFill>
-                        <a:srgbClr val="ffffff"/>
+                        <a:srgbClr val="FFFFFF"/>
                       </a:solidFill>
                     </a:lnT>
                     <a:lnB w="12240">
                       <a:solidFill>
-                        <a:srgbClr val="ffffff"/>
+                        <a:srgbClr val="FFFFFF"/>
                       </a:solidFill>
                     </a:lnB>
                     <a:solidFill>
-                      <a:srgbClr val="e7eaec"/>
+                      <a:srgbClr val="E7EAEC"/>
                     </a:solidFill>
                   </a:tcPr>
                 </a:tc>
                 <a:tc>
                   <a:txBody>
-                    <a:bodyPr lIns="7560" rIns="7560">
-                      <a:noAutofit/>
-                    </a:bodyPr>
+                    <a:bodyPr/>
+                    <a:lstStyle/>
                     <a:p>
                       <a:pPr algn="ctr">
                         <a:lnSpc>
@@ -4789,7 +5756,7 @@
                         </a:lnSpc>
                       </a:pPr>
                       <a:r>
-                        <a:rPr b="0" lang="es-ES" sz="1200" spc="-1" strike="noStrike">
+                        <a:rPr lang="es-ES" sz="1200" b="0" strike="noStrike" spc="-1">
                           <a:solidFill>
                             <a:srgbClr val="000000"/>
                           </a:solidFill>
@@ -4798,7 +5765,7 @@
                         </a:rPr>
                         <a:t>18:60371535</a:t>
                       </a:r>
-                      <a:endParaRPr b="0" lang="es-ES" sz="1200" spc="-1" strike="noStrike">
+                      <a:endParaRPr lang="es-ES" sz="1200" b="0" strike="noStrike" spc="-1">
                         <a:latin typeface="Arial"/>
                       </a:endParaRPr>
                     </a:p>
@@ -4806,34 +5773,33 @@
                   <a:tcPr marL="7560" marR="7560">
                     <a:lnL w="12240">
                       <a:solidFill>
-                        <a:srgbClr val="ffffff"/>
+                        <a:srgbClr val="FFFFFF"/>
                       </a:solidFill>
                     </a:lnL>
                     <a:lnR w="12240">
                       <a:solidFill>
-                        <a:srgbClr val="ffffff"/>
+                        <a:srgbClr val="FFFFFF"/>
                       </a:solidFill>
                     </a:lnR>
                     <a:lnT w="12240">
                       <a:solidFill>
-                        <a:srgbClr val="ffffff"/>
+                        <a:srgbClr val="FFFFFF"/>
                       </a:solidFill>
                     </a:lnT>
                     <a:lnB w="12240">
                       <a:solidFill>
-                        <a:srgbClr val="ffffff"/>
+                        <a:srgbClr val="FFFFFF"/>
                       </a:solidFill>
                     </a:lnB>
                     <a:solidFill>
-                      <a:srgbClr val="e7eaec"/>
+                      <a:srgbClr val="E7EAEC"/>
                     </a:solidFill>
                   </a:tcPr>
                 </a:tc>
                 <a:tc>
                   <a:txBody>
-                    <a:bodyPr lIns="7560" rIns="7560">
-                      <a:noAutofit/>
-                    </a:bodyPr>
+                    <a:bodyPr/>
+                    <a:lstStyle/>
                     <a:p>
                       <a:pPr algn="ctr">
                         <a:lnSpc>
@@ -4841,7 +5807,7 @@
                         </a:lnSpc>
                       </a:pPr>
                       <a:r>
-                        <a:rPr b="0" lang="es-ES" sz="1200" spc="-1" strike="noStrike">
+                        <a:rPr lang="es-ES" sz="1200" b="0" strike="noStrike" spc="-1">
                           <a:solidFill>
                             <a:srgbClr val="000000"/>
                           </a:solidFill>
@@ -4850,7 +5816,7 @@
                         </a:rPr>
                         <a:t>ENST00000299766.5:c.815C&gt;A</a:t>
                       </a:r>
-                      <a:endParaRPr b="0" lang="es-ES" sz="1200" spc="-1" strike="noStrike">
+                      <a:endParaRPr lang="es-ES" sz="1200" b="0" strike="noStrike" spc="-1">
                         <a:latin typeface="Arial"/>
                       </a:endParaRPr>
                     </a:p>
@@ -4858,34 +5824,33 @@
                   <a:tcPr marL="7560" marR="7560">
                     <a:lnL w="12240">
                       <a:solidFill>
-                        <a:srgbClr val="ffffff"/>
+                        <a:srgbClr val="FFFFFF"/>
                       </a:solidFill>
                     </a:lnL>
                     <a:lnR w="12240">
                       <a:solidFill>
-                        <a:srgbClr val="ffffff"/>
+                        <a:srgbClr val="FFFFFF"/>
                       </a:solidFill>
                     </a:lnR>
                     <a:lnT w="12240">
                       <a:solidFill>
-                        <a:srgbClr val="ffffff"/>
+                        <a:srgbClr val="FFFFFF"/>
                       </a:solidFill>
                     </a:lnT>
                     <a:lnB w="12240">
                       <a:solidFill>
-                        <a:srgbClr val="ffffff"/>
+                        <a:srgbClr val="FFFFFF"/>
                       </a:solidFill>
                     </a:lnB>
                     <a:solidFill>
-                      <a:srgbClr val="e7eaec"/>
+                      <a:srgbClr val="E7EAEC"/>
                     </a:solidFill>
                   </a:tcPr>
                 </a:tc>
                 <a:tc>
                   <a:txBody>
-                    <a:bodyPr lIns="7560" rIns="7560">
-                      <a:noAutofit/>
-                    </a:bodyPr>
+                    <a:bodyPr/>
+                    <a:lstStyle/>
                     <a:p>
                       <a:pPr algn="ctr">
                         <a:lnSpc>
@@ -4893,7 +5858,7 @@
                         </a:lnSpc>
                       </a:pPr>
                       <a:r>
-                        <a:rPr b="0" lang="es-ES" sz="1200" spc="-1" strike="noStrike">
+                        <a:rPr lang="es-ES" sz="1200" b="0" strike="noStrike" spc="-1">
                           <a:solidFill>
                             <a:srgbClr val="000000"/>
                           </a:solidFill>
@@ -4902,7 +5867,7 @@
                         </a:rPr>
                         <a:t>SNP</a:t>
                       </a:r>
-                      <a:endParaRPr b="0" lang="es-ES" sz="1200" spc="-1" strike="noStrike">
+                      <a:endParaRPr lang="es-ES" sz="1200" b="0" strike="noStrike" spc="-1">
                         <a:latin typeface="Arial"/>
                       </a:endParaRPr>
                     </a:p>
@@ -4910,34 +5875,33 @@
                   <a:tcPr marL="7560" marR="7560">
                     <a:lnL w="12240">
                       <a:solidFill>
-                        <a:srgbClr val="ffffff"/>
+                        <a:srgbClr val="FFFFFF"/>
                       </a:solidFill>
                     </a:lnL>
                     <a:lnR w="12240">
                       <a:solidFill>
-                        <a:srgbClr val="ffffff"/>
+                        <a:srgbClr val="FFFFFF"/>
                       </a:solidFill>
                     </a:lnR>
                     <a:lnT w="12240">
                       <a:solidFill>
-                        <a:srgbClr val="ffffff"/>
+                        <a:srgbClr val="FFFFFF"/>
                       </a:solidFill>
                     </a:lnT>
                     <a:lnB w="12240">
                       <a:solidFill>
-                        <a:srgbClr val="ffffff"/>
+                        <a:srgbClr val="FFFFFF"/>
                       </a:solidFill>
                     </a:lnB>
                     <a:solidFill>
-                      <a:srgbClr val="e7eaec"/>
+                      <a:srgbClr val="E7EAEC"/>
                     </a:solidFill>
                   </a:tcPr>
                 </a:tc>
                 <a:tc>
                   <a:txBody>
-                    <a:bodyPr lIns="7560" rIns="7560">
-                      <a:noAutofit/>
-                    </a:bodyPr>
+                    <a:bodyPr/>
+                    <a:lstStyle/>
                     <a:p>
                       <a:pPr algn="ctr">
                         <a:lnSpc>
@@ -4945,7 +5909,7 @@
                         </a:lnSpc>
                       </a:pPr>
                       <a:r>
-                        <a:rPr b="0" lang="es-ES" sz="1200" spc="-1" strike="noStrike">
+                        <a:rPr lang="es-ES" sz="1200" b="0" strike="noStrike" spc="-1">
                           <a:solidFill>
                             <a:srgbClr val="000000"/>
                           </a:solidFill>
@@ -4954,7 +5918,7 @@
                         </a:rPr>
                         <a:t>heterocigoto</a:t>
                       </a:r>
-                      <a:endParaRPr b="0" lang="es-ES" sz="1200" spc="-1" strike="noStrike">
+                      <a:endParaRPr lang="es-ES" sz="1200" b="0" strike="noStrike" spc="-1">
                         <a:latin typeface="Arial"/>
                       </a:endParaRPr>
                     </a:p>
@@ -4962,34 +5926,33 @@
                   <a:tcPr marL="7560" marR="7560">
                     <a:lnL w="12240">
                       <a:solidFill>
-                        <a:srgbClr val="ffffff"/>
+                        <a:srgbClr val="FFFFFF"/>
                       </a:solidFill>
                     </a:lnL>
                     <a:lnR w="12240">
                       <a:solidFill>
-                        <a:srgbClr val="ffffff"/>
+                        <a:srgbClr val="FFFFFF"/>
                       </a:solidFill>
                     </a:lnR>
                     <a:lnT w="12240">
                       <a:solidFill>
-                        <a:srgbClr val="ffffff"/>
+                        <a:srgbClr val="FFFFFF"/>
                       </a:solidFill>
                     </a:lnT>
                     <a:lnB w="12240">
                       <a:solidFill>
-                        <a:srgbClr val="ffffff"/>
+                        <a:srgbClr val="FFFFFF"/>
                       </a:solidFill>
                     </a:lnB>
                     <a:solidFill>
-                      <a:srgbClr val="e7eaec"/>
+                      <a:srgbClr val="E7EAEC"/>
                     </a:solidFill>
                   </a:tcPr>
                 </a:tc>
                 <a:tc>
                   <a:txBody>
-                    <a:bodyPr lIns="7560" rIns="7560">
-                      <a:noAutofit/>
-                    </a:bodyPr>
+                    <a:bodyPr/>
+                    <a:lstStyle/>
                     <a:p>
                       <a:pPr algn="ctr">
                         <a:lnSpc>
@@ -4997,7 +5960,7 @@
                         </a:lnSpc>
                       </a:pPr>
                       <a:r>
-                        <a:rPr b="0" lang="es-ES" sz="1200" spc="-1" strike="noStrike">
+                        <a:rPr lang="es-ES" sz="1200" b="0" strike="noStrike" spc="-1">
                           <a:solidFill>
                             <a:srgbClr val="000000"/>
                           </a:solidFill>
@@ -5006,7 +5969,7 @@
                         </a:rPr>
                         <a:t>6.195x10-7</a:t>
                       </a:r>
-                      <a:endParaRPr b="0" lang="es-ES" sz="1200" spc="-1" strike="noStrike">
+                      <a:endParaRPr lang="es-ES" sz="1200" b="0" strike="noStrike" spc="-1">
                         <a:latin typeface="Arial"/>
                       </a:endParaRPr>
                     </a:p>
@@ -5017,7 +5980,7 @@
                         </a:lnSpc>
                       </a:pPr>
                       <a:r>
-                        <a:rPr b="0" lang="es-ES" sz="1200" spc="-1" strike="noStrike">
+                        <a:rPr lang="es-ES" sz="1200" b="0" strike="noStrike" spc="-1">
                           <a:solidFill>
                             <a:srgbClr val="000000"/>
                           </a:solidFill>
@@ -5026,7 +5989,7 @@
                         </a:rPr>
                         <a:t>(mutación)</a:t>
                       </a:r>
-                      <a:endParaRPr b="0" lang="es-ES" sz="1200" spc="-1" strike="noStrike">
+                      <a:endParaRPr lang="es-ES" sz="1200" b="0" strike="noStrike" spc="-1">
                         <a:latin typeface="Arial"/>
                       </a:endParaRPr>
                     </a:p>
@@ -5034,34 +5997,33 @@
                   <a:tcPr marL="7560" marR="7560">
                     <a:lnL w="12240">
                       <a:solidFill>
-                        <a:srgbClr val="ffffff"/>
+                        <a:srgbClr val="FFFFFF"/>
                       </a:solidFill>
                     </a:lnL>
                     <a:lnR w="12240">
                       <a:solidFill>
-                        <a:srgbClr val="ffffff"/>
+                        <a:srgbClr val="FFFFFF"/>
                       </a:solidFill>
                     </a:lnR>
                     <a:lnT w="12240">
                       <a:solidFill>
-                        <a:srgbClr val="ffffff"/>
+                        <a:srgbClr val="FFFFFF"/>
                       </a:solidFill>
                     </a:lnT>
                     <a:lnB w="12240">
                       <a:solidFill>
-                        <a:srgbClr val="ffffff"/>
+                        <a:srgbClr val="FFFFFF"/>
                       </a:solidFill>
                     </a:lnB>
                     <a:solidFill>
-                      <a:srgbClr val="e7eaec"/>
+                      <a:srgbClr val="E7EAEC"/>
                     </a:solidFill>
                   </a:tcPr>
                 </a:tc>
                 <a:tc>
                   <a:txBody>
-                    <a:bodyPr lIns="7560" rIns="7560">
-                      <a:noAutofit/>
-                    </a:bodyPr>
+                    <a:bodyPr/>
+                    <a:lstStyle/>
                     <a:p>
                       <a:pPr algn="ctr">
                         <a:lnSpc>
@@ -5069,7 +6031,7 @@
                         </a:lnSpc>
                       </a:pPr>
                       <a:r>
-                        <a:rPr b="0" lang="es-ES" sz="1200" spc="-1" strike="noStrike">
+                        <a:rPr lang="es-ES" sz="1200" b="0" strike="noStrike" spc="-1">
                           <a:solidFill>
                             <a:srgbClr val="000000"/>
                           </a:solidFill>
@@ -5078,7 +6040,7 @@
                         </a:rPr>
                         <a:t>ENST00000299766.5</a:t>
                       </a:r>
-                      <a:endParaRPr b="0" lang="es-ES" sz="1200" spc="-1" strike="noStrike">
+                      <a:endParaRPr lang="es-ES" sz="1200" b="0" strike="noStrike" spc="-1">
                         <a:latin typeface="Arial"/>
                       </a:endParaRPr>
                     </a:p>
@@ -5086,34 +6048,33 @@
                   <a:tcPr marL="7560" marR="7560">
                     <a:lnL w="12240">
                       <a:solidFill>
-                        <a:srgbClr val="ffffff"/>
+                        <a:srgbClr val="FFFFFF"/>
                       </a:solidFill>
                     </a:lnL>
                     <a:lnR w="12240">
                       <a:solidFill>
-                        <a:srgbClr val="ffffff"/>
+                        <a:srgbClr val="FFFFFF"/>
                       </a:solidFill>
                     </a:lnR>
                     <a:lnT w="12240">
                       <a:solidFill>
-                        <a:srgbClr val="ffffff"/>
+                        <a:srgbClr val="FFFFFF"/>
                       </a:solidFill>
                     </a:lnT>
                     <a:lnB w="12240">
                       <a:solidFill>
-                        <a:srgbClr val="ffffff"/>
+                        <a:srgbClr val="FFFFFF"/>
                       </a:solidFill>
                     </a:lnB>
                     <a:solidFill>
-                      <a:srgbClr val="e7eaec"/>
+                      <a:srgbClr val="E7EAEC"/>
                     </a:solidFill>
                   </a:tcPr>
                 </a:tc>
                 <a:tc>
                   <a:txBody>
-                    <a:bodyPr lIns="7560" rIns="7560">
-                      <a:noAutofit/>
-                    </a:bodyPr>
+                    <a:bodyPr/>
+                    <a:lstStyle/>
                     <a:p>
                       <a:pPr algn="ctr">
                         <a:lnSpc>
@@ -5121,7 +6082,7 @@
                         </a:lnSpc>
                       </a:pPr>
                       <a:r>
-                        <a:rPr b="0" lang="es-ES" sz="1200" spc="-1" strike="noStrike">
+                        <a:rPr lang="es-ES" sz="1200" b="0" strike="noStrike" spc="-1">
                           <a:solidFill>
                             <a:srgbClr val="000000"/>
                           </a:solidFill>
@@ -5130,7 +6091,7 @@
                         </a:rPr>
                         <a:t>ENSP00000299766.3:p.Pro272His</a:t>
                       </a:r>
-                      <a:endParaRPr b="0" lang="es-ES" sz="1200" spc="-1" strike="noStrike">
+                      <a:endParaRPr lang="es-ES" sz="1200" b="0" strike="noStrike" spc="-1">
                         <a:latin typeface="Arial"/>
                       </a:endParaRPr>
                     </a:p>
@@ -5138,34 +6099,33 @@
                   <a:tcPr marL="7560" marR="7560">
                     <a:lnL w="12240">
                       <a:solidFill>
-                        <a:srgbClr val="ffffff"/>
+                        <a:srgbClr val="FFFFFF"/>
                       </a:solidFill>
                     </a:lnL>
                     <a:lnR w="12240">
                       <a:solidFill>
-                        <a:srgbClr val="ffffff"/>
+                        <a:srgbClr val="FFFFFF"/>
                       </a:solidFill>
                     </a:lnR>
                     <a:lnT w="12240">
                       <a:solidFill>
-                        <a:srgbClr val="ffffff"/>
+                        <a:srgbClr val="FFFFFF"/>
                       </a:solidFill>
                     </a:lnT>
                     <a:lnB w="12240">
                       <a:solidFill>
-                        <a:srgbClr val="ffffff"/>
+                        <a:srgbClr val="FFFFFF"/>
                       </a:solidFill>
                     </a:lnB>
                     <a:solidFill>
-                      <a:srgbClr val="e7eaec"/>
+                      <a:srgbClr val="E7EAEC"/>
                     </a:solidFill>
                   </a:tcPr>
                 </a:tc>
                 <a:tc>
                   <a:txBody>
-                    <a:bodyPr lIns="7560" rIns="7560">
-                      <a:noAutofit/>
-                    </a:bodyPr>
+                    <a:bodyPr/>
+                    <a:lstStyle/>
                     <a:p>
                       <a:pPr algn="ctr">
                         <a:lnSpc>
@@ -5173,7 +6133,7 @@
                         </a:lnSpc>
                       </a:pPr>
                       <a:r>
-                        <a:rPr b="0" lang="es-ES" sz="1200" spc="-1" strike="noStrike">
+                        <a:rPr lang="es-ES" sz="1200" b="0" strike="noStrike" spc="-1">
                           <a:solidFill>
                             <a:srgbClr val="000000"/>
                           </a:solidFill>
@@ -5182,7 +6142,7 @@
                         </a:rPr>
                         <a:t>Missense</a:t>
                       </a:r>
-                      <a:endParaRPr b="0" lang="es-ES" sz="1200" spc="-1" strike="noStrike">
+                      <a:endParaRPr lang="es-ES" sz="1200" b="0" strike="noStrike" spc="-1">
                         <a:latin typeface="Arial"/>
                       </a:endParaRPr>
                     </a:p>
@@ -5190,34 +6150,33 @@
                   <a:tcPr marL="7560" marR="7560">
                     <a:lnL w="12240">
                       <a:solidFill>
-                        <a:srgbClr val="ffffff"/>
+                        <a:srgbClr val="FFFFFF"/>
                       </a:solidFill>
                     </a:lnL>
                     <a:lnR w="12240">
                       <a:solidFill>
-                        <a:srgbClr val="ffffff"/>
+                        <a:srgbClr val="FFFFFF"/>
                       </a:solidFill>
                     </a:lnR>
                     <a:lnT w="12240">
                       <a:solidFill>
-                        <a:srgbClr val="ffffff"/>
+                        <a:srgbClr val="FFFFFF"/>
                       </a:solidFill>
                     </a:lnT>
                     <a:lnB w="12240">
                       <a:solidFill>
-                        <a:srgbClr val="ffffff"/>
+                        <a:srgbClr val="FFFFFF"/>
                       </a:solidFill>
                     </a:lnB>
                     <a:solidFill>
-                      <a:srgbClr val="e7eaec"/>
+                      <a:srgbClr val="E7EAEC"/>
                     </a:solidFill>
                   </a:tcPr>
                 </a:tc>
                 <a:tc>
                   <a:txBody>
-                    <a:bodyPr lIns="7560" rIns="7560">
-                      <a:noAutofit/>
-                    </a:bodyPr>
+                    <a:bodyPr/>
+                    <a:lstStyle/>
                     <a:p>
                       <a:pPr algn="ctr">
                         <a:lnSpc>
@@ -5225,7 +6184,7 @@
                         </a:lnSpc>
                       </a:pPr>
                       <a:r>
-                        <a:rPr b="0" lang="es-ES" sz="1200" spc="-1" strike="noStrike">
+                        <a:rPr lang="es-ES" sz="1200" b="0" strike="noStrike" spc="-1">
                           <a:solidFill>
                             <a:srgbClr val="000000"/>
                           </a:solidFill>
@@ -5234,7 +6193,7 @@
                         </a:rPr>
                         <a:t>deleterious (0)</a:t>
                       </a:r>
-                      <a:endParaRPr b="0" lang="es-ES" sz="1200" spc="-1" strike="noStrike">
+                      <a:endParaRPr lang="es-ES" sz="1200" b="0" strike="noStrike" spc="-1">
                         <a:latin typeface="Arial"/>
                       </a:endParaRPr>
                     </a:p>
@@ -5242,34 +6201,33 @@
                   <a:tcPr marL="7560" marR="7560">
                     <a:lnL w="12240">
                       <a:solidFill>
-                        <a:srgbClr val="ffffff"/>
+                        <a:srgbClr val="FFFFFF"/>
                       </a:solidFill>
                     </a:lnL>
                     <a:lnR w="12240">
                       <a:solidFill>
-                        <a:srgbClr val="ffffff"/>
+                        <a:srgbClr val="FFFFFF"/>
                       </a:solidFill>
                     </a:lnR>
                     <a:lnT w="12240">
                       <a:solidFill>
-                        <a:srgbClr val="ffffff"/>
+                        <a:srgbClr val="FFFFFF"/>
                       </a:solidFill>
                     </a:lnT>
                     <a:lnB w="12240">
                       <a:solidFill>
-                        <a:srgbClr val="ffffff"/>
+                        <a:srgbClr val="FFFFFF"/>
                       </a:solidFill>
                     </a:lnB>
                     <a:solidFill>
-                      <a:srgbClr val="e7eaec"/>
+                      <a:srgbClr val="E7EAEC"/>
                     </a:solidFill>
                   </a:tcPr>
                 </a:tc>
                 <a:tc>
                   <a:txBody>
-                    <a:bodyPr lIns="7560" rIns="7560">
-                      <a:noAutofit/>
-                    </a:bodyPr>
+                    <a:bodyPr/>
+                    <a:lstStyle/>
                     <a:p>
                       <a:pPr algn="ctr">
                         <a:lnSpc>
@@ -5277,7 +6235,7 @@
                         </a:lnSpc>
                       </a:pPr>
                       <a:r>
-                        <a:rPr b="0" lang="es-ES" sz="1200" spc="-1" strike="noStrike">
+                        <a:rPr lang="es-ES" sz="1200" b="0" strike="noStrike" spc="-1">
                           <a:solidFill>
                             <a:srgbClr val="000000"/>
                           </a:solidFill>
@@ -5286,7 +6244,7 @@
                         </a:rPr>
                         <a:t>probably damaging (1)</a:t>
                       </a:r>
-                      <a:endParaRPr b="0" lang="es-ES" sz="1200" spc="-1" strike="noStrike">
+                      <a:endParaRPr lang="es-ES" sz="1200" b="0" strike="noStrike" spc="-1">
                         <a:latin typeface="Arial"/>
                       </a:endParaRPr>
                     </a:p>
@@ -5294,34 +6252,33 @@
                   <a:tcPr marL="7560" marR="7560">
                     <a:lnL w="12240">
                       <a:solidFill>
-                        <a:srgbClr val="ffffff"/>
+                        <a:srgbClr val="FFFFFF"/>
                       </a:solidFill>
                     </a:lnL>
                     <a:lnR w="12240">
                       <a:solidFill>
-                        <a:srgbClr val="ffffff"/>
+                        <a:srgbClr val="FFFFFF"/>
                       </a:solidFill>
                     </a:lnR>
                     <a:lnT w="12240">
                       <a:solidFill>
-                        <a:srgbClr val="ffffff"/>
+                        <a:srgbClr val="FFFFFF"/>
                       </a:solidFill>
                     </a:lnT>
                     <a:lnB w="12240">
                       <a:solidFill>
-                        <a:srgbClr val="ffffff"/>
+                        <a:srgbClr val="FFFFFF"/>
                       </a:solidFill>
                     </a:lnB>
                     <a:solidFill>
-                      <a:srgbClr val="e7eaec"/>
+                      <a:srgbClr val="E7EAEC"/>
                     </a:solidFill>
                   </a:tcPr>
                 </a:tc>
                 <a:tc>
                   <a:txBody>
-                    <a:bodyPr lIns="7560" rIns="7560">
-                      <a:noAutofit/>
-                    </a:bodyPr>
+                    <a:bodyPr/>
+                    <a:lstStyle/>
                     <a:p>
                       <a:pPr algn="ctr">
                         <a:lnSpc>
@@ -5329,7 +6286,7 @@
                         </a:lnSpc>
                       </a:pPr>
                       <a:r>
-                        <a:rPr b="0" lang="es-ES" sz="1200" spc="-1" strike="noStrike">
+                        <a:rPr lang="es-ES" sz="1200" b="0" strike="noStrike" spc="-1">
                           <a:solidFill>
                             <a:srgbClr val="000000"/>
                           </a:solidFill>
@@ -5338,7 +6295,7 @@
                         </a:rPr>
                         <a:t>#618406</a:t>
                       </a:r>
-                      <a:endParaRPr b="0" lang="es-ES" sz="1200" spc="-1" strike="noStrike">
+                      <a:endParaRPr lang="es-ES" sz="1200" b="0" strike="noStrike" spc="-1">
                         <a:latin typeface="Arial"/>
                       </a:endParaRPr>
                     </a:p>
@@ -5346,45 +6303,44 @@
                   <a:tcPr marL="7560" marR="7560">
                     <a:lnL w="12240">
                       <a:solidFill>
-                        <a:srgbClr val="ffffff"/>
+                        <a:srgbClr val="FFFFFF"/>
                       </a:solidFill>
                     </a:lnL>
                     <a:lnR w="12240">
                       <a:solidFill>
-                        <a:srgbClr val="ffffff"/>
+                        <a:srgbClr val="FFFFFF"/>
                       </a:solidFill>
                     </a:lnR>
                     <a:lnT w="12240">
                       <a:solidFill>
-                        <a:srgbClr val="ffffff"/>
+                        <a:srgbClr val="FFFFFF"/>
                       </a:solidFill>
                     </a:lnT>
                     <a:lnB w="12240">
                       <a:solidFill>
-                        <a:srgbClr val="ffffff"/>
+                        <a:srgbClr val="FFFFFF"/>
                       </a:solidFill>
                     </a:lnB>
                     <a:solidFill>
-                      <a:srgbClr val="e7eaec"/>
+                      <a:srgbClr val="E7EAEC"/>
                     </a:solidFill>
                   </a:tcPr>
                 </a:tc>
                 <a:tc>
                   <a:txBody>
-                    <a:bodyPr lIns="7560" rIns="7560">
-                      <a:noAutofit/>
-                    </a:bodyPr>
+                    <a:bodyPr/>
+                    <a:lstStyle/>
                     <a:p>
                       <a:pPr algn="ctr">
                         <a:lnSpc>
                           <a:spcPct val="100000"/>
                         </a:lnSpc>
                         <a:tabLst>
-                          <a:tab algn="l" pos="0"/>
+                          <a:tab pos="0" algn="l"/>
                         </a:tabLst>
                       </a:pPr>
                       <a:r>
-                        <a:rPr b="0" lang="es-ES" sz="1200" spc="-1" strike="noStrike">
+                        <a:rPr lang="es-ES" sz="1200" b="0" strike="noStrike" spc="-1">
                           <a:solidFill>
                             <a:srgbClr val="000000"/>
                           </a:solidFill>
@@ -5393,7 +6349,7 @@
                         </a:rPr>
                         <a:t>Autosómico recesiva</a:t>
                       </a:r>
-                      <a:endParaRPr b="0" lang="es-ES" sz="1200" spc="-1" strike="noStrike">
+                      <a:endParaRPr lang="es-ES" sz="1200" b="0" strike="noStrike" spc="-1">
                         <a:latin typeface="Arial"/>
                       </a:endParaRPr>
                     </a:p>
@@ -5403,10 +6359,10 @@
                           <a:spcPct val="100000"/>
                         </a:lnSpc>
                         <a:tabLst>
-                          <a:tab algn="l" pos="0"/>
+                          <a:tab pos="0" algn="l"/>
                         </a:tabLst>
                       </a:pPr>
-                      <a:endParaRPr b="0" lang="es-ES" sz="1200" spc="-1" strike="noStrike">
+                      <a:endParaRPr lang="es-ES" sz="1200" b="0" strike="noStrike" spc="-1">
                         <a:latin typeface="Arial"/>
                       </a:endParaRPr>
                     </a:p>
@@ -5414,34 +6370,33 @@
                   <a:tcPr marL="7560" marR="7560">
                     <a:lnL w="12240">
                       <a:solidFill>
-                        <a:srgbClr val="ffffff"/>
+                        <a:srgbClr val="FFFFFF"/>
                       </a:solidFill>
                     </a:lnL>
                     <a:lnR w="12240">
                       <a:solidFill>
-                        <a:srgbClr val="ffffff"/>
+                        <a:srgbClr val="FFFFFF"/>
                       </a:solidFill>
                     </a:lnR>
                     <a:lnT w="12240">
                       <a:solidFill>
-                        <a:srgbClr val="ffffff"/>
+                        <a:srgbClr val="FFFFFF"/>
                       </a:solidFill>
                     </a:lnT>
                     <a:lnB w="12240">
                       <a:solidFill>
-                        <a:srgbClr val="ffffff"/>
+                        <a:srgbClr val="FFFFFF"/>
                       </a:solidFill>
                     </a:lnB>
                     <a:solidFill>
-                      <a:srgbClr val="e7eaec"/>
+                      <a:srgbClr val="E7EAEC"/>
                     </a:solidFill>
                   </a:tcPr>
                 </a:tc>
                 <a:tc>
                   <a:txBody>
-                    <a:bodyPr lIns="7560" rIns="7560">
-                      <a:noAutofit/>
-                    </a:bodyPr>
+                    <a:bodyPr/>
+                    <a:lstStyle/>
                     <a:p>
                       <a:pPr algn="ctr">
                         <a:lnSpc>
@@ -5449,7 +6404,7 @@
                         </a:lnSpc>
                       </a:pPr>
                       <a:r>
-                        <a:rPr b="0" lang="es-ES" sz="1200" spc="-1" strike="noStrike">
+                        <a:rPr lang="es-ES" sz="1200" b="0" strike="noStrike" spc="-1">
                           <a:solidFill>
                             <a:srgbClr val="000000"/>
                           </a:solidFill>
@@ -5458,7 +6413,7 @@
                         </a:rPr>
                         <a:t>Vía de señalización de la saciedad </a:t>
                       </a:r>
-                      <a:endParaRPr b="0" lang="es-ES" sz="1200" spc="-1" strike="noStrike">
+                      <a:endParaRPr lang="es-ES" sz="1200" b="0" strike="noStrike" spc="-1">
                         <a:latin typeface="Arial"/>
                       </a:endParaRPr>
                     </a:p>
@@ -5466,36 +6421,40 @@
                   <a:tcPr marL="7560" marR="7560">
                     <a:lnL w="12240">
                       <a:solidFill>
-                        <a:srgbClr val="ffffff"/>
+                        <a:srgbClr val="FFFFFF"/>
                       </a:solidFill>
                     </a:lnL>
                     <a:lnR w="12240">
                       <a:solidFill>
-                        <a:srgbClr val="ffffff"/>
+                        <a:srgbClr val="FFFFFF"/>
                       </a:solidFill>
                     </a:lnR>
                     <a:lnT w="12240">
                       <a:solidFill>
-                        <a:srgbClr val="ffffff"/>
+                        <a:srgbClr val="FFFFFF"/>
                       </a:solidFill>
                     </a:lnT>
                     <a:lnB w="12240">
                       <a:solidFill>
-                        <a:srgbClr val="ffffff"/>
+                        <a:srgbClr val="FFFFFF"/>
                       </a:solidFill>
                     </a:lnB>
                     <a:solidFill>
-                      <a:srgbClr val="e7eaec"/>
+                      <a:srgbClr val="E7EAEC"/>
                     </a:solidFill>
                   </a:tcPr>
                 </a:tc>
+                <a:extLst>
+                  <a:ext uri="{0D108BD9-81ED-4DB2-BD59-A6C34878D82A}">
+                    <a16:rowId xmlns:a16="http://schemas.microsoft.com/office/drawing/2014/main" val="10002"/>
+                  </a:ext>
+                </a:extLst>
               </a:tr>
               <a:tr h="774360">
                 <a:tc>
                   <a:txBody>
-                    <a:bodyPr lIns="7560" rIns="7560">
-                      <a:noAutofit/>
-                    </a:bodyPr>
+                    <a:bodyPr/>
+                    <a:lstStyle/>
                     <a:p>
                       <a:pPr>
                         <a:lnSpc>
@@ -5503,7 +6462,7 @@
                         </a:lnSpc>
                       </a:pPr>
                       <a:r>
-                        <a:rPr b="0" lang="es-ES" sz="1200" spc="-1" strike="noStrike">
+                        <a:rPr lang="es-ES" sz="1200" b="0" strike="noStrike" spc="-1">
                           <a:solidFill>
                             <a:srgbClr val="000000"/>
                           </a:solidFill>
@@ -5512,7 +6471,7 @@
                         </a:rPr>
                         <a:t>MED12</a:t>
                       </a:r>
-                      <a:endParaRPr b="0" lang="es-ES" sz="1200" spc="-1" strike="noStrike">
+                      <a:endParaRPr lang="es-ES" sz="1200" b="0" strike="noStrike" spc="-1">
                         <a:latin typeface="Arial"/>
                       </a:endParaRPr>
                     </a:p>
@@ -5520,34 +6479,33 @@
                   <a:tcPr marL="7560" marR="7560">
                     <a:lnL w="12240">
                       <a:solidFill>
-                        <a:srgbClr val="ffffff"/>
+                        <a:srgbClr val="FFFFFF"/>
                       </a:solidFill>
                     </a:lnL>
                     <a:lnR w="12240">
                       <a:solidFill>
-                        <a:srgbClr val="ffffff"/>
+                        <a:srgbClr val="FFFFFF"/>
                       </a:solidFill>
                     </a:lnR>
                     <a:lnT w="12240">
                       <a:solidFill>
-                        <a:srgbClr val="ffffff"/>
+                        <a:srgbClr val="FFFFFF"/>
                       </a:solidFill>
                     </a:lnT>
                     <a:lnB w="12240">
                       <a:solidFill>
-                        <a:srgbClr val="ffffff"/>
+                        <a:srgbClr val="FFFFFF"/>
                       </a:solidFill>
                     </a:lnB>
                     <a:solidFill>
-                      <a:srgbClr val="e7eaec"/>
+                      <a:srgbClr val="E7EAEC"/>
                     </a:solidFill>
                   </a:tcPr>
                 </a:tc>
                 <a:tc>
                   <a:txBody>
-                    <a:bodyPr lIns="7560" rIns="7560">
-                      <a:noAutofit/>
-                    </a:bodyPr>
+                    <a:bodyPr/>
+                    <a:lstStyle/>
                     <a:p>
                       <a:pPr algn="ctr">
                         <a:lnSpc>
@@ -5555,7 +6513,7 @@
                         </a:lnSpc>
                       </a:pPr>
                       <a:r>
-                        <a:rPr b="0" lang="es-ES" sz="1200" spc="-1" strike="noStrike">
+                        <a:rPr lang="es-ES" sz="1200" b="0" strike="noStrike" spc="-1">
                           <a:solidFill>
                             <a:srgbClr val="000000"/>
                           </a:solidFill>
@@ -5564,7 +6522,7 @@
                         </a:rPr>
                         <a:t>X:71121046</a:t>
                       </a:r>
-                      <a:endParaRPr b="0" lang="es-ES" sz="1200" spc="-1" strike="noStrike">
+                      <a:endParaRPr lang="es-ES" sz="1200" b="0" strike="noStrike" spc="-1">
                         <a:latin typeface="Arial"/>
                       </a:endParaRPr>
                     </a:p>
@@ -5572,34 +6530,33 @@
                   <a:tcPr marL="7560" marR="7560">
                     <a:lnL w="12240">
                       <a:solidFill>
-                        <a:srgbClr val="ffffff"/>
+                        <a:srgbClr val="FFFFFF"/>
                       </a:solidFill>
                     </a:lnL>
                     <a:lnR w="12240">
                       <a:solidFill>
-                        <a:srgbClr val="ffffff"/>
+                        <a:srgbClr val="FFFFFF"/>
                       </a:solidFill>
                     </a:lnR>
                     <a:lnT w="12240">
                       <a:solidFill>
-                        <a:srgbClr val="ffffff"/>
+                        <a:srgbClr val="FFFFFF"/>
                       </a:solidFill>
                     </a:lnT>
                     <a:lnB w="12240">
                       <a:solidFill>
-                        <a:srgbClr val="ffffff"/>
+                        <a:srgbClr val="FFFFFF"/>
                       </a:solidFill>
                     </a:lnB>
                     <a:solidFill>
-                      <a:srgbClr val="e7eaec"/>
+                      <a:srgbClr val="E7EAEC"/>
                     </a:solidFill>
                   </a:tcPr>
                 </a:tc>
                 <a:tc>
                   <a:txBody>
-                    <a:bodyPr lIns="7560" rIns="7560">
-                      <a:noAutofit/>
-                    </a:bodyPr>
+                    <a:bodyPr/>
+                    <a:lstStyle/>
                     <a:p>
                       <a:pPr algn="ctr">
                         <a:lnSpc>
@@ -5607,7 +6564,7 @@
                         </a:lnSpc>
                       </a:pPr>
                       <a:r>
-                        <a:rPr b="0" lang="es-ES" sz="1200" spc="-1" strike="noStrike">
+                        <a:rPr lang="es-ES" sz="1200" b="0" strike="noStrike" spc="-1">
                           <a:solidFill>
                             <a:srgbClr val="000000"/>
                           </a:solidFill>
@@ -5616,7 +6573,7 @@
                         </a:rPr>
                         <a:t>ENST00000374080.8:c.629C&gt;T</a:t>
                       </a:r>
-                      <a:endParaRPr b="0" lang="es-ES" sz="1200" spc="-1" strike="noStrike">
+                      <a:endParaRPr lang="es-ES" sz="1200" b="0" strike="noStrike" spc="-1">
                         <a:latin typeface="Arial"/>
                       </a:endParaRPr>
                     </a:p>
@@ -5624,34 +6581,33 @@
                   <a:tcPr marL="7560" marR="7560">
                     <a:lnL w="12240">
                       <a:solidFill>
-                        <a:srgbClr val="ffffff"/>
+                        <a:srgbClr val="FFFFFF"/>
                       </a:solidFill>
                     </a:lnL>
                     <a:lnR w="12240">
                       <a:solidFill>
-                        <a:srgbClr val="ffffff"/>
+                        <a:srgbClr val="FFFFFF"/>
                       </a:solidFill>
                     </a:lnR>
                     <a:lnT w="12240">
                       <a:solidFill>
-                        <a:srgbClr val="ffffff"/>
+                        <a:srgbClr val="FFFFFF"/>
                       </a:solidFill>
                     </a:lnT>
                     <a:lnB w="12240">
                       <a:solidFill>
-                        <a:srgbClr val="ffffff"/>
+                        <a:srgbClr val="FFFFFF"/>
                       </a:solidFill>
                     </a:lnB>
                     <a:solidFill>
-                      <a:srgbClr val="e7eaec"/>
+                      <a:srgbClr val="E7EAEC"/>
                     </a:solidFill>
                   </a:tcPr>
                 </a:tc>
                 <a:tc>
                   <a:txBody>
-                    <a:bodyPr lIns="7560" rIns="7560">
-                      <a:noAutofit/>
-                    </a:bodyPr>
+                    <a:bodyPr/>
+                    <a:lstStyle/>
                     <a:p>
                       <a:pPr algn="ctr">
                         <a:lnSpc>
@@ -5659,7 +6615,7 @@
                         </a:lnSpc>
                       </a:pPr>
                       <a:r>
-                        <a:rPr b="0" lang="es-ES" sz="1200" spc="-1" strike="noStrike">
+                        <a:rPr lang="es-ES" sz="1200" b="0" strike="noStrike" spc="-1">
                           <a:solidFill>
                             <a:srgbClr val="000000"/>
                           </a:solidFill>
@@ -5668,7 +6624,7 @@
                         </a:rPr>
                         <a:t>SNP</a:t>
                       </a:r>
-                      <a:endParaRPr b="0" lang="es-ES" sz="1200" spc="-1" strike="noStrike">
+                      <a:endParaRPr lang="es-ES" sz="1200" b="0" strike="noStrike" spc="-1">
                         <a:latin typeface="Arial"/>
                       </a:endParaRPr>
                     </a:p>
@@ -5676,34 +6632,33 @@
                   <a:tcPr marL="7560" marR="7560">
                     <a:lnL w="12240">
                       <a:solidFill>
-                        <a:srgbClr val="ffffff"/>
+                        <a:srgbClr val="FFFFFF"/>
                       </a:solidFill>
                     </a:lnL>
                     <a:lnR w="12240">
                       <a:solidFill>
-                        <a:srgbClr val="ffffff"/>
+                        <a:srgbClr val="FFFFFF"/>
                       </a:solidFill>
                     </a:lnR>
                     <a:lnT w="12240">
                       <a:solidFill>
-                        <a:srgbClr val="ffffff"/>
+                        <a:srgbClr val="FFFFFF"/>
                       </a:solidFill>
                     </a:lnT>
                     <a:lnB w="12240">
                       <a:solidFill>
-                        <a:srgbClr val="ffffff"/>
+                        <a:srgbClr val="FFFFFF"/>
                       </a:solidFill>
                     </a:lnB>
                     <a:solidFill>
-                      <a:srgbClr val="e7eaec"/>
+                      <a:srgbClr val="E7EAEC"/>
                     </a:solidFill>
                   </a:tcPr>
                 </a:tc>
                 <a:tc>
                   <a:txBody>
-                    <a:bodyPr lIns="7560" rIns="7560">
-                      <a:noAutofit/>
-                    </a:bodyPr>
+                    <a:bodyPr/>
+                    <a:lstStyle/>
                     <a:p>
                       <a:pPr algn="ctr">
                         <a:lnSpc>
@@ -5711,7 +6666,7 @@
                         </a:lnSpc>
                       </a:pPr>
                       <a:r>
-                        <a:rPr b="0" lang="es-ES" sz="1200" spc="-1" strike="noStrike">
+                        <a:rPr lang="es-ES" sz="1200" b="0" strike="noStrike" spc="-1">
                           <a:solidFill>
                             <a:srgbClr val="000000"/>
                           </a:solidFill>
@@ -5720,7 +6675,7 @@
                         </a:rPr>
                         <a:t>hemicigoto</a:t>
                       </a:r>
-                      <a:endParaRPr b="0" lang="es-ES" sz="1200" spc="-1" strike="noStrike">
+                      <a:endParaRPr lang="es-ES" sz="1200" b="0" strike="noStrike" spc="-1">
                         <a:latin typeface="Arial"/>
                       </a:endParaRPr>
                     </a:p>
@@ -5728,34 +6683,33 @@
                   <a:tcPr marL="7560" marR="7560">
                     <a:lnL w="12240">
                       <a:solidFill>
-                        <a:srgbClr val="ffffff"/>
+                        <a:srgbClr val="FFFFFF"/>
                       </a:solidFill>
                     </a:lnL>
                     <a:lnR w="12240">
                       <a:solidFill>
-                        <a:srgbClr val="ffffff"/>
+                        <a:srgbClr val="FFFFFF"/>
                       </a:solidFill>
                     </a:lnR>
                     <a:lnT w="12240">
                       <a:solidFill>
-                        <a:srgbClr val="ffffff"/>
+                        <a:srgbClr val="FFFFFF"/>
                       </a:solidFill>
                     </a:lnT>
                     <a:lnB w="12240">
                       <a:solidFill>
-                        <a:srgbClr val="ffffff"/>
+                        <a:srgbClr val="FFFFFF"/>
                       </a:solidFill>
                     </a:lnB>
                     <a:solidFill>
-                      <a:srgbClr val="e7eaec"/>
+                      <a:srgbClr val="E7EAEC"/>
                     </a:solidFill>
                   </a:tcPr>
                 </a:tc>
                 <a:tc>
                   <a:txBody>
-                    <a:bodyPr lIns="7560" rIns="7560">
-                      <a:noAutofit/>
-                    </a:bodyPr>
+                    <a:bodyPr/>
+                    <a:lstStyle/>
                     <a:p>
                       <a:pPr algn="ctr">
                         <a:lnSpc>
@@ -5763,7 +6717,7 @@
                         </a:lnSpc>
                       </a:pPr>
                       <a:r>
-                        <a:rPr b="0" lang="es-ES" sz="1200" spc="-1" strike="noStrike">
+                        <a:rPr lang="es-ES" sz="1200" b="0" strike="noStrike" spc="-1">
                           <a:solidFill>
                             <a:srgbClr val="000000"/>
                           </a:solidFill>
@@ -5772,7 +6726,7 @@
                         </a:rPr>
                         <a:t>4.553x10-6 (mutación)</a:t>
                       </a:r>
-                      <a:endParaRPr b="0" lang="es-ES" sz="1200" spc="-1" strike="noStrike">
+                      <a:endParaRPr lang="es-ES" sz="1200" b="0" strike="noStrike" spc="-1">
                         <a:latin typeface="Arial"/>
                       </a:endParaRPr>
                     </a:p>
@@ -5780,34 +6734,33 @@
                   <a:tcPr marL="7560" marR="7560">
                     <a:lnL w="12240">
                       <a:solidFill>
-                        <a:srgbClr val="ffffff"/>
+                        <a:srgbClr val="FFFFFF"/>
                       </a:solidFill>
                     </a:lnL>
                     <a:lnR w="12240">
                       <a:solidFill>
-                        <a:srgbClr val="ffffff"/>
+                        <a:srgbClr val="FFFFFF"/>
                       </a:solidFill>
                     </a:lnR>
                     <a:lnT w="12240">
                       <a:solidFill>
-                        <a:srgbClr val="ffffff"/>
+                        <a:srgbClr val="FFFFFF"/>
                       </a:solidFill>
                     </a:lnT>
                     <a:lnB w="12240">
                       <a:solidFill>
-                        <a:srgbClr val="ffffff"/>
+                        <a:srgbClr val="FFFFFF"/>
                       </a:solidFill>
                     </a:lnB>
                     <a:solidFill>
-                      <a:srgbClr val="e7eaec"/>
+                      <a:srgbClr val="E7EAEC"/>
                     </a:solidFill>
                   </a:tcPr>
                 </a:tc>
                 <a:tc>
                   <a:txBody>
-                    <a:bodyPr lIns="7560" rIns="7560">
-                      <a:noAutofit/>
-                    </a:bodyPr>
+                    <a:bodyPr/>
+                    <a:lstStyle/>
                     <a:p>
                       <a:pPr algn="ctr">
                         <a:lnSpc>
@@ -5815,7 +6768,7 @@
                         </a:lnSpc>
                       </a:pPr>
                       <a:r>
-                        <a:rPr b="0" lang="es-ES" sz="1200" spc="-1" strike="noStrike">
+                        <a:rPr lang="es-ES" sz="1200" b="0" strike="noStrike" spc="-1">
                           <a:solidFill>
                             <a:srgbClr val="000000"/>
                           </a:solidFill>
@@ -5824,7 +6777,7 @@
                         </a:rPr>
                         <a:t>ENST00000374080.8</a:t>
                       </a:r>
-                      <a:endParaRPr b="0" lang="es-ES" sz="1200" spc="-1" strike="noStrike">
+                      <a:endParaRPr lang="es-ES" sz="1200" b="0" strike="noStrike" spc="-1">
                         <a:latin typeface="Arial"/>
                       </a:endParaRPr>
                     </a:p>
@@ -5832,34 +6785,33 @@
                   <a:tcPr marL="7560" marR="7560">
                     <a:lnL w="12240">
                       <a:solidFill>
-                        <a:srgbClr val="ffffff"/>
+                        <a:srgbClr val="FFFFFF"/>
                       </a:solidFill>
                     </a:lnL>
                     <a:lnR w="12240">
                       <a:solidFill>
-                        <a:srgbClr val="ffffff"/>
+                        <a:srgbClr val="FFFFFF"/>
                       </a:solidFill>
                     </a:lnR>
                     <a:lnT w="12240">
                       <a:solidFill>
-                        <a:srgbClr val="ffffff"/>
+                        <a:srgbClr val="FFFFFF"/>
                       </a:solidFill>
                     </a:lnT>
                     <a:lnB w="12240">
                       <a:solidFill>
-                        <a:srgbClr val="ffffff"/>
+                        <a:srgbClr val="FFFFFF"/>
                       </a:solidFill>
                     </a:lnB>
                     <a:solidFill>
-                      <a:srgbClr val="e7eaec"/>
+                      <a:srgbClr val="E7EAEC"/>
                     </a:solidFill>
                   </a:tcPr>
                 </a:tc>
                 <a:tc>
                   <a:txBody>
-                    <a:bodyPr lIns="7560" rIns="7560">
-                      <a:noAutofit/>
-                    </a:bodyPr>
+                    <a:bodyPr/>
+                    <a:lstStyle/>
                     <a:p>
                       <a:pPr algn="ctr">
                         <a:lnSpc>
@@ -5867,7 +6819,7 @@
                         </a:lnSpc>
                       </a:pPr>
                       <a:r>
-                        <a:rPr b="0" lang="es-ES" sz="1200" spc="-1" strike="noStrike">
+                        <a:rPr lang="es-ES" sz="1200" b="0" strike="noStrike" spc="-1">
                           <a:solidFill>
                             <a:srgbClr val="000000"/>
                           </a:solidFill>
@@ -5876,7 +6828,7 @@
                         </a:rPr>
                         <a:t>ENSP00000363193.3:p.Ala210Val</a:t>
                       </a:r>
-                      <a:endParaRPr b="0" lang="es-ES" sz="1200" spc="-1" strike="noStrike">
+                      <a:endParaRPr lang="es-ES" sz="1200" b="0" strike="noStrike" spc="-1">
                         <a:latin typeface="Arial"/>
                       </a:endParaRPr>
                     </a:p>
@@ -5884,34 +6836,33 @@
                   <a:tcPr marL="7560" marR="7560">
                     <a:lnL w="12240">
                       <a:solidFill>
-                        <a:srgbClr val="ffffff"/>
+                        <a:srgbClr val="FFFFFF"/>
                       </a:solidFill>
                     </a:lnL>
                     <a:lnR w="12240">
                       <a:solidFill>
-                        <a:srgbClr val="ffffff"/>
+                        <a:srgbClr val="FFFFFF"/>
                       </a:solidFill>
                     </a:lnR>
                     <a:lnT w="12240">
                       <a:solidFill>
-                        <a:srgbClr val="ffffff"/>
+                        <a:srgbClr val="FFFFFF"/>
                       </a:solidFill>
                     </a:lnT>
                     <a:lnB w="12240">
                       <a:solidFill>
-                        <a:srgbClr val="ffffff"/>
+                        <a:srgbClr val="FFFFFF"/>
                       </a:solidFill>
                     </a:lnB>
                     <a:solidFill>
-                      <a:srgbClr val="e7eaec"/>
+                      <a:srgbClr val="E7EAEC"/>
                     </a:solidFill>
                   </a:tcPr>
                 </a:tc>
                 <a:tc>
                   <a:txBody>
-                    <a:bodyPr lIns="7560" rIns="7560">
-                      <a:noAutofit/>
-                    </a:bodyPr>
+                    <a:bodyPr/>
+                    <a:lstStyle/>
                     <a:p>
                       <a:pPr algn="ctr">
                         <a:lnSpc>
@@ -5919,7 +6870,7 @@
                         </a:lnSpc>
                       </a:pPr>
                       <a:r>
-                        <a:rPr b="0" lang="es-ES" sz="1200" spc="-1" strike="noStrike">
+                        <a:rPr lang="es-ES" sz="1200" b="0" strike="noStrike" spc="-1">
                           <a:solidFill>
                             <a:srgbClr val="000000"/>
                           </a:solidFill>
@@ -5928,7 +6879,7 @@
                         </a:rPr>
                         <a:t>Missense</a:t>
                       </a:r>
-                      <a:endParaRPr b="0" lang="es-ES" sz="1200" spc="-1" strike="noStrike">
+                      <a:endParaRPr lang="es-ES" sz="1200" b="0" strike="noStrike" spc="-1">
                         <a:latin typeface="Arial"/>
                       </a:endParaRPr>
                     </a:p>
@@ -5936,34 +6887,33 @@
                   <a:tcPr marL="7560" marR="7560">
                     <a:lnL w="12240">
                       <a:solidFill>
-                        <a:srgbClr val="ffffff"/>
+                        <a:srgbClr val="FFFFFF"/>
                       </a:solidFill>
                     </a:lnL>
                     <a:lnR w="12240">
                       <a:solidFill>
-                        <a:srgbClr val="ffffff"/>
+                        <a:srgbClr val="FFFFFF"/>
                       </a:solidFill>
                     </a:lnR>
                     <a:lnT w="12240">
                       <a:solidFill>
-                        <a:srgbClr val="ffffff"/>
+                        <a:srgbClr val="FFFFFF"/>
                       </a:solidFill>
                     </a:lnT>
                     <a:lnB w="12240">
                       <a:solidFill>
-                        <a:srgbClr val="ffffff"/>
+                        <a:srgbClr val="FFFFFF"/>
                       </a:solidFill>
                     </a:lnB>
                     <a:solidFill>
-                      <a:srgbClr val="e7eaec"/>
+                      <a:srgbClr val="E7EAEC"/>
                     </a:solidFill>
                   </a:tcPr>
                 </a:tc>
                 <a:tc>
                   <a:txBody>
-                    <a:bodyPr lIns="7560" rIns="7560">
-                      <a:noAutofit/>
-                    </a:bodyPr>
+                    <a:bodyPr/>
+                    <a:lstStyle/>
                     <a:p>
                       <a:pPr algn="ctr">
                         <a:lnSpc>
@@ -5971,7 +6921,7 @@
                         </a:lnSpc>
                       </a:pPr>
                       <a:r>
-                        <a:rPr b="0" lang="es-ES" sz="1200" spc="-1" strike="noStrike">
+                        <a:rPr lang="es-ES" sz="1200" b="0" strike="noStrike" spc="-1">
                           <a:solidFill>
                             <a:srgbClr val="000000"/>
                           </a:solidFill>
@@ -5980,7 +6930,7 @@
                         </a:rPr>
                         <a:t>deleterious low confidence (0.02)</a:t>
                       </a:r>
-                      <a:endParaRPr b="0" lang="es-ES" sz="1200" spc="-1" strike="noStrike">
+                      <a:endParaRPr lang="es-ES" sz="1200" b="0" strike="noStrike" spc="-1">
                         <a:latin typeface="Arial"/>
                       </a:endParaRPr>
                     </a:p>
@@ -5988,34 +6938,33 @@
                   <a:tcPr marL="7560" marR="7560">
                     <a:lnL w="12240">
                       <a:solidFill>
-                        <a:srgbClr val="ffffff"/>
+                        <a:srgbClr val="FFFFFF"/>
                       </a:solidFill>
                     </a:lnL>
                     <a:lnR w="12240">
                       <a:solidFill>
-                        <a:srgbClr val="ffffff"/>
+                        <a:srgbClr val="FFFFFF"/>
                       </a:solidFill>
                     </a:lnR>
                     <a:lnT w="12240">
                       <a:solidFill>
-                        <a:srgbClr val="ffffff"/>
+                        <a:srgbClr val="FFFFFF"/>
                       </a:solidFill>
                     </a:lnT>
                     <a:lnB w="12240">
                       <a:solidFill>
-                        <a:srgbClr val="ffffff"/>
+                        <a:srgbClr val="FFFFFF"/>
                       </a:solidFill>
                     </a:lnB>
                     <a:solidFill>
-                      <a:srgbClr val="e7eaec"/>
+                      <a:srgbClr val="E7EAEC"/>
                     </a:solidFill>
                   </a:tcPr>
                 </a:tc>
                 <a:tc>
                   <a:txBody>
-                    <a:bodyPr lIns="7560" rIns="7560">
-                      <a:noAutofit/>
-                    </a:bodyPr>
+                    <a:bodyPr/>
+                    <a:lstStyle/>
                     <a:p>
                       <a:pPr algn="ctr">
                         <a:lnSpc>
@@ -6023,7 +6972,7 @@
                         </a:lnSpc>
                       </a:pPr>
                       <a:r>
-                        <a:rPr b="0" lang="es-ES" sz="1200" spc="-1" strike="noStrike">
+                        <a:rPr lang="es-ES" sz="1200" b="0" strike="noStrike" spc="-1">
                           <a:solidFill>
                             <a:srgbClr val="000000"/>
                           </a:solidFill>
@@ -6032,7 +6981,7 @@
                         </a:rPr>
                         <a:t>benign (0.19)</a:t>
                       </a:r>
-                      <a:endParaRPr b="0" lang="es-ES" sz="1200" spc="-1" strike="noStrike">
+                      <a:endParaRPr lang="es-ES" sz="1200" b="0" strike="noStrike" spc="-1">
                         <a:latin typeface="Arial"/>
                       </a:endParaRPr>
                     </a:p>
@@ -6040,34 +6989,33 @@
                   <a:tcPr marL="7560" marR="7560">
                     <a:lnL w="12240">
                       <a:solidFill>
-                        <a:srgbClr val="ffffff"/>
+                        <a:srgbClr val="FFFFFF"/>
                       </a:solidFill>
                     </a:lnL>
                     <a:lnR w="12240">
                       <a:solidFill>
-                        <a:srgbClr val="ffffff"/>
+                        <a:srgbClr val="FFFFFF"/>
                       </a:solidFill>
                     </a:lnR>
                     <a:lnT w="12240">
                       <a:solidFill>
-                        <a:srgbClr val="ffffff"/>
+                        <a:srgbClr val="FFFFFF"/>
                       </a:solidFill>
                     </a:lnT>
                     <a:lnB w="12240">
                       <a:solidFill>
-                        <a:srgbClr val="ffffff"/>
+                        <a:srgbClr val="FFFFFF"/>
                       </a:solidFill>
                     </a:lnB>
                     <a:solidFill>
-                      <a:srgbClr val="e7eaec"/>
+                      <a:srgbClr val="E7EAEC"/>
                     </a:solidFill>
                   </a:tcPr>
                 </a:tc>
                 <a:tc>
                   <a:txBody>
-                    <a:bodyPr lIns="7560" rIns="7560">
-                      <a:noAutofit/>
-                    </a:bodyPr>
+                    <a:bodyPr/>
+                    <a:lstStyle/>
                     <a:p>
                       <a:pPr algn="ctr">
                         <a:lnSpc>
@@ -6075,7 +7023,7 @@
                         </a:lnSpc>
                       </a:pPr>
                       <a:r>
-                        <a:rPr b="0" lang="es-ES" sz="1200" spc="-1" strike="noStrike">
+                        <a:rPr lang="es-ES" sz="1200" b="0" strike="noStrike" spc="-1">
                           <a:solidFill>
                             <a:srgbClr val="000000"/>
                           </a:solidFill>
@@ -6084,7 +7032,7 @@
                         </a:rPr>
                         <a:t>???</a:t>
                       </a:r>
-                      <a:endParaRPr b="0" lang="es-ES" sz="1200" spc="-1" strike="noStrike">
+                      <a:endParaRPr lang="es-ES" sz="1200" b="0" strike="noStrike" spc="-1">
                         <a:latin typeface="Arial"/>
                       </a:endParaRPr>
                     </a:p>
@@ -6092,34 +7040,33 @@
                   <a:tcPr marL="7560" marR="7560">
                     <a:lnL w="12240">
                       <a:solidFill>
-                        <a:srgbClr val="ffffff"/>
+                        <a:srgbClr val="FFFFFF"/>
                       </a:solidFill>
                     </a:lnL>
                     <a:lnR w="12240">
                       <a:solidFill>
-                        <a:srgbClr val="ffffff"/>
+                        <a:srgbClr val="FFFFFF"/>
                       </a:solidFill>
                     </a:lnR>
                     <a:lnT w="12240">
                       <a:solidFill>
-                        <a:srgbClr val="ffffff"/>
+                        <a:srgbClr val="FFFFFF"/>
                       </a:solidFill>
                     </a:lnT>
                     <a:lnB w="12240">
                       <a:solidFill>
-                        <a:srgbClr val="ffffff"/>
+                        <a:srgbClr val="FFFFFF"/>
                       </a:solidFill>
                     </a:lnB>
                     <a:solidFill>
-                      <a:srgbClr val="e7eaec"/>
+                      <a:srgbClr val="E7EAEC"/>
                     </a:solidFill>
                   </a:tcPr>
                 </a:tc>
                 <a:tc>
                   <a:txBody>
-                    <a:bodyPr lIns="7560" rIns="7560">
-                      <a:noAutofit/>
-                    </a:bodyPr>
+                    <a:bodyPr/>
+                    <a:lstStyle/>
                     <a:p>
                       <a:pPr algn="ctr">
                         <a:lnSpc>
@@ -6127,7 +7074,7 @@
                         </a:lnSpc>
                       </a:pPr>
                       <a:r>
-                        <a:rPr b="0" lang="es-ES" sz="1200" spc="-1" strike="noStrike">
+                        <a:rPr lang="es-ES" sz="1200" b="0" strike="noStrike" spc="-1">
                           <a:solidFill>
                             <a:srgbClr val="000000"/>
                           </a:solidFill>
@@ -6136,7 +7083,7 @@
                         </a:rPr>
                         <a:t>???</a:t>
                       </a:r>
-                      <a:endParaRPr b="0" lang="es-ES" sz="1200" spc="-1" strike="noStrike">
+                      <a:endParaRPr lang="es-ES" sz="1200" b="0" strike="noStrike" spc="-1">
                         <a:latin typeface="Arial"/>
                       </a:endParaRPr>
                     </a:p>
@@ -6144,34 +7091,33 @@
                   <a:tcPr marL="7560" marR="7560">
                     <a:lnL w="12240">
                       <a:solidFill>
-                        <a:srgbClr val="ffffff"/>
+                        <a:srgbClr val="FFFFFF"/>
                       </a:solidFill>
                     </a:lnL>
                     <a:lnR w="12240">
                       <a:solidFill>
-                        <a:srgbClr val="ffffff"/>
+                        <a:srgbClr val="FFFFFF"/>
                       </a:solidFill>
                     </a:lnR>
                     <a:lnT w="12240">
                       <a:solidFill>
-                        <a:srgbClr val="ffffff"/>
+                        <a:srgbClr val="FFFFFF"/>
                       </a:solidFill>
                     </a:lnT>
                     <a:lnB w="12240">
                       <a:solidFill>
-                        <a:srgbClr val="ffffff"/>
+                        <a:srgbClr val="FFFFFF"/>
                       </a:solidFill>
                     </a:lnB>
                     <a:solidFill>
-                      <a:srgbClr val="e7eaec"/>
+                      <a:srgbClr val="E7EAEC"/>
                     </a:solidFill>
                   </a:tcPr>
                 </a:tc>
                 <a:tc>
                   <a:txBody>
-                    <a:bodyPr lIns="7560" rIns="7560">
-                      <a:noAutofit/>
-                    </a:bodyPr>
+                    <a:bodyPr/>
+                    <a:lstStyle/>
                     <a:p>
                       <a:pPr algn="ctr">
                         <a:lnSpc>
@@ -6179,7 +7125,7 @@
                         </a:lnSpc>
                       </a:pPr>
                       <a:r>
-                        <a:rPr b="0" lang="es-ES" sz="1200" spc="-1" strike="noStrike">
+                        <a:rPr lang="es-ES" sz="1200" b="0" strike="noStrike" spc="-1">
                           <a:solidFill>
                             <a:srgbClr val="000000"/>
                           </a:solidFill>
@@ -6188,7 +7134,7 @@
                         </a:rPr>
                         <a:t>Vía de señalización de la hormona tiroidea</a:t>
                       </a:r>
-                      <a:endParaRPr b="0" lang="es-ES" sz="1200" spc="-1" strike="noStrike">
+                      <a:endParaRPr lang="es-ES" sz="1200" b="0" strike="noStrike" spc="-1">
                         <a:latin typeface="Arial"/>
                       </a:endParaRPr>
                     </a:p>
@@ -6196,36 +7142,40 @@
                   <a:tcPr marL="7560" marR="7560">
                     <a:lnL w="12240">
                       <a:solidFill>
-                        <a:srgbClr val="ffffff"/>
+                        <a:srgbClr val="FFFFFF"/>
                       </a:solidFill>
                     </a:lnL>
                     <a:lnR w="12240">
                       <a:solidFill>
-                        <a:srgbClr val="ffffff"/>
+                        <a:srgbClr val="FFFFFF"/>
                       </a:solidFill>
                     </a:lnR>
                     <a:lnT w="12240">
                       <a:solidFill>
-                        <a:srgbClr val="ffffff"/>
+                        <a:srgbClr val="FFFFFF"/>
                       </a:solidFill>
                     </a:lnT>
                     <a:lnB w="12240">
                       <a:solidFill>
-                        <a:srgbClr val="ffffff"/>
+                        <a:srgbClr val="FFFFFF"/>
                       </a:solidFill>
                     </a:lnB>
                     <a:solidFill>
-                      <a:srgbClr val="e7eaec"/>
+                      <a:srgbClr val="E7EAEC"/>
                     </a:solidFill>
                   </a:tcPr>
                 </a:tc>
+                <a:extLst>
+                  <a:ext uri="{0D108BD9-81ED-4DB2-BD59-A6C34878D82A}">
+                    <a16:rowId xmlns:a16="http://schemas.microsoft.com/office/drawing/2014/main" val="10003"/>
+                  </a:ext>
+                </a:extLst>
               </a:tr>
               <a:tr h="433080">
                 <a:tc>
                   <a:txBody>
-                    <a:bodyPr lIns="7560" rIns="7560">
-                      <a:noAutofit/>
-                    </a:bodyPr>
+                    <a:bodyPr/>
+                    <a:lstStyle/>
                     <a:p>
                       <a:pPr>
                         <a:lnSpc>
@@ -6233,7 +7183,7 @@
                         </a:lnSpc>
                       </a:pPr>
                       <a:r>
-                        <a:rPr b="0" lang="es-ES" sz="1200" spc="-1" strike="noStrike">
+                        <a:rPr lang="es-ES" sz="1200" b="0" strike="noStrike" spc="-1">
                           <a:solidFill>
                             <a:srgbClr val="000000"/>
                           </a:solidFill>
@@ -6242,7 +7192,7 @@
                         </a:rPr>
                         <a:t>TP53</a:t>
                       </a:r>
-                      <a:endParaRPr b="0" lang="es-ES" sz="1200" spc="-1" strike="noStrike">
+                      <a:endParaRPr lang="es-ES" sz="1200" b="0" strike="noStrike" spc="-1">
                         <a:latin typeface="Arial"/>
                       </a:endParaRPr>
                     </a:p>
@@ -6250,34 +7200,33 @@
                   <a:tcPr marL="7560" marR="7560">
                     <a:lnL w="12240">
                       <a:solidFill>
-                        <a:srgbClr val="ffffff"/>
+                        <a:srgbClr val="FFFFFF"/>
                       </a:solidFill>
                     </a:lnL>
                     <a:lnR w="12240">
                       <a:solidFill>
-                        <a:srgbClr val="ffffff"/>
+                        <a:srgbClr val="FFFFFF"/>
                       </a:solidFill>
                     </a:lnR>
                     <a:lnT w="12240">
                       <a:solidFill>
-                        <a:srgbClr val="ffffff"/>
+                        <a:srgbClr val="FFFFFF"/>
                       </a:solidFill>
                     </a:lnT>
                     <a:lnB w="12240">
                       <a:solidFill>
-                        <a:srgbClr val="ffffff"/>
+                        <a:srgbClr val="FFFFFF"/>
                       </a:solidFill>
                     </a:lnB>
                     <a:solidFill>
-                      <a:srgbClr val="e7eaec"/>
+                      <a:srgbClr val="E7EAEC"/>
                     </a:solidFill>
                   </a:tcPr>
                 </a:tc>
                 <a:tc>
                   <a:txBody>
-                    <a:bodyPr lIns="7560" rIns="7560">
-                      <a:noAutofit/>
-                    </a:bodyPr>
+                    <a:bodyPr/>
+                    <a:lstStyle/>
                     <a:p>
                       <a:pPr algn="ctr">
                         <a:lnSpc>
@@ -6285,7 +7234,7 @@
                         </a:lnSpc>
                       </a:pPr>
                       <a:r>
-                        <a:rPr b="0" lang="es-ES" sz="1200" spc="-1" strike="noStrike">
+                        <a:rPr lang="es-ES" sz="1200" b="0" strike="noStrike" spc="-1">
                           <a:solidFill>
                             <a:srgbClr val="000000"/>
                           </a:solidFill>
@@ -6294,7 +7243,7 @@
                         </a:rPr>
                         <a:t>17:7676154</a:t>
                       </a:r>
-                      <a:endParaRPr b="0" lang="es-ES" sz="1200" spc="-1" strike="noStrike">
+                      <a:endParaRPr lang="es-ES" sz="1200" b="0" strike="noStrike" spc="-1">
                         <a:latin typeface="Arial"/>
                       </a:endParaRPr>
                     </a:p>
@@ -6302,34 +7251,33 @@
                   <a:tcPr marL="7560" marR="7560">
                     <a:lnL w="12240">
                       <a:solidFill>
-                        <a:srgbClr val="ffffff"/>
+                        <a:srgbClr val="FFFFFF"/>
                       </a:solidFill>
                     </a:lnL>
                     <a:lnR w="12240">
                       <a:solidFill>
-                        <a:srgbClr val="ffffff"/>
+                        <a:srgbClr val="FFFFFF"/>
                       </a:solidFill>
                     </a:lnR>
                     <a:lnT w="12240">
                       <a:solidFill>
-                        <a:srgbClr val="ffffff"/>
+                        <a:srgbClr val="FFFFFF"/>
                       </a:solidFill>
                     </a:lnT>
                     <a:lnB w="12240">
                       <a:solidFill>
-                        <a:srgbClr val="ffffff"/>
+                        <a:srgbClr val="FFFFFF"/>
                       </a:solidFill>
                     </a:lnB>
                     <a:solidFill>
-                      <a:srgbClr val="e7eaec"/>
+                      <a:srgbClr val="E7EAEC"/>
                     </a:solidFill>
                   </a:tcPr>
                 </a:tc>
                 <a:tc>
                   <a:txBody>
-                    <a:bodyPr lIns="7560" rIns="7560">
-                      <a:noAutofit/>
-                    </a:bodyPr>
+                    <a:bodyPr/>
+                    <a:lstStyle/>
                     <a:p>
                       <a:pPr algn="ctr">
                         <a:lnSpc>
@@ -6337,7 +7285,7 @@
                         </a:lnSpc>
                       </a:pPr>
                       <a:r>
-                        <a:rPr b="0" lang="es-ES" sz="1200" spc="-1" strike="noStrike">
+                        <a:rPr lang="es-ES" sz="1200" b="0" strike="noStrike" spc="-1">
                           <a:solidFill>
                             <a:srgbClr val="000000"/>
                           </a:solidFill>
@@ -6346,7 +7294,7 @@
                         </a:rPr>
                         <a:t>ENST00000269305.9:c.215C&gt;T</a:t>
                       </a:r>
-                      <a:endParaRPr b="0" lang="es-ES" sz="1200" spc="-1" strike="noStrike">
+                      <a:endParaRPr lang="es-ES" sz="1200" b="0" strike="noStrike" spc="-1">
                         <a:latin typeface="Arial"/>
                       </a:endParaRPr>
                     </a:p>
@@ -6354,34 +7302,33 @@
                   <a:tcPr marL="7560" marR="7560">
                     <a:lnL w="12240">
                       <a:solidFill>
-                        <a:srgbClr val="ffffff"/>
+                        <a:srgbClr val="FFFFFF"/>
                       </a:solidFill>
                     </a:lnL>
                     <a:lnR w="12240">
                       <a:solidFill>
-                        <a:srgbClr val="ffffff"/>
+                        <a:srgbClr val="FFFFFF"/>
                       </a:solidFill>
                     </a:lnR>
                     <a:lnT w="12240">
                       <a:solidFill>
-                        <a:srgbClr val="ffffff"/>
+                        <a:srgbClr val="FFFFFF"/>
                       </a:solidFill>
                     </a:lnT>
                     <a:lnB w="12240">
                       <a:solidFill>
-                        <a:srgbClr val="ffffff"/>
+                        <a:srgbClr val="FFFFFF"/>
                       </a:solidFill>
                     </a:lnB>
                     <a:solidFill>
-                      <a:srgbClr val="e7eaec"/>
+                      <a:srgbClr val="E7EAEC"/>
                     </a:solidFill>
                   </a:tcPr>
                 </a:tc>
                 <a:tc>
                   <a:txBody>
-                    <a:bodyPr lIns="7560" rIns="7560">
-                      <a:noAutofit/>
-                    </a:bodyPr>
+                    <a:bodyPr/>
+                    <a:lstStyle/>
                     <a:p>
                       <a:pPr algn="ctr">
                         <a:lnSpc>
@@ -6389,7 +7336,7 @@
                         </a:lnSpc>
                       </a:pPr>
                       <a:r>
-                        <a:rPr b="0" lang="es-ES" sz="1200" spc="-1" strike="noStrike">
+                        <a:rPr lang="es-ES" sz="1200" b="0" strike="noStrike" spc="-1">
                           <a:solidFill>
                             <a:srgbClr val="000000"/>
                           </a:solidFill>
@@ -6398,7 +7345,7 @@
                         </a:rPr>
                         <a:t>SNP</a:t>
                       </a:r>
-                      <a:endParaRPr b="0" lang="es-ES" sz="1200" spc="-1" strike="noStrike">
+                      <a:endParaRPr lang="es-ES" sz="1200" b="0" strike="noStrike" spc="-1">
                         <a:latin typeface="Arial"/>
                       </a:endParaRPr>
                     </a:p>
@@ -6406,34 +7353,33 @@
                   <a:tcPr marL="7560" marR="7560">
                     <a:lnL w="12240">
                       <a:solidFill>
-                        <a:srgbClr val="ffffff"/>
+                        <a:srgbClr val="FFFFFF"/>
                       </a:solidFill>
                     </a:lnL>
                     <a:lnR w="12240">
                       <a:solidFill>
-                        <a:srgbClr val="ffffff"/>
+                        <a:srgbClr val="FFFFFF"/>
                       </a:solidFill>
                     </a:lnR>
                     <a:lnT w="12240">
                       <a:solidFill>
-                        <a:srgbClr val="ffffff"/>
+                        <a:srgbClr val="FFFFFF"/>
                       </a:solidFill>
                     </a:lnT>
                     <a:lnB w="12240">
                       <a:solidFill>
-                        <a:srgbClr val="ffffff"/>
+                        <a:srgbClr val="FFFFFF"/>
                       </a:solidFill>
                     </a:lnB>
                     <a:solidFill>
-                      <a:srgbClr val="e7eaec"/>
+                      <a:srgbClr val="E7EAEC"/>
                     </a:solidFill>
                   </a:tcPr>
                 </a:tc>
                 <a:tc>
                   <a:txBody>
-                    <a:bodyPr lIns="7560" rIns="7560">
-                      <a:noAutofit/>
-                    </a:bodyPr>
+                    <a:bodyPr/>
+                    <a:lstStyle/>
                     <a:p>
                       <a:pPr algn="ctr">
                         <a:lnSpc>
@@ -6441,7 +7387,7 @@
                         </a:lnSpc>
                       </a:pPr>
                       <a:r>
-                        <a:rPr b="0" lang="es-ES" sz="1200" spc="-1" strike="noStrike">
+                        <a:rPr lang="es-ES" sz="1200" b="0" strike="noStrike" spc="-1">
                           <a:solidFill>
                             <a:srgbClr val="000000"/>
                           </a:solidFill>
@@ -6450,7 +7396,7 @@
                         </a:rPr>
                         <a:t>heterocigoto</a:t>
                       </a:r>
-                      <a:endParaRPr b="0" lang="es-ES" sz="1200" spc="-1" strike="noStrike">
+                      <a:endParaRPr lang="es-ES" sz="1200" b="0" strike="noStrike" spc="-1">
                         <a:latin typeface="Arial"/>
                       </a:endParaRPr>
                     </a:p>
@@ -6458,34 +7404,33 @@
                   <a:tcPr marL="7560" marR="7560">
                     <a:lnL w="12240">
                       <a:solidFill>
-                        <a:srgbClr val="ffffff"/>
+                        <a:srgbClr val="FFFFFF"/>
                       </a:solidFill>
                     </a:lnL>
                     <a:lnR w="12240">
                       <a:solidFill>
-                        <a:srgbClr val="ffffff"/>
+                        <a:srgbClr val="FFFFFF"/>
                       </a:solidFill>
                     </a:lnR>
                     <a:lnT w="12240">
                       <a:solidFill>
-                        <a:srgbClr val="ffffff"/>
+                        <a:srgbClr val="FFFFFF"/>
                       </a:solidFill>
                     </a:lnT>
                     <a:lnB w="12240">
                       <a:solidFill>
-                        <a:srgbClr val="ffffff"/>
+                        <a:srgbClr val="FFFFFF"/>
                       </a:solidFill>
                     </a:lnB>
                     <a:solidFill>
-                      <a:srgbClr val="e7eaec"/>
+                      <a:srgbClr val="E7EAEC"/>
                     </a:solidFill>
                   </a:tcPr>
                 </a:tc>
                 <a:tc>
                   <a:txBody>
-                    <a:bodyPr lIns="7560" rIns="7560">
-                      <a:noAutofit/>
-                    </a:bodyPr>
+                    <a:bodyPr/>
+                    <a:lstStyle/>
                     <a:p>
                       <a:pPr algn="ctr">
                         <a:lnSpc>
@@ -6493,7 +7438,7 @@
                         </a:lnSpc>
                       </a:pPr>
                       <a:r>
-                        <a:rPr b="0" lang="es-ES" sz="1200" spc="-1" strike="noStrike">
+                        <a:rPr lang="es-ES" sz="1200" b="0" strike="noStrike" spc="-1">
                           <a:solidFill>
                             <a:srgbClr val="000000"/>
                           </a:solidFill>
@@ -6502,7 +7447,7 @@
                         </a:rPr>
                         <a:t>6.19 x 10-7 (mutación)</a:t>
                       </a:r>
-                      <a:endParaRPr b="0" lang="es-ES" sz="1200" spc="-1" strike="noStrike">
+                      <a:endParaRPr lang="es-ES" sz="1200" b="0" strike="noStrike" spc="-1">
                         <a:latin typeface="Arial"/>
                       </a:endParaRPr>
                     </a:p>
@@ -6510,34 +7455,33 @@
                   <a:tcPr marL="7560" marR="7560">
                     <a:lnL w="12240">
                       <a:solidFill>
-                        <a:srgbClr val="ffffff"/>
+                        <a:srgbClr val="FFFFFF"/>
                       </a:solidFill>
                     </a:lnL>
                     <a:lnR w="12240">
                       <a:solidFill>
-                        <a:srgbClr val="ffffff"/>
+                        <a:srgbClr val="FFFFFF"/>
                       </a:solidFill>
                     </a:lnR>
                     <a:lnT w="12240">
                       <a:solidFill>
-                        <a:srgbClr val="ffffff"/>
+                        <a:srgbClr val="FFFFFF"/>
                       </a:solidFill>
                     </a:lnT>
                     <a:lnB w="12240">
                       <a:solidFill>
-                        <a:srgbClr val="ffffff"/>
+                        <a:srgbClr val="FFFFFF"/>
                       </a:solidFill>
                     </a:lnB>
                     <a:solidFill>
-                      <a:srgbClr val="e7eaec"/>
+                      <a:srgbClr val="E7EAEC"/>
                     </a:solidFill>
                   </a:tcPr>
                 </a:tc>
                 <a:tc>
                   <a:txBody>
-                    <a:bodyPr lIns="7560" rIns="7560">
-                      <a:noAutofit/>
-                    </a:bodyPr>
+                    <a:bodyPr/>
+                    <a:lstStyle/>
                     <a:p>
                       <a:pPr algn="ctr">
                         <a:lnSpc>
@@ -6545,7 +7489,7 @@
                         </a:lnSpc>
                       </a:pPr>
                       <a:r>
-                        <a:rPr b="0" lang="es-ES" sz="1200" spc="-1" strike="noStrike">
+                        <a:rPr lang="es-ES" sz="1200" b="0" strike="noStrike" spc="-1">
                           <a:solidFill>
                             <a:srgbClr val="000000"/>
                           </a:solidFill>
@@ -6554,7 +7498,7 @@
                         </a:rPr>
                         <a:t>ENST00000269305.9</a:t>
                       </a:r>
-                      <a:endParaRPr b="0" lang="es-ES" sz="1200" spc="-1" strike="noStrike">
+                      <a:endParaRPr lang="es-ES" sz="1200" b="0" strike="noStrike" spc="-1">
                         <a:latin typeface="Arial"/>
                       </a:endParaRPr>
                     </a:p>
@@ -6562,34 +7506,33 @@
                   <a:tcPr marL="7560" marR="7560">
                     <a:lnL w="12240">
                       <a:solidFill>
-                        <a:srgbClr val="ffffff"/>
+                        <a:srgbClr val="FFFFFF"/>
                       </a:solidFill>
                     </a:lnL>
                     <a:lnR w="12240">
                       <a:solidFill>
-                        <a:srgbClr val="ffffff"/>
+                        <a:srgbClr val="FFFFFF"/>
                       </a:solidFill>
                     </a:lnR>
                     <a:lnT w="12240">
                       <a:solidFill>
-                        <a:srgbClr val="ffffff"/>
+                        <a:srgbClr val="FFFFFF"/>
                       </a:solidFill>
                     </a:lnT>
                     <a:lnB w="12240">
                       <a:solidFill>
-                        <a:srgbClr val="ffffff"/>
+                        <a:srgbClr val="FFFFFF"/>
                       </a:solidFill>
                     </a:lnB>
                     <a:solidFill>
-                      <a:srgbClr val="e7eaec"/>
+                      <a:srgbClr val="E7EAEC"/>
                     </a:solidFill>
                   </a:tcPr>
                 </a:tc>
                 <a:tc>
                   <a:txBody>
-                    <a:bodyPr lIns="7560" rIns="7560">
-                      <a:noAutofit/>
-                    </a:bodyPr>
+                    <a:bodyPr/>
+                    <a:lstStyle/>
                     <a:p>
                       <a:pPr algn="ctr">
                         <a:lnSpc>
@@ -6597,7 +7540,7 @@
                         </a:lnSpc>
                       </a:pPr>
                       <a:r>
-                        <a:rPr b="0" lang="es-ES" sz="1200" spc="-1" strike="noStrike">
+                        <a:rPr lang="es-ES" sz="1200" b="0" strike="noStrike" spc="-1">
                           <a:solidFill>
                             <a:srgbClr val="000000"/>
                           </a:solidFill>
@@ -6606,7 +7549,7 @@
                         </a:rPr>
                         <a:t>ENSP00000269305.4:p.Pro72Leu</a:t>
                       </a:r>
-                      <a:endParaRPr b="0" lang="es-ES" sz="1200" spc="-1" strike="noStrike">
+                      <a:endParaRPr lang="es-ES" sz="1200" b="0" strike="noStrike" spc="-1">
                         <a:latin typeface="Arial"/>
                       </a:endParaRPr>
                     </a:p>
@@ -6614,34 +7557,33 @@
                   <a:tcPr marL="7560" marR="7560">
                     <a:lnL w="12240">
                       <a:solidFill>
-                        <a:srgbClr val="ffffff"/>
+                        <a:srgbClr val="FFFFFF"/>
                       </a:solidFill>
                     </a:lnL>
                     <a:lnR w="12240">
                       <a:solidFill>
-                        <a:srgbClr val="ffffff"/>
+                        <a:srgbClr val="FFFFFF"/>
                       </a:solidFill>
                     </a:lnR>
                     <a:lnT w="12240">
                       <a:solidFill>
-                        <a:srgbClr val="ffffff"/>
+                        <a:srgbClr val="FFFFFF"/>
                       </a:solidFill>
                     </a:lnT>
                     <a:lnB w="12240">
                       <a:solidFill>
-                        <a:srgbClr val="ffffff"/>
+                        <a:srgbClr val="FFFFFF"/>
                       </a:solidFill>
                     </a:lnB>
                     <a:solidFill>
-                      <a:srgbClr val="e7eaec"/>
+                      <a:srgbClr val="E7EAEC"/>
                     </a:solidFill>
                   </a:tcPr>
                 </a:tc>
                 <a:tc>
                   <a:txBody>
-                    <a:bodyPr lIns="7560" rIns="7560">
-                      <a:noAutofit/>
-                    </a:bodyPr>
+                    <a:bodyPr/>
+                    <a:lstStyle/>
                     <a:p>
                       <a:pPr algn="ctr">
                         <a:lnSpc>
@@ -6649,7 +7591,7 @@
                         </a:lnSpc>
                       </a:pPr>
                       <a:r>
-                        <a:rPr b="0" lang="es-ES" sz="1200" spc="-1" strike="noStrike">
+                        <a:rPr lang="es-ES" sz="1200" b="0" strike="noStrike" spc="-1">
                           <a:solidFill>
                             <a:srgbClr val="000000"/>
                           </a:solidFill>
@@ -6658,7 +7600,7 @@
                         </a:rPr>
                         <a:t>Missense</a:t>
                       </a:r>
-                      <a:endParaRPr b="0" lang="es-ES" sz="1200" spc="-1" strike="noStrike">
+                      <a:endParaRPr lang="es-ES" sz="1200" b="0" strike="noStrike" spc="-1">
                         <a:latin typeface="Arial"/>
                       </a:endParaRPr>
                     </a:p>
@@ -6666,34 +7608,33 @@
                   <a:tcPr marL="7560" marR="7560">
                     <a:lnL w="12240">
                       <a:solidFill>
-                        <a:srgbClr val="ffffff"/>
+                        <a:srgbClr val="FFFFFF"/>
                       </a:solidFill>
                     </a:lnL>
                     <a:lnR w="12240">
                       <a:solidFill>
-                        <a:srgbClr val="ffffff"/>
+                        <a:srgbClr val="FFFFFF"/>
                       </a:solidFill>
                     </a:lnR>
                     <a:lnT w="12240">
                       <a:solidFill>
-                        <a:srgbClr val="ffffff"/>
+                        <a:srgbClr val="FFFFFF"/>
                       </a:solidFill>
                     </a:lnT>
                     <a:lnB w="12240">
                       <a:solidFill>
-                        <a:srgbClr val="ffffff"/>
+                        <a:srgbClr val="FFFFFF"/>
                       </a:solidFill>
                     </a:lnB>
                     <a:solidFill>
-                      <a:srgbClr val="e7eaec"/>
+                      <a:srgbClr val="E7EAEC"/>
                     </a:solidFill>
                   </a:tcPr>
                 </a:tc>
                 <a:tc>
                   <a:txBody>
-                    <a:bodyPr lIns="7560" rIns="7560">
-                      <a:noAutofit/>
-                    </a:bodyPr>
+                    <a:bodyPr/>
+                    <a:lstStyle/>
                     <a:p>
                       <a:pPr algn="ctr">
                         <a:lnSpc>
@@ -6701,7 +7642,7 @@
                         </a:lnSpc>
                       </a:pPr>
                       <a:r>
-                        <a:rPr b="0" lang="es-ES" sz="1200" spc="-1" strike="noStrike">
+                        <a:rPr lang="es-ES" sz="1200" b="0" strike="noStrike" spc="-1">
                           <a:solidFill>
                             <a:srgbClr val="000000"/>
                           </a:solidFill>
@@ -6710,7 +7651,7 @@
                         </a:rPr>
                         <a:t>tolerated (0.13)</a:t>
                       </a:r>
-                      <a:endParaRPr b="0" lang="es-ES" sz="1200" spc="-1" strike="noStrike">
+                      <a:endParaRPr lang="es-ES" sz="1200" b="0" strike="noStrike" spc="-1">
                         <a:latin typeface="Arial"/>
                       </a:endParaRPr>
                     </a:p>
@@ -6718,34 +7659,33 @@
                   <a:tcPr marL="7560" marR="7560">
                     <a:lnL w="12240">
                       <a:solidFill>
-                        <a:srgbClr val="ffffff"/>
+                        <a:srgbClr val="FFFFFF"/>
                       </a:solidFill>
                     </a:lnL>
                     <a:lnR w="12240">
                       <a:solidFill>
-                        <a:srgbClr val="ffffff"/>
+                        <a:srgbClr val="FFFFFF"/>
                       </a:solidFill>
                     </a:lnR>
                     <a:lnT w="12240">
                       <a:solidFill>
-                        <a:srgbClr val="ffffff"/>
+                        <a:srgbClr val="FFFFFF"/>
                       </a:solidFill>
                     </a:lnT>
                     <a:lnB w="12240">
                       <a:solidFill>
-                        <a:srgbClr val="ffffff"/>
+                        <a:srgbClr val="FFFFFF"/>
                       </a:solidFill>
                     </a:lnB>
                     <a:solidFill>
-                      <a:srgbClr val="e7eaec"/>
+                      <a:srgbClr val="E7EAEC"/>
                     </a:solidFill>
                   </a:tcPr>
                 </a:tc>
                 <a:tc>
                   <a:txBody>
-                    <a:bodyPr lIns="7560" rIns="7560">
-                      <a:noAutofit/>
-                    </a:bodyPr>
+                    <a:bodyPr/>
+                    <a:lstStyle/>
                     <a:p>
                       <a:pPr algn="ctr">
                         <a:lnSpc>
@@ -6753,7 +7693,7 @@
                         </a:lnSpc>
                       </a:pPr>
                       <a:r>
-                        <a:rPr b="0" lang="es-ES" sz="1200" spc="-1" strike="noStrike">
+                        <a:rPr lang="es-ES" sz="1200" b="0" strike="noStrike" spc="-1">
                           <a:solidFill>
                             <a:srgbClr val="000000"/>
                           </a:solidFill>
@@ -6762,7 +7702,7 @@
                         </a:rPr>
                         <a:t>benign (0.003)</a:t>
                       </a:r>
-                      <a:endParaRPr b="0" lang="es-ES" sz="1200" spc="-1" strike="noStrike">
+                      <a:endParaRPr lang="es-ES" sz="1200" b="0" strike="noStrike" spc="-1">
                         <a:latin typeface="Arial"/>
                       </a:endParaRPr>
                     </a:p>
@@ -6770,34 +7710,33 @@
                   <a:tcPr marL="7560" marR="7560">
                     <a:lnL w="12240">
                       <a:solidFill>
-                        <a:srgbClr val="ffffff"/>
+                        <a:srgbClr val="FFFFFF"/>
                       </a:solidFill>
                     </a:lnL>
                     <a:lnR w="12240">
                       <a:solidFill>
-                        <a:srgbClr val="ffffff"/>
+                        <a:srgbClr val="FFFFFF"/>
                       </a:solidFill>
                     </a:lnR>
                     <a:lnT w="12240">
                       <a:solidFill>
-                        <a:srgbClr val="ffffff"/>
+                        <a:srgbClr val="FFFFFF"/>
                       </a:solidFill>
                     </a:lnT>
                     <a:lnB w="12240">
                       <a:solidFill>
-                        <a:srgbClr val="ffffff"/>
+                        <a:srgbClr val="FFFFFF"/>
                       </a:solidFill>
                     </a:lnB>
                     <a:solidFill>
-                      <a:srgbClr val="e7eaec"/>
+                      <a:srgbClr val="E7EAEC"/>
                     </a:solidFill>
                   </a:tcPr>
                 </a:tc>
                 <a:tc>
                   <a:txBody>
-                    <a:bodyPr lIns="7560" rIns="7560">
-                      <a:noAutofit/>
-                    </a:bodyPr>
+                    <a:bodyPr/>
+                    <a:lstStyle/>
                     <a:p>
                       <a:pPr algn="ctr">
                         <a:lnSpc>
@@ -6805,7 +7744,7 @@
                         </a:lnSpc>
                       </a:pPr>
                       <a:r>
-                        <a:rPr b="0" lang="es-ES" sz="1200" spc="-1" strike="noStrike">
+                        <a:rPr lang="es-ES" sz="1200" b="0" strike="noStrike" spc="-1">
                           <a:solidFill>
                             <a:srgbClr val="000000"/>
                           </a:solidFill>
@@ -6814,7 +7753,7 @@
                         </a:rPr>
                         <a:t>#151623</a:t>
                       </a:r>
-                      <a:endParaRPr b="0" lang="es-ES" sz="1200" spc="-1" strike="noStrike">
+                      <a:endParaRPr lang="es-ES" sz="1200" b="0" strike="noStrike" spc="-1">
                         <a:latin typeface="Arial"/>
                       </a:endParaRPr>
                     </a:p>
@@ -6822,34 +7761,33 @@
                   <a:tcPr marL="7560" marR="7560">
                     <a:lnL w="12240">
                       <a:solidFill>
-                        <a:srgbClr val="ffffff"/>
+                        <a:srgbClr val="FFFFFF"/>
                       </a:solidFill>
                     </a:lnL>
                     <a:lnR w="12240">
                       <a:solidFill>
-                        <a:srgbClr val="ffffff"/>
+                        <a:srgbClr val="FFFFFF"/>
                       </a:solidFill>
                     </a:lnR>
                     <a:lnT w="12240">
                       <a:solidFill>
-                        <a:srgbClr val="ffffff"/>
+                        <a:srgbClr val="FFFFFF"/>
                       </a:solidFill>
                     </a:lnT>
                     <a:lnB w="12240">
                       <a:solidFill>
-                        <a:srgbClr val="ffffff"/>
+                        <a:srgbClr val="FFFFFF"/>
                       </a:solidFill>
                     </a:lnB>
                     <a:solidFill>
-                      <a:srgbClr val="e7eaec"/>
+                      <a:srgbClr val="E7EAEC"/>
                     </a:solidFill>
                   </a:tcPr>
                 </a:tc>
                 <a:tc>
                   <a:txBody>
-                    <a:bodyPr lIns="7560" rIns="7560">
-                      <a:noAutofit/>
-                    </a:bodyPr>
+                    <a:bodyPr/>
+                    <a:lstStyle/>
                     <a:p>
                       <a:pPr algn="ctr">
                         <a:lnSpc>
@@ -6857,7 +7795,7 @@
                         </a:lnSpc>
                       </a:pPr>
                       <a:r>
-                        <a:rPr b="0" lang="es-ES" sz="1200" spc="-1" strike="noStrike">
+                        <a:rPr lang="es-ES" sz="1200" b="0" strike="noStrike" spc="-1">
                           <a:solidFill>
                             <a:srgbClr val="000000"/>
                           </a:solidFill>
@@ -6866,7 +7804,7 @@
                         </a:rPr>
                         <a:t>Autosómica dominante</a:t>
                       </a:r>
-                      <a:endParaRPr b="0" lang="es-ES" sz="1200" spc="-1" strike="noStrike">
+                      <a:endParaRPr lang="es-ES" sz="1200" b="0" strike="noStrike" spc="-1">
                         <a:latin typeface="Arial"/>
                       </a:endParaRPr>
                     </a:p>
@@ -6874,34 +7812,33 @@
                   <a:tcPr marL="7560" marR="7560">
                     <a:lnL w="12240">
                       <a:solidFill>
-                        <a:srgbClr val="ffffff"/>
+                        <a:srgbClr val="FFFFFF"/>
                       </a:solidFill>
                     </a:lnL>
                     <a:lnR w="12240">
                       <a:solidFill>
-                        <a:srgbClr val="ffffff"/>
+                        <a:srgbClr val="FFFFFF"/>
                       </a:solidFill>
                     </a:lnR>
                     <a:lnT w="12240">
                       <a:solidFill>
-                        <a:srgbClr val="ffffff"/>
+                        <a:srgbClr val="FFFFFF"/>
                       </a:solidFill>
                     </a:lnT>
                     <a:lnB w="12240">
                       <a:solidFill>
-                        <a:srgbClr val="ffffff"/>
+                        <a:srgbClr val="FFFFFF"/>
                       </a:solidFill>
                     </a:lnB>
                     <a:solidFill>
-                      <a:srgbClr val="e7eaec"/>
+                      <a:srgbClr val="E7EAEC"/>
                     </a:solidFill>
                   </a:tcPr>
                 </a:tc>
                 <a:tc>
                   <a:txBody>
-                    <a:bodyPr lIns="7560" rIns="7560">
-                      <a:noAutofit/>
-                    </a:bodyPr>
+                    <a:bodyPr/>
+                    <a:lstStyle/>
                     <a:p>
                       <a:pPr algn="ctr">
                         <a:lnSpc>
@@ -6909,7 +7846,7 @@
                         </a:lnSpc>
                       </a:pPr>
                       <a:r>
-                        <a:rPr b="0" lang="es-ES" sz="1200" spc="-1" strike="noStrike">
+                        <a:rPr lang="es-ES" sz="1200" b="0" strike="noStrike" spc="-1">
                           <a:solidFill>
                             <a:srgbClr val="000000"/>
                           </a:solidFill>
@@ -6918,7 +7855,7 @@
                         </a:rPr>
                         <a:t>Ruta de lípidos y aterosclerosis</a:t>
                       </a:r>
-                      <a:endParaRPr b="0" lang="es-ES" sz="1200" spc="-1" strike="noStrike">
+                      <a:endParaRPr lang="es-ES" sz="1200" b="0" strike="noStrike" spc="-1">
                         <a:latin typeface="Arial"/>
                       </a:endParaRPr>
                     </a:p>
@@ -6926,29 +7863,34 @@
                   <a:tcPr marL="7560" marR="7560">
                     <a:lnL w="12240">
                       <a:solidFill>
-                        <a:srgbClr val="ffffff"/>
+                        <a:srgbClr val="FFFFFF"/>
                       </a:solidFill>
                     </a:lnL>
                     <a:lnR w="12240">
                       <a:solidFill>
-                        <a:srgbClr val="ffffff"/>
+                        <a:srgbClr val="FFFFFF"/>
                       </a:solidFill>
                     </a:lnR>
                     <a:lnT w="12240">
                       <a:solidFill>
-                        <a:srgbClr val="ffffff"/>
+                        <a:srgbClr val="FFFFFF"/>
                       </a:solidFill>
                     </a:lnT>
                     <a:lnB w="12240">
                       <a:solidFill>
-                        <a:srgbClr val="ffffff"/>
+                        <a:srgbClr val="FFFFFF"/>
                       </a:solidFill>
                     </a:lnB>
                     <a:solidFill>
-                      <a:srgbClr val="e7eaec"/>
+                      <a:srgbClr val="E7EAEC"/>
                     </a:solidFill>
                   </a:tcPr>
                 </a:tc>
+                <a:extLst>
+                  <a:ext uri="{0D108BD9-81ED-4DB2-BD59-A6C34878D82A}">
+                    <a16:rowId xmlns:a16="http://schemas.microsoft.com/office/drawing/2014/main" val="10004"/>
+                  </a:ext>
+                </a:extLst>
               </a:tr>
             </a:tbl>
           </a:graphicData>
@@ -6956,12 +7898,12 @@
       </p:graphicFrame>
       <p:pic>
         <p:nvPicPr>
-          <p:cNvPr id="62" name="Imagen 64" descr=""/>
+          <p:cNvPr id="62" name="Imagen 64"/>
           <p:cNvPicPr/>
           <p:nvPr/>
         </p:nvPicPr>
         <p:blipFill>
-          <a:blip r:embed="rId13"/>
+          <a:blip r:embed="rId15"/>
           <a:stretch/>
         </p:blipFill>
         <p:spPr>
@@ -6992,6 +7934,7 @@
             <a:avLst/>
             <a:gdLst/>
             <a:ahLst/>
+            <a:cxnLst/>
             <a:rect l="l" t="t" r="r" b="b"/>
             <a:pathLst>
               <a:path w="402" h="802">
@@ -7023,30 +7966,43 @@
             </a:pathLst>
           </a:custGeom>
           <a:solidFill>
-            <a:srgbClr val="729fcf"/>
+            <a:srgbClr val="729FCF"/>
           </a:solidFill>
           <a:ln>
             <a:solidFill>
-              <a:srgbClr val="3465a4"/>
+              <a:srgbClr val="3465A4"/>
             </a:solidFill>
           </a:ln>
         </p:spPr>
         <p:style>
-          <a:lnRef idx="0"/>
-          <a:fillRef idx="0"/>
-          <a:effectRef idx="0"/>
+          <a:lnRef idx="0">
+            <a:scrgbClr r="0" g="0" b="0"/>
+          </a:lnRef>
+          <a:fillRef idx="0">
+            <a:scrgbClr r="0" g="0" b="0"/>
+          </a:fillRef>
+          <a:effectRef idx="0">
+            <a:scrgbClr r="0" g="0" b="0"/>
+          </a:effectRef>
           <a:fontRef idx="minor"/>
         </p:style>
+        <p:txBody>
+          <a:bodyPr/>
+          <a:lstStyle/>
+          <a:p>
+            <a:endParaRPr lang="es-ES"/>
+          </a:p>
+        </p:txBody>
       </p:sp>
       <p:pic>
         <p:nvPicPr>
-          <p:cNvPr id="64" name="Imagen 66" descr=""/>
+          <p:cNvPr id="64" name="Imagen 66"/>
           <p:cNvPicPr/>
           <p:nvPr/>
         </p:nvPicPr>
         <p:blipFill>
-          <a:blip r:embed="rId14"/>
-          <a:srcRect l="0" t="54155" r="0" b="0"/>
+          <a:blip r:embed="rId16"/>
+          <a:srcRect t="54155"/>
           <a:stretch/>
         </p:blipFill>
         <p:spPr>
@@ -7100,22 +8056,23 @@
           <a:fontRef idx="minor"/>
         </p:style>
         <p:txBody>
-          <a:bodyPr lIns="90000" rIns="90000" tIns="45000" bIns="45000" anchor="ctr">
+          <a:bodyPr lIns="90000" tIns="45000" rIns="90000" bIns="45000" anchor="ctr">
             <a:noAutofit/>
           </a:bodyPr>
+          <a:lstStyle/>
           <a:p>
             <a:pPr>
               <a:lnSpc>
                 <a:spcPct val="80000"/>
               </a:lnSpc>
               <a:tabLst>
-                <a:tab algn="l" pos="0"/>
+                <a:tab pos="0" algn="l"/>
               </a:tabLst>
             </a:pPr>
             <a:r>
-              <a:rPr b="1" lang="es-ES_tradnl" sz="1800" spc="-1" strike="noStrike">
+              <a:rPr lang="es-ES_tradnl" sz="1800" b="1" strike="noStrike" spc="-1">
                 <a:solidFill>
-                  <a:srgbClr val="4196c9"/>
+                  <a:srgbClr val="4196C9"/>
                 </a:solidFill>
                 <a:latin typeface="Aptos"/>
                 <a:ea typeface="DejaVu Sans"/>
@@ -7123,7 +8080,7 @@
               <a:t>Figura 3. </a:t>
             </a:r>
             <a:r>
-              <a:rPr b="0" lang="es-ES_tradnl" sz="1800" spc="-1" strike="noStrike">
+              <a:rPr lang="es-ES_tradnl" sz="1800" b="0" strike="noStrike" spc="-1">
                 <a:solidFill>
                   <a:srgbClr val="000000"/>
                 </a:solidFill>
@@ -7132,7 +8089,7 @@
               </a:rPr>
               <a:t>Rutas metabolicas implicadas en MC4R en KEGG.</a:t>
             </a:r>
-            <a:endParaRPr b="0" lang="es-ES" sz="1800" spc="-1" strike="noStrike">
+            <a:endParaRPr lang="es-ES" sz="1800" b="0" strike="noStrike" spc="-1">
               <a:latin typeface="Arial"/>
             </a:endParaRPr>
           </a:p>
@@ -7158,15 +8115,22 @@
           </a:ln>
         </p:spPr>
         <p:style>
-          <a:lnRef idx="0"/>
-          <a:fillRef idx="0"/>
-          <a:effectRef idx="0"/>
+          <a:lnRef idx="0">
+            <a:scrgbClr r="0" g="0" b="0"/>
+          </a:lnRef>
+          <a:fillRef idx="0">
+            <a:scrgbClr r="0" g="0" b="0"/>
+          </a:fillRef>
+          <a:effectRef idx="0">
+            <a:scrgbClr r="0" g="0" b="0"/>
+          </a:effectRef>
           <a:fontRef idx="minor"/>
         </p:style>
         <p:txBody>
-          <a:bodyPr lIns="90000" rIns="90000" tIns="45000" bIns="45000">
+          <a:bodyPr lIns="90000" tIns="45000" rIns="90000" bIns="45000">
             <a:noAutofit/>
           </a:bodyPr>
+          <a:lstStyle/>
           <a:p>
             <a:pPr>
               <a:lnSpc>
@@ -7174,7 +8138,7 @@
               </a:lnSpc>
             </a:pPr>
             <a:r>
-              <a:rPr b="0" lang="es-ES" sz="1500" spc="-1" strike="noStrike">
+              <a:rPr lang="es-ES" sz="1500" b="0" strike="noStrike" spc="-1">
                 <a:solidFill>
                   <a:srgbClr val="000000"/>
                 </a:solidFill>
@@ -7183,7 +8147,7 @@
               </a:rPr>
               <a:t>MC4R. Via de la señalización hormonal del AMP cíclico </a:t>
             </a:r>
-            <a:endParaRPr b="0" lang="es-ES" sz="1500" spc="-1" strike="noStrike">
+            <a:endParaRPr lang="es-ES" sz="1500" b="0" strike="noStrike" spc="-1">
               <a:latin typeface="Arial"/>
             </a:endParaRPr>
           </a:p>
@@ -7191,12 +8155,12 @@
       </p:sp>
       <p:pic>
         <p:nvPicPr>
-          <p:cNvPr id="67" name="Imagen 1" descr=""/>
+          <p:cNvPr id="67" name="Imagen 1"/>
           <p:cNvPicPr/>
           <p:nvPr/>
         </p:nvPicPr>
         <p:blipFill>
-          <a:blip r:embed="rId15"/>
+          <a:blip r:embed="rId17"/>
           <a:srcRect l="16030" t="12976" r="35241" b="5276"/>
           <a:stretch/>
         </p:blipFill>
@@ -7215,16 +8179,47 @@
           </a:ln>
         </p:spPr>
       </p:pic>
+      <p:pic>
+        <p:nvPicPr>
+          <p:cNvPr id="3" name="Imagen 2" descr="Código QR&#10;&#10;El contenido generado por IA puede ser incorrecto.">
+            <a:extLst>
+              <a:ext uri="{FF2B5EF4-FFF2-40B4-BE49-F238E27FC236}">
+                <a16:creationId xmlns:a16="http://schemas.microsoft.com/office/drawing/2014/main" id="{77ED0077-7CDA-5232-C64C-3CA3DBB9B7DD}"/>
+              </a:ext>
+            </a:extLst>
+          </p:cNvPr>
+          <p:cNvPicPr>
+            <a:picLocks noChangeAspect="1"/>
+          </p:cNvPicPr>
+          <p:nvPr/>
+        </p:nvPicPr>
+        <p:blipFill>
+          <a:blip r:embed="rId18">
+            <a:extLst>
+              <a:ext uri="{28A0092B-C50C-407E-A947-70E740481C1C}">
+                <a14:useLocalDpi xmlns:a14="http://schemas.microsoft.com/office/drawing/2010/main" val="0"/>
+              </a:ext>
+            </a:extLst>
+          </a:blip>
+          <a:stretch>
+            <a:fillRect/>
+          </a:stretch>
+        </p:blipFill>
+        <p:spPr>
+          <a:xfrm>
+            <a:off x="13961520" y="20296785"/>
+            <a:ext cx="914400" cy="1066651"/>
+          </a:xfrm>
+          <a:prstGeom prst="rect">
+            <a:avLst/>
+          </a:prstGeom>
+        </p:spPr>
+      </p:pic>
     </p:spTree>
   </p:cSld>
-  <mc:AlternateContent>
-    <mc:Choice Requires="p14">
-      <p:transition spd="slow" p14:dur="2000"/>
-    </mc:Choice>
-    <mc:Fallback>
-      <p:transition spd="slow"/>
-    </mc:Fallback>
-  </mc:AlternateContent>
+  <p:clrMapOvr>
+    <a:masterClrMapping/>
+  </p:clrMapOvr>
 </p:sld>
 </file>
 
@@ -7239,34 +8234,34 @@
         <a:sysClr val="window" lastClr="FFFFFF"/>
       </a:lt1>
       <a:dk2>
-        <a:srgbClr val="0e2841"/>
+        <a:srgbClr val="0E2841"/>
       </a:dk2>
       <a:lt2>
-        <a:srgbClr val="e8e8e8"/>
+        <a:srgbClr val="E8E8E8"/>
       </a:lt2>
       <a:accent1>
         <a:srgbClr val="156082"/>
       </a:accent1>
       <a:accent2>
-        <a:srgbClr val="e97132"/>
+        <a:srgbClr val="E97132"/>
       </a:accent2>
       <a:accent3>
-        <a:srgbClr val="196b24"/>
+        <a:srgbClr val="196B24"/>
       </a:accent3>
       <a:accent4>
-        <a:srgbClr val="0f9ed5"/>
+        <a:srgbClr val="0F9ED5"/>
       </a:accent4>
       <a:accent5>
-        <a:srgbClr val="a02b93"/>
+        <a:srgbClr val="A02B93"/>
       </a:accent5>
       <a:accent6>
-        <a:srgbClr val="4ea72e"/>
+        <a:srgbClr val="4EA72E"/>
       </a:accent6>
       <a:hlink>
         <a:srgbClr val="467886"/>
       </a:hlink>
       <a:folHlink>
-        <a:srgbClr val="96607d"/>
+        <a:srgbClr val="96607D"/>
       </a:folHlink>
     </a:clrScheme>
     <a:fontScheme name="Office">
@@ -7451,6 +8446,323 @@
       </a:bgFillStyleLst>
     </a:fmtScheme>
   </a:themeElements>
+  <a:objectDefaults/>
+  <a:extraClrSchemeLst/>
+</a:theme>
+</file>
+
+<file path=ppt/theme/theme2.xml><?xml version="1.0" encoding="utf-8"?>
+<a:theme xmlns:a="http://schemas.openxmlformats.org/drawingml/2006/main" name="Tema de Office">
+  <a:themeElements>
+    <a:clrScheme name="Office">
+      <a:dk1>
+        <a:sysClr val="windowText" lastClr="000000"/>
+      </a:dk1>
+      <a:lt1>
+        <a:sysClr val="window" lastClr="FFFFFF"/>
+      </a:lt1>
+      <a:dk2>
+        <a:srgbClr val="0E2841"/>
+      </a:dk2>
+      <a:lt2>
+        <a:srgbClr val="E8E8E8"/>
+      </a:lt2>
+      <a:accent1>
+        <a:srgbClr val="156082"/>
+      </a:accent1>
+      <a:accent2>
+        <a:srgbClr val="E97132"/>
+      </a:accent2>
+      <a:accent3>
+        <a:srgbClr val="196B24"/>
+      </a:accent3>
+      <a:accent4>
+        <a:srgbClr val="0F9ED5"/>
+      </a:accent4>
+      <a:accent5>
+        <a:srgbClr val="A02B93"/>
+      </a:accent5>
+      <a:accent6>
+        <a:srgbClr val="4EA72E"/>
+      </a:accent6>
+      <a:hlink>
+        <a:srgbClr val="467886"/>
+      </a:hlink>
+      <a:folHlink>
+        <a:srgbClr val="96607D"/>
+      </a:folHlink>
+    </a:clrScheme>
+    <a:fontScheme name="Office">
+      <a:majorFont>
+        <a:latin typeface="Aptos Display" panose="02110004020202020204"/>
+        <a:ea typeface=""/>
+        <a:cs typeface=""/>
+        <a:font script="Jpan" typeface="游ゴシック Light"/>
+        <a:font script="Hang" typeface="맑은 고딕"/>
+        <a:font script="Hans" typeface="等线 Light"/>
+        <a:font script="Hant" typeface="新細明體"/>
+        <a:font script="Arab" typeface="Times New Roman"/>
+        <a:font script="Hebr" typeface="Times New Roman"/>
+        <a:font script="Thai" typeface="Angsana New"/>
+        <a:font script="Ethi" typeface="Nyala"/>
+        <a:font script="Beng" typeface="Vrinda"/>
+        <a:font script="Gujr" typeface="Shruti"/>
+        <a:font script="Khmr" typeface="MoolBoran"/>
+        <a:font script="Knda" typeface="Tunga"/>
+        <a:font script="Guru" typeface="Raavi"/>
+        <a:font script="Cans" typeface="Euphemia"/>
+        <a:font script="Cher" typeface="Plantagenet Cherokee"/>
+        <a:font script="Yiii" typeface="Microsoft Yi Baiti"/>
+        <a:font script="Tibt" typeface="Microsoft Himalaya"/>
+        <a:font script="Thaa" typeface="MV Boli"/>
+        <a:font script="Deva" typeface="Mangal"/>
+        <a:font script="Telu" typeface="Gautami"/>
+        <a:font script="Taml" typeface="Latha"/>
+        <a:font script="Syrc" typeface="Estrangelo Edessa"/>
+        <a:font script="Orya" typeface="Kalinga"/>
+        <a:font script="Mlym" typeface="Kartika"/>
+        <a:font script="Laoo" typeface="DokChampa"/>
+        <a:font script="Sinh" typeface="Iskoola Pota"/>
+        <a:font script="Mong" typeface="Mongolian Baiti"/>
+        <a:font script="Viet" typeface="Times New Roman"/>
+        <a:font script="Uigh" typeface="Microsoft Uighur"/>
+        <a:font script="Geor" typeface="Sylfaen"/>
+        <a:font script="Armn" typeface="Arial"/>
+        <a:font script="Bugi" typeface="Leelawadee UI"/>
+        <a:font script="Bopo" typeface="Microsoft JhengHei"/>
+        <a:font script="Java" typeface="Javanese Text"/>
+        <a:font script="Lisu" typeface="Segoe UI"/>
+        <a:font script="Mymr" typeface="Myanmar Text"/>
+        <a:font script="Nkoo" typeface="Ebrima"/>
+        <a:font script="Olck" typeface="Nirmala UI"/>
+        <a:font script="Osma" typeface="Ebrima"/>
+        <a:font script="Phag" typeface="Phagspa"/>
+        <a:font script="Syrn" typeface="Estrangelo Edessa"/>
+        <a:font script="Syrj" typeface="Estrangelo Edessa"/>
+        <a:font script="Syre" typeface="Estrangelo Edessa"/>
+        <a:font script="Sora" typeface="Nirmala UI"/>
+        <a:font script="Tale" typeface="Microsoft Tai Le"/>
+        <a:font script="Talu" typeface="Microsoft New Tai Lue"/>
+        <a:font script="Tfng" typeface="Ebrima"/>
+      </a:majorFont>
+      <a:minorFont>
+        <a:latin typeface="Aptos" panose="02110004020202020204"/>
+        <a:ea typeface=""/>
+        <a:cs typeface=""/>
+        <a:font script="Jpan" typeface="游ゴシック"/>
+        <a:font script="Hang" typeface="맑은 고딕"/>
+        <a:font script="Hans" typeface="等线"/>
+        <a:font script="Hant" typeface="新細明體"/>
+        <a:font script="Arab" typeface="Arial"/>
+        <a:font script="Hebr" typeface="Arial"/>
+        <a:font script="Thai" typeface="Cordia New"/>
+        <a:font script="Ethi" typeface="Nyala"/>
+        <a:font script="Beng" typeface="Vrinda"/>
+        <a:font script="Gujr" typeface="Shruti"/>
+        <a:font script="Khmr" typeface="DaunPenh"/>
+        <a:font script="Knda" typeface="Tunga"/>
+        <a:font script="Guru" typeface="Raavi"/>
+        <a:font script="Cans" typeface="Euphemia"/>
+        <a:font script="Cher" typeface="Plantagenet Cherokee"/>
+        <a:font script="Yiii" typeface="Microsoft Yi Baiti"/>
+        <a:font script="Tibt" typeface="Microsoft Himalaya"/>
+        <a:font script="Thaa" typeface="MV Boli"/>
+        <a:font script="Deva" typeface="Mangal"/>
+        <a:font script="Telu" typeface="Gautami"/>
+        <a:font script="Taml" typeface="Latha"/>
+        <a:font script="Syrc" typeface="Estrangelo Edessa"/>
+        <a:font script="Orya" typeface="Kalinga"/>
+        <a:font script="Mlym" typeface="Kartika"/>
+        <a:font script="Laoo" typeface="DokChampa"/>
+        <a:font script="Sinh" typeface="Iskoola Pota"/>
+        <a:font script="Mong" typeface="Mongolian Baiti"/>
+        <a:font script="Viet" typeface="Arial"/>
+        <a:font script="Uigh" typeface="Microsoft Uighur"/>
+        <a:font script="Geor" typeface="Sylfaen"/>
+        <a:font script="Armn" typeface="Arial"/>
+        <a:font script="Bugi" typeface="Leelawadee UI"/>
+        <a:font script="Bopo" typeface="Microsoft JhengHei"/>
+        <a:font script="Java" typeface="Javanese Text"/>
+        <a:font script="Lisu" typeface="Segoe UI"/>
+        <a:font script="Mymr" typeface="Myanmar Text"/>
+        <a:font script="Nkoo" typeface="Ebrima"/>
+        <a:font script="Olck" typeface="Nirmala UI"/>
+        <a:font script="Osma" typeface="Ebrima"/>
+        <a:font script="Phag" typeface="Phagspa"/>
+        <a:font script="Syrn" typeface="Estrangelo Edessa"/>
+        <a:font script="Syrj" typeface="Estrangelo Edessa"/>
+        <a:font script="Syre" typeface="Estrangelo Edessa"/>
+        <a:font script="Sora" typeface="Nirmala UI"/>
+        <a:font script="Tale" typeface="Microsoft Tai Le"/>
+        <a:font script="Talu" typeface="Microsoft New Tai Lue"/>
+        <a:font script="Tfng" typeface="Ebrima"/>
+      </a:minorFont>
+    </a:fontScheme>
+    <a:fmtScheme name="Office">
+      <a:fillStyleLst>
+        <a:solidFill>
+          <a:schemeClr val="phClr"/>
+        </a:solidFill>
+        <a:gradFill rotWithShape="1">
+          <a:gsLst>
+            <a:gs pos="0">
+              <a:schemeClr val="phClr">
+                <a:lumMod val="110000"/>
+                <a:satMod val="105000"/>
+                <a:tint val="67000"/>
+              </a:schemeClr>
+            </a:gs>
+            <a:gs pos="50000">
+              <a:schemeClr val="phClr">
+                <a:lumMod val="105000"/>
+                <a:satMod val="103000"/>
+                <a:tint val="73000"/>
+              </a:schemeClr>
+            </a:gs>
+            <a:gs pos="100000">
+              <a:schemeClr val="phClr">
+                <a:lumMod val="105000"/>
+                <a:satMod val="109000"/>
+                <a:tint val="81000"/>
+              </a:schemeClr>
+            </a:gs>
+          </a:gsLst>
+          <a:lin ang="5400000" scaled="0"/>
+        </a:gradFill>
+        <a:gradFill rotWithShape="1">
+          <a:gsLst>
+            <a:gs pos="0">
+              <a:schemeClr val="phClr">
+                <a:satMod val="103000"/>
+                <a:lumMod val="102000"/>
+                <a:tint val="94000"/>
+              </a:schemeClr>
+            </a:gs>
+            <a:gs pos="50000">
+              <a:schemeClr val="phClr">
+                <a:satMod val="110000"/>
+                <a:lumMod val="100000"/>
+                <a:shade val="100000"/>
+              </a:schemeClr>
+            </a:gs>
+            <a:gs pos="100000">
+              <a:schemeClr val="phClr">
+                <a:lumMod val="99000"/>
+                <a:satMod val="120000"/>
+                <a:shade val="78000"/>
+              </a:schemeClr>
+            </a:gs>
+          </a:gsLst>
+          <a:lin ang="5400000" scaled="0"/>
+        </a:gradFill>
+      </a:fillStyleLst>
+      <a:lnStyleLst>
+        <a:ln w="12700" cap="flat" cmpd="sng" algn="ctr">
+          <a:solidFill>
+            <a:schemeClr val="phClr"/>
+          </a:solidFill>
+          <a:prstDash val="solid"/>
+          <a:miter lim="800000"/>
+        </a:ln>
+        <a:ln w="19050" cap="flat" cmpd="sng" algn="ctr">
+          <a:solidFill>
+            <a:schemeClr val="phClr"/>
+          </a:solidFill>
+          <a:prstDash val="solid"/>
+          <a:miter lim="800000"/>
+        </a:ln>
+        <a:ln w="25400" cap="flat" cmpd="sng" algn="ctr">
+          <a:solidFill>
+            <a:schemeClr val="phClr"/>
+          </a:solidFill>
+          <a:prstDash val="solid"/>
+          <a:miter lim="800000"/>
+        </a:ln>
+      </a:lnStyleLst>
+      <a:effectStyleLst>
+        <a:effectStyle>
+          <a:effectLst/>
+        </a:effectStyle>
+        <a:effectStyle>
+          <a:effectLst/>
+        </a:effectStyle>
+        <a:effectStyle>
+          <a:effectLst>
+            <a:outerShdw blurRad="57150" dist="19050" dir="5400000" algn="ctr" rotWithShape="0">
+              <a:srgbClr val="000000">
+                <a:alpha val="63000"/>
+              </a:srgbClr>
+            </a:outerShdw>
+          </a:effectLst>
+        </a:effectStyle>
+      </a:effectStyleLst>
+      <a:bgFillStyleLst>
+        <a:solidFill>
+          <a:schemeClr val="phClr"/>
+        </a:solidFill>
+        <a:solidFill>
+          <a:schemeClr val="phClr">
+            <a:tint val="95000"/>
+            <a:satMod val="170000"/>
+          </a:schemeClr>
+        </a:solidFill>
+        <a:gradFill rotWithShape="1">
+          <a:gsLst>
+            <a:gs pos="0">
+              <a:schemeClr val="phClr">
+                <a:tint val="93000"/>
+                <a:satMod val="150000"/>
+                <a:shade val="98000"/>
+                <a:lumMod val="102000"/>
+              </a:schemeClr>
+            </a:gs>
+            <a:gs pos="50000">
+              <a:schemeClr val="phClr">
+                <a:tint val="98000"/>
+                <a:satMod val="130000"/>
+                <a:shade val="90000"/>
+                <a:lumMod val="103000"/>
+              </a:schemeClr>
+            </a:gs>
+            <a:gs pos="100000">
+              <a:schemeClr val="phClr">
+                <a:shade val="63000"/>
+                <a:satMod val="120000"/>
+              </a:schemeClr>
+            </a:gs>
+          </a:gsLst>
+          <a:lin ang="5400000" scaled="0"/>
+        </a:gradFill>
+      </a:bgFillStyleLst>
+    </a:fmtScheme>
+  </a:themeElements>
+  <a:objectDefaults>
+    <a:lnDef>
+      <a:spPr/>
+      <a:bodyPr/>
+      <a:lstStyle/>
+      <a:style>
+        <a:lnRef idx="2">
+          <a:schemeClr val="accent1"/>
+        </a:lnRef>
+        <a:fillRef idx="0">
+          <a:schemeClr val="accent1"/>
+        </a:fillRef>
+        <a:effectRef idx="1">
+          <a:schemeClr val="accent1"/>
+        </a:effectRef>
+        <a:fontRef idx="minor">
+          <a:schemeClr val="tx1"/>
+        </a:fontRef>
+      </a:style>
+    </a:lnDef>
+  </a:objectDefaults>
+  <a:extraClrSchemeLst/>
+  <a:extLst>
+    <a:ext uri="{05A4C25C-085E-4340-85A3-A5531E510DB2}">
+      <thm15:themeFamily xmlns:thm15="http://schemas.microsoft.com/office/thememl/2012/main" name="Office Theme" id="{2E142A2C-CD16-42D6-873A-C26D2A0506FA}" vid="{1BDDFF52-6CD6-40A5-AB3C-68EB2F1E4D0A}"/>
+    </a:ext>
+  </a:extLst>
 </a:theme>
 </file>
 
